--- a/slides/aula3-alura.pptx
+++ b/slides/aula3-alura.pptx
@@ -4,9 +4,6 @@
   <p:sldMasterIdLst>
     <p:sldMasterId id="2147483648" r:id="rId1"/>
   </p:sldMasterIdLst>
-  <p:notesMasterIdLst>
-    <p:notesMasterId r:id="rId23"/>
-  </p:notesMasterIdLst>
   <p:sldIdLst>
     <p:sldId id="256" r:id="rId2"/>
     <p:sldId id="257" r:id="rId3"/>
@@ -14,24 +11,26 @@
     <p:sldId id="259" r:id="rId5"/>
     <p:sldId id="260" r:id="rId6"/>
     <p:sldId id="261" r:id="rId7"/>
-    <p:sldId id="276" r:id="rId8"/>
-    <p:sldId id="262" r:id="rId9"/>
-    <p:sldId id="263" r:id="rId10"/>
-    <p:sldId id="264" r:id="rId11"/>
-    <p:sldId id="265" r:id="rId12"/>
-    <p:sldId id="266" r:id="rId13"/>
-    <p:sldId id="267" r:id="rId14"/>
-    <p:sldId id="268" r:id="rId15"/>
-    <p:sldId id="269" r:id="rId16"/>
-    <p:sldId id="270" r:id="rId17"/>
-    <p:sldId id="271" r:id="rId18"/>
-    <p:sldId id="272" r:id="rId19"/>
-    <p:sldId id="273" r:id="rId20"/>
-    <p:sldId id="274" r:id="rId21"/>
-    <p:sldId id="275" r:id="rId22"/>
+    <p:sldId id="262" r:id="rId8"/>
+    <p:sldId id="263" r:id="rId9"/>
+    <p:sldId id="264" r:id="rId10"/>
+    <p:sldId id="265" r:id="rId11"/>
+    <p:sldId id="266" r:id="rId12"/>
+    <p:sldId id="267" r:id="rId13"/>
+    <p:sldId id="268" r:id="rId14"/>
+    <p:sldId id="269" r:id="rId15"/>
+    <p:sldId id="270" r:id="rId16"/>
+    <p:sldId id="271" r:id="rId17"/>
+    <p:sldId id="272" r:id="rId18"/>
+    <p:sldId id="273" r:id="rId19"/>
+    <p:sldId id="274" r:id="rId20"/>
+    <p:sldId id="275" r:id="rId21"/>
   </p:sldIdLst>
-  <p:sldSz cx="24387175" cy="13716000"/>
-  <p:notesSz cx="13716000" cy="24387175"/>
+  <p:notesMasterIdLst>
+    <p:notesMasterId r:id="rId22"/>
+  </p:notesMasterIdLst>
+  <p:sldSz cx="24387048" cy="13716000"/>
+  <p:notesSz cx="13716000" cy="24387048"/>
   <p:defaultTextStyle>
     <a:lvl1pPr marL="0" algn="l" defTabSz="914400" rtl="0" eaLnBrk="1" latinLnBrk="0" hangingPunct="1">
       <a:defRPr sz="1800" kern="1200">
@@ -124,11 +123,6 @@
       </a:defRPr>
     </a:lvl9pPr>
   </p:defaultTextStyle>
-  <p:extLst>
-    <p:ext uri="{EFAFB233-063F-42B5-8137-9DF3F51BA10A}">
-      <p15:sldGuideLst xmlns:p15="http://schemas.microsoft.com/office/powerpoint/2012/main"/>
-    </p:ext>
-  </p:extLst>
 </p:presentation>
 </file>
 
@@ -154,10 +148,234 @@
           <a:chExt cx="0" cy="0"/>
         </a:xfrm>
       </p:grpSpPr>
+      <p:sp>
+        <p:nvSpPr>
+          <p:cNvPr id="2" name="Header Placeholder 1"/>
+          <p:cNvSpPr>
+            <a:spLocks noGrp="1"/>
+          </p:cNvSpPr>
+          <p:nvPr>
+            <p:ph type="hdr" sz="quarter"/>
+          </p:nvPr>
+        </p:nvSpPr>
+        <p:spPr>
+          <a:xfrm>
+            <a:off x="0" y="0"/>
+            <a:ext cx="2971800" cy="458788"/>
+          </a:xfrm>
+          <a:prstGeom prst="rect">
+            <a:avLst/>
+          </a:prstGeom>
+        </p:spPr>
+        <p:txBody>
+          <a:bodyPr vert="horz" lIns="91440" tIns="45720" rIns="91440" bIns="45720" rtlCol="0"/>
+          <a:lstStyle>
+            <a:lvl1pPr algn="l">
+              <a:defRPr sz="1200"/>
+            </a:lvl1pPr>
+          </a:lstStyle>
+          <a:p>
+            <a:endParaRPr lang="en-US"/>
+          </a:p>
+        </p:txBody>
+      </p:sp>
+      <p:sp>
+        <p:nvSpPr>
+          <p:cNvPr id="3" name="Date Placeholder 2"/>
+          <p:cNvSpPr>
+            <a:spLocks noGrp="1"/>
+          </p:cNvSpPr>
+          <p:nvPr>
+            <p:ph type="dt" idx="1"/>
+          </p:nvPr>
+        </p:nvSpPr>
+        <p:spPr>
+          <a:xfrm>
+            <a:off x="3884613" y="0"/>
+            <a:ext cx="2971800" cy="458788"/>
+          </a:xfrm>
+          <a:prstGeom prst="rect">
+            <a:avLst/>
+          </a:prstGeom>
+        </p:spPr>
+        <p:txBody>
+          <a:bodyPr vert="horz" lIns="91440" tIns="45720" rIns="91440" bIns="45720" rtlCol="0"/>
+          <a:lstStyle>
+            <a:lvl1pPr algn="r">
+              <a:defRPr sz="1200"/>
+            </a:lvl1pPr>
+          </a:lstStyle>
+          <a:p>
+            <a:fld id="{5282F153-3F37-0F45-9E97-73ACFA13230C}" type="datetimeFigureOut">
+              <a:rPr lang="en-US"/>
+              <a:t>7/23/19</a:t>
+            </a:fld>
+            <a:endParaRPr lang="en-US"/>
+          </a:p>
+        </p:txBody>
+      </p:sp>
+      <p:sp>
+        <p:nvSpPr>
+          <p:cNvPr id="4" name="Slide Image Placeholder 3"/>
+          <p:cNvSpPr>
+            <a:spLocks noGrp="1" noRot="1" noChangeAspect="1"/>
+          </p:cNvSpPr>
+          <p:nvPr>
+            <p:ph type="sldImg" idx="2"/>
+          </p:nvPr>
+        </p:nvSpPr>
+        <p:spPr>
+          <a:xfrm>
+            <a:off x="685800" y="1143000"/>
+            <a:ext cx="5486400" cy="3086100"/>
+          </a:xfrm>
+          <a:prstGeom prst="rect">
+            <a:avLst/>
+          </a:prstGeom>
+          <a:noFill/>
+          <a:ln w="12700">
+            <a:solidFill>
+              <a:prstClr val="black"/>
+            </a:solidFill>
+          </a:ln>
+        </p:spPr>
+        <p:txBody>
+          <a:bodyPr vert="horz" lIns="91440" tIns="45720" rIns="91440" bIns="45720" rtlCol="0" anchor="ctr"/>
+          <a:lstStyle/>
+          <a:p>
+            <a:endParaRPr lang="en-US"/>
+          </a:p>
+        </p:txBody>
+      </p:sp>
+      <p:sp>
+        <p:nvSpPr>
+          <p:cNvPr id="5" name="Notes Placeholder 4"/>
+          <p:cNvSpPr>
+            <a:spLocks noGrp="1"/>
+          </p:cNvSpPr>
+          <p:nvPr>
+            <p:ph type="body" sz="quarter" idx="3"/>
+          </p:nvPr>
+        </p:nvSpPr>
+        <p:spPr>
+          <a:xfrm>
+            <a:off x="685800" y="4400550"/>
+            <a:ext cx="5486400" cy="3600450"/>
+          </a:xfrm>
+          <a:prstGeom prst="rect">
+            <a:avLst/>
+          </a:prstGeom>
+        </p:spPr>
+        <p:txBody>
+          <a:bodyPr vert="horz" lIns="91440" tIns="45720" rIns="91440" bIns="45720" rtlCol="0"/>
+          <a:lstStyle/>
+          <a:p>
+            <a:pPr lvl="0"/>
+            <a:r>
+              <a:rPr lang="en-US"/>
+              <a:t>Click to edit Master text styles</a:t>
+            </a:r>
+          </a:p>
+          <a:p>
+            <a:pPr lvl="1"/>
+            <a:r>
+              <a:rPr lang="en-US"/>
+              <a:t>Second level</a:t>
+            </a:r>
+          </a:p>
+          <a:p>
+            <a:pPr lvl="2"/>
+            <a:r>
+              <a:rPr lang="en-US"/>
+              <a:t>Third level</a:t>
+            </a:r>
+          </a:p>
+          <a:p>
+            <a:pPr lvl="3"/>
+            <a:r>
+              <a:rPr lang="en-US"/>
+              <a:t>Fourth level</a:t>
+            </a:r>
+          </a:p>
+          <a:p>
+            <a:pPr lvl="4"/>
+            <a:r>
+              <a:rPr lang="en-US"/>
+              <a:t>Fifth level</a:t>
+            </a:r>
+          </a:p>
+        </p:txBody>
+      </p:sp>
+      <p:sp>
+        <p:nvSpPr>
+          <p:cNvPr id="6" name="Footer Placeholder 5"/>
+          <p:cNvSpPr>
+            <a:spLocks noGrp="1"/>
+          </p:cNvSpPr>
+          <p:nvPr>
+            <p:ph type="ftr" sz="quarter" idx="4"/>
+          </p:nvPr>
+        </p:nvSpPr>
+        <p:spPr>
+          <a:xfrm>
+            <a:off x="0" y="8685213"/>
+            <a:ext cx="2971800" cy="458787"/>
+          </a:xfrm>
+          <a:prstGeom prst="rect">
+            <a:avLst/>
+          </a:prstGeom>
+        </p:spPr>
+        <p:txBody>
+          <a:bodyPr vert="horz" lIns="91440" tIns="45720" rIns="91440" bIns="45720" rtlCol="0" anchor="b"/>
+          <a:lstStyle>
+            <a:lvl1pPr algn="l">
+              <a:defRPr sz="1200"/>
+            </a:lvl1pPr>
+          </a:lstStyle>
+          <a:p>
+            <a:endParaRPr lang="en-US"/>
+          </a:p>
+        </p:txBody>
+      </p:sp>
+      <p:sp>
+        <p:nvSpPr>
+          <p:cNvPr id="7" name="Slide Number Placeholder 6"/>
+          <p:cNvSpPr>
+            <a:spLocks noGrp="1"/>
+          </p:cNvSpPr>
+          <p:nvPr>
+            <p:ph type="sldNum" sz="quarter" idx="5"/>
+          </p:nvPr>
+        </p:nvSpPr>
+        <p:spPr>
+          <a:xfrm>
+            <a:off x="3884613" y="8685213"/>
+            <a:ext cx="2971800" cy="458787"/>
+          </a:xfrm>
+          <a:prstGeom prst="rect">
+            <a:avLst/>
+          </a:prstGeom>
+        </p:spPr>
+        <p:txBody>
+          <a:bodyPr vert="horz" lIns="91440" tIns="45720" rIns="91440" bIns="45720" rtlCol="0" anchor="b"/>
+          <a:lstStyle>
+            <a:lvl1pPr algn="r">
+              <a:defRPr sz="1200"/>
+            </a:lvl1pPr>
+          </a:lstStyle>
+          <a:p>
+            <a:fld id="{CE5E9CC1-C706-0F49-92D6-E571CC5EEA8F}" type="slidenum">
+              <a:rPr lang="en-US"/>
+              <a:t>‹#›</a:t>
+            </a:fld>
+            <a:endParaRPr lang="en-US"/>
+          </a:p>
+        </p:txBody>
+      </p:sp>
     </p:spTree>
     <p:extLst>
       <p:ext uri="{BB962C8B-B14F-4D97-AF65-F5344CB8AC3E}">
-        <p14:creationId xmlns:p14="http://schemas.microsoft.com/office/powerpoint/2010/main" val="2156412459"/>
+        <p14:creationId xmlns:p14="http://schemas.microsoft.com/office/powerpoint/2010/main" val="1024086991"/>
       </p:ext>
     </p:extLst>
   </p:cSld>
@@ -305,6 +523,7 @@
               <a:rPr lang="en-US" dirty="0"/>
               <a:t>Capa. Ciclo completo ao vivo: detectar, diagnosticar, corrigir.</a:t>
             </a:r>
+            <a:endParaRPr lang="en-US" dirty="0"/>
           </a:p>
         </p:txBody>
       </p:sp>
@@ -388,6 +607,10 @@
           <a:bodyPr/>
           <a:lstStyle/>
           <a:p>
+            <a:r>
+              <a:rPr lang="en-US" dirty="0"/>
+              <a:t>CLAQUETE — inicio do video 3.3. Segure 2 segundos em silencio antes de comecar a falar: e por esta tela que a edicao corta.</a:t>
+            </a:r>
             <a:endParaRPr lang="en-US" dirty="0"/>
           </a:p>
         </p:txBody>
@@ -474,8 +697,9 @@
           <a:p>
             <a:r>
               <a:rPr lang="en-US" dirty="0"/>
-              <a:t>CLAQUETE — inicio do video 3.3. Segure 2 segundos em silencio antes de comecar a falar: e por esta tela que a edicao corta.</a:t>
-            </a:r>
+              <a:t/>
+            </a:r>
+            <a:endParaRPr lang="en-US" dirty="0"/>
           </a:p>
         </p:txBody>
       </p:sp>
@@ -559,6 +783,10 @@
           <a:bodyPr/>
           <a:lstStyle/>
           <a:p>
+            <a:r>
+              <a:rPr lang="en-US" dirty="0"/>
+              <a:t/>
+            </a:r>
             <a:endParaRPr lang="en-US" dirty="0"/>
           </a:p>
         </p:txBody>
@@ -643,6 +871,10 @@
           <a:bodyPr/>
           <a:lstStyle/>
           <a:p>
+            <a:r>
+              <a:rPr lang="en-US" dirty="0"/>
+              <a:t/>
+            </a:r>
             <a:endParaRPr lang="en-US" dirty="0"/>
           </a:p>
         </p:txBody>
@@ -727,6 +959,10 @@
           <a:bodyPr/>
           <a:lstStyle/>
           <a:p>
+            <a:r>
+              <a:rPr lang="en-US" dirty="0"/>
+              <a:t>CLAQUETE — inicio do video 3.4. Segure 2 segundos em silencio antes de comecar a falar: e por esta tela que a edicao corta.</a:t>
+            </a:r>
             <a:endParaRPr lang="en-US" dirty="0"/>
           </a:p>
         </p:txBody>
@@ -813,8 +1049,9 @@
           <a:p>
             <a:r>
               <a:rPr lang="en-US" dirty="0"/>
-              <a:t>CLAQUETE — inicio do video 3.4. Segure 2 segundos em silencio antes de comecar a falar: e por esta tela que a edicao corta.</a:t>
-            </a:r>
+              <a:t/>
+            </a:r>
+            <a:endParaRPr lang="en-US" dirty="0"/>
           </a:p>
         </p:txBody>
       </p:sp>
@@ -898,6 +1135,10 @@
           <a:bodyPr/>
           <a:lstStyle/>
           <a:p>
+            <a:r>
+              <a:rPr lang="en-US" dirty="0"/>
+              <a:t/>
+            </a:r>
             <a:endParaRPr lang="en-US" dirty="0"/>
           </a:p>
         </p:txBody>
@@ -982,6 +1223,10 @@
           <a:bodyPr/>
           <a:lstStyle/>
           <a:p>
+            <a:r>
+              <a:rPr lang="en-US" dirty="0"/>
+              <a:t/>
+            </a:r>
             <a:endParaRPr lang="en-US" dirty="0"/>
           </a:p>
         </p:txBody>
@@ -1066,6 +1311,10 @@
           <a:bodyPr/>
           <a:lstStyle/>
           <a:p>
+            <a:r>
+              <a:rPr lang="en-US" dirty="0"/>
+              <a:t>CLAQUETE — inicio do video 3.5. Segure 2 segundos em silencio antes de comecar a falar: e por esta tela que a edicao corta.</a:t>
+            </a:r>
             <a:endParaRPr lang="en-US" dirty="0"/>
           </a:p>
         </p:txBody>
@@ -1152,8 +1401,9 @@
           <a:p>
             <a:r>
               <a:rPr lang="en-US" dirty="0"/>
-              <a:t>CLAQUETE — inicio do video 3.5. Segure 2 segundos em silencio antes de comecar a falar: e por esta tela que a edicao corta.</a:t>
-            </a:r>
+              <a:t/>
+            </a:r>
+            <a:endParaRPr lang="en-US" dirty="0"/>
           </a:p>
         </p:txBody>
       </p:sp>
@@ -1241,6 +1491,7 @@
               <a:rPr lang="en-US" dirty="0"/>
               <a:t>CLAQUETE — inicio do video 3.1. Segure 2 segundos em silencio antes de comecar a falar: e por esta tela que a edicao corta.</a:t>
             </a:r>
+            <a:endParaRPr lang="en-US" dirty="0"/>
           </a:p>
         </p:txBody>
       </p:sp>
@@ -1324,6 +1575,10 @@
           <a:bodyPr/>
           <a:lstStyle/>
           <a:p>
+            <a:r>
+              <a:rPr lang="en-US" dirty="0"/>
+              <a:t/>
+            </a:r>
             <a:endParaRPr lang="en-US" dirty="0"/>
           </a:p>
         </p:txBody>
@@ -1346,90 +1601,6 @@
             <a:fld id="{F7021451-1387-4CA6-816F-3879F97B5CBC}" type="slidenum">
               <a:rPr lang="en-US"/>
               <a:t>20</a:t>
-            </a:fld>
-            <a:endParaRPr lang="en-US"/>
-          </a:p>
-        </p:txBody>
-      </p:sp>
-    </p:spTree>
-    <p:extLst>
-      <p:ext uri="{BB962C8B-B14F-4D97-AF65-F5344CB8AC3E}">
-        <p14:creationId xmlns:p14="http://schemas.microsoft.com/office/powerpoint/2010/main" val="1024086991"/>
-      </p:ext>
-    </p:extLst>
-  </p:cSld>
-  <p:clrMapOvr>
-    <a:masterClrMapping/>
-  </p:clrMapOvr>
-</p:notes>
-</file>
-
-<file path=ppt/notesSlides/notesSlide21.xml><?xml version="1.0" encoding="utf-8"?>
-<p:notes xmlns:a="http://schemas.openxmlformats.org/drawingml/2006/main" xmlns:r="http://schemas.openxmlformats.org/officeDocument/2006/relationships" xmlns:p="http://schemas.openxmlformats.org/presentationml/2006/main">
-  <p:cSld>
-    <p:spTree>
-      <p:nvGrpSpPr>
-        <p:cNvPr id="1" name=""/>
-        <p:cNvGrpSpPr/>
-        <p:nvPr/>
-      </p:nvGrpSpPr>
-      <p:grpSpPr>
-        <a:xfrm>
-          <a:off x="0" y="0"/>
-          <a:ext cx="0" cy="0"/>
-          <a:chOff x="0" y="0"/>
-          <a:chExt cx="0" cy="0"/>
-        </a:xfrm>
-      </p:grpSpPr>
-      <p:sp>
-        <p:nvSpPr>
-          <p:cNvPr id="2" name="Slide Image Placeholder 1"/>
-          <p:cNvSpPr>
-            <a:spLocks noGrp="1" noRot="1" noChangeAspect="1"/>
-          </p:cNvSpPr>
-          <p:nvPr>
-            <p:ph type="sldImg"/>
-          </p:nvPr>
-        </p:nvSpPr>
-        <p:spPr/>
-      </p:sp>
-      <p:sp>
-        <p:nvSpPr>
-          <p:cNvPr id="3" name="Notes Placeholder 2"/>
-          <p:cNvSpPr>
-            <a:spLocks noGrp="1"/>
-          </p:cNvSpPr>
-          <p:nvPr>
-            <p:ph type="body" idx="1"/>
-          </p:nvPr>
-        </p:nvSpPr>
-        <p:spPr/>
-        <p:txBody>
-          <a:bodyPr/>
-          <a:lstStyle/>
-          <a:p>
-            <a:endParaRPr lang="en-US" dirty="0"/>
-          </a:p>
-        </p:txBody>
-      </p:sp>
-      <p:sp>
-        <p:nvSpPr>
-          <p:cNvPr id="4" name="Slide Number Placeholder 3"/>
-          <p:cNvSpPr>
-            <a:spLocks noGrp="1"/>
-          </p:cNvSpPr>
-          <p:nvPr>
-            <p:ph type="sldNum" sz="quarter" idx="10"/>
-          </p:nvPr>
-        </p:nvSpPr>
-        <p:spPr/>
-        <p:txBody>
-          <a:bodyPr/>
-          <a:lstStyle/>
-          <a:p>
-            <a:fld id="{F7021451-1387-4CA6-816F-3879F97B5CBC}" type="slidenum">
-              <a:rPr lang="en-US"/>
-              <a:t>21</a:t>
             </a:fld>
             <a:endParaRPr lang="en-US"/>
           </a:p>
@@ -1492,6 +1663,10 @@
           <a:bodyPr/>
           <a:lstStyle/>
           <a:p>
+            <a:r>
+              <a:rPr lang="en-US" dirty="0"/>
+              <a:t/>
+            </a:r>
             <a:endParaRPr lang="en-US" dirty="0"/>
           </a:p>
         </p:txBody>
@@ -1576,6 +1751,10 @@
           <a:bodyPr/>
           <a:lstStyle/>
           <a:p>
+            <a:r>
+              <a:rPr lang="en-US" dirty="0"/>
+              <a:t/>
+            </a:r>
             <a:endParaRPr lang="en-US" dirty="0"/>
           </a:p>
         </p:txBody>
@@ -1660,6 +1839,10 @@
           <a:bodyPr/>
           <a:lstStyle/>
           <a:p>
+            <a:r>
+              <a:rPr lang="en-US" dirty="0"/>
+              <a:t/>
+            </a:r>
             <a:endParaRPr lang="en-US" dirty="0"/>
           </a:p>
         </p:txBody>
@@ -1748,6 +1931,7 @@
               <a:rPr lang="en-US" dirty="0"/>
               <a:t>CLAQUETE — inicio do video 3.2. Segure 2 segundos em silencio antes de comecar a falar: e por esta tela que a edicao corta.</a:t>
             </a:r>
+            <a:endParaRPr lang="en-US" dirty="0"/>
           </a:p>
         </p:txBody>
       </p:sp>
@@ -1792,13 +1976,7 @@
   <p:cSld>
     <p:spTree>
       <p:nvGrpSpPr>
-        <p:cNvPr id="1" name="">
-          <a:extLst>
-            <a:ext uri="{FF2B5EF4-FFF2-40B4-BE49-F238E27FC236}">
-              <a16:creationId xmlns:a16="http://schemas.microsoft.com/office/drawing/2014/main" id="{83CAB1DE-1E08-8DDA-3CC1-0DA83B922E9A}"/>
-            </a:ext>
-          </a:extLst>
-        </p:cNvPr>
+        <p:cNvPr id="1" name=""/>
         <p:cNvGrpSpPr/>
         <p:nvPr/>
       </p:nvGrpSpPr>
@@ -1812,13 +1990,7 @@
       </p:grpSpPr>
       <p:sp>
         <p:nvSpPr>
-          <p:cNvPr id="2" name="Slide Image Placeholder 1">
-            <a:extLst>
-              <a:ext uri="{FF2B5EF4-FFF2-40B4-BE49-F238E27FC236}">
-                <a16:creationId xmlns:a16="http://schemas.microsoft.com/office/drawing/2014/main" id="{769262EF-C010-B16A-138C-26BECC159BB6}"/>
-              </a:ext>
-            </a:extLst>
-          </p:cNvPr>
+          <p:cNvPr id="2" name="Slide Image Placeholder 1"/>
           <p:cNvSpPr>
             <a:spLocks noGrp="1" noRot="1" noChangeAspect="1"/>
           </p:cNvSpPr>
@@ -1830,13 +2002,7 @@
       </p:sp>
       <p:sp>
         <p:nvSpPr>
-          <p:cNvPr id="3" name="Notes Placeholder 2">
-            <a:extLst>
-              <a:ext uri="{FF2B5EF4-FFF2-40B4-BE49-F238E27FC236}">
-                <a16:creationId xmlns:a16="http://schemas.microsoft.com/office/drawing/2014/main" id="{F9F9B896-1BBE-20C9-8812-B031E6BF8C71}"/>
-              </a:ext>
-            </a:extLst>
-          </p:cNvPr>
+          <p:cNvPr id="3" name="Notes Placeholder 2"/>
           <p:cNvSpPr>
             <a:spLocks noGrp="1"/>
           </p:cNvSpPr>
@@ -1851,20 +2017,15 @@
           <a:p>
             <a:r>
               <a:rPr lang="en-US" dirty="0"/>
-              <a:t>Capa. Ciclo completo ao vivo: detectar, diagnosticar, corrigir.</a:t>
-            </a:r>
-          </a:p>
-        </p:txBody>
-      </p:sp>
-      <p:sp>
-        <p:nvSpPr>
-          <p:cNvPr id="4" name="Slide Number Placeholder 3">
-            <a:extLst>
-              <a:ext uri="{FF2B5EF4-FFF2-40B4-BE49-F238E27FC236}">
-                <a16:creationId xmlns:a16="http://schemas.microsoft.com/office/drawing/2014/main" id="{2447159F-B005-792B-4841-2A686D8DD381}"/>
-              </a:ext>
-            </a:extLst>
-          </p:cNvPr>
+              <a:t/>
+            </a:r>
+            <a:endParaRPr lang="en-US" dirty="0"/>
+          </a:p>
+        </p:txBody>
+      </p:sp>
+      <p:sp>
+        <p:nvSpPr>
+          <p:cNvPr id="4" name="Slide Number Placeholder 3"/>
           <p:cNvSpPr>
             <a:spLocks noGrp="1"/>
           </p:cNvSpPr>
@@ -1888,7 +2049,7 @@
     </p:spTree>
     <p:extLst>
       <p:ext uri="{BB962C8B-B14F-4D97-AF65-F5344CB8AC3E}">
-        <p14:creationId xmlns:p14="http://schemas.microsoft.com/office/powerpoint/2010/main" val="293954435"/>
+        <p14:creationId xmlns:p14="http://schemas.microsoft.com/office/powerpoint/2010/main" val="1024086991"/>
       </p:ext>
     </p:extLst>
   </p:cSld>
@@ -1942,6 +2103,10 @@
           <a:bodyPr/>
           <a:lstStyle/>
           <a:p>
+            <a:r>
+              <a:rPr lang="en-US" dirty="0"/>
+              <a:t/>
+            </a:r>
             <a:endParaRPr lang="en-US" dirty="0"/>
           </a:p>
         </p:txBody>
@@ -2026,6 +2191,10 @@
           <a:bodyPr/>
           <a:lstStyle/>
           <a:p>
+            <a:r>
+              <a:rPr lang="en-US" dirty="0"/>
+              <a:t/>
+            </a:r>
             <a:endParaRPr lang="en-US" dirty="0"/>
           </a:p>
         </p:txBody>
@@ -2099,11 +2268,6 @@
 <file path=ppt/slideMasters/slideMaster1.xml><?xml version="1.0" encoding="utf-8"?>
 <p:sldMaster xmlns:a="http://schemas.openxmlformats.org/drawingml/2006/main" xmlns:r="http://schemas.openxmlformats.org/officeDocument/2006/relationships" xmlns:p="http://schemas.openxmlformats.org/presentationml/2006/main">
   <p:cSld>
-    <p:bg>
-      <p:bgRef idx="1001">
-        <a:schemeClr val="bg1"/>
-      </p:bgRef>
-    </p:bg>
     <p:spTree>
       <p:nvGrpSpPr>
         <p:cNvPr id="1" name=""/>
@@ -2386,7 +2550,6 @@
         <a:solidFill>
           <a:srgbClr val="0C0C0E"/>
         </a:solidFill>
-        <a:effectLst/>
       </p:bgPr>
     </p:bg>
     <p:spTree>
@@ -2405,7 +2568,55 @@
       </p:grpSpPr>
       <p:pic>
         <p:nvPicPr>
-          <p:cNvPr id="2" name="Image 0" descr="C:\Users\PCSTUD~1\AppData\Local\Temp\claude\C--Users-PC-Studio-2-Desktop-6498-Evals\7ce78c02-4c99-40d4-bc57-5394098065c6\scratchpad\art\malha.png"/>
+          <p:cNvPr id="2" name="Image 0" descr="art\malha.png">    </p:cNvPr>
+          <p:cNvPicPr>
+            <a:picLocks noChangeAspect="1"/>
+          </p:cNvPicPr>
+          <p:nvPr/>
+        </p:nvPicPr>
+        <p:blipFill>
+          <a:blip r:embed="rId1"/>
+          <a:stretch>
+            <a:fillRect/>
+          </a:stretch>
+        </p:blipFill>
+        <p:spPr>
+          <a:xfrm>
+            <a:off x="0" y="0"/>
+            <a:ext cx="24387048" cy="13716000"/>
+          </a:xfrm>
+          <a:prstGeom prst="rect">
+            <a:avLst/>
+          </a:prstGeom>
+        </p:spPr>
+      </p:pic>
+      <p:pic>
+        <p:nvPicPr>
+          <p:cNvPr id="3" name="Image 1" descr="art\capa.png">    </p:cNvPr>
+          <p:cNvPicPr>
+            <a:picLocks noChangeAspect="1"/>
+          </p:cNvPicPr>
+          <p:nvPr/>
+        </p:nvPicPr>
+        <p:blipFill>
+          <a:blip r:embed="rId2"/>
+          <a:stretch>
+            <a:fillRect/>
+          </a:stretch>
+        </p:blipFill>
+        <p:spPr>
+          <a:xfrm>
+            <a:off x="8092440" y="0"/>
+            <a:ext cx="16294608" cy="13716000"/>
+          </a:xfrm>
+          <a:prstGeom prst="rect">
+            <a:avLst/>
+          </a:prstGeom>
+        </p:spPr>
+      </p:pic>
+      <p:pic>
+        <p:nvPicPr>
+          <p:cNvPr id="4" name="Image 2" descr="art\logo.png">    </p:cNvPr>
           <p:cNvPicPr>
             <a:picLocks noChangeAspect="1"/>
           </p:cNvPicPr>
@@ -2419,54 +2630,6 @@
         </p:blipFill>
         <p:spPr>
           <a:xfrm>
-            <a:off x="0" y="0"/>
-            <a:ext cx="24387048" cy="13716000"/>
-          </a:xfrm>
-          <a:prstGeom prst="rect">
-            <a:avLst/>
-          </a:prstGeom>
-        </p:spPr>
-      </p:pic>
-      <p:pic>
-        <p:nvPicPr>
-          <p:cNvPr id="3" name="Image 1" descr="C:\Users\PCSTUD~1\AppData\Local\Temp\claude\C--Users-PC-Studio-2-Desktop-6498-Evals\7ce78c02-4c99-40d4-bc57-5394098065c6\scratchpad\art\capa.png"/>
-          <p:cNvPicPr>
-            <a:picLocks noChangeAspect="1"/>
-          </p:cNvPicPr>
-          <p:nvPr/>
-        </p:nvPicPr>
-        <p:blipFill>
-          <a:blip r:embed="rId4"/>
-          <a:stretch>
-            <a:fillRect/>
-          </a:stretch>
-        </p:blipFill>
-        <p:spPr>
-          <a:xfrm>
-            <a:off x="8092440" y="0"/>
-            <a:ext cx="16294608" cy="13716000"/>
-          </a:xfrm>
-          <a:prstGeom prst="rect">
-            <a:avLst/>
-          </a:prstGeom>
-        </p:spPr>
-      </p:pic>
-      <p:pic>
-        <p:nvPicPr>
-          <p:cNvPr id="4" name="Image 2" descr="C:\Users\PCSTUD~1\AppData\Local\Temp\claude\C--Users-PC-Studio-2-Desktop-6498-Evals\7ce78c02-4c99-40d4-bc57-5394098065c6\scratchpad\art\logo.png"/>
-          <p:cNvPicPr>
-            <a:picLocks noChangeAspect="1"/>
-          </p:cNvPicPr>
-          <p:nvPr/>
-        </p:nvPicPr>
-        <p:blipFill>
-          <a:blip r:embed="rId5"/>
-          <a:stretch>
-            <a:fillRect/>
-          </a:stretch>
-        </p:blipFill>
-        <p:spPr>
-          <a:xfrm>
             <a:off x="23436072" y="402336"/>
             <a:ext cx="475488" cy="594360"/>
           </a:xfrm>
@@ -2496,11 +2659,11 @@
           <a:bodyPr wrap="square" lIns="0" tIns="0" rIns="0" bIns="0" rtlCol="0" anchor="ctr"/>
           <a:lstStyle/>
           <a:p>
-            <a:pPr marL="0" indent="0">
+            <a:pPr indent="0" marL="0">
               <a:buNone/>
             </a:pPr>
             <a:r>
-              <a:rPr lang="en-US" sz="2200" b="1" kern="0" spc="300" dirty="0">
+              <a:rPr lang="en-US" sz="2200" b="1" spc="300" kern="0" dirty="0">
                 <a:solidFill>
                   <a:srgbClr val="1F53E5"/>
                 </a:solidFill>
@@ -2535,7 +2698,7 @@
           <a:bodyPr wrap="square" lIns="0" tIns="0" rIns="0" bIns="0" rtlCol="0" anchor="t"/>
           <a:lstStyle/>
           <a:p>
-            <a:pPr marL="0" indent="0">
+            <a:pPr indent="0" marL="0">
               <a:lnSpc>
                 <a:spcPct val="102000"/>
               </a:lnSpc>
@@ -2555,7 +2718,7 @@
             <a:endParaRPr lang="en-US" sz="10400" dirty="0"/>
           </a:p>
           <a:p>
-            <a:pPr marL="0" indent="0">
+            <a:pPr indent="0" marL="0">
               <a:lnSpc>
                 <a:spcPct val="102000"/>
               </a:lnSpc>
@@ -2575,7 +2738,7 @@
             <a:endParaRPr lang="en-US" sz="10400" dirty="0"/>
           </a:p>
           <a:p>
-            <a:pPr marL="0" indent="0">
+            <a:pPr indent="0" marL="0">
               <a:lnSpc>
                 <a:spcPct val="102000"/>
               </a:lnSpc>
@@ -2617,7 +2780,7 @@
           <a:bodyPr wrap="square" lIns="0" tIns="0" rIns="0" bIns="0" rtlCol="0" anchor="t"/>
           <a:lstStyle/>
           <a:p>
-            <a:pPr marL="0" indent="0">
+            <a:pPr indent="0" marL="0">
               <a:lnSpc>
                 <a:spcPct val="115000"/>
               </a:lnSpc>
@@ -2659,7 +2822,7 @@
           <a:bodyPr wrap="square" lIns="0" tIns="0" rIns="0" bIns="0" rtlCol="0" anchor="ctr"/>
           <a:lstStyle/>
           <a:p>
-            <a:pPr marL="0" indent="0">
+            <a:pPr indent="0" marL="0">
               <a:buNone/>
             </a:pPr>
             <a:r>
@@ -2687,13 +2850,12 @@
 
 <file path=ppt/slides/slide10.xml><?xml version="1.0" encoding="utf-8"?>
 <p:sld xmlns:a="http://schemas.openxmlformats.org/drawingml/2006/main" xmlns:r="http://schemas.openxmlformats.org/officeDocument/2006/relationships" xmlns:p="http://schemas.openxmlformats.org/presentationml/2006/main">
-  <p:cSld name="Slide 9">
+  <p:cSld name="Slide 10">
     <p:bg>
       <p:bgPr>
         <a:solidFill>
-          <a:srgbClr val="0C0C0E"/>
+          <a:srgbClr val="052FD3"/>
         </a:solidFill>
-        <a:effectLst/>
       </p:bgPr>
     </p:bg>
     <p:spTree>
@@ -2712,44 +2874,20 @@
       </p:grpSpPr>
       <p:pic>
         <p:nvPicPr>
-          <p:cNvPr id="2" name="Image 0" descr="C:\Users\PCSTUD~1\AppData\Local\Temp\claude\C--Users-PC-Studio-2-Desktop-6498-Evals\7ce78c02-4c99-40d4-bc57-5394098065c6\scratchpad\art\malha.png"/>
+          <p:cNvPr id="2" name="Image 0" descr="art\logo.png">    </p:cNvPr>
           <p:cNvPicPr>
             <a:picLocks noChangeAspect="1"/>
           </p:cNvPicPr>
           <p:nvPr/>
         </p:nvPicPr>
         <p:blipFill>
-          <a:blip r:embed="rId3"/>
+          <a:blip r:embed="rId1"/>
           <a:stretch>
             <a:fillRect/>
           </a:stretch>
         </p:blipFill>
         <p:spPr>
           <a:xfrm>
-            <a:off x="0" y="0"/>
-            <a:ext cx="24387048" cy="13716000"/>
-          </a:xfrm>
-          <a:prstGeom prst="rect">
-            <a:avLst/>
-          </a:prstGeom>
-        </p:spPr>
-      </p:pic>
-      <p:pic>
-        <p:nvPicPr>
-          <p:cNvPr id="3" name="Image 1" descr="C:\Users\PCSTUD~1\AppData\Local\Temp\claude\C--Users-PC-Studio-2-Desktop-6498-Evals\7ce78c02-4c99-40d4-bc57-5394098065c6\scratchpad\art\logo.png"/>
-          <p:cNvPicPr>
-            <a:picLocks noChangeAspect="1"/>
-          </p:cNvPicPr>
-          <p:nvPr/>
-        </p:nvPicPr>
-        <p:blipFill>
-          <a:blip r:embed="rId4"/>
-          <a:stretch>
-            <a:fillRect/>
-          </a:stretch>
-        </p:blipFill>
-        <p:spPr>
-          <a:xfrm>
             <a:off x="23436072" y="402336"/>
             <a:ext cx="475488" cy="594360"/>
           </a:xfrm>
@@ -2760,14 +2898,14 @@
       </p:pic>
       <p:sp>
         <p:nvSpPr>
-          <p:cNvPr id="4" name="Text 0"/>
+          <p:cNvPr id="3" name="Text 0"/>
           <p:cNvSpPr txBox="1"/>
           <p:nvPr/>
         </p:nvSpPr>
         <p:spPr>
           <a:xfrm>
-            <a:off x="2423160" y="2148840"/>
-            <a:ext cx="19540728" cy="594360"/>
+            <a:off x="4416552" y="4023360"/>
+            <a:ext cx="15544800" cy="5669280"/>
           </a:xfrm>
           <a:prstGeom prst="rect">
             <a:avLst/>
@@ -2779,347 +2917,24 @@
           <a:bodyPr wrap="square" lIns="0" tIns="0" rIns="0" bIns="0" rtlCol="0" anchor="ctr"/>
           <a:lstStyle/>
           <a:p>
-            <a:pPr marL="0" indent="0">
+            <a:pPr algn="ctr" indent="0" marL="0">
+              <a:lnSpc>
+                <a:spcPct val="105000"/>
+              </a:lnSpc>
               <a:buNone/>
             </a:pPr>
             <a:r>
-              <a:rPr lang="en-US" sz="2100" b="1" kern="0" spc="250" dirty="0">
+              <a:rPr lang="en-US" sz="9600" dirty="0">
                 <a:solidFill>
-                  <a:srgbClr val="1F53E5"/>
+                  <a:srgbClr val="FFFFFF"/>
                 </a:solidFill>
                 <a:latin typeface="Encode Sans" pitchFamily="34" charset="0"/>
                 <a:ea typeface="Encode Sans" pitchFamily="34" charset="-122"/>
                 <a:cs typeface="Encode Sans" pitchFamily="34" charset="-120"/>
               </a:rPr>
-              <a:t>VÍDEO 3.2</a:t>
-            </a:r>
-            <a:endParaRPr lang="en-US" sz="2100" dirty="0"/>
-          </a:p>
-        </p:txBody>
-      </p:sp>
-      <p:sp>
-        <p:nvSpPr>
-          <p:cNvPr id="5" name="Text 1"/>
-          <p:cNvSpPr txBox="1"/>
-          <p:nvPr/>
-        </p:nvSpPr>
-        <p:spPr>
-          <a:xfrm>
-            <a:off x="2423160" y="2880360"/>
-            <a:ext cx="18745200" cy="2377440"/>
-          </a:xfrm>
-          <a:prstGeom prst="rect">
-            <a:avLst/>
-          </a:prstGeom>
-          <a:noFill/>
-          <a:ln/>
-        </p:spPr>
-        <p:txBody>
-          <a:bodyPr wrap="square" lIns="0" tIns="0" rIns="0" bIns="0" rtlCol="0" anchor="t"/>
-          <a:lstStyle/>
-          <a:p>
-            <a:pPr marL="0" indent="0">
-              <a:lnSpc>
-                <a:spcPct val="105000"/>
-              </a:lnSpc>
-              <a:buNone/>
-            </a:pPr>
-            <a:r>
-              <a:rPr lang="en-US" sz="6600" dirty="0">
-                <a:solidFill>
-                  <a:srgbClr val="BDBFC7"/>
-                </a:solidFill>
-                <a:latin typeface="Encode Sans" pitchFamily="34" charset="0"/>
-                <a:ea typeface="Encode Sans" pitchFamily="34" charset="-122"/>
-                <a:cs typeface="Encode Sans" pitchFamily="34" charset="-120"/>
-              </a:rPr>
-              <a:t>Antes e depois, ao vivo</a:t>
-            </a:r>
-            <a:endParaRPr lang="en-US" sz="6600" dirty="0"/>
-          </a:p>
-        </p:txBody>
-      </p:sp>
-      <p:sp>
-        <p:nvSpPr>
-          <p:cNvPr id="6" name="Text 2"/>
-          <p:cNvSpPr txBox="1"/>
-          <p:nvPr/>
-        </p:nvSpPr>
-        <p:spPr>
-          <a:xfrm>
-            <a:off x="2423160" y="5367528"/>
-            <a:ext cx="777240" cy="548640"/>
-          </a:xfrm>
-          <a:prstGeom prst="rect">
-            <a:avLst/>
-          </a:prstGeom>
-          <a:noFill/>
-          <a:ln/>
-        </p:spPr>
-        <p:txBody>
-          <a:bodyPr wrap="square" lIns="0" tIns="0" rIns="0" bIns="0" rtlCol="0" anchor="t"/>
-          <a:lstStyle/>
-          <a:p>
-            <a:pPr marL="0" indent="0">
-              <a:buNone/>
-            </a:pPr>
-            <a:r>
-              <a:rPr lang="en-US" sz="3000" b="1" dirty="0">
-                <a:solidFill>
-                  <a:srgbClr val="1F53E5"/>
-                </a:solidFill>
-                <a:latin typeface="Roboto" pitchFamily="34" charset="0"/>
-                <a:ea typeface="Roboto" pitchFamily="34" charset="-122"/>
-                <a:cs typeface="Roboto" pitchFamily="34" charset="-120"/>
-              </a:rPr>
-              <a:t>→</a:t>
-            </a:r>
-            <a:endParaRPr lang="en-US" sz="3000" dirty="0"/>
-          </a:p>
-        </p:txBody>
-      </p:sp>
-      <p:sp>
-        <p:nvSpPr>
-          <p:cNvPr id="7" name="Text 3"/>
-          <p:cNvSpPr txBox="1"/>
-          <p:nvPr/>
-        </p:nvSpPr>
-        <p:spPr>
-          <a:xfrm>
-            <a:off x="3337560" y="5349240"/>
-            <a:ext cx="17922240" cy="548640"/>
-          </a:xfrm>
-          <a:prstGeom prst="rect">
-            <a:avLst/>
-          </a:prstGeom>
-          <a:noFill/>
-          <a:ln/>
-        </p:spPr>
-        <p:txBody>
-          <a:bodyPr wrap="square" lIns="0" tIns="0" rIns="0" bIns="0" rtlCol="0" anchor="t"/>
-          <a:lstStyle/>
-          <a:p>
-            <a:pPr marL="0" indent="0">
-              <a:lnSpc>
-                <a:spcPct val="118000"/>
-              </a:lnSpc>
-              <a:buNone/>
-            </a:pPr>
-            <a:r>
-              <a:rPr lang="en-US" sz="2800" dirty="0">
-                <a:solidFill>
-                  <a:srgbClr val="A7A9B4"/>
-                </a:solidFill>
-                <a:latin typeface="Roboto" pitchFamily="34" charset="0"/>
-                <a:ea typeface="Roboto" pitchFamily="34" charset="-122"/>
-                <a:cs typeface="Roboto" pitchFamily="34" charset="-120"/>
-              </a:rPr>
-              <a:t>Desligo a observabilidade e uso o produto: funciona igual, e não aparece nada no painel.</a:t>
-            </a:r>
-            <a:endParaRPr lang="en-US" sz="2800" dirty="0"/>
-          </a:p>
-        </p:txBody>
-      </p:sp>
-      <p:sp>
-        <p:nvSpPr>
-          <p:cNvPr id="8" name="Text 4"/>
-          <p:cNvSpPr txBox="1"/>
-          <p:nvPr/>
-        </p:nvSpPr>
-        <p:spPr>
-          <a:xfrm>
-            <a:off x="2423160" y="6419088"/>
-            <a:ext cx="777240" cy="548640"/>
-          </a:xfrm>
-          <a:prstGeom prst="rect">
-            <a:avLst/>
-          </a:prstGeom>
-          <a:noFill/>
-          <a:ln/>
-        </p:spPr>
-        <p:txBody>
-          <a:bodyPr wrap="square" lIns="0" tIns="0" rIns="0" bIns="0" rtlCol="0" anchor="t"/>
-          <a:lstStyle/>
-          <a:p>
-            <a:pPr marL="0" indent="0">
-              <a:buNone/>
-            </a:pPr>
-            <a:r>
-              <a:rPr lang="en-US" sz="3000" b="1" dirty="0">
-                <a:solidFill>
-                  <a:srgbClr val="1F53E5"/>
-                </a:solidFill>
-                <a:latin typeface="Roboto" pitchFamily="34" charset="0"/>
-                <a:ea typeface="Roboto" pitchFamily="34" charset="-122"/>
-                <a:cs typeface="Roboto" pitchFamily="34" charset="-120"/>
-              </a:rPr>
-              <a:t>→</a:t>
-            </a:r>
-            <a:endParaRPr lang="en-US" sz="3000" dirty="0"/>
-          </a:p>
-        </p:txBody>
-      </p:sp>
-      <p:sp>
-        <p:nvSpPr>
-          <p:cNvPr id="9" name="Text 5"/>
-          <p:cNvSpPr txBox="1"/>
-          <p:nvPr/>
-        </p:nvSpPr>
-        <p:spPr>
-          <a:xfrm>
-            <a:off x="3337560" y="6400800"/>
-            <a:ext cx="17922240" cy="548640"/>
-          </a:xfrm>
-          <a:prstGeom prst="rect">
-            <a:avLst/>
-          </a:prstGeom>
-          <a:noFill/>
-          <a:ln/>
-        </p:spPr>
-        <p:txBody>
-          <a:bodyPr wrap="square" lIns="0" tIns="0" rIns="0" bIns="0" rtlCol="0" anchor="t"/>
-          <a:lstStyle/>
-          <a:p>
-            <a:pPr marL="0" indent="0">
-              <a:lnSpc>
-                <a:spcPct val="118000"/>
-              </a:lnSpc>
-              <a:buNone/>
-            </a:pPr>
-            <a:r>
-              <a:rPr lang="en-US" sz="2800" dirty="0">
-                <a:solidFill>
-                  <a:srgbClr val="A7A9B4"/>
-                </a:solidFill>
-                <a:latin typeface="Roboto" pitchFamily="34" charset="0"/>
-                <a:ea typeface="Roboto" pitchFamily="34" charset="-122"/>
-                <a:cs typeface="Roboto" pitchFamily="34" charset="-120"/>
-              </a:rPr>
-              <a:t>Ligo de novo e faço exatamente a mesma coisa: agora a interação aparece inteira.</a:t>
-            </a:r>
-            <a:endParaRPr lang="en-US" sz="2800" dirty="0"/>
-          </a:p>
-        </p:txBody>
-      </p:sp>
-      <p:sp>
-        <p:nvSpPr>
-          <p:cNvPr id="10" name="Text 6"/>
-          <p:cNvSpPr txBox="1"/>
-          <p:nvPr/>
-        </p:nvSpPr>
-        <p:spPr>
-          <a:xfrm>
-            <a:off x="2423160" y="7470648"/>
-            <a:ext cx="777240" cy="548640"/>
-          </a:xfrm>
-          <a:prstGeom prst="rect">
-            <a:avLst/>
-          </a:prstGeom>
-          <a:noFill/>
-          <a:ln/>
-        </p:spPr>
-        <p:txBody>
-          <a:bodyPr wrap="square" lIns="0" tIns="0" rIns="0" bIns="0" rtlCol="0" anchor="t"/>
-          <a:lstStyle/>
-          <a:p>
-            <a:pPr marL="0" indent="0">
-              <a:buNone/>
-            </a:pPr>
-            <a:r>
-              <a:rPr lang="en-US" sz="3000" b="1" dirty="0">
-                <a:solidFill>
-                  <a:srgbClr val="1F53E5"/>
-                </a:solidFill>
-                <a:latin typeface="Roboto" pitchFamily="34" charset="0"/>
-                <a:ea typeface="Roboto" pitchFamily="34" charset="-122"/>
-                <a:cs typeface="Roboto" pitchFamily="34" charset="-120"/>
-              </a:rPr>
-              <a:t>→</a:t>
-            </a:r>
-            <a:endParaRPr lang="en-US" sz="3000" dirty="0"/>
-          </a:p>
-        </p:txBody>
-      </p:sp>
-      <p:sp>
-        <p:nvSpPr>
-          <p:cNvPr id="11" name="Text 7"/>
-          <p:cNvSpPr txBox="1"/>
-          <p:nvPr/>
-        </p:nvSpPr>
-        <p:spPr>
-          <a:xfrm>
-            <a:off x="3337560" y="7452360"/>
-            <a:ext cx="17922240" cy="548640"/>
-          </a:xfrm>
-          <a:prstGeom prst="rect">
-            <a:avLst/>
-          </a:prstGeom>
-          <a:noFill/>
-          <a:ln/>
-        </p:spPr>
-        <p:txBody>
-          <a:bodyPr wrap="square" lIns="0" tIns="0" rIns="0" bIns="0" rtlCol="0" anchor="t"/>
-          <a:lstStyle/>
-          <a:p>
-            <a:pPr marL="0" indent="0">
-              <a:lnSpc>
-                <a:spcPct val="118000"/>
-              </a:lnSpc>
-              <a:buNone/>
-            </a:pPr>
-            <a:r>
-              <a:rPr lang="en-US" sz="2800" b="1" dirty="0">
-                <a:solidFill>
-                  <a:srgbClr val="BDBFC7"/>
-                </a:solidFill>
-                <a:latin typeface="Roboto" pitchFamily="34" charset="0"/>
-                <a:ea typeface="Roboto" pitchFamily="34" charset="-122"/>
-                <a:cs typeface="Roboto" pitchFamily="34" charset="-120"/>
-              </a:rPr>
-              <a:t>Espere uns 45 segundos até o registro ficar visível. Não é erro — é a fila de chegada.</a:t>
-            </a:r>
-            <a:endParaRPr lang="en-US" sz="2800" dirty="0"/>
-          </a:p>
-        </p:txBody>
-      </p:sp>
-      <p:sp>
-        <p:nvSpPr>
-          <p:cNvPr id="12" name="Text 8"/>
-          <p:cNvSpPr txBox="1"/>
-          <p:nvPr/>
-        </p:nvSpPr>
-        <p:spPr>
-          <a:xfrm>
-            <a:off x="2423160" y="12755880"/>
-            <a:ext cx="19540728" cy="457200"/>
-          </a:xfrm>
-          <a:prstGeom prst="rect">
-            <a:avLst/>
-          </a:prstGeom>
-          <a:noFill/>
-          <a:ln/>
-        </p:spPr>
-        <p:txBody>
-          <a:bodyPr wrap="square" lIns="0" tIns="0" rIns="0" bIns="0" rtlCol="0" anchor="ctr"/>
-          <a:lstStyle/>
-          <a:p>
-            <a:pPr marL="0" indent="0">
-              <a:buNone/>
-            </a:pPr>
-            <a:r>
-              <a:rPr lang="en-US" sz="1500" dirty="0">
-                <a:solidFill>
-                  <a:srgbClr val="A7A9B4">
-                    <a:alpha val="65000"/>
-                  </a:srgbClr>
-                </a:solidFill>
-                <a:latin typeface="Roboto" pitchFamily="34" charset="0"/>
-                <a:ea typeface="Roboto" pitchFamily="34" charset="-122"/>
-                <a:cs typeface="Roboto" pitchFamily="34" charset="-120"/>
-              </a:rPr>
-              <a:t>Aula 3 — Observabilidade: monitorando em produção — Evals, observabilidade e conformidade</a:t>
-            </a:r>
-            <a:endParaRPr lang="en-US" sz="1500" dirty="0"/>
+              <a:t>3.3 Lendo os dados de produção</a:t>
+            </a:r>
+            <a:endParaRPr lang="en-US" sz="9600" dirty="0"/>
           </a:p>
         </p:txBody>
       </p:sp>
@@ -3133,13 +2948,12 @@
 
 <file path=ppt/slides/slide11.xml><?xml version="1.0" encoding="utf-8"?>
 <p:sld xmlns:a="http://schemas.openxmlformats.org/drawingml/2006/main" xmlns:r="http://schemas.openxmlformats.org/officeDocument/2006/relationships" xmlns:p="http://schemas.openxmlformats.org/presentationml/2006/main">
-  <p:cSld name="Slide 10">
+  <p:cSld name="Slide 11">
     <p:bg>
       <p:bgPr>
         <a:solidFill>
-          <a:srgbClr val="052FD3"/>
+          <a:srgbClr val="EEEFF1"/>
         </a:solidFill>
-        <a:effectLst/>
       </p:bgPr>
     </p:bg>
     <p:spTree>
@@ -3158,14 +2972,14 @@
       </p:grpSpPr>
       <p:pic>
         <p:nvPicPr>
-          <p:cNvPr id="2" name="Image 0" descr="C:\Users\PCSTUD~1\AppData\Local\Temp\claude\C--Users-PC-Studio-2-Desktop-6498-Evals\7ce78c02-4c99-40d4-bc57-5394098065c6\scratchpad\art\logo.png"/>
+          <p:cNvPr id="2" name="Image 0" descr="art\logo.png">    </p:cNvPr>
           <p:cNvPicPr>
             <a:picLocks noChangeAspect="1"/>
           </p:cNvPicPr>
           <p:nvPr/>
         </p:nvPicPr>
         <p:blipFill>
-          <a:blip r:embed="rId3"/>
+          <a:blip r:embed="rId1"/>
           <a:stretch>
             <a:fillRect/>
           </a:stretch>
@@ -3188,8 +3002,8 @@
         </p:nvSpPr>
         <p:spPr>
           <a:xfrm>
-            <a:off x="4416552" y="4023360"/>
-            <a:ext cx="15544800" cy="5669280"/>
+            <a:off x="2423160" y="2148840"/>
+            <a:ext cx="19540728" cy="594360"/>
           </a:xfrm>
           <a:prstGeom prst="rect">
             <a:avLst/>
@@ -3201,110 +3015,11 @@
           <a:bodyPr wrap="square" lIns="0" tIns="0" rIns="0" bIns="0" rtlCol="0" anchor="ctr"/>
           <a:lstStyle/>
           <a:p>
-            <a:pPr marL="0" indent="0" algn="ctr">
-              <a:lnSpc>
-                <a:spcPct val="105000"/>
-              </a:lnSpc>
+            <a:pPr indent="0" marL="0">
               <a:buNone/>
             </a:pPr>
             <a:r>
-              <a:rPr lang="en-US" sz="9600" dirty="0">
-                <a:solidFill>
-                  <a:srgbClr val="FFFFFF"/>
-                </a:solidFill>
-                <a:latin typeface="Encode Sans" pitchFamily="34" charset="0"/>
-                <a:ea typeface="Encode Sans" pitchFamily="34" charset="-122"/>
-                <a:cs typeface="Encode Sans" pitchFamily="34" charset="-120"/>
-              </a:rPr>
-              <a:t>3.3 Lendo os dados de produção</a:t>
-            </a:r>
-            <a:endParaRPr lang="en-US" sz="9600" dirty="0"/>
-          </a:p>
-        </p:txBody>
-      </p:sp>
-    </p:spTree>
-  </p:cSld>
-  <p:clrMapOvr>
-    <a:masterClrMapping/>
-  </p:clrMapOvr>
-</p:sld>
-</file>
-
-<file path=ppt/slides/slide12.xml><?xml version="1.0" encoding="utf-8"?>
-<p:sld xmlns:a="http://schemas.openxmlformats.org/drawingml/2006/main" xmlns:r="http://schemas.openxmlformats.org/officeDocument/2006/relationships" xmlns:p="http://schemas.openxmlformats.org/presentationml/2006/main">
-  <p:cSld name="Slide 11">
-    <p:bg>
-      <p:bgPr>
-        <a:solidFill>
-          <a:srgbClr val="EEEFF1"/>
-        </a:solidFill>
-        <a:effectLst/>
-      </p:bgPr>
-    </p:bg>
-    <p:spTree>
-      <p:nvGrpSpPr>
-        <p:cNvPr id="1" name=""/>
-        <p:cNvGrpSpPr/>
-        <p:nvPr/>
-      </p:nvGrpSpPr>
-      <p:grpSpPr>
-        <a:xfrm>
-          <a:off x="0" y="0"/>
-          <a:ext cx="0" cy="0"/>
-          <a:chOff x="0" y="0"/>
-          <a:chExt cx="0" cy="0"/>
-        </a:xfrm>
-      </p:grpSpPr>
-      <p:pic>
-        <p:nvPicPr>
-          <p:cNvPr id="2" name="Image 0" descr="C:\Users\PCSTUD~1\AppData\Local\Temp\claude\C--Users-PC-Studio-2-Desktop-6498-Evals\7ce78c02-4c99-40d4-bc57-5394098065c6\scratchpad\art\logo.png"/>
-          <p:cNvPicPr>
-            <a:picLocks noChangeAspect="1"/>
-          </p:cNvPicPr>
-          <p:nvPr/>
-        </p:nvPicPr>
-        <p:blipFill>
-          <a:blip r:embed="rId3"/>
-          <a:stretch>
-            <a:fillRect/>
-          </a:stretch>
-        </p:blipFill>
-        <p:spPr>
-          <a:xfrm>
-            <a:off x="23436072" y="402336"/>
-            <a:ext cx="475488" cy="594360"/>
-          </a:xfrm>
-          <a:prstGeom prst="rect">
-            <a:avLst/>
-          </a:prstGeom>
-        </p:spPr>
-      </p:pic>
-      <p:sp>
-        <p:nvSpPr>
-          <p:cNvPr id="3" name="Text 0"/>
-          <p:cNvSpPr txBox="1"/>
-          <p:nvPr/>
-        </p:nvSpPr>
-        <p:spPr>
-          <a:xfrm>
-            <a:off x="2423160" y="2148840"/>
-            <a:ext cx="19540728" cy="594360"/>
-          </a:xfrm>
-          <a:prstGeom prst="rect">
-            <a:avLst/>
-          </a:prstGeom>
-          <a:noFill/>
-          <a:ln/>
-        </p:spPr>
-        <p:txBody>
-          <a:bodyPr wrap="square" lIns="0" tIns="0" rIns="0" bIns="0" rtlCol="0" anchor="ctr"/>
-          <a:lstStyle/>
-          <a:p>
-            <a:pPr marL="0" indent="0">
-              <a:buNone/>
-            </a:pPr>
-            <a:r>
-              <a:rPr lang="en-US" sz="2100" b="1" kern="0" spc="250" dirty="0">
+              <a:rPr lang="en-US" sz="2100" b="1" spc="250" kern="0" dirty="0">
                 <a:solidFill>
                   <a:srgbClr val="0429BC"/>
                 </a:solidFill>
@@ -3312,7 +3027,7 @@
                 <a:ea typeface="Encode Sans" pitchFamily="34" charset="-122"/>
                 <a:cs typeface="Encode Sans" pitchFamily="34" charset="-120"/>
               </a:rPr>
-              <a:t>VÍDEO 3.3 — DADOS REAIS</a:t>
+              <a:t>VÍDEO 3.3 — DADOS REAIS (14/09)</a:t>
             </a:r>
             <a:endParaRPr lang="en-US" sz="2100" dirty="0"/>
           </a:p>
@@ -3339,7 +3054,7 @@
           <a:bodyPr wrap="square" lIns="0" tIns="0" rIns="0" bIns="0" rtlCol="0" anchor="t"/>
           <a:lstStyle/>
           <a:p>
-            <a:pPr marL="0" indent="0">
+            <a:pPr indent="0" marL="0">
               <a:buNone/>
             </a:pPr>
             <a:r>
@@ -3351,7 +3066,7 @@
                 <a:ea typeface="Encode Sans" pitchFamily="34" charset="-122"/>
                 <a:cs typeface="Encode Sans" pitchFamily="34" charset="-120"/>
               </a:rPr>
-              <a:t>61 interações, US$ 1,88 acumulado</a:t>
+              <a:t>38 interações, US$ 1,53 acumulado</a:t>
             </a:r>
             <a:endParaRPr lang="en-US" sz="6400" dirty="0"/>
           </a:p>
@@ -3380,41 +3095,11 @@
             <a:tbl>
               <a:tblPr/>
               <a:tblGrid>
-                <a:gridCol w="5943600">
-                  <a:extLst>
-                    <a:ext uri="{9D8B030D-6E8A-4147-A177-3AD203B41FA5}">
-                      <a16:colId xmlns:a16="http://schemas.microsoft.com/office/drawing/2014/main" val="20000"/>
-                    </a:ext>
-                  </a:extLst>
-                </a:gridCol>
-                <a:gridCol w="1325880">
-                  <a:extLst>
-                    <a:ext uri="{9D8B030D-6E8A-4147-A177-3AD203B41FA5}">
-                      <a16:colId xmlns:a16="http://schemas.microsoft.com/office/drawing/2014/main" val="20001"/>
-                    </a:ext>
-                  </a:extLst>
-                </a:gridCol>
-                <a:gridCol w="3749040">
-                  <a:extLst>
-                    <a:ext uri="{9D8B030D-6E8A-4147-A177-3AD203B41FA5}">
-                      <a16:colId xmlns:a16="http://schemas.microsoft.com/office/drawing/2014/main" val="20002"/>
-                    </a:ext>
-                  </a:extLst>
-                </a:gridCol>
-                <a:gridCol w="4206240">
-                  <a:extLst>
-                    <a:ext uri="{9D8B030D-6E8A-4147-A177-3AD203B41FA5}">
-                      <a16:colId xmlns:a16="http://schemas.microsoft.com/office/drawing/2014/main" val="20003"/>
-                    </a:ext>
-                  </a:extLst>
-                </a:gridCol>
-                <a:gridCol w="4315968">
-                  <a:extLst>
-                    <a:ext uri="{9D8B030D-6E8A-4147-A177-3AD203B41FA5}">
-                      <a16:colId xmlns:a16="http://schemas.microsoft.com/office/drawing/2014/main" val="20004"/>
-                    </a:ext>
-                  </a:extLst>
-                </a:gridCol>
+                <a:gridCol w="5943600"/>
+                <a:gridCol w="1325880"/>
+                <a:gridCol w="3749040"/>
+                <a:gridCol w="4206240"/>
+                <a:gridCol w="4315968"/>
               </a:tblGrid>
               <a:tr h="777240">
                 <a:tc>
@@ -3422,7 +3107,7 @@
                     <a:bodyPr/>
                     <a:lstStyle/>
                     <a:p>
-                      <a:pPr marL="0" indent="0" algn="l">
+                      <a:pPr algn="l" indent="0" marL="0">
                         <a:buNone/>
                       </a:pPr>
                       <a:r>
@@ -3443,7 +3128,7 @@
                       </a:endParaRPr>
                     </a:p>
                   </a:txBody>
-                  <a:tcPr anchor="ctr">
+                  <a:tcPr marL="91440" marR="91440" marT="45720" marB="45720" anchor="ctr">
                     <a:lnL w="9525" cap="flat" cmpd="sng" algn="ctr">
                       <a:solidFill>
                         <a:srgbClr val="D8DCEA"/>
@@ -3490,7 +3175,7 @@
                     <a:bodyPr/>
                     <a:lstStyle/>
                     <a:p>
-                      <a:pPr marL="0" indent="0" algn="l">
+                      <a:pPr algn="l" indent="0" marL="0">
                         <a:buNone/>
                       </a:pPr>
                       <a:r>
@@ -3511,7 +3196,7 @@
                       </a:endParaRPr>
                     </a:p>
                   </a:txBody>
-                  <a:tcPr anchor="ctr">
+                  <a:tcPr marL="91440" marR="91440" marT="45720" marB="45720" anchor="ctr">
                     <a:lnL w="9525" cap="flat" cmpd="sng" algn="ctr">
                       <a:solidFill>
                         <a:srgbClr val="D8DCEA"/>
@@ -3558,7 +3243,7 @@
                     <a:bodyPr/>
                     <a:lstStyle/>
                     <a:p>
-                      <a:pPr marL="0" indent="0" algn="l">
+                      <a:pPr algn="l" indent="0" marL="0">
                         <a:buNone/>
                       </a:pPr>
                       <a:r>
@@ -3579,7 +3264,7 @@
                       </a:endParaRPr>
                     </a:p>
                   </a:txBody>
-                  <a:tcPr anchor="ctr">
+                  <a:tcPr marL="91440" marR="91440" marT="45720" marB="45720" anchor="ctr">
                     <a:lnL w="9525" cap="flat" cmpd="sng" algn="ctr">
                       <a:solidFill>
                         <a:srgbClr val="D8DCEA"/>
@@ -3626,7 +3311,7 @@
                     <a:bodyPr/>
                     <a:lstStyle/>
                     <a:p>
-                      <a:pPr marL="0" indent="0" algn="l">
+                      <a:pPr algn="l" indent="0" marL="0">
                         <a:buNone/>
                       </a:pPr>
                       <a:r>
@@ -3647,7 +3332,7 @@
                       </a:endParaRPr>
                     </a:p>
                   </a:txBody>
-                  <a:tcPr anchor="ctr">
+                  <a:tcPr marL="91440" marR="91440" marT="45720" marB="45720" anchor="ctr">
                     <a:lnL w="9525" cap="flat" cmpd="sng" algn="ctr">
                       <a:solidFill>
                         <a:srgbClr val="D8DCEA"/>
@@ -3694,7 +3379,7 @@
                     <a:bodyPr/>
                     <a:lstStyle/>
                     <a:p>
-                      <a:pPr marL="0" indent="0" algn="l">
+                      <a:pPr algn="l" indent="0" marL="0">
                         <a:buNone/>
                       </a:pPr>
                       <a:r>
@@ -3715,7 +3400,7 @@
                       </a:endParaRPr>
                     </a:p>
                   </a:txBody>
-                  <a:tcPr anchor="ctr">
+                  <a:tcPr marL="91440" marR="91440" marT="45720" marB="45720" anchor="ctr">
                     <a:lnL w="9525" cap="flat" cmpd="sng" algn="ctr">
                       <a:solidFill>
                         <a:srgbClr val="D8DCEA"/>
@@ -3757,11 +3442,6 @@
                     </a:solidFill>
                   </a:tcPr>
                 </a:tc>
-                <a:extLst>
-                  <a:ext uri="{0D108BD9-81ED-4DB2-BD59-A6C34878D82A}">
-                    <a16:rowId xmlns:a16="http://schemas.microsoft.com/office/drawing/2014/main" val="10000"/>
-                  </a:ext>
-                </a:extLst>
               </a:tr>
               <a:tr h="777240">
                 <a:tc>
@@ -3769,7 +3449,7 @@
                     <a:bodyPr/>
                     <a:lstStyle/>
                     <a:p>
-                      <a:pPr marL="0" indent="0" algn="l">
+                      <a:pPr algn="l" indent="0" marL="0">
                         <a:buNone/>
                       </a:pPr>
                       <a:r>
@@ -3790,7 +3470,7 @@
                       </a:endParaRPr>
                     </a:p>
                   </a:txBody>
-                  <a:tcPr anchor="ctr">
+                  <a:tcPr marL="91440" marR="91440" marT="45720" marB="45720" anchor="ctr">
                     <a:lnL w="9525" cap="flat" cmpd="sng" algn="ctr">
                       <a:solidFill>
                         <a:srgbClr val="D8DCEA"/>
@@ -3837,7 +3517,7 @@
                     <a:bodyPr/>
                     <a:lstStyle/>
                     <a:p>
-                      <a:pPr marL="0" indent="0" algn="l">
+                      <a:pPr algn="l" indent="0" marL="0">
                         <a:buNone/>
                       </a:pPr>
                       <a:r>
@@ -3849,7 +3529,7 @@
                           <a:ea typeface="Roboto" pitchFamily="34" charset="-122"/>
                           <a:cs typeface="Roboto" pitchFamily="34" charset="-120"/>
                         </a:rPr>
-                        <a:t>12</a:t>
+                        <a:t>10</a:t>
                       </a:r>
                       <a:endParaRPr lang="en-US" sz="2200" dirty="0">
                         <a:latin typeface="Roboto" charset="0"/>
@@ -3858,7 +3538,7 @@
                       </a:endParaRPr>
                     </a:p>
                   </a:txBody>
-                  <a:tcPr anchor="ctr">
+                  <a:tcPr marL="91440" marR="91440" marT="45720" marB="45720" anchor="ctr">
                     <a:lnL w="9525" cap="flat" cmpd="sng" algn="ctr">
                       <a:solidFill>
                         <a:srgbClr val="D8DCEA"/>
@@ -3905,7 +3585,7 @@
                     <a:bodyPr/>
                     <a:lstStyle/>
                     <a:p>
-                      <a:pPr marL="0" indent="0" algn="l">
+                      <a:pPr algn="l" indent="0" marL="0">
                         <a:buNone/>
                       </a:pPr>
                       <a:r>
@@ -3917,7 +3597,7 @@
                           <a:ea typeface="Roboto" pitchFamily="34" charset="-122"/>
                           <a:cs typeface="Roboto" pitchFamily="34" charset="-120"/>
                         </a:rPr>
-                        <a:t>US$ 0,1184</a:t>
+                        <a:t>US$ 0,1381</a:t>
                       </a:r>
                       <a:endParaRPr lang="en-US" sz="2200" dirty="0">
                         <a:latin typeface="Roboto" charset="0"/>
@@ -3926,7 +3606,7 @@
                       </a:endParaRPr>
                     </a:p>
                   </a:txBody>
-                  <a:tcPr anchor="ctr">
+                  <a:tcPr marL="91440" marR="91440" marT="45720" marB="45720" anchor="ctr">
                     <a:lnL w="9525" cap="flat" cmpd="sng" algn="ctr">
                       <a:solidFill>
                         <a:srgbClr val="D8DCEA"/>
@@ -3973,7 +3653,7 @@
                     <a:bodyPr/>
                     <a:lstStyle/>
                     <a:p>
-                      <a:pPr marL="0" indent="0" algn="l">
+                      <a:pPr algn="l" indent="0" marL="0">
                         <a:buNone/>
                       </a:pPr>
                       <a:r>
@@ -3985,7 +3665,7 @@
                           <a:ea typeface="Roboto" pitchFamily="34" charset="-122"/>
                           <a:cs typeface="Roboto" pitchFamily="34" charset="-120"/>
                         </a:rPr>
-                        <a:t>51,2 s</a:t>
+                        <a:t>55,9 s</a:t>
                       </a:r>
                       <a:endParaRPr lang="en-US" sz="2200" dirty="0">
                         <a:latin typeface="Roboto" charset="0"/>
@@ -3994,7 +3674,7 @@
                       </a:endParaRPr>
                     </a:p>
                   </a:txBody>
-                  <a:tcPr anchor="ctr">
+                  <a:tcPr marL="91440" marR="91440" marT="45720" marB="45720" anchor="ctr">
                     <a:lnL w="9525" cap="flat" cmpd="sng" algn="ctr">
                       <a:solidFill>
                         <a:srgbClr val="D8DCEA"/>
@@ -4041,7 +3721,7 @@
                     <a:bodyPr/>
                     <a:lstStyle/>
                     <a:p>
-                      <a:pPr marL="0" indent="0" algn="l">
+                      <a:pPr algn="l" indent="0" marL="0">
                         <a:buNone/>
                       </a:pPr>
                       <a:r>
@@ -4053,7 +3733,7 @@
                           <a:ea typeface="Roboto" pitchFamily="34" charset="-122"/>
                           <a:cs typeface="Roboto" pitchFamily="34" charset="-120"/>
                         </a:rPr>
-                        <a:t>76 %</a:t>
+                        <a:t>90 %</a:t>
                       </a:r>
                       <a:endParaRPr lang="en-US" sz="2200" dirty="0">
                         <a:latin typeface="Roboto" charset="0"/>
@@ -4062,7 +3742,7 @@
                       </a:endParaRPr>
                     </a:p>
                   </a:txBody>
-                  <a:tcPr anchor="ctr">
+                  <a:tcPr marL="91440" marR="91440" marT="45720" marB="45720" anchor="ctr">
                     <a:lnL w="9525" cap="flat" cmpd="sng" algn="ctr">
                       <a:solidFill>
                         <a:srgbClr val="D8DCEA"/>
@@ -4104,11 +3784,6 @@
                     </a:solidFill>
                   </a:tcPr>
                 </a:tc>
-                <a:extLst>
-                  <a:ext uri="{0D108BD9-81ED-4DB2-BD59-A6C34878D82A}">
-                    <a16:rowId xmlns:a16="http://schemas.microsoft.com/office/drawing/2014/main" val="10001"/>
-                  </a:ext>
-                </a:extLst>
               </a:tr>
               <a:tr h="777240">
                 <a:tc>
@@ -4116,7 +3791,7 @@
                     <a:bodyPr/>
                     <a:lstStyle/>
                     <a:p>
-                      <a:pPr marL="0" indent="0" algn="l">
+                      <a:pPr algn="l" indent="0" marL="0">
                         <a:buNone/>
                       </a:pPr>
                       <a:r>
@@ -4128,7 +3803,7 @@
                           <a:ea typeface="Roboto" pitchFamily="34" charset="-122"/>
                           <a:cs typeface="Roboto" pitchFamily="34" charset="-120"/>
                         </a:rPr>
-                        <a:t>Sugerir receita</a:t>
+                        <a:t>Receita premium da semana</a:t>
                       </a:r>
                       <a:endParaRPr lang="en-US" sz="2200" dirty="0">
                         <a:latin typeface="Roboto" charset="0"/>
@@ -4137,7 +3812,7 @@
                       </a:endParaRPr>
                     </a:p>
                   </a:txBody>
-                  <a:tcPr anchor="ctr">
+                  <a:tcPr marL="91440" marR="91440" marT="45720" marB="45720" anchor="ctr">
                     <a:lnL w="9525" cap="flat" cmpd="sng" algn="ctr">
                       <a:solidFill>
                         <a:srgbClr val="D8DCEA"/>
@@ -4184,7 +3859,7 @@
                     <a:bodyPr/>
                     <a:lstStyle/>
                     <a:p>
-                      <a:pPr marL="0" indent="0" algn="l">
+                      <a:pPr algn="l" indent="0" marL="0">
                         <a:buNone/>
                       </a:pPr>
                       <a:r>
@@ -4196,7 +3871,7 @@
                           <a:ea typeface="Roboto" pitchFamily="34" charset="-122"/>
                           <a:cs typeface="Roboto" pitchFamily="34" charset="-120"/>
                         </a:rPr>
-                        <a:t>7</a:t>
+                        <a:t>6</a:t>
                       </a:r>
                       <a:endParaRPr lang="en-US" sz="2200" dirty="0">
                         <a:latin typeface="Roboto" charset="0"/>
@@ -4205,7 +3880,7 @@
                       </a:endParaRPr>
                     </a:p>
                   </a:txBody>
-                  <a:tcPr anchor="ctr">
+                  <a:tcPr marL="91440" marR="91440" marT="45720" marB="45720" anchor="ctr">
                     <a:lnL w="9525" cap="flat" cmpd="sng" algn="ctr">
                       <a:solidFill>
                         <a:srgbClr val="D8DCEA"/>
@@ -4252,7 +3927,7 @@
                     <a:bodyPr/>
                     <a:lstStyle/>
                     <a:p>
-                      <a:pPr marL="0" indent="0" algn="l">
+                      <a:pPr algn="l" indent="0" marL="0">
                         <a:buNone/>
                       </a:pPr>
                       <a:r>
@@ -4264,7 +3939,7 @@
                           <a:ea typeface="Roboto" pitchFamily="34" charset="-122"/>
                           <a:cs typeface="Roboto" pitchFamily="34" charset="-120"/>
                         </a:rPr>
-                        <a:t>US$ 0,0324</a:t>
+                        <a:t>US$ 0,0115</a:t>
                       </a:r>
                       <a:endParaRPr lang="en-US" sz="2200" dirty="0">
                         <a:latin typeface="Roboto" charset="0"/>
@@ -4273,7 +3948,7 @@
                       </a:endParaRPr>
                     </a:p>
                   </a:txBody>
-                  <a:tcPr anchor="ctr">
+                  <a:tcPr marL="91440" marR="91440" marT="45720" marB="45720" anchor="ctr">
                     <a:lnL w="9525" cap="flat" cmpd="sng" algn="ctr">
                       <a:solidFill>
                         <a:srgbClr val="D8DCEA"/>
@@ -4320,7 +3995,7 @@
                     <a:bodyPr/>
                     <a:lstStyle/>
                     <a:p>
-                      <a:pPr marL="0" indent="0" algn="l">
+                      <a:pPr algn="l" indent="0" marL="0">
                         <a:buNone/>
                       </a:pPr>
                       <a:r>
@@ -4332,7 +4007,7 @@
                           <a:ea typeface="Roboto" pitchFamily="34" charset="-122"/>
                           <a:cs typeface="Roboto" pitchFamily="34" charset="-120"/>
                         </a:rPr>
-                        <a:t>34,1 s</a:t>
+                        <a:t>7,3 s</a:t>
                       </a:r>
                       <a:endParaRPr lang="en-US" sz="2200" dirty="0">
                         <a:latin typeface="Roboto" charset="0"/>
@@ -4341,7 +4016,7 @@
                       </a:endParaRPr>
                     </a:p>
                   </a:txBody>
-                  <a:tcPr anchor="ctr">
+                  <a:tcPr marL="91440" marR="91440" marT="45720" marB="45720" anchor="ctr">
                     <a:lnL w="9525" cap="flat" cmpd="sng" algn="ctr">
                       <a:solidFill>
                         <a:srgbClr val="D8DCEA"/>
@@ -4388,7 +4063,7 @@
                     <a:bodyPr/>
                     <a:lstStyle/>
                     <a:p>
-                      <a:pPr marL="0" indent="0" algn="l">
+                      <a:pPr algn="l" indent="0" marL="0">
                         <a:buNone/>
                       </a:pPr>
                       <a:r>
@@ -4400,7 +4075,7 @@
                           <a:ea typeface="Roboto" pitchFamily="34" charset="-122"/>
                           <a:cs typeface="Roboto" pitchFamily="34" charset="-120"/>
                         </a:rPr>
-                        <a:t>12 %</a:t>
+                        <a:t>5 %</a:t>
                       </a:r>
                       <a:endParaRPr lang="en-US" sz="2200" dirty="0">
                         <a:latin typeface="Roboto" charset="0"/>
@@ -4409,7 +4084,7 @@
                       </a:endParaRPr>
                     </a:p>
                   </a:txBody>
-                  <a:tcPr anchor="ctr">
+                  <a:tcPr marL="91440" marR="91440" marT="45720" marB="45720" anchor="ctr">
                     <a:lnL w="9525" cap="flat" cmpd="sng" algn="ctr">
                       <a:solidFill>
                         <a:srgbClr val="D8DCEA"/>
@@ -4451,11 +4126,6 @@
                     </a:solidFill>
                   </a:tcPr>
                 </a:tc>
-                <a:extLst>
-                  <a:ext uri="{0D108BD9-81ED-4DB2-BD59-A6C34878D82A}">
-                    <a16:rowId xmlns:a16="http://schemas.microsoft.com/office/drawing/2014/main" val="10002"/>
-                  </a:ext>
-                </a:extLst>
               </a:tr>
               <a:tr h="777240">
                 <a:tc>
@@ -4463,7 +4133,7 @@
                     <a:bodyPr/>
                     <a:lstStyle/>
                     <a:p>
-                      <a:pPr marL="0" indent="0" algn="l">
+                      <a:pPr algn="l" indent="0" marL="0">
                         <a:buNone/>
                       </a:pPr>
                       <a:r>
@@ -4484,7 +4154,7 @@
                       </a:endParaRPr>
                     </a:p>
                   </a:txBody>
-                  <a:tcPr anchor="ctr">
+                  <a:tcPr marL="91440" marR="91440" marT="45720" marB="45720" anchor="ctr">
                     <a:lnL w="9525" cap="flat" cmpd="sng" algn="ctr">
                       <a:solidFill>
                         <a:srgbClr val="D8DCEA"/>
@@ -4531,7 +4201,7 @@
                     <a:bodyPr/>
                     <a:lstStyle/>
                     <a:p>
-                      <a:pPr marL="0" indent="0" algn="l">
+                      <a:pPr algn="l" indent="0" marL="0">
                         <a:buNone/>
                       </a:pPr>
                       <a:r>
@@ -4543,7 +4213,7 @@
                           <a:ea typeface="Roboto" pitchFamily="34" charset="-122"/>
                           <a:cs typeface="Roboto" pitchFamily="34" charset="-120"/>
                         </a:rPr>
-                        <a:t>34</a:t>
+                        <a:t>17</a:t>
                       </a:r>
                       <a:endParaRPr lang="en-US" sz="2200" dirty="0">
                         <a:latin typeface="Roboto" charset="0"/>
@@ -4552,7 +4222,7 @@
                       </a:endParaRPr>
                     </a:p>
                   </a:txBody>
-                  <a:tcPr anchor="ctr">
+                  <a:tcPr marL="91440" marR="91440" marT="45720" marB="45720" anchor="ctr">
                     <a:lnL w="9525" cap="flat" cmpd="sng" algn="ctr">
                       <a:solidFill>
                         <a:srgbClr val="D8DCEA"/>
@@ -4599,7 +4269,7 @@
                     <a:bodyPr/>
                     <a:lstStyle/>
                     <a:p>
-                      <a:pPr marL="0" indent="0" algn="l">
+                      <a:pPr algn="l" indent="0" marL="0">
                         <a:buNone/>
                       </a:pPr>
                       <a:r>
@@ -4611,7 +4281,7 @@
                           <a:ea typeface="Roboto" pitchFamily="34" charset="-122"/>
                           <a:cs typeface="Roboto" pitchFamily="34" charset="-120"/>
                         </a:rPr>
-                        <a:t>US$ 0,0048</a:t>
+                        <a:t>US$ 0,0032</a:t>
                       </a:r>
                       <a:endParaRPr lang="en-US" sz="2200" dirty="0">
                         <a:latin typeface="Roboto" charset="0"/>
@@ -4620,7 +4290,7 @@
                       </a:endParaRPr>
                     </a:p>
                   </a:txBody>
-                  <a:tcPr anchor="ctr">
+                  <a:tcPr marL="91440" marR="91440" marT="45720" marB="45720" anchor="ctr">
                     <a:lnL w="9525" cap="flat" cmpd="sng" algn="ctr">
                       <a:solidFill>
                         <a:srgbClr val="D8DCEA"/>
@@ -4667,7 +4337,7 @@
                     <a:bodyPr/>
                     <a:lstStyle/>
                     <a:p>
-                      <a:pPr marL="0" indent="0" algn="l">
+                      <a:pPr algn="l" indent="0" marL="0">
                         <a:buNone/>
                       </a:pPr>
                       <a:r>
@@ -4679,7 +4349,7 @@
                           <a:ea typeface="Roboto" pitchFamily="34" charset="-122"/>
                           <a:cs typeface="Roboto" pitchFamily="34" charset="-120"/>
                         </a:rPr>
-                        <a:t>2,5 s</a:t>
+                        <a:t>1,6 s</a:t>
                       </a:r>
                       <a:endParaRPr lang="en-US" sz="2200" dirty="0">
                         <a:latin typeface="Roboto" charset="0"/>
@@ -4688,7 +4358,7 @@
                       </a:endParaRPr>
                     </a:p>
                   </a:txBody>
-                  <a:tcPr anchor="ctr">
+                  <a:tcPr marL="91440" marR="91440" marT="45720" marB="45720" anchor="ctr">
                     <a:lnL w="9525" cap="flat" cmpd="sng" algn="ctr">
                       <a:solidFill>
                         <a:srgbClr val="D8DCEA"/>
@@ -4735,7 +4405,7 @@
                     <a:bodyPr/>
                     <a:lstStyle/>
                     <a:p>
-                      <a:pPr marL="0" indent="0" algn="l">
+                      <a:pPr algn="l" indent="0" marL="0">
                         <a:buNone/>
                       </a:pPr>
                       <a:r>
@@ -4747,7 +4417,7 @@
                           <a:ea typeface="Roboto" pitchFamily="34" charset="-122"/>
                           <a:cs typeface="Roboto" pitchFamily="34" charset="-120"/>
                         </a:rPr>
-                        <a:t>9 %</a:t>
+                        <a:t>4 %</a:t>
                       </a:r>
                       <a:endParaRPr lang="en-US" sz="2200" dirty="0">
                         <a:latin typeface="Roboto" charset="0"/>
@@ -4756,7 +4426,7 @@
                       </a:endParaRPr>
                     </a:p>
                   </a:txBody>
-                  <a:tcPr anchor="ctr">
+                  <a:tcPr marL="91440" marR="91440" marT="45720" marB="45720" anchor="ctr">
                     <a:lnL w="9525" cap="flat" cmpd="sng" algn="ctr">
                       <a:solidFill>
                         <a:srgbClr val="D8DCEA"/>
@@ -4798,11 +4468,6 @@
                     </a:solidFill>
                   </a:tcPr>
                 </a:tc>
-                <a:extLst>
-                  <a:ext uri="{0D108BD9-81ED-4DB2-BD59-A6C34878D82A}">
-                    <a16:rowId xmlns:a16="http://schemas.microsoft.com/office/drawing/2014/main" val="10003"/>
-                  </a:ext>
-                </a:extLst>
               </a:tr>
               <a:tr h="777240">
                 <a:tc>
@@ -4810,7 +4475,7 @@
                     <a:bodyPr/>
                     <a:lstStyle/>
                     <a:p>
-                      <a:pPr marL="0" indent="0" algn="l">
+                      <a:pPr algn="l" indent="0" marL="0">
                         <a:buNone/>
                       </a:pPr>
                       <a:r>
@@ -4822,7 +4487,7 @@
                           <a:ea typeface="Roboto" pitchFamily="34" charset="-122"/>
                           <a:cs typeface="Roboto" pitchFamily="34" charset="-120"/>
                         </a:rPr>
-                        <a:t>Receita premium da semana</a:t>
+                        <a:t>Ler nota por foto</a:t>
                       </a:r>
                       <a:endParaRPr lang="en-US" sz="2200" dirty="0">
                         <a:latin typeface="Roboto" charset="0"/>
@@ -4831,7 +4496,7 @@
                       </a:endParaRPr>
                     </a:p>
                   </a:txBody>
-                  <a:tcPr anchor="ctr">
+                  <a:tcPr marL="91440" marR="91440" marT="45720" marB="45720" anchor="ctr">
                     <a:lnL w="9525" cap="flat" cmpd="sng" algn="ctr">
                       <a:solidFill>
                         <a:srgbClr val="D8DCEA"/>
@@ -4878,7 +4543,7 @@
                     <a:bodyPr/>
                     <a:lstStyle/>
                     <a:p>
-                      <a:pPr marL="0" indent="0" algn="l">
+                      <a:pPr algn="l" indent="0" marL="0">
                         <a:buNone/>
                       </a:pPr>
                       <a:r>
@@ -4890,7 +4555,7 @@
                           <a:ea typeface="Roboto" pitchFamily="34" charset="-122"/>
                           <a:cs typeface="Roboto" pitchFamily="34" charset="-120"/>
                         </a:rPr>
-                        <a:t>4</a:t>
+                        <a:t>2</a:t>
                       </a:r>
                       <a:endParaRPr lang="en-US" sz="2200" dirty="0">
                         <a:latin typeface="Roboto" charset="0"/>
@@ -4899,7 +4564,7 @@
                       </a:endParaRPr>
                     </a:p>
                   </a:txBody>
-                  <a:tcPr anchor="ctr">
+                  <a:tcPr marL="91440" marR="91440" marT="45720" marB="45720" anchor="ctr">
                     <a:lnL w="9525" cap="flat" cmpd="sng" algn="ctr">
                       <a:solidFill>
                         <a:srgbClr val="D8DCEA"/>
@@ -4946,7 +4611,7 @@
                     <a:bodyPr/>
                     <a:lstStyle/>
                     <a:p>
-                      <a:pPr marL="0" indent="0" algn="l">
+                      <a:pPr algn="l" indent="0" marL="0">
                         <a:buNone/>
                       </a:pPr>
                       <a:r>
@@ -4958,7 +4623,7 @@
                           <a:ea typeface="Roboto" pitchFamily="34" charset="-122"/>
                           <a:cs typeface="Roboto" pitchFamily="34" charset="-120"/>
                         </a:rPr>
-                        <a:t>US$ 0,0085</a:t>
+                        <a:t>US$ 0,0071</a:t>
                       </a:r>
                       <a:endParaRPr lang="en-US" sz="2200" dirty="0">
                         <a:latin typeface="Roboto" charset="0"/>
@@ -4967,7 +4632,7 @@
                       </a:endParaRPr>
                     </a:p>
                   </a:txBody>
-                  <a:tcPr anchor="ctr">
+                  <a:tcPr marL="91440" marR="91440" marT="45720" marB="45720" anchor="ctr">
                     <a:lnL w="9525" cap="flat" cmpd="sng" algn="ctr">
                       <a:solidFill>
                         <a:srgbClr val="D8DCEA"/>
@@ -5014,7 +4679,7 @@
                     <a:bodyPr/>
                     <a:lstStyle/>
                     <a:p>
-                      <a:pPr marL="0" indent="0" algn="l">
+                      <a:pPr algn="l" indent="0" marL="0">
                         <a:buNone/>
                       </a:pPr>
                       <a:r>
@@ -5026,7 +4691,7 @@
                           <a:ea typeface="Roboto" pitchFamily="34" charset="-122"/>
                           <a:cs typeface="Roboto" pitchFamily="34" charset="-120"/>
                         </a:rPr>
-                        <a:t>5,8 s</a:t>
+                        <a:t>3,3 s</a:t>
                       </a:r>
                       <a:endParaRPr lang="en-US" sz="2200" dirty="0">
                         <a:latin typeface="Roboto" charset="0"/>
@@ -5035,7 +4700,7 @@
                       </a:endParaRPr>
                     </a:p>
                   </a:txBody>
-                  <a:tcPr anchor="ctr">
+                  <a:tcPr marL="91440" marR="91440" marT="45720" marB="45720" anchor="ctr">
                     <a:lnL w="9525" cap="flat" cmpd="sng" algn="ctr">
                       <a:solidFill>
                         <a:srgbClr val="D8DCEA"/>
@@ -5082,7 +4747,7 @@
                     <a:bodyPr/>
                     <a:lstStyle/>
                     <a:p>
-                      <a:pPr marL="0" indent="0" algn="l">
+                      <a:pPr algn="l" indent="0" marL="0">
                         <a:buNone/>
                       </a:pPr>
                       <a:r>
@@ -5094,7 +4759,7 @@
                           <a:ea typeface="Roboto" pitchFamily="34" charset="-122"/>
                           <a:cs typeface="Roboto" pitchFamily="34" charset="-120"/>
                         </a:rPr>
-                        <a:t>2 %</a:t>
+                        <a:t>1 %</a:t>
                       </a:r>
                       <a:endParaRPr lang="en-US" sz="2200" dirty="0">
                         <a:latin typeface="Roboto" charset="0"/>
@@ -5103,7 +4768,7 @@
                       </a:endParaRPr>
                     </a:p>
                   </a:txBody>
-                  <a:tcPr anchor="ctr">
+                  <a:tcPr marL="91440" marR="91440" marT="45720" marB="45720" anchor="ctr">
                     <a:lnL w="9525" cap="flat" cmpd="sng" algn="ctr">
                       <a:solidFill>
                         <a:srgbClr val="D8DCEA"/>
@@ -5145,11 +4810,6 @@
                     </a:solidFill>
                   </a:tcPr>
                 </a:tc>
-                <a:extLst>
-                  <a:ext uri="{0D108BD9-81ED-4DB2-BD59-A6C34878D82A}">
-                    <a16:rowId xmlns:a16="http://schemas.microsoft.com/office/drawing/2014/main" val="10004"/>
-                  </a:ext>
-                </a:extLst>
               </a:tr>
               <a:tr h="777240">
                 <a:tc>
@@ -5157,7 +4817,7 @@
                     <a:bodyPr/>
                     <a:lstStyle/>
                     <a:p>
-                      <a:pPr marL="0" indent="0" algn="l">
+                      <a:pPr algn="l" indent="0" marL="0">
                         <a:buNone/>
                       </a:pPr>
                       <a:r>
@@ -5178,7 +4838,7 @@
                       </a:endParaRPr>
                     </a:p>
                   </a:txBody>
-                  <a:tcPr anchor="ctr">
+                  <a:tcPr marL="91440" marR="91440" marT="45720" marB="45720" anchor="ctr">
                     <a:lnL w="9525" cap="flat" cmpd="sng" algn="ctr">
                       <a:solidFill>
                         <a:srgbClr val="D8DCEA"/>
@@ -5225,7 +4885,7 @@
                     <a:bodyPr/>
                     <a:lstStyle/>
                     <a:p>
-                      <a:pPr marL="0" indent="0" algn="l">
+                      <a:pPr algn="l" indent="0" marL="0">
                         <a:buNone/>
                       </a:pPr>
                       <a:r>
@@ -5237,7 +4897,7 @@
                           <a:ea typeface="Roboto" pitchFamily="34" charset="-122"/>
                           <a:cs typeface="Roboto" pitchFamily="34" charset="-120"/>
                         </a:rPr>
-                        <a:t>4</a:t>
+                        <a:t>2</a:t>
                       </a:r>
                       <a:endParaRPr lang="en-US" sz="2200" dirty="0">
                         <a:latin typeface="Roboto" charset="0"/>
@@ -5246,7 +4906,7 @@
                       </a:endParaRPr>
                     </a:p>
                   </a:txBody>
-                  <a:tcPr anchor="ctr">
+                  <a:tcPr marL="91440" marR="91440" marT="45720" marB="45720" anchor="ctr">
                     <a:lnL w="9525" cap="flat" cmpd="sng" algn="ctr">
                       <a:solidFill>
                         <a:srgbClr val="D8DCEA"/>
@@ -5293,7 +4953,7 @@
                     <a:bodyPr/>
                     <a:lstStyle/>
                     <a:p>
-                      <a:pPr marL="0" indent="0" algn="l">
+                      <a:pPr algn="l" indent="0" marL="0">
                         <a:buNone/>
                       </a:pPr>
                       <a:r>
@@ -5305,7 +4965,7 @@
                           <a:ea typeface="Roboto" pitchFamily="34" charset="-122"/>
                           <a:cs typeface="Roboto" pitchFamily="34" charset="-120"/>
                         </a:rPr>
-                        <a:t>US$ 0,0080</a:t>
+                        <a:t>US$ 0,0054</a:t>
                       </a:r>
                       <a:endParaRPr lang="en-US" sz="2200" dirty="0">
                         <a:latin typeface="Roboto" charset="0"/>
@@ -5314,7 +4974,7 @@
                       </a:endParaRPr>
                     </a:p>
                   </a:txBody>
-                  <a:tcPr anchor="ctr">
+                  <a:tcPr marL="91440" marR="91440" marT="45720" marB="45720" anchor="ctr">
                     <a:lnL w="9525" cap="flat" cmpd="sng" algn="ctr">
                       <a:solidFill>
                         <a:srgbClr val="D8DCEA"/>
@@ -5361,7 +5021,7 @@
                     <a:bodyPr/>
                     <a:lstStyle/>
                     <a:p>
-                      <a:pPr marL="0" indent="0" algn="l">
+                      <a:pPr algn="l" indent="0" marL="0">
                         <a:buNone/>
                       </a:pPr>
                       <a:r>
@@ -5373,7 +5033,7 @@
                           <a:ea typeface="Roboto" pitchFamily="34" charset="-122"/>
                           <a:cs typeface="Roboto" pitchFamily="34" charset="-120"/>
                         </a:rPr>
-                        <a:t>3,9 s</a:t>
+                        <a:t>2,7 s</a:t>
                       </a:r>
                       <a:endParaRPr lang="en-US" sz="2200" dirty="0">
                         <a:latin typeface="Roboto" charset="0"/>
@@ -5382,7 +5042,7 @@
                       </a:endParaRPr>
                     </a:p>
                   </a:txBody>
-                  <a:tcPr anchor="ctr">
+                  <a:tcPr marL="91440" marR="91440" marT="45720" marB="45720" anchor="ctr">
                     <a:lnL w="9525" cap="flat" cmpd="sng" algn="ctr">
                       <a:solidFill>
                         <a:srgbClr val="D8DCEA"/>
@@ -5429,7 +5089,7 @@
                     <a:bodyPr/>
                     <a:lstStyle/>
                     <a:p>
-                      <a:pPr marL="0" indent="0" algn="l">
+                      <a:pPr algn="l" indent="0" marL="0">
                         <a:buNone/>
                       </a:pPr>
                       <a:r>
@@ -5441,7 +5101,7 @@
                           <a:ea typeface="Roboto" pitchFamily="34" charset="-122"/>
                           <a:cs typeface="Roboto" pitchFamily="34" charset="-120"/>
                         </a:rPr>
-                        <a:t>2 %</a:t>
+                        <a:t>1 %</a:t>
                       </a:r>
                       <a:endParaRPr lang="en-US" sz="2200" dirty="0">
                         <a:latin typeface="Roboto" charset="0"/>
@@ -5450,7 +5110,7 @@
                       </a:endParaRPr>
                     </a:p>
                   </a:txBody>
-                  <a:tcPr anchor="ctr">
+                  <a:tcPr marL="91440" marR="91440" marT="45720" marB="45720" anchor="ctr">
                     <a:lnL w="9525" cap="flat" cmpd="sng" algn="ctr">
                       <a:solidFill>
                         <a:srgbClr val="D8DCEA"/>
@@ -5492,11 +5152,6 @@
                     </a:solidFill>
                   </a:tcPr>
                 </a:tc>
-                <a:extLst>
-                  <a:ext uri="{0D108BD9-81ED-4DB2-BD59-A6C34878D82A}">
-                    <a16:rowId xmlns:a16="http://schemas.microsoft.com/office/drawing/2014/main" val="10005"/>
-                  </a:ext>
-                </a:extLst>
               </a:tr>
             </a:tbl>
           </a:graphicData>
@@ -5523,7 +5178,7 @@
           <a:bodyPr wrap="square" lIns="0" tIns="0" rIns="0" bIns="0" rtlCol="0" anchor="ctr"/>
           <a:lstStyle/>
           <a:p>
-            <a:pPr marL="0" indent="0">
+            <a:pPr indent="0" marL="0">
               <a:buNone/>
             </a:pPr>
             <a:r>
@@ -5535,7 +5190,7 @@
                 <a:ea typeface="Roboto" pitchFamily="34" charset="-122"/>
                 <a:cs typeface="Roboto" pitchFamily="34" charset="-120"/>
               </a:rPr>
-              <a:t>Três quartos da conta em um quinto das chamadas.</a:t>
+              <a:t>Nove de cada dez dólares da conta, em pouco mais de um quarto das chamadas.</a:t>
             </a:r>
             <a:endParaRPr lang="en-US" sz="2600" dirty="0"/>
           </a:p>
@@ -5562,7 +5217,7 @@
           <a:bodyPr wrap="square" lIns="0" tIns="0" rIns="0" bIns="0" rtlCol="0" anchor="ctr"/>
           <a:lstStyle/>
           <a:p>
-            <a:pPr marL="0" indent="0">
+            <a:pPr indent="0" marL="0">
               <a:buNone/>
             </a:pPr>
             <a:r>
@@ -5588,7 +5243,7 @@
 </p:sld>
 </file>
 
-<file path=ppt/slides/slide13.xml><?xml version="1.0" encoding="utf-8"?>
+<file path=ppt/slides/slide12.xml><?xml version="1.0" encoding="utf-8"?>
 <p:sld xmlns:a="http://schemas.openxmlformats.org/drawingml/2006/main" xmlns:r="http://schemas.openxmlformats.org/officeDocument/2006/relationships" xmlns:p="http://schemas.openxmlformats.org/presentationml/2006/main">
   <p:cSld name="Slide 12">
     <p:bg>
@@ -5596,7 +5251,6 @@
         <a:solidFill>
           <a:srgbClr val="0C0C0E"/>
         </a:solidFill>
-        <a:effectLst/>
       </p:bgPr>
     </p:bg>
     <p:spTree>
@@ -5615,14 +5269,14 @@
       </p:grpSpPr>
       <p:pic>
         <p:nvPicPr>
-          <p:cNvPr id="2" name="Image 0" descr="C:\Users\PCSTUD~1\AppData\Local\Temp\claude\C--Users-PC-Studio-2-Desktop-6498-Evals\7ce78c02-4c99-40d4-bc57-5394098065c6\scratchpad\art\malha.png"/>
+          <p:cNvPr id="2" name="Image 0" descr="art\malha.png">    </p:cNvPr>
           <p:cNvPicPr>
             <a:picLocks noChangeAspect="1"/>
           </p:cNvPicPr>
           <p:nvPr/>
         </p:nvPicPr>
         <p:blipFill>
-          <a:blip r:embed="rId3"/>
+          <a:blip r:embed="rId1"/>
           <a:stretch>
             <a:fillRect/>
           </a:stretch>
@@ -5639,14 +5293,14 @@
       </p:pic>
       <p:pic>
         <p:nvPicPr>
-          <p:cNvPr id="3" name="Image 1" descr="C:\Users\PCSTUD~1\AppData\Local\Temp\claude\C--Users-PC-Studio-2-Desktop-6498-Evals\7ce78c02-4c99-40d4-bc57-5394098065c6\scratchpad\art\logo.png"/>
+          <p:cNvPr id="3" name="Image 1" descr="art\logo.png">    </p:cNvPr>
           <p:cNvPicPr>
             <a:picLocks noChangeAspect="1"/>
           </p:cNvPicPr>
           <p:nvPr/>
         </p:nvPicPr>
         <p:blipFill>
-          <a:blip r:embed="rId4"/>
+          <a:blip r:embed="rId2"/>
           <a:stretch>
             <a:fillRect/>
           </a:stretch>
@@ -5669,7 +5323,7 @@
         </p:nvSpPr>
         <p:spPr>
           <a:xfrm>
-            <a:off x="2423160" y="2148840"/>
+            <a:off x="2423160" y="1051560"/>
             <a:ext cx="19540728" cy="594360"/>
           </a:xfrm>
           <a:prstGeom prst="rect">
@@ -5682,11 +5336,11 @@
           <a:bodyPr wrap="square" lIns="0" tIns="0" rIns="0" bIns="0" rtlCol="0" anchor="ctr"/>
           <a:lstStyle/>
           <a:p>
-            <a:pPr marL="0" indent="0">
+            <a:pPr indent="0" marL="0">
               <a:buNone/>
             </a:pPr>
             <a:r>
-              <a:rPr lang="en-US" sz="2100" b="1" kern="0" spc="250" dirty="0">
+              <a:rPr lang="en-US" sz="2100" b="1" spc="250" kern="0" dirty="0">
                 <a:solidFill>
                   <a:srgbClr val="1F53E5"/>
                 </a:solidFill>
@@ -5708,8 +5362,8 @@
         </p:nvSpPr>
         <p:spPr>
           <a:xfrm>
-            <a:off x="2423160" y="2880360"/>
-            <a:ext cx="18745200" cy="2377440"/>
+            <a:off x="2423160" y="1783080"/>
+            <a:ext cx="19568160" cy="2377440"/>
           </a:xfrm>
           <a:prstGeom prst="rect">
             <a:avLst/>
@@ -5721,7 +5375,7 @@
           <a:bodyPr wrap="square" lIns="0" tIns="0" rIns="0" bIns="0" rtlCol="0" anchor="t"/>
           <a:lstStyle/>
           <a:p>
-            <a:pPr marL="0" indent="0">
+            <a:pPr indent="0" marL="0">
               <a:lnSpc>
                 <a:spcPct val="105000"/>
               </a:lnSpc>
@@ -5736,7 +5390,7 @@
                 <a:ea typeface="Encode Sans" pitchFamily="34" charset="-122"/>
                 <a:cs typeface="Encode Sans" pitchFamily="34" charset="-120"/>
               </a:rPr>
-              <a:t>20% das chamadas, 76% da conta</a:t>
+              <a:t>26% das chamadas, 90% da conta</a:t>
             </a:r>
             <a:endParaRPr lang="en-US" sz="6600" dirty="0"/>
           </a:p>
@@ -5744,14 +5398,58 @@
       </p:sp>
       <p:sp>
         <p:nvSpPr>
-          <p:cNvPr id="6" name="Text 2"/>
+          <p:cNvPr id="6" name="Shape 2"/>
+          <p:cNvSpPr/>
+          <p:nvPr/>
+        </p:nvSpPr>
+        <p:spPr>
+          <a:xfrm>
+            <a:off x="2423160" y="4526280"/>
+            <a:ext cx="2011680" cy="68580"/>
+          </a:xfrm>
+          <a:prstGeom prst="rect">
+            <a:avLst/>
+          </a:prstGeom>
+          <a:solidFill>
+            <a:srgbClr val="1F53E5"/>
+          </a:solidFill>
+          <a:ln/>
+        </p:spPr>
+      </p:sp>
+      <p:pic>
+        <p:nvPicPr>
+          <p:cNvPr id="7" name="Image 2" descr="art\seta.png">    </p:cNvPr>
+          <p:cNvPicPr>
+            <a:picLocks noChangeAspect="1"/>
+          </p:cNvPicPr>
+          <p:nvPr/>
+        </p:nvPicPr>
+        <p:blipFill>
+          <a:blip r:embed="rId3"/>
+          <a:stretch>
+            <a:fillRect/>
+          </a:stretch>
+        </p:blipFill>
+        <p:spPr>
+          <a:xfrm>
+            <a:off x="2423160" y="6871716"/>
+            <a:ext cx="475488" cy="411480"/>
+          </a:xfrm>
+          <a:prstGeom prst="rect">
+            <a:avLst/>
+          </a:prstGeom>
+        </p:spPr>
+      </p:pic>
+      <p:sp>
+        <p:nvSpPr>
+          <p:cNvPr id="8" name="Text 3"/>
           <p:cNvSpPr txBox="1"/>
           <p:nvPr/>
         </p:nvSpPr>
         <p:spPr>
           <a:xfrm>
-            <a:off x="2423160" y="5367528"/>
-            <a:ext cx="777240" cy="548640"/>
+            <a:off x="3337560" y="6743700"/>
+            <a:ext cx="17922240" cy="548640"/>
           </a:xfrm>
           <a:prstGeom prst="rect">
             <a:avLst/>
@@ -5763,46 +5461,7 @@
           <a:bodyPr wrap="square" lIns="0" tIns="0" rIns="0" bIns="0" rtlCol="0" anchor="t"/>
           <a:lstStyle/>
           <a:p>
-            <a:pPr marL="0" indent="0">
-              <a:buNone/>
-            </a:pPr>
-            <a:r>
-              <a:rPr lang="en-US" sz="3000" b="1" dirty="0">
-                <a:solidFill>
-                  <a:srgbClr val="1F53E5"/>
-                </a:solidFill>
-                <a:latin typeface="Roboto" pitchFamily="34" charset="0"/>
-                <a:ea typeface="Roboto" pitchFamily="34" charset="-122"/>
-                <a:cs typeface="Roboto" pitchFamily="34" charset="-120"/>
-              </a:rPr>
-              <a:t>→</a:t>
-            </a:r>
-            <a:endParaRPr lang="en-US" sz="3000" dirty="0"/>
-          </a:p>
-        </p:txBody>
-      </p:sp>
-      <p:sp>
-        <p:nvSpPr>
-          <p:cNvPr id="7" name="Text 3"/>
-          <p:cNvSpPr txBox="1"/>
-          <p:nvPr/>
-        </p:nvSpPr>
-        <p:spPr>
-          <a:xfrm>
-            <a:off x="3337560" y="5349240"/>
-            <a:ext cx="17922240" cy="548640"/>
-          </a:xfrm>
-          <a:prstGeom prst="rect">
-            <a:avLst/>
-          </a:prstGeom>
-          <a:noFill/>
-          <a:ln/>
-        </p:spPr>
-        <p:txBody>
-          <a:bodyPr wrap="square" lIns="0" tIns="0" rIns="0" bIns="0" rtlCol="0" anchor="t"/>
-          <a:lstStyle/>
-          <a:p>
-            <a:pPr marL="0" indent="0">
+            <a:pPr indent="0" marL="0">
               <a:lnSpc>
                 <a:spcPct val="118000"/>
               </a:lnSpc>
@@ -5811,7 +5470,7 @@
             <a:r>
               <a:rPr lang="en-US" sz="2800" b="1" dirty="0">
                 <a:solidFill>
-                  <a:srgbClr val="BDBFC7"/>
+                  <a:srgbClr val="F4F5F6"/>
                 </a:solidFill>
                 <a:latin typeface="Roboto" pitchFamily="34" charset="0"/>
                 <a:ea typeface="Roboto" pitchFamily="34" charset="-122"/>
@@ -5823,16 +5482,40 @@
           </a:p>
         </p:txBody>
       </p:sp>
-      <p:sp>
-        <p:nvSpPr>
-          <p:cNvPr id="8" name="Text 4"/>
+      <p:pic>
+        <p:nvPicPr>
+          <p:cNvPr id="9" name="Image 3" descr="art\seta.png">    </p:cNvPr>
+          <p:cNvPicPr>
+            <a:picLocks noChangeAspect="1"/>
+          </p:cNvPicPr>
+          <p:nvPr/>
+        </p:nvPicPr>
+        <p:blipFill>
+          <a:blip r:embed="rId4"/>
+          <a:stretch>
+            <a:fillRect/>
+          </a:stretch>
+        </p:blipFill>
+        <p:spPr>
+          <a:xfrm>
+            <a:off x="2423160" y="8426196"/>
+            <a:ext cx="475488" cy="411480"/>
+          </a:xfrm>
+          <a:prstGeom prst="rect">
+            <a:avLst/>
+          </a:prstGeom>
+        </p:spPr>
+      </p:pic>
+      <p:sp>
+        <p:nvSpPr>
+          <p:cNvPr id="10" name="Text 4"/>
           <p:cNvSpPr txBox="1"/>
           <p:nvPr/>
         </p:nvSpPr>
         <p:spPr>
           <a:xfrm>
-            <a:off x="2423160" y="6419088"/>
-            <a:ext cx="777240" cy="548640"/>
+            <a:off x="3337560" y="8298180"/>
+            <a:ext cx="17922240" cy="548640"/>
           </a:xfrm>
           <a:prstGeom prst="rect">
             <a:avLst/>
@@ -5844,46 +5527,7 @@
           <a:bodyPr wrap="square" lIns="0" tIns="0" rIns="0" bIns="0" rtlCol="0" anchor="t"/>
           <a:lstStyle/>
           <a:p>
-            <a:pPr marL="0" indent="0">
-              <a:buNone/>
-            </a:pPr>
-            <a:r>
-              <a:rPr lang="en-US" sz="3000" b="1" dirty="0">
-                <a:solidFill>
-                  <a:srgbClr val="1F53E5"/>
-                </a:solidFill>
-                <a:latin typeface="Roboto" pitchFamily="34" charset="0"/>
-                <a:ea typeface="Roboto" pitchFamily="34" charset="-122"/>
-                <a:cs typeface="Roboto" pitchFamily="34" charset="-120"/>
-              </a:rPr>
-              <a:t>→</a:t>
-            </a:r>
-            <a:endParaRPr lang="en-US" sz="3000" dirty="0"/>
-          </a:p>
-        </p:txBody>
-      </p:sp>
-      <p:sp>
-        <p:nvSpPr>
-          <p:cNvPr id="9" name="Text 5"/>
-          <p:cNvSpPr txBox="1"/>
-          <p:nvPr/>
-        </p:nvSpPr>
-        <p:spPr>
-          <a:xfrm>
-            <a:off x="3337560" y="6400800"/>
-            <a:ext cx="17922240" cy="548640"/>
-          </a:xfrm>
-          <a:prstGeom prst="rect">
-            <a:avLst/>
-          </a:prstGeom>
-          <a:noFill/>
-          <a:ln/>
-        </p:spPr>
-        <p:txBody>
-          <a:bodyPr wrap="square" lIns="0" tIns="0" rIns="0" bIns="0" rtlCol="0" anchor="t"/>
-          <a:lstStyle/>
-          <a:p>
-            <a:pPr marL="0" indent="0">
+            <a:pPr indent="0" marL="0">
               <a:lnSpc>
                 <a:spcPct val="118000"/>
               </a:lnSpc>
@@ -5898,22 +5542,46 @@
                 <a:ea typeface="Roboto" pitchFamily="34" charset="-122"/>
                 <a:cs typeface="Roboto" pitchFamily="34" charset="-120"/>
               </a:rPr>
-              <a:t>Um quinto das chamadas do produto, três quartos de tudo que eu pago.</a:t>
+              <a:t>Pouco mais de um quarto das chamadas do produto, nove de cada dez dólares que eu pago.</a:t>
             </a:r>
             <a:endParaRPr lang="en-US" sz="2800" dirty="0"/>
           </a:p>
         </p:txBody>
       </p:sp>
-      <p:sp>
-        <p:nvSpPr>
-          <p:cNvPr id="10" name="Text 6"/>
+      <p:pic>
+        <p:nvPicPr>
+          <p:cNvPr id="11" name="Image 4" descr="art\seta.png">    </p:cNvPr>
+          <p:cNvPicPr>
+            <a:picLocks noChangeAspect="1"/>
+          </p:cNvPicPr>
+          <p:nvPr/>
+        </p:nvPicPr>
+        <p:blipFill>
+          <a:blip r:embed="rId5"/>
+          <a:stretch>
+            <a:fillRect/>
+          </a:stretch>
+        </p:blipFill>
+        <p:spPr>
+          <a:xfrm>
+            <a:off x="2423160" y="9980676"/>
+            <a:ext cx="475488" cy="411480"/>
+          </a:xfrm>
+          <a:prstGeom prst="rect">
+            <a:avLst/>
+          </a:prstGeom>
+        </p:spPr>
+      </p:pic>
+      <p:sp>
+        <p:nvSpPr>
+          <p:cNvPr id="12" name="Text 5"/>
           <p:cNvSpPr txBox="1"/>
           <p:nvPr/>
         </p:nvSpPr>
         <p:spPr>
           <a:xfrm>
-            <a:off x="2423160" y="7470648"/>
-            <a:ext cx="777240" cy="548640"/>
+            <a:off x="3337560" y="9852660"/>
+            <a:ext cx="17922240" cy="548640"/>
           </a:xfrm>
           <a:prstGeom prst="rect">
             <a:avLst/>
@@ -5925,46 +5593,7 @@
           <a:bodyPr wrap="square" lIns="0" tIns="0" rIns="0" bIns="0" rtlCol="0" anchor="t"/>
           <a:lstStyle/>
           <a:p>
-            <a:pPr marL="0" indent="0">
-              <a:buNone/>
-            </a:pPr>
-            <a:r>
-              <a:rPr lang="en-US" sz="3000" b="1" dirty="0">
-                <a:solidFill>
-                  <a:srgbClr val="1F53E5"/>
-                </a:solidFill>
-                <a:latin typeface="Roboto" pitchFamily="34" charset="0"/>
-                <a:ea typeface="Roboto" pitchFamily="34" charset="-122"/>
-                <a:cs typeface="Roboto" pitchFamily="34" charset="-120"/>
-              </a:rPr>
-              <a:t>→</a:t>
-            </a:r>
-            <a:endParaRPr lang="en-US" sz="3000" dirty="0"/>
-          </a:p>
-        </p:txBody>
-      </p:sp>
-      <p:sp>
-        <p:nvSpPr>
-          <p:cNvPr id="11" name="Text 7"/>
-          <p:cNvSpPr txBox="1"/>
-          <p:nvPr/>
-        </p:nvSpPr>
-        <p:spPr>
-          <a:xfrm>
-            <a:off x="3337560" y="7452360"/>
-            <a:ext cx="17922240" cy="548640"/>
-          </a:xfrm>
-          <a:prstGeom prst="rect">
-            <a:avLst/>
-          </a:prstGeom>
-          <a:noFill/>
-          <a:ln/>
-        </p:spPr>
-        <p:txBody>
-          <a:bodyPr wrap="square" lIns="0" tIns="0" rIns="0" bIns="0" rtlCol="0" anchor="t"/>
-          <a:lstStyle/>
-          <a:p>
-            <a:pPr marL="0" indent="0">
+            <a:pPr indent="0" marL="0">
               <a:lnSpc>
                 <a:spcPct val="118000"/>
               </a:lnSpc>
@@ -5987,7 +5616,7 @@
       </p:sp>
       <p:sp>
         <p:nvSpPr>
-          <p:cNvPr id="12" name="Text 8"/>
+          <p:cNvPr id="13" name="Text 6"/>
           <p:cNvSpPr txBox="1"/>
           <p:nvPr/>
         </p:nvSpPr>
@@ -6006,7 +5635,7 @@
           <a:bodyPr wrap="square" lIns="0" tIns="0" rIns="0" bIns="0" rtlCol="0" anchor="ctr"/>
           <a:lstStyle/>
           <a:p>
-            <a:pPr marL="0" indent="0">
+            <a:pPr indent="0" marL="0">
               <a:buNone/>
             </a:pPr>
             <a:r>
@@ -6034,15 +5663,14 @@
 </p:sld>
 </file>
 
-<file path=ppt/slides/slide14.xml><?xml version="1.0" encoding="utf-8"?>
+<file path=ppt/slides/slide13.xml><?xml version="1.0" encoding="utf-8"?>
 <p:sld xmlns:a="http://schemas.openxmlformats.org/drawingml/2006/main" xmlns:r="http://schemas.openxmlformats.org/officeDocument/2006/relationships" xmlns:p="http://schemas.openxmlformats.org/presentationml/2006/main">
   <p:cSld name="Slide 13">
     <p:bg>
       <p:bgPr>
         <a:solidFill>
-          <a:srgbClr val="EEEFF1"/>
+          <a:srgbClr val="0C0C0E"/>
         </a:solidFill>
-        <a:effectLst/>
       </p:bgPr>
     </p:bg>
     <p:spTree>
@@ -6061,7 +5689,156 @@
       </p:grpSpPr>
       <p:pic>
         <p:nvPicPr>
-          <p:cNvPr id="2" name="Image 0" descr="C:\Users\PCSTUD~1\AppData\Local\Temp\claude\C--Users-PC-Studio-2-Desktop-6498-Evals\7ce78c02-4c99-40d4-bc57-5394098065c6\scratchpad\art\logo.png"/>
+          <p:cNvPr id="2" name="Image 0" descr="art\malha.png">    </p:cNvPr>
+          <p:cNvPicPr>
+            <a:picLocks noChangeAspect="1"/>
+          </p:cNvPicPr>
+          <p:nvPr/>
+        </p:nvPicPr>
+        <p:blipFill>
+          <a:blip r:embed="rId1"/>
+          <a:stretch>
+            <a:fillRect/>
+          </a:stretch>
+        </p:blipFill>
+        <p:spPr>
+          <a:xfrm>
+            <a:off x="0" y="0"/>
+            <a:ext cx="24387048" cy="13716000"/>
+          </a:xfrm>
+          <a:prstGeom prst="rect">
+            <a:avLst/>
+          </a:prstGeom>
+        </p:spPr>
+      </p:pic>
+      <p:pic>
+        <p:nvPicPr>
+          <p:cNvPr id="3" name="Image 1" descr="art\logo.png">    </p:cNvPr>
+          <p:cNvPicPr>
+            <a:picLocks noChangeAspect="1"/>
+          </p:cNvPicPr>
+          <p:nvPr/>
+        </p:nvPicPr>
+        <p:blipFill>
+          <a:blip r:embed="rId2"/>
+          <a:stretch>
+            <a:fillRect/>
+          </a:stretch>
+        </p:blipFill>
+        <p:spPr>
+          <a:xfrm>
+            <a:off x="23436072" y="402336"/>
+            <a:ext cx="475488" cy="594360"/>
+          </a:xfrm>
+          <a:prstGeom prst="rect">
+            <a:avLst/>
+          </a:prstGeom>
+        </p:spPr>
+      </p:pic>
+      <p:sp>
+        <p:nvSpPr>
+          <p:cNvPr id="4" name="Text 0"/>
+          <p:cNvSpPr txBox="1"/>
+          <p:nvPr/>
+        </p:nvSpPr>
+        <p:spPr>
+          <a:xfrm>
+            <a:off x="2423160" y="1051560"/>
+            <a:ext cx="19540728" cy="594360"/>
+          </a:xfrm>
+          <a:prstGeom prst="rect">
+            <a:avLst/>
+          </a:prstGeom>
+          <a:noFill/>
+          <a:ln/>
+        </p:spPr>
+        <p:txBody>
+          <a:bodyPr wrap="square" lIns="0" tIns="0" rIns="0" bIns="0" rtlCol="0" anchor="ctr"/>
+          <a:lstStyle/>
+          <a:p>
+            <a:pPr indent="0" marL="0">
+              <a:buNone/>
+            </a:pPr>
+            <a:r>
+              <a:rPr lang="en-US" sz="2100" b="1" spc="250" kern="0" dirty="0">
+                <a:solidFill>
+                  <a:srgbClr val="1F53E5"/>
+                </a:solidFill>
+                <a:latin typeface="Encode Sans" pitchFamily="34" charset="0"/>
+                <a:ea typeface="Encode Sans" pitchFamily="34" charset="-122"/>
+                <a:cs typeface="Encode Sans" pitchFamily="34" charset="-120"/>
+              </a:rPr>
+              <a:t>VÍDEO 3.3 — AO VIVO</a:t>
+            </a:r>
+            <a:endParaRPr lang="en-US" sz="2100" dirty="0"/>
+          </a:p>
+        </p:txBody>
+      </p:sp>
+      <p:sp>
+        <p:nvSpPr>
+          <p:cNvPr id="5" name="Text 1"/>
+          <p:cNvSpPr txBox="1"/>
+          <p:nvPr/>
+        </p:nvSpPr>
+        <p:spPr>
+          <a:xfrm>
+            <a:off x="2423160" y="1783080"/>
+            <a:ext cx="19568160" cy="2377440"/>
+          </a:xfrm>
+          <a:prstGeom prst="rect">
+            <a:avLst/>
+          </a:prstGeom>
+          <a:noFill/>
+          <a:ln/>
+        </p:spPr>
+        <p:txBody>
+          <a:bodyPr wrap="square" lIns="0" tIns="0" rIns="0" bIns="0" rtlCol="0" anchor="t"/>
+          <a:lstStyle/>
+          <a:p>
+            <a:pPr indent="0" marL="0">
+              <a:lnSpc>
+                <a:spcPct val="105000"/>
+              </a:lnSpc>
+              <a:buNone/>
+            </a:pPr>
+            <a:r>
+              <a:rPr lang="en-US" sz="6600" dirty="0">
+                <a:solidFill>
+                  <a:srgbClr val="BDBFC7"/>
+                </a:solidFill>
+                <a:latin typeface="Encode Sans" pitchFamily="34" charset="0"/>
+                <a:ea typeface="Encode Sans" pitchFamily="34" charset="-122"/>
+                <a:cs typeface="Encode Sans" pitchFamily="34" charset="-120"/>
+              </a:rPr>
+              <a:t>Trocando o eixo, ao vivo</a:t>
+            </a:r>
+            <a:endParaRPr lang="en-US" sz="6600" dirty="0"/>
+          </a:p>
+        </p:txBody>
+      </p:sp>
+      <p:sp>
+        <p:nvSpPr>
+          <p:cNvPr id="6" name="Shape 2"/>
+          <p:cNvSpPr/>
+          <p:nvPr/>
+        </p:nvSpPr>
+        <p:spPr>
+          <a:xfrm>
+            <a:off x="2423160" y="4526280"/>
+            <a:ext cx="2011680" cy="68580"/>
+          </a:xfrm>
+          <a:prstGeom prst="rect">
+            <a:avLst/>
+          </a:prstGeom>
+          <a:solidFill>
+            <a:srgbClr val="1F53E5"/>
+          </a:solidFill>
+          <a:ln/>
+        </p:spPr>
+      </p:sp>
+      <p:pic>
+        <p:nvPicPr>
+          <p:cNvPr id="7" name="Image 2" descr="art\seta.png">    </p:cNvPr>
           <p:cNvPicPr>
             <a:picLocks noChangeAspect="1"/>
           </p:cNvPicPr>
@@ -6075,8 +5852,8 @@
         </p:blipFill>
         <p:spPr>
           <a:xfrm>
-            <a:off x="23436072" y="402336"/>
-            <a:ext cx="475488" cy="594360"/>
+            <a:off x="2423160" y="6871716"/>
+            <a:ext cx="475488" cy="411480"/>
           </a:xfrm>
           <a:prstGeom prst="rect">
             <a:avLst/>
@@ -6085,14 +5862,14 @@
       </p:pic>
       <p:sp>
         <p:nvSpPr>
-          <p:cNvPr id="3" name="Text 0"/>
+          <p:cNvPr id="8" name="Text 3"/>
           <p:cNvSpPr txBox="1"/>
           <p:nvPr/>
         </p:nvSpPr>
         <p:spPr>
           <a:xfrm>
-            <a:off x="2423160" y="2148840"/>
-            <a:ext cx="19540728" cy="594360"/>
+            <a:off x="3337560" y="6743700"/>
+            <a:ext cx="17922240" cy="548640"/>
           </a:xfrm>
           <a:prstGeom prst="rect">
             <a:avLst/>
@@ -6101,1001 +5878,165 @@
           <a:ln/>
         </p:spPr>
         <p:txBody>
-          <a:bodyPr wrap="square" lIns="0" tIns="0" rIns="0" bIns="0" rtlCol="0" anchor="ctr"/>
-          <a:lstStyle/>
-          <a:p>
-            <a:pPr marL="0" indent="0">
+          <a:bodyPr wrap="square" lIns="0" tIns="0" rIns="0" bIns="0" rtlCol="0" anchor="t"/>
+          <a:lstStyle/>
+          <a:p>
+            <a:pPr indent="0" marL="0">
+              <a:lnSpc>
+                <a:spcPct val="118000"/>
+              </a:lnSpc>
               <a:buNone/>
             </a:pPr>
             <a:r>
-              <a:rPr lang="en-US" sz="2100" b="1" kern="0" spc="250" dirty="0">
+              <a:rPr lang="en-US" sz="2800" dirty="0">
                 <a:solidFill>
-                  <a:srgbClr val="0429BC"/>
-                </a:solidFill>
-                <a:latin typeface="Encode Sans" pitchFamily="34" charset="0"/>
-                <a:ea typeface="Encode Sans" pitchFamily="34" charset="-122"/>
-                <a:cs typeface="Encode Sans" pitchFamily="34" charset="-120"/>
-              </a:rPr>
-              <a:t>VÍDEO 3.3 — COMPARAÇÃO</a:t>
-            </a:r>
-            <a:endParaRPr lang="en-US" sz="2100" dirty="0"/>
-          </a:p>
-        </p:txBody>
-      </p:sp>
-      <p:sp>
-        <p:nvSpPr>
-          <p:cNvPr id="4" name="Text 1"/>
-          <p:cNvSpPr txBox="1"/>
-          <p:nvPr/>
-        </p:nvSpPr>
-        <p:spPr>
-          <a:xfrm>
-            <a:off x="2423160" y="2880360"/>
-            <a:ext cx="18745200" cy="1463040"/>
-          </a:xfrm>
-          <a:prstGeom prst="rect">
-            <a:avLst/>
-          </a:prstGeom>
-          <a:noFill/>
-          <a:ln/>
-        </p:spPr>
-        <p:txBody>
-          <a:bodyPr wrap="square" lIns="0" tIns="0" rIns="0" bIns="0" rtlCol="0" anchor="t"/>
-          <a:lstStyle/>
-          <a:p>
-            <a:pPr marL="0" indent="0">
-              <a:buNone/>
-            </a:pPr>
-            <a:r>
-              <a:rPr lang="en-US" sz="6400" dirty="0">
-                <a:solidFill>
-                  <a:srgbClr val="0C0C0E"/>
-                </a:solidFill>
-                <a:latin typeface="Encode Sans" pitchFamily="34" charset="0"/>
-                <a:ea typeface="Encode Sans" pitchFamily="34" charset="-122"/>
-                <a:cs typeface="Encode Sans" pitchFamily="34" charset="-120"/>
-              </a:rPr>
-              <a:t>Mesma tarefa, dois modelos</a:t>
-            </a:r>
-            <a:endParaRPr lang="en-US" sz="6400" dirty="0"/>
-          </a:p>
-        </p:txBody>
-      </p:sp>
-      <p:graphicFrame>
-        <p:nvGraphicFramePr>
-          <p:cNvPr id="14" name="Table 0"/>
-          <p:cNvGraphicFramePr>
-            <a:graphicFrameLocks noGrp="1"/>
-          </p:cNvGraphicFramePr>
-          <p:nvPr>
-            <p:extLst>
-              <p:ext uri="{D42A27DB-BD31-4B8C-83A1-F6EECF244321}">
-                <p14:modId xmlns:p14="http://schemas.microsoft.com/office/powerpoint/2010/main" val="1579011935"/>
-              </p:ext>
-            </p:extLst>
-          </p:nvPr>
-        </p:nvGraphicFramePr>
-        <p:xfrm>
-          <a:off x="2423160" y="5029200"/>
-          <a:ext cx="19540728" cy="914400"/>
-        </p:xfrm>
-        <a:graphic>
-          <a:graphicData uri="http://schemas.openxmlformats.org/drawingml/2006/table">
-            <a:tbl>
-              <a:tblPr/>
-              <a:tblGrid>
-                <a:gridCol w="6766560">
-                  <a:extLst>
-                    <a:ext uri="{9D8B030D-6E8A-4147-A177-3AD203B41FA5}">
-                      <a16:colId xmlns:a16="http://schemas.microsoft.com/office/drawing/2014/main" val="20000"/>
-                    </a:ext>
-                  </a:extLst>
-                </a:gridCol>
-                <a:gridCol w="4206240">
-                  <a:extLst>
-                    <a:ext uri="{9D8B030D-6E8A-4147-A177-3AD203B41FA5}">
-                      <a16:colId xmlns:a16="http://schemas.microsoft.com/office/drawing/2014/main" val="20001"/>
-                    </a:ext>
-                  </a:extLst>
-                </a:gridCol>
-                <a:gridCol w="4480560">
-                  <a:extLst>
-                    <a:ext uri="{9D8B030D-6E8A-4147-A177-3AD203B41FA5}">
-                      <a16:colId xmlns:a16="http://schemas.microsoft.com/office/drawing/2014/main" val="20002"/>
-                    </a:ext>
-                  </a:extLst>
-                </a:gridCol>
-                <a:gridCol w="4114800">
-                  <a:extLst>
-                    <a:ext uri="{9D8B030D-6E8A-4147-A177-3AD203B41FA5}">
-                      <a16:colId xmlns:a16="http://schemas.microsoft.com/office/drawing/2014/main" val="20003"/>
-                    </a:ext>
-                  </a:extLst>
-                </a:gridCol>
-              </a:tblGrid>
-              <a:tr h="777240">
-                <a:tc>
-                  <a:txBody>
-                    <a:bodyPr/>
-                    <a:lstStyle/>
-                    <a:p>
-                      <a:pPr marL="0" indent="0" algn="l">
-                        <a:buNone/>
-                      </a:pPr>
-                      <a:r>
-                        <a:rPr lang="en-US" sz="2200" b="1" dirty="0">
-                          <a:solidFill>
-                            <a:srgbClr val="F4F5F6"/>
-                          </a:solidFill>
-                          <a:latin typeface="Roboto" pitchFamily="34" charset="0"/>
-                          <a:ea typeface="Roboto" pitchFamily="34" charset="-122"/>
-                          <a:cs typeface="Roboto" pitchFamily="34" charset="-120"/>
-                        </a:rPr>
-                        <a:t>Modelo</a:t>
-                      </a:r>
-                      <a:endParaRPr lang="en-US" sz="2200" dirty="0">
-                        <a:latin typeface="Roboto" charset="0"/>
-                        <a:ea typeface="Roboto" charset="0"/>
-                        <a:cs typeface="Roboto" charset="0"/>
-                      </a:endParaRPr>
-                    </a:p>
-                  </a:txBody>
-                  <a:tcPr anchor="ctr">
-                    <a:lnL w="9525" cap="flat" cmpd="sng" algn="ctr">
-                      <a:solidFill>
-                        <a:srgbClr val="D8DCEA"/>
-                      </a:solidFill>
-                      <a:prstDash val="solid"/>
-                      <a:round/>
-                      <a:headEnd type="none" w="med" len="med"/>
-                      <a:tailEnd type="none" w="med" len="med"/>
-                    </a:lnL>
-                    <a:lnR w="9525" cap="flat" cmpd="sng" algn="ctr">
-                      <a:solidFill>
-                        <a:srgbClr val="D8DCEA"/>
-                      </a:solidFill>
-                      <a:prstDash val="solid"/>
-                      <a:round/>
-                      <a:headEnd type="none" w="med" len="med"/>
-                      <a:tailEnd type="none" w="med" len="med"/>
-                    </a:lnR>
-                    <a:lnT w="9525" cap="flat" cmpd="sng" algn="ctr">
-                      <a:solidFill>
-                        <a:srgbClr val="D8DCEA"/>
-                      </a:solidFill>
-                      <a:prstDash val="solid"/>
-                      <a:round/>
-                      <a:headEnd type="none" w="med" len="med"/>
-                      <a:tailEnd type="none" w="med" len="med"/>
-                    </a:lnT>
-                    <a:lnB w="9525" cap="flat" cmpd="sng" algn="ctr">
-                      <a:solidFill>
-                        <a:srgbClr val="D8DCEA"/>
-                      </a:solidFill>
-                      <a:prstDash val="solid"/>
-                      <a:round/>
-                      <a:headEnd type="none" w="med" len="med"/>
-                      <a:tailEnd type="none" w="med" len="med"/>
-                    </a:lnB>
-                    <a:solidFill>
-                      <a:srgbClr val="010C53"/>
-                    </a:solidFill>
-                  </a:tcPr>
-                </a:tc>
-                <a:tc>
-                  <a:txBody>
-                    <a:bodyPr/>
-                    <a:lstStyle/>
-                    <a:p>
-                      <a:pPr marL="0" indent="0" algn="l">
-                        <a:buNone/>
-                      </a:pPr>
-                      <a:r>
-                        <a:rPr lang="en-US" sz="2200" b="1" dirty="0">
-                          <a:solidFill>
-                            <a:srgbClr val="F4F5F6"/>
-                          </a:solidFill>
-                          <a:latin typeface="Roboto" pitchFamily="34" charset="0"/>
-                          <a:ea typeface="Roboto" pitchFamily="34" charset="-122"/>
-                          <a:cs typeface="Roboto" pitchFamily="34" charset="-120"/>
-                        </a:rPr>
-                        <a:t>quantas vezes</a:t>
-                      </a:r>
-                      <a:endParaRPr lang="en-US" sz="2200" dirty="0">
-                        <a:latin typeface="Roboto" charset="0"/>
-                        <a:ea typeface="Roboto" charset="0"/>
-                        <a:cs typeface="Roboto" charset="0"/>
-                      </a:endParaRPr>
-                    </a:p>
-                  </a:txBody>
-                  <a:tcPr anchor="ctr">
-                    <a:lnL w="9525" cap="flat" cmpd="sng" algn="ctr">
-                      <a:solidFill>
-                        <a:srgbClr val="D8DCEA"/>
-                      </a:solidFill>
-                      <a:prstDash val="solid"/>
-                      <a:round/>
-                      <a:headEnd type="none" w="med" len="med"/>
-                      <a:tailEnd type="none" w="med" len="med"/>
-                    </a:lnL>
-                    <a:lnR w="9525" cap="flat" cmpd="sng" algn="ctr">
-                      <a:solidFill>
-                        <a:srgbClr val="D8DCEA"/>
-                      </a:solidFill>
-                      <a:prstDash val="solid"/>
-                      <a:round/>
-                      <a:headEnd type="none" w="med" len="med"/>
-                      <a:tailEnd type="none" w="med" len="med"/>
-                    </a:lnR>
-                    <a:lnT w="9525" cap="flat" cmpd="sng" algn="ctr">
-                      <a:solidFill>
-                        <a:srgbClr val="D8DCEA"/>
-                      </a:solidFill>
-                      <a:prstDash val="solid"/>
-                      <a:round/>
-                      <a:headEnd type="none" w="med" len="med"/>
-                      <a:tailEnd type="none" w="med" len="med"/>
-                    </a:lnT>
-                    <a:lnB w="9525" cap="flat" cmpd="sng" algn="ctr">
-                      <a:solidFill>
-                        <a:srgbClr val="D8DCEA"/>
-                      </a:solidFill>
-                      <a:prstDash val="solid"/>
-                      <a:round/>
-                      <a:headEnd type="none" w="med" len="med"/>
-                      <a:tailEnd type="none" w="med" len="med"/>
-                    </a:lnB>
-                    <a:solidFill>
-                      <a:srgbClr val="010C53"/>
-                    </a:solidFill>
-                  </a:tcPr>
-                </a:tc>
-                <a:tc>
-                  <a:txBody>
-                    <a:bodyPr/>
-                    <a:lstStyle/>
-                    <a:p>
-                      <a:pPr marL="0" indent="0" algn="l">
-                        <a:buNone/>
-                      </a:pPr>
-                      <a:r>
-                        <a:rPr lang="en-US" sz="2200" b="1" dirty="0">
-                          <a:solidFill>
-                            <a:srgbClr val="F4F5F6"/>
-                          </a:solidFill>
-                          <a:latin typeface="Roboto" pitchFamily="34" charset="0"/>
-                          <a:ea typeface="Roboto" pitchFamily="34" charset="-122"/>
-                          <a:cs typeface="Roboto" pitchFamily="34" charset="-120"/>
-                        </a:rPr>
-                        <a:t>custo por vez</a:t>
-                      </a:r>
-                      <a:endParaRPr lang="en-US" sz="2200" dirty="0">
-                        <a:latin typeface="Roboto" charset="0"/>
-                        <a:ea typeface="Roboto" charset="0"/>
-                        <a:cs typeface="Roboto" charset="0"/>
-                      </a:endParaRPr>
-                    </a:p>
-                  </a:txBody>
-                  <a:tcPr anchor="ctr">
-                    <a:lnL w="9525" cap="flat" cmpd="sng" algn="ctr">
-                      <a:solidFill>
-                        <a:srgbClr val="D8DCEA"/>
-                      </a:solidFill>
-                      <a:prstDash val="solid"/>
-                      <a:round/>
-                      <a:headEnd type="none" w="med" len="med"/>
-                      <a:tailEnd type="none" w="med" len="med"/>
-                    </a:lnL>
-                    <a:lnR w="9525" cap="flat" cmpd="sng" algn="ctr">
-                      <a:solidFill>
-                        <a:srgbClr val="D8DCEA"/>
-                      </a:solidFill>
-                      <a:prstDash val="solid"/>
-                      <a:round/>
-                      <a:headEnd type="none" w="med" len="med"/>
-                      <a:tailEnd type="none" w="med" len="med"/>
-                    </a:lnR>
-                    <a:lnT w="9525" cap="flat" cmpd="sng" algn="ctr">
-                      <a:solidFill>
-                        <a:srgbClr val="D8DCEA"/>
-                      </a:solidFill>
-                      <a:prstDash val="solid"/>
-                      <a:round/>
-                      <a:headEnd type="none" w="med" len="med"/>
-                      <a:tailEnd type="none" w="med" len="med"/>
-                    </a:lnT>
-                    <a:lnB w="9525" cap="flat" cmpd="sng" algn="ctr">
-                      <a:solidFill>
-                        <a:srgbClr val="D8DCEA"/>
-                      </a:solidFill>
-                      <a:prstDash val="solid"/>
-                      <a:round/>
-                      <a:headEnd type="none" w="med" len="med"/>
-                      <a:tailEnd type="none" w="med" len="med"/>
-                    </a:lnB>
-                    <a:solidFill>
-                      <a:srgbClr val="010C53"/>
-                    </a:solidFill>
-                  </a:tcPr>
-                </a:tc>
-                <a:tc>
-                  <a:txBody>
-                    <a:bodyPr/>
-                    <a:lstStyle/>
-                    <a:p>
-                      <a:pPr marL="0" indent="0" algn="l">
-                        <a:buNone/>
-                      </a:pPr>
-                      <a:r>
-                        <a:rPr lang="en-US" sz="2200" b="1" dirty="0">
-                          <a:solidFill>
-                            <a:srgbClr val="F4F5F6"/>
-                          </a:solidFill>
-                          <a:latin typeface="Roboto" pitchFamily="34" charset="0"/>
-                          <a:ea typeface="Roboto" pitchFamily="34" charset="-122"/>
-                          <a:cs typeface="Roboto" pitchFamily="34" charset="-120"/>
-                        </a:rPr>
-                        <a:t>demora</a:t>
-                      </a:r>
-                      <a:endParaRPr lang="en-US" sz="2200" dirty="0">
-                        <a:latin typeface="Roboto" charset="0"/>
-                        <a:ea typeface="Roboto" charset="0"/>
-                        <a:cs typeface="Roboto" charset="0"/>
-                      </a:endParaRPr>
-                    </a:p>
-                  </a:txBody>
-                  <a:tcPr anchor="ctr">
-                    <a:lnL w="9525" cap="flat" cmpd="sng" algn="ctr">
-                      <a:solidFill>
-                        <a:srgbClr val="D8DCEA"/>
-                      </a:solidFill>
-                      <a:prstDash val="solid"/>
-                      <a:round/>
-                      <a:headEnd type="none" w="med" len="med"/>
-                      <a:tailEnd type="none" w="med" len="med"/>
-                    </a:lnL>
-                    <a:lnR w="9525" cap="flat" cmpd="sng" algn="ctr">
-                      <a:solidFill>
-                        <a:srgbClr val="D8DCEA"/>
-                      </a:solidFill>
-                      <a:prstDash val="solid"/>
-                      <a:round/>
-                      <a:headEnd type="none" w="med" len="med"/>
-                      <a:tailEnd type="none" w="med" len="med"/>
-                    </a:lnR>
-                    <a:lnT w="9525" cap="flat" cmpd="sng" algn="ctr">
-                      <a:solidFill>
-                        <a:srgbClr val="D8DCEA"/>
-                      </a:solidFill>
-                      <a:prstDash val="solid"/>
-                      <a:round/>
-                      <a:headEnd type="none" w="med" len="med"/>
-                      <a:tailEnd type="none" w="med" len="med"/>
-                    </a:lnT>
-                    <a:lnB w="9525" cap="flat" cmpd="sng" algn="ctr">
-                      <a:solidFill>
-                        <a:srgbClr val="D8DCEA"/>
-                      </a:solidFill>
-                      <a:prstDash val="solid"/>
-                      <a:round/>
-                      <a:headEnd type="none" w="med" len="med"/>
-                      <a:tailEnd type="none" w="med" len="med"/>
-                    </a:lnB>
-                    <a:solidFill>
-                      <a:srgbClr val="010C53"/>
-                    </a:solidFill>
-                  </a:tcPr>
-                </a:tc>
-                <a:extLst>
-                  <a:ext uri="{0D108BD9-81ED-4DB2-BD59-A6C34878D82A}">
-                    <a16:rowId xmlns:a16="http://schemas.microsoft.com/office/drawing/2014/main" val="10000"/>
-                  </a:ext>
-                </a:extLst>
-              </a:tr>
-              <a:tr h="777240">
-                <a:tc>
-                  <a:txBody>
-                    <a:bodyPr/>
-                    <a:lstStyle/>
-                    <a:p>
-                      <a:pPr marL="0" indent="0" algn="l">
-                        <a:buNone/>
-                      </a:pPr>
-                      <a:r>
-                        <a:rPr lang="en-US" sz="2200" dirty="0">
-                          <a:solidFill>
-                            <a:srgbClr val="2B2F3A"/>
-                          </a:solidFill>
-                          <a:latin typeface="Roboto" pitchFamily="34" charset="0"/>
-                          <a:ea typeface="Roboto" pitchFamily="34" charset="-122"/>
-                          <a:cs typeface="Roboto" pitchFamily="34" charset="-120"/>
-                        </a:rPr>
-                        <a:t>Haiku (mais barato)</a:t>
-                      </a:r>
-                      <a:endParaRPr lang="en-US" sz="2200" dirty="0">
-                        <a:latin typeface="Roboto" charset="0"/>
-                        <a:ea typeface="Roboto" charset="0"/>
-                        <a:cs typeface="Roboto" charset="0"/>
-                      </a:endParaRPr>
-                    </a:p>
-                  </a:txBody>
-                  <a:tcPr anchor="ctr">
-                    <a:lnL w="9525" cap="flat" cmpd="sng" algn="ctr">
-                      <a:solidFill>
-                        <a:srgbClr val="D8DCEA"/>
-                      </a:solidFill>
-                      <a:prstDash val="solid"/>
-                      <a:round/>
-                      <a:headEnd type="none" w="med" len="med"/>
-                      <a:tailEnd type="none" w="med" len="med"/>
-                    </a:lnL>
-                    <a:lnR w="9525" cap="flat" cmpd="sng" algn="ctr">
-                      <a:solidFill>
-                        <a:srgbClr val="D8DCEA"/>
-                      </a:solidFill>
-                      <a:prstDash val="solid"/>
-                      <a:round/>
-                      <a:headEnd type="none" w="med" len="med"/>
-                      <a:tailEnd type="none" w="med" len="med"/>
-                    </a:lnR>
-                    <a:lnT w="9525" cap="flat" cmpd="sng" algn="ctr">
-                      <a:solidFill>
-                        <a:srgbClr val="D8DCEA"/>
-                      </a:solidFill>
-                      <a:prstDash val="solid"/>
-                      <a:round/>
-                      <a:headEnd type="none" w="med" len="med"/>
-                      <a:tailEnd type="none" w="med" len="med"/>
-                    </a:lnT>
-                    <a:lnB w="9525" cap="flat" cmpd="sng" algn="ctr">
-                      <a:solidFill>
-                        <a:srgbClr val="D8DCEA"/>
-                      </a:solidFill>
-                      <a:prstDash val="solid"/>
-                      <a:round/>
-                      <a:headEnd type="none" w="med" len="med"/>
-                      <a:tailEnd type="none" w="med" len="med"/>
-                    </a:lnB>
-                    <a:solidFill>
-                      <a:srgbClr val="FFFFFF"/>
-                    </a:solidFill>
-                  </a:tcPr>
-                </a:tc>
-                <a:tc>
-                  <a:txBody>
-                    <a:bodyPr/>
-                    <a:lstStyle/>
-                    <a:p>
-                      <a:pPr marL="0" indent="0" algn="l">
-                        <a:buNone/>
-                      </a:pPr>
-                      <a:r>
-                        <a:rPr lang="en-US" sz="2200" dirty="0">
-                          <a:solidFill>
-                            <a:srgbClr val="2B2F3A"/>
-                          </a:solidFill>
-                          <a:latin typeface="Roboto" pitchFamily="34" charset="0"/>
-                          <a:ea typeface="Roboto" pitchFamily="34" charset="-122"/>
-                          <a:cs typeface="Roboto" pitchFamily="34" charset="-120"/>
-                        </a:rPr>
-                        <a:t>6</a:t>
-                      </a:r>
-                      <a:endParaRPr lang="en-US" sz="2200" dirty="0">
-                        <a:latin typeface="Roboto" charset="0"/>
-                        <a:ea typeface="Roboto" charset="0"/>
-                        <a:cs typeface="Roboto" charset="0"/>
-                      </a:endParaRPr>
-                    </a:p>
-                  </a:txBody>
-                  <a:tcPr anchor="ctr">
-                    <a:lnL w="9525" cap="flat" cmpd="sng" algn="ctr">
-                      <a:solidFill>
-                        <a:srgbClr val="D8DCEA"/>
-                      </a:solidFill>
-                      <a:prstDash val="solid"/>
-                      <a:round/>
-                      <a:headEnd type="none" w="med" len="med"/>
-                      <a:tailEnd type="none" w="med" len="med"/>
-                    </a:lnL>
-                    <a:lnR w="9525" cap="flat" cmpd="sng" algn="ctr">
-                      <a:solidFill>
-                        <a:srgbClr val="D8DCEA"/>
-                      </a:solidFill>
-                      <a:prstDash val="solid"/>
-                      <a:round/>
-                      <a:headEnd type="none" w="med" len="med"/>
-                      <a:tailEnd type="none" w="med" len="med"/>
-                    </a:lnR>
-                    <a:lnT w="9525" cap="flat" cmpd="sng" algn="ctr">
-                      <a:solidFill>
-                        <a:srgbClr val="D8DCEA"/>
-                      </a:solidFill>
-                      <a:prstDash val="solid"/>
-                      <a:round/>
-                      <a:headEnd type="none" w="med" len="med"/>
-                      <a:tailEnd type="none" w="med" len="med"/>
-                    </a:lnT>
-                    <a:lnB w="9525" cap="flat" cmpd="sng" algn="ctr">
-                      <a:solidFill>
-                        <a:srgbClr val="D8DCEA"/>
-                      </a:solidFill>
-                      <a:prstDash val="solid"/>
-                      <a:round/>
-                      <a:headEnd type="none" w="med" len="med"/>
-                      <a:tailEnd type="none" w="med" len="med"/>
-                    </a:lnB>
-                    <a:solidFill>
-                      <a:srgbClr val="FFFFFF"/>
-                    </a:solidFill>
-                  </a:tcPr>
-                </a:tc>
-                <a:tc>
-                  <a:txBody>
-                    <a:bodyPr/>
-                    <a:lstStyle/>
-                    <a:p>
-                      <a:pPr marL="0" indent="0" algn="l">
-                        <a:buNone/>
-                      </a:pPr>
-                      <a:r>
-                        <a:rPr lang="en-US" sz="2200" dirty="0">
-                          <a:solidFill>
-                            <a:srgbClr val="2B2F3A"/>
-                          </a:solidFill>
-                          <a:latin typeface="Roboto" pitchFamily="34" charset="0"/>
-                          <a:ea typeface="Roboto" pitchFamily="34" charset="-122"/>
-                          <a:cs typeface="Roboto" pitchFamily="34" charset="-120"/>
-                        </a:rPr>
-                        <a:t>US$ 0,00293</a:t>
-                      </a:r>
-                      <a:endParaRPr lang="en-US" sz="2200" dirty="0">
-                        <a:latin typeface="Roboto" charset="0"/>
-                        <a:ea typeface="Roboto" charset="0"/>
-                        <a:cs typeface="Roboto" charset="0"/>
-                      </a:endParaRPr>
-                    </a:p>
-                  </a:txBody>
-                  <a:tcPr anchor="ctr">
-                    <a:lnL w="9525" cap="flat" cmpd="sng" algn="ctr">
-                      <a:solidFill>
-                        <a:srgbClr val="D8DCEA"/>
-                      </a:solidFill>
-                      <a:prstDash val="solid"/>
-                      <a:round/>
-                      <a:headEnd type="none" w="med" len="med"/>
-                      <a:tailEnd type="none" w="med" len="med"/>
-                    </a:lnL>
-                    <a:lnR w="9525" cap="flat" cmpd="sng" algn="ctr">
-                      <a:solidFill>
-                        <a:srgbClr val="D8DCEA"/>
-                      </a:solidFill>
-                      <a:prstDash val="solid"/>
-                      <a:round/>
-                      <a:headEnd type="none" w="med" len="med"/>
-                      <a:tailEnd type="none" w="med" len="med"/>
-                    </a:lnR>
-                    <a:lnT w="9525" cap="flat" cmpd="sng" algn="ctr">
-                      <a:solidFill>
-                        <a:srgbClr val="D8DCEA"/>
-                      </a:solidFill>
-                      <a:prstDash val="solid"/>
-                      <a:round/>
-                      <a:headEnd type="none" w="med" len="med"/>
-                      <a:tailEnd type="none" w="med" len="med"/>
-                    </a:lnT>
-                    <a:lnB w="9525" cap="flat" cmpd="sng" algn="ctr">
-                      <a:solidFill>
-                        <a:srgbClr val="D8DCEA"/>
-                      </a:solidFill>
-                      <a:prstDash val="solid"/>
-                      <a:round/>
-                      <a:headEnd type="none" w="med" len="med"/>
-                      <a:tailEnd type="none" w="med" len="med"/>
-                    </a:lnB>
-                    <a:solidFill>
-                      <a:srgbClr val="FFFFFF"/>
-                    </a:solidFill>
-                  </a:tcPr>
-                </a:tc>
-                <a:tc>
-                  <a:txBody>
-                    <a:bodyPr/>
-                    <a:lstStyle/>
-                    <a:p>
-                      <a:pPr marL="0" indent="0" algn="l">
-                        <a:buNone/>
-                      </a:pPr>
-                      <a:r>
-                        <a:rPr lang="en-US" sz="2200" dirty="0">
-                          <a:solidFill>
-                            <a:srgbClr val="2B2F3A"/>
-                          </a:solidFill>
-                          <a:latin typeface="Roboto" pitchFamily="34" charset="0"/>
-                          <a:ea typeface="Roboto" pitchFamily="34" charset="-122"/>
-                          <a:cs typeface="Roboto" pitchFamily="34" charset="-120"/>
-                        </a:rPr>
-                        <a:t>1,17 s</a:t>
-                      </a:r>
-                      <a:endParaRPr lang="en-US" sz="2200" dirty="0">
-                        <a:latin typeface="Roboto" charset="0"/>
-                        <a:ea typeface="Roboto" charset="0"/>
-                        <a:cs typeface="Roboto" charset="0"/>
-                      </a:endParaRPr>
-                    </a:p>
-                  </a:txBody>
-                  <a:tcPr anchor="ctr">
-                    <a:lnL w="9525" cap="flat" cmpd="sng" algn="ctr">
-                      <a:solidFill>
-                        <a:srgbClr val="D8DCEA"/>
-                      </a:solidFill>
-                      <a:prstDash val="solid"/>
-                      <a:round/>
-                      <a:headEnd type="none" w="med" len="med"/>
-                      <a:tailEnd type="none" w="med" len="med"/>
-                    </a:lnL>
-                    <a:lnR w="9525" cap="flat" cmpd="sng" algn="ctr">
-                      <a:solidFill>
-                        <a:srgbClr val="D8DCEA"/>
-                      </a:solidFill>
-                      <a:prstDash val="solid"/>
-                      <a:round/>
-                      <a:headEnd type="none" w="med" len="med"/>
-                      <a:tailEnd type="none" w="med" len="med"/>
-                    </a:lnR>
-                    <a:lnT w="9525" cap="flat" cmpd="sng" algn="ctr">
-                      <a:solidFill>
-                        <a:srgbClr val="D8DCEA"/>
-                      </a:solidFill>
-                      <a:prstDash val="solid"/>
-                      <a:round/>
-                      <a:headEnd type="none" w="med" len="med"/>
-                      <a:tailEnd type="none" w="med" len="med"/>
-                    </a:lnT>
-                    <a:lnB w="9525" cap="flat" cmpd="sng" algn="ctr">
-                      <a:solidFill>
-                        <a:srgbClr val="D8DCEA"/>
-                      </a:solidFill>
-                      <a:prstDash val="solid"/>
-                      <a:round/>
-                      <a:headEnd type="none" w="med" len="med"/>
-                      <a:tailEnd type="none" w="med" len="med"/>
-                    </a:lnB>
-                    <a:solidFill>
-                      <a:srgbClr val="FFFFFF"/>
-                    </a:solidFill>
-                  </a:tcPr>
-                </a:tc>
-                <a:extLst>
-                  <a:ext uri="{0D108BD9-81ED-4DB2-BD59-A6C34878D82A}">
-                    <a16:rowId xmlns:a16="http://schemas.microsoft.com/office/drawing/2014/main" val="10001"/>
-                  </a:ext>
-                </a:extLst>
-              </a:tr>
-              <a:tr h="777240">
-                <a:tc>
-                  <a:txBody>
-                    <a:bodyPr/>
-                    <a:lstStyle/>
-                    <a:p>
-                      <a:pPr marL="0" indent="0" algn="l">
-                        <a:buNone/>
-                      </a:pPr>
-                      <a:r>
-                        <a:rPr lang="en-US" sz="2200" dirty="0">
-                          <a:solidFill>
-                            <a:srgbClr val="2B2F3A"/>
-                          </a:solidFill>
-                          <a:latin typeface="Roboto" pitchFamily="34" charset="0"/>
-                          <a:ea typeface="Roboto" pitchFamily="34" charset="-122"/>
-                          <a:cs typeface="Roboto" pitchFamily="34" charset="-120"/>
-                        </a:rPr>
-                        <a:t>Sonnet (mais caro)</a:t>
-                      </a:r>
-                      <a:endParaRPr lang="en-US" sz="2200" dirty="0">
-                        <a:latin typeface="Roboto" charset="0"/>
-                        <a:ea typeface="Roboto" charset="0"/>
-                        <a:cs typeface="Roboto" charset="0"/>
-                      </a:endParaRPr>
-                    </a:p>
-                  </a:txBody>
-                  <a:tcPr anchor="ctr">
-                    <a:lnL w="9525" cap="flat" cmpd="sng" algn="ctr">
-                      <a:solidFill>
-                        <a:srgbClr val="D8DCEA"/>
-                      </a:solidFill>
-                      <a:prstDash val="solid"/>
-                      <a:round/>
-                      <a:headEnd type="none" w="med" len="med"/>
-                      <a:tailEnd type="none" w="med" len="med"/>
-                    </a:lnL>
-                    <a:lnR w="9525" cap="flat" cmpd="sng" algn="ctr">
-                      <a:solidFill>
-                        <a:srgbClr val="D8DCEA"/>
-                      </a:solidFill>
-                      <a:prstDash val="solid"/>
-                      <a:round/>
-                      <a:headEnd type="none" w="med" len="med"/>
-                      <a:tailEnd type="none" w="med" len="med"/>
-                    </a:lnR>
-                    <a:lnT w="9525" cap="flat" cmpd="sng" algn="ctr">
-                      <a:solidFill>
-                        <a:srgbClr val="D8DCEA"/>
-                      </a:solidFill>
-                      <a:prstDash val="solid"/>
-                      <a:round/>
-                      <a:headEnd type="none" w="med" len="med"/>
-                      <a:tailEnd type="none" w="med" len="med"/>
-                    </a:lnT>
-                    <a:lnB w="9525" cap="flat" cmpd="sng" algn="ctr">
-                      <a:solidFill>
-                        <a:srgbClr val="D8DCEA"/>
-                      </a:solidFill>
-                      <a:prstDash val="solid"/>
-                      <a:round/>
-                      <a:headEnd type="none" w="med" len="med"/>
-                      <a:tailEnd type="none" w="med" len="med"/>
-                    </a:lnB>
-                    <a:solidFill>
-                      <a:srgbClr val="F7F8FA"/>
-                    </a:solidFill>
-                  </a:tcPr>
-                </a:tc>
-                <a:tc>
-                  <a:txBody>
-                    <a:bodyPr/>
-                    <a:lstStyle/>
-                    <a:p>
-                      <a:pPr marL="0" indent="0" algn="l">
-                        <a:buNone/>
-                      </a:pPr>
-                      <a:r>
-                        <a:rPr lang="en-US" sz="2200" dirty="0">
-                          <a:solidFill>
-                            <a:srgbClr val="2B2F3A"/>
-                          </a:solidFill>
-                          <a:latin typeface="Roboto" pitchFamily="34" charset="0"/>
-                          <a:ea typeface="Roboto" pitchFamily="34" charset="-122"/>
-                          <a:cs typeface="Roboto" pitchFamily="34" charset="-120"/>
-                        </a:rPr>
-                        <a:t>24</a:t>
-                      </a:r>
-                      <a:endParaRPr lang="en-US" sz="2200" dirty="0">
-                        <a:latin typeface="Roboto" charset="0"/>
-                        <a:ea typeface="Roboto" charset="0"/>
-                        <a:cs typeface="Roboto" charset="0"/>
-                      </a:endParaRPr>
-                    </a:p>
-                  </a:txBody>
-                  <a:tcPr anchor="ctr">
-                    <a:lnL w="9525" cap="flat" cmpd="sng" algn="ctr">
-                      <a:solidFill>
-                        <a:srgbClr val="D8DCEA"/>
-                      </a:solidFill>
-                      <a:prstDash val="solid"/>
-                      <a:round/>
-                      <a:headEnd type="none" w="med" len="med"/>
-                      <a:tailEnd type="none" w="med" len="med"/>
-                    </a:lnL>
-                    <a:lnR w="9525" cap="flat" cmpd="sng" algn="ctr">
-                      <a:solidFill>
-                        <a:srgbClr val="D8DCEA"/>
-                      </a:solidFill>
-                      <a:prstDash val="solid"/>
-                      <a:round/>
-                      <a:headEnd type="none" w="med" len="med"/>
-                      <a:tailEnd type="none" w="med" len="med"/>
-                    </a:lnR>
-                    <a:lnT w="9525" cap="flat" cmpd="sng" algn="ctr">
-                      <a:solidFill>
-                        <a:srgbClr val="D8DCEA"/>
-                      </a:solidFill>
-                      <a:prstDash val="solid"/>
-                      <a:round/>
-                      <a:headEnd type="none" w="med" len="med"/>
-                      <a:tailEnd type="none" w="med" len="med"/>
-                    </a:lnT>
-                    <a:lnB w="9525" cap="flat" cmpd="sng" algn="ctr">
-                      <a:solidFill>
-                        <a:srgbClr val="D8DCEA"/>
-                      </a:solidFill>
-                      <a:prstDash val="solid"/>
-                      <a:round/>
-                      <a:headEnd type="none" w="med" len="med"/>
-                      <a:tailEnd type="none" w="med" len="med"/>
-                    </a:lnB>
-                    <a:solidFill>
-                      <a:srgbClr val="F7F8FA"/>
-                    </a:solidFill>
-                  </a:tcPr>
-                </a:tc>
-                <a:tc>
-                  <a:txBody>
-                    <a:bodyPr/>
-                    <a:lstStyle/>
-                    <a:p>
-                      <a:pPr marL="0" indent="0" algn="l">
-                        <a:buNone/>
-                      </a:pPr>
-                      <a:r>
-                        <a:rPr lang="en-US" sz="2200" dirty="0">
-                          <a:solidFill>
-                            <a:srgbClr val="2B2F3A"/>
-                          </a:solidFill>
-                          <a:latin typeface="Roboto" pitchFamily="34" charset="0"/>
-                          <a:ea typeface="Roboto" pitchFamily="34" charset="-122"/>
-                          <a:cs typeface="Roboto" pitchFamily="34" charset="-120"/>
-                        </a:rPr>
-                        <a:t>US$ 0,00563</a:t>
-                      </a:r>
-                      <a:endParaRPr lang="en-US" sz="2200" dirty="0">
-                        <a:latin typeface="Roboto" charset="0"/>
-                        <a:ea typeface="Roboto" charset="0"/>
-                        <a:cs typeface="Roboto" charset="0"/>
-                      </a:endParaRPr>
-                    </a:p>
-                  </a:txBody>
-                  <a:tcPr anchor="ctr">
-                    <a:lnL w="9525" cap="flat" cmpd="sng" algn="ctr">
-                      <a:solidFill>
-                        <a:srgbClr val="D8DCEA"/>
-                      </a:solidFill>
-                      <a:prstDash val="solid"/>
-                      <a:round/>
-                      <a:headEnd type="none" w="med" len="med"/>
-                      <a:tailEnd type="none" w="med" len="med"/>
-                    </a:lnL>
-                    <a:lnR w="9525" cap="flat" cmpd="sng" algn="ctr">
-                      <a:solidFill>
-                        <a:srgbClr val="D8DCEA"/>
-                      </a:solidFill>
-                      <a:prstDash val="solid"/>
-                      <a:round/>
-                      <a:headEnd type="none" w="med" len="med"/>
-                      <a:tailEnd type="none" w="med" len="med"/>
-                    </a:lnR>
-                    <a:lnT w="9525" cap="flat" cmpd="sng" algn="ctr">
-                      <a:solidFill>
-                        <a:srgbClr val="D8DCEA"/>
-                      </a:solidFill>
-                      <a:prstDash val="solid"/>
-                      <a:round/>
-                      <a:headEnd type="none" w="med" len="med"/>
-                      <a:tailEnd type="none" w="med" len="med"/>
-                    </a:lnT>
-                    <a:lnB w="9525" cap="flat" cmpd="sng" algn="ctr">
-                      <a:solidFill>
-                        <a:srgbClr val="D8DCEA"/>
-                      </a:solidFill>
-                      <a:prstDash val="solid"/>
-                      <a:round/>
-                      <a:headEnd type="none" w="med" len="med"/>
-                      <a:tailEnd type="none" w="med" len="med"/>
-                    </a:lnB>
-                    <a:solidFill>
-                      <a:srgbClr val="F7F8FA"/>
-                    </a:solidFill>
-                  </a:tcPr>
-                </a:tc>
-                <a:tc>
-                  <a:txBody>
-                    <a:bodyPr/>
-                    <a:lstStyle/>
-                    <a:p>
-                      <a:pPr marL="0" indent="0" algn="l">
-                        <a:buNone/>
-                      </a:pPr>
-                      <a:r>
-                        <a:rPr lang="en-US" sz="2200" dirty="0">
-                          <a:solidFill>
-                            <a:srgbClr val="2B2F3A"/>
-                          </a:solidFill>
-                          <a:latin typeface="Roboto" pitchFamily="34" charset="0"/>
-                          <a:ea typeface="Roboto" pitchFamily="34" charset="-122"/>
-                          <a:cs typeface="Roboto" pitchFamily="34" charset="-120"/>
-                        </a:rPr>
-                        <a:t>2,99 s</a:t>
-                      </a:r>
-                      <a:endParaRPr lang="en-US" sz="2200" dirty="0">
-                        <a:latin typeface="Roboto" charset="0"/>
-                        <a:ea typeface="Roboto" charset="0"/>
-                        <a:cs typeface="Roboto" charset="0"/>
-                      </a:endParaRPr>
-                    </a:p>
-                  </a:txBody>
-                  <a:tcPr anchor="ctr">
-                    <a:lnL w="9525" cap="flat" cmpd="sng" algn="ctr">
-                      <a:solidFill>
-                        <a:srgbClr val="D8DCEA"/>
-                      </a:solidFill>
-                      <a:prstDash val="solid"/>
-                      <a:round/>
-                      <a:headEnd type="none" w="med" len="med"/>
-                      <a:tailEnd type="none" w="med" len="med"/>
-                    </a:lnL>
-                    <a:lnR w="9525" cap="flat" cmpd="sng" algn="ctr">
-                      <a:solidFill>
-                        <a:srgbClr val="D8DCEA"/>
-                      </a:solidFill>
-                      <a:prstDash val="solid"/>
-                      <a:round/>
-                      <a:headEnd type="none" w="med" len="med"/>
-                      <a:tailEnd type="none" w="med" len="med"/>
-                    </a:lnR>
-                    <a:lnT w="9525" cap="flat" cmpd="sng" algn="ctr">
-                      <a:solidFill>
-                        <a:srgbClr val="D8DCEA"/>
-                      </a:solidFill>
-                      <a:prstDash val="solid"/>
-                      <a:round/>
-                      <a:headEnd type="none" w="med" len="med"/>
-                      <a:tailEnd type="none" w="med" len="med"/>
-                    </a:lnT>
-                    <a:lnB w="9525" cap="flat" cmpd="sng" algn="ctr">
-                      <a:solidFill>
-                        <a:srgbClr val="D8DCEA"/>
-                      </a:solidFill>
-                      <a:prstDash val="solid"/>
-                      <a:round/>
-                      <a:headEnd type="none" w="med" len="med"/>
-                      <a:tailEnd type="none" w="med" len="med"/>
-                    </a:lnB>
-                    <a:solidFill>
-                      <a:srgbClr val="F7F8FA"/>
-                    </a:solidFill>
-                  </a:tcPr>
-                </a:tc>
-                <a:extLst>
-                  <a:ext uri="{0D108BD9-81ED-4DB2-BD59-A6C34878D82A}">
-                    <a16:rowId xmlns:a16="http://schemas.microsoft.com/office/drawing/2014/main" val="10002"/>
-                  </a:ext>
-                </a:extLst>
-              </a:tr>
-            </a:tbl>
-          </a:graphicData>
-        </a:graphic>
-      </p:graphicFrame>
-      <p:sp>
-        <p:nvSpPr>
-          <p:cNvPr id="6" name="Text 2"/>
-          <p:cNvSpPr txBox="1"/>
-          <p:nvPr/>
-        </p:nvSpPr>
-        <p:spPr>
-          <a:xfrm>
-            <a:off x="2423160" y="10607040"/>
-            <a:ext cx="19540728" cy="731520"/>
-          </a:xfrm>
-          <a:prstGeom prst="rect">
-            <a:avLst/>
-          </a:prstGeom>
-          <a:noFill/>
-          <a:ln/>
-        </p:spPr>
-        <p:txBody>
-          <a:bodyPr wrap="square" lIns="0" tIns="0" rIns="0" bIns="0" rtlCol="0" anchor="ctr"/>
-          <a:lstStyle/>
-          <a:p>
-            <a:pPr marL="0" indent="0">
-              <a:buNone/>
-            </a:pPr>
-            <a:r>
-              <a:rPr lang="en-US" sz="2600" i="1" dirty="0">
-                <a:solidFill>
-                  <a:srgbClr val="7B7F8E"/>
+                  <a:srgbClr val="A7A9B4"/>
                 </a:solidFill>
                 <a:latin typeface="Roboto" pitchFamily="34" charset="0"/>
                 <a:ea typeface="Roboto" pitchFamily="34" charset="-122"/>
                 <a:cs typeface="Roboto" pitchFamily="34" charset="-120"/>
               </a:rPr>
-              <a:t>Quase o dobro do preço e quase três vezes mais lento — para o mesmo resultado.</a:t>
-            </a:r>
-            <a:endParaRPr lang="en-US" sz="2600" dirty="0"/>
-          </a:p>
-        </p:txBody>
-      </p:sp>
-      <p:sp>
-        <p:nvSpPr>
-          <p:cNvPr id="7" name="Text 3"/>
+              <a:t>Mesma tarefa: entender uma frase curta e classificar o tipo de relato.</a:t>
+            </a:r>
+            <a:endParaRPr lang="en-US" sz="2800" dirty="0"/>
+          </a:p>
+        </p:txBody>
+      </p:sp>
+      <p:pic>
+        <p:nvPicPr>
+          <p:cNvPr id="9" name="Image 3" descr="art\seta.png">    </p:cNvPr>
+          <p:cNvPicPr>
+            <a:picLocks noChangeAspect="1"/>
+          </p:cNvPicPr>
+          <p:nvPr/>
+        </p:nvPicPr>
+        <p:blipFill>
+          <a:blip r:embed="rId4"/>
+          <a:stretch>
+            <a:fillRect/>
+          </a:stretch>
+        </p:blipFill>
+        <p:spPr>
+          <a:xfrm>
+            <a:off x="2423160" y="8426196"/>
+            <a:ext cx="475488" cy="411480"/>
+          </a:xfrm>
+          <a:prstGeom prst="rect">
+            <a:avLst/>
+          </a:prstGeom>
+        </p:spPr>
+      </p:pic>
+      <p:sp>
+        <p:nvSpPr>
+          <p:cNvPr id="10" name="Text 4"/>
+          <p:cNvSpPr txBox="1"/>
+          <p:nvPr/>
+        </p:nvSpPr>
+        <p:spPr>
+          <a:xfrm>
+            <a:off x="3337560" y="8298180"/>
+            <a:ext cx="17922240" cy="548640"/>
+          </a:xfrm>
+          <a:prstGeom prst="rect">
+            <a:avLst/>
+          </a:prstGeom>
+          <a:noFill/>
+          <a:ln/>
+        </p:spPr>
+        <p:txBody>
+          <a:bodyPr wrap="square" lIns="0" tIns="0" rIns="0" bIns="0" rtlCol="0" anchor="t"/>
+          <a:lstStyle/>
+          <a:p>
+            <a:pPr indent="0" marL="0">
+              <a:lnSpc>
+                <a:spcPct val="118000"/>
+              </a:lnSpc>
+              <a:buNone/>
+            </a:pPr>
+            <a:r>
+              <a:rPr lang="en-US" sz="2800" dirty="0">
+                <a:solidFill>
+                  <a:srgbClr val="A7A9B4"/>
+                </a:solidFill>
+                <a:latin typeface="Roboto" pitchFamily="34" charset="0"/>
+                <a:ea typeface="Roboto" pitchFamily="34" charset="-122"/>
+                <a:cs typeface="Roboto" pitchFamily="34" charset="-120"/>
+              </a:rPr>
+              <a:t>Troco o modelo no painel, mando uma mensagem, e comparamos o trace novo com um trace recente.</a:t>
+            </a:r>
+            <a:endParaRPr lang="en-US" sz="2800" dirty="0"/>
+          </a:p>
+        </p:txBody>
+      </p:sp>
+      <p:pic>
+        <p:nvPicPr>
+          <p:cNvPr id="11" name="Image 4" descr="art\seta.png">    </p:cNvPr>
+          <p:cNvPicPr>
+            <a:picLocks noChangeAspect="1"/>
+          </p:cNvPicPr>
+          <p:nvPr/>
+        </p:nvPicPr>
+        <p:blipFill>
+          <a:blip r:embed="rId5"/>
+          <a:stretch>
+            <a:fillRect/>
+          </a:stretch>
+        </p:blipFill>
+        <p:spPr>
+          <a:xfrm>
+            <a:off x="2423160" y="9980676"/>
+            <a:ext cx="475488" cy="411480"/>
+          </a:xfrm>
+          <a:prstGeom prst="rect">
+            <a:avLst/>
+          </a:prstGeom>
+        </p:spPr>
+      </p:pic>
+      <p:sp>
+        <p:nvSpPr>
+          <p:cNvPr id="12" name="Text 5"/>
+          <p:cNvSpPr txBox="1"/>
+          <p:nvPr/>
+        </p:nvSpPr>
+        <p:spPr>
+          <a:xfrm>
+            <a:off x="3337560" y="9852660"/>
+            <a:ext cx="17922240" cy="548640"/>
+          </a:xfrm>
+          <a:prstGeom prst="rect">
+            <a:avLst/>
+          </a:prstGeom>
+          <a:noFill/>
+          <a:ln/>
+        </p:spPr>
+        <p:txBody>
+          <a:bodyPr wrap="square" lIns="0" tIns="0" rIns="0" bIns="0" rtlCol="0" anchor="t"/>
+          <a:lstStyle/>
+          <a:p>
+            <a:pPr indent="0" marL="0">
+              <a:lnSpc>
+                <a:spcPct val="118000"/>
+              </a:lnSpc>
+              <a:buNone/>
+            </a:pPr>
+            <a:r>
+              <a:rPr lang="en-US" sz="2800" b="1" dirty="0">
+                <a:solidFill>
+                  <a:srgbClr val="F4F5F6"/>
+                </a:solidFill>
+                <a:latin typeface="Roboto" pitchFamily="34" charset="0"/>
+                <a:ea typeface="Roboto" pitchFamily="34" charset="-122"/>
+                <a:cs typeface="Roboto" pitchFamily="34" charset="-120"/>
+              </a:rPr>
+              <a:t>Essa decisão só é óbvia porque eu tenho a medição.</a:t>
+            </a:r>
+            <a:endParaRPr lang="en-US" sz="2800" dirty="0"/>
+          </a:p>
+        </p:txBody>
+      </p:sp>
+      <p:sp>
+        <p:nvSpPr>
+          <p:cNvPr id="13" name="Text 6"/>
           <p:cNvSpPr txBox="1"/>
           <p:nvPr/>
         </p:nvSpPr>
@@ -7114,13 +6055,15 @@
           <a:bodyPr wrap="square" lIns="0" tIns="0" rIns="0" bIns="0" rtlCol="0" anchor="ctr"/>
           <a:lstStyle/>
           <a:p>
-            <a:pPr marL="0" indent="0">
+            <a:pPr indent="0" marL="0">
               <a:buNone/>
             </a:pPr>
             <a:r>
               <a:rPr lang="en-US" sz="1500" dirty="0">
                 <a:solidFill>
-                  <a:srgbClr val="7B7F8E"/>
+                  <a:srgbClr val="A7A9B4">
+                    <a:alpha val="65000"/>
+                  </a:srgbClr>
                 </a:solidFill>
                 <a:latin typeface="Roboto" pitchFamily="34" charset="0"/>
                 <a:ea typeface="Roboto" pitchFamily="34" charset="-122"/>
@@ -7140,7 +6083,7 @@
 </p:sld>
 </file>
 
-<file path=ppt/slides/slide15.xml><?xml version="1.0" encoding="utf-8"?>
+<file path=ppt/slides/slide14.xml><?xml version="1.0" encoding="utf-8"?>
 <p:sld xmlns:a="http://schemas.openxmlformats.org/drawingml/2006/main" xmlns:r="http://schemas.openxmlformats.org/officeDocument/2006/relationships" xmlns:p="http://schemas.openxmlformats.org/presentationml/2006/main">
   <p:cSld name="Slide 14">
     <p:bg>
@@ -7148,7 +6091,6 @@
         <a:solidFill>
           <a:srgbClr val="052FD3"/>
         </a:solidFill>
-        <a:effectLst/>
       </p:bgPr>
     </p:bg>
     <p:spTree>
@@ -7167,14 +6109,14 @@
       </p:grpSpPr>
       <p:pic>
         <p:nvPicPr>
-          <p:cNvPr id="2" name="Image 0" descr="C:\Users\PCSTUD~1\AppData\Local\Temp\claude\C--Users-PC-Studio-2-Desktop-6498-Evals\7ce78c02-4c99-40d4-bc57-5394098065c6\scratchpad\art\logo.png"/>
+          <p:cNvPr id="2" name="Image 0" descr="art\logo.png">    </p:cNvPr>
           <p:cNvPicPr>
             <a:picLocks noChangeAspect="1"/>
           </p:cNvPicPr>
           <p:nvPr/>
         </p:nvPicPr>
         <p:blipFill>
-          <a:blip r:embed="rId3"/>
+          <a:blip r:embed="rId1"/>
           <a:stretch>
             <a:fillRect/>
           </a:stretch>
@@ -7210,7 +6152,7 @@
           <a:bodyPr wrap="square" lIns="0" tIns="0" rIns="0" bIns="0" rtlCol="0" anchor="ctr"/>
           <a:lstStyle/>
           <a:p>
-            <a:pPr marL="0" indent="0" algn="ctr">
+            <a:pPr algn="ctr" indent="0" marL="0">
               <a:lnSpc>
                 <a:spcPct val="105000"/>
               </a:lnSpc>
@@ -7239,7 +6181,7 @@
 </p:sld>
 </file>
 
-<file path=ppt/slides/slide16.xml><?xml version="1.0" encoding="utf-8"?>
+<file path=ppt/slides/slide15.xml><?xml version="1.0" encoding="utf-8"?>
 <p:sld xmlns:a="http://schemas.openxmlformats.org/drawingml/2006/main" xmlns:r="http://schemas.openxmlformats.org/officeDocument/2006/relationships" xmlns:p="http://schemas.openxmlformats.org/presentationml/2006/main">
   <p:cSld name="Slide 15">
     <p:bg>
@@ -7247,7 +6189,6 @@
         <a:solidFill>
           <a:srgbClr val="0C0C0E"/>
         </a:solidFill>
-        <a:effectLst/>
       </p:bgPr>
     </p:bg>
     <p:spTree>
@@ -7266,14 +6207,14 @@
       </p:grpSpPr>
       <p:pic>
         <p:nvPicPr>
-          <p:cNvPr id="2" name="Image 0" descr="C:\Users\PCSTUD~1\AppData\Local\Temp\claude\C--Users-PC-Studio-2-Desktop-6498-Evals\7ce78c02-4c99-40d4-bc57-5394098065c6\scratchpad\art\malha.png"/>
+          <p:cNvPr id="2" name="Image 0" descr="art\malha.png">    </p:cNvPr>
           <p:cNvPicPr>
             <a:picLocks noChangeAspect="1"/>
           </p:cNvPicPr>
           <p:nvPr/>
         </p:nvPicPr>
         <p:blipFill>
-          <a:blip r:embed="rId3"/>
+          <a:blip r:embed="rId1"/>
           <a:stretch>
             <a:fillRect/>
           </a:stretch>
@@ -7290,14 +6231,14 @@
       </p:pic>
       <p:pic>
         <p:nvPicPr>
-          <p:cNvPr id="3" name="Image 1" descr="C:\Users\PCSTUD~1\AppData\Local\Temp\claude\C--Users-PC-Studio-2-Desktop-6498-Evals\7ce78c02-4c99-40d4-bc57-5394098065c6\scratchpad\art\logo.png"/>
+          <p:cNvPr id="3" name="Image 1" descr="art\logo.png">    </p:cNvPr>
           <p:cNvPicPr>
             <a:picLocks noChangeAspect="1"/>
           </p:cNvPicPr>
           <p:nvPr/>
         </p:nvPicPr>
         <p:blipFill>
-          <a:blip r:embed="rId4"/>
+          <a:blip r:embed="rId2"/>
           <a:stretch>
             <a:fillRect/>
           </a:stretch>
@@ -7320,7 +6261,7 @@
         </p:nvSpPr>
         <p:spPr>
           <a:xfrm>
-            <a:off x="2423160" y="2148840"/>
+            <a:off x="2423160" y="1051560"/>
             <a:ext cx="19540728" cy="594360"/>
           </a:xfrm>
           <a:prstGeom prst="rect">
@@ -7333,11 +6274,11 @@
           <a:bodyPr wrap="square" lIns="0" tIns="0" rIns="0" bIns="0" rtlCol="0" anchor="ctr"/>
           <a:lstStyle/>
           <a:p>
-            <a:pPr marL="0" indent="0">
+            <a:pPr indent="0" marL="0">
               <a:buNone/>
             </a:pPr>
             <a:r>
-              <a:rPr lang="en-US" sz="2100" b="1" kern="0" spc="250" dirty="0">
+              <a:rPr lang="en-US" sz="2100" b="1" spc="250" kern="0" dirty="0">
                 <a:solidFill>
                   <a:srgbClr val="1F53E5"/>
                 </a:solidFill>
@@ -7359,8 +6300,8 @@
         </p:nvSpPr>
         <p:spPr>
           <a:xfrm>
-            <a:off x="2423160" y="2880360"/>
-            <a:ext cx="18745200" cy="2377440"/>
+            <a:off x="2423160" y="1783080"/>
+            <a:ext cx="19568160" cy="2377440"/>
           </a:xfrm>
           <a:prstGeom prst="rect">
             <a:avLst/>
@@ -7372,7 +6313,7 @@
           <a:bodyPr wrap="square" lIns="0" tIns="0" rIns="0" bIns="0" rtlCol="0" anchor="t"/>
           <a:lstStyle/>
           <a:p>
-            <a:pPr marL="0" indent="0">
+            <a:pPr indent="0" marL="0">
               <a:lnSpc>
                 <a:spcPct val="105000"/>
               </a:lnSpc>
@@ -7395,14 +6336,58 @@
       </p:sp>
       <p:sp>
         <p:nvSpPr>
-          <p:cNvPr id="6" name="Text 2"/>
+          <p:cNvPr id="6" name="Shape 2"/>
+          <p:cNvSpPr/>
+          <p:nvPr/>
+        </p:nvSpPr>
+        <p:spPr>
+          <a:xfrm>
+            <a:off x="2423160" y="4526280"/>
+            <a:ext cx="2011680" cy="68580"/>
+          </a:xfrm>
+          <a:prstGeom prst="rect">
+            <a:avLst/>
+          </a:prstGeom>
+          <a:solidFill>
+            <a:srgbClr val="1F53E5"/>
+          </a:solidFill>
+          <a:ln/>
+        </p:spPr>
+      </p:sp>
+      <p:pic>
+        <p:nvPicPr>
+          <p:cNvPr id="7" name="Image 2" descr="art\seta.png">    </p:cNvPr>
+          <p:cNvPicPr>
+            <a:picLocks noChangeAspect="1"/>
+          </p:cNvPicPr>
+          <p:nvPr/>
+        </p:nvPicPr>
+        <p:blipFill>
+          <a:blip r:embed="rId3"/>
+          <a:stretch>
+            <a:fillRect/>
+          </a:stretch>
+        </p:blipFill>
+        <p:spPr>
+          <a:xfrm>
+            <a:off x="2423160" y="6094476"/>
+            <a:ext cx="475488" cy="411480"/>
+          </a:xfrm>
+          <a:prstGeom prst="rect">
+            <a:avLst/>
+          </a:prstGeom>
+        </p:spPr>
+      </p:pic>
+      <p:sp>
+        <p:nvSpPr>
+          <p:cNvPr id="8" name="Text 3"/>
           <p:cNvSpPr txBox="1"/>
           <p:nvPr/>
         </p:nvSpPr>
         <p:spPr>
           <a:xfrm>
-            <a:off x="2423160" y="5367528"/>
-            <a:ext cx="777240" cy="548640"/>
+            <a:off x="3337560" y="5966460"/>
+            <a:ext cx="17922240" cy="548640"/>
           </a:xfrm>
           <a:prstGeom prst="rect">
             <a:avLst/>
@@ -7414,46 +6399,7 @@
           <a:bodyPr wrap="square" lIns="0" tIns="0" rIns="0" bIns="0" rtlCol="0" anchor="t"/>
           <a:lstStyle/>
           <a:p>
-            <a:pPr marL="0" indent="0">
-              <a:buNone/>
-            </a:pPr>
-            <a:r>
-              <a:rPr lang="en-US" sz="3000" b="1" dirty="0">
-                <a:solidFill>
-                  <a:srgbClr val="1F53E5"/>
-                </a:solidFill>
-                <a:latin typeface="Roboto" pitchFamily="34" charset="0"/>
-                <a:ea typeface="Roboto" pitchFamily="34" charset="-122"/>
-                <a:cs typeface="Roboto" pitchFamily="34" charset="-120"/>
-              </a:rPr>
-              <a:t>→</a:t>
-            </a:r>
-            <a:endParaRPr lang="en-US" sz="3000" dirty="0"/>
-          </a:p>
-        </p:txBody>
-      </p:sp>
-      <p:sp>
-        <p:nvSpPr>
-          <p:cNvPr id="7" name="Text 3"/>
-          <p:cNvSpPr txBox="1"/>
-          <p:nvPr/>
-        </p:nvSpPr>
-        <p:spPr>
-          <a:xfrm>
-            <a:off x="3337560" y="5349240"/>
-            <a:ext cx="17922240" cy="548640"/>
-          </a:xfrm>
-          <a:prstGeom prst="rect">
-            <a:avLst/>
-          </a:prstGeom>
-          <a:noFill/>
-          <a:ln/>
-        </p:spPr>
-        <p:txBody>
-          <a:bodyPr wrap="square" lIns="0" tIns="0" rIns="0" bIns="0" rtlCol="0" anchor="t"/>
-          <a:lstStyle/>
-          <a:p>
-            <a:pPr marL="0" indent="0">
+            <a:pPr indent="0" marL="0">
               <a:lnSpc>
                 <a:spcPct val="118000"/>
               </a:lnSpc>
@@ -7474,16 +6420,40 @@
           </a:p>
         </p:txBody>
       </p:sp>
-      <p:sp>
-        <p:nvSpPr>
-          <p:cNvPr id="8" name="Text 4"/>
+      <p:pic>
+        <p:nvPicPr>
+          <p:cNvPr id="9" name="Image 3" descr="art\seta.png">    </p:cNvPr>
+          <p:cNvPicPr>
+            <a:picLocks noChangeAspect="1"/>
+          </p:cNvPicPr>
+          <p:nvPr/>
+        </p:nvPicPr>
+        <p:blipFill>
+          <a:blip r:embed="rId4"/>
+          <a:stretch>
+            <a:fillRect/>
+          </a:stretch>
+        </p:blipFill>
+        <p:spPr>
+          <a:xfrm>
+            <a:off x="2423160" y="7648956"/>
+            <a:ext cx="475488" cy="411480"/>
+          </a:xfrm>
+          <a:prstGeom prst="rect">
+            <a:avLst/>
+          </a:prstGeom>
+        </p:spPr>
+      </p:pic>
+      <p:sp>
+        <p:nvSpPr>
+          <p:cNvPr id="10" name="Text 4"/>
           <p:cNvSpPr txBox="1"/>
           <p:nvPr/>
         </p:nvSpPr>
         <p:spPr>
           <a:xfrm>
-            <a:off x="2423160" y="6419088"/>
-            <a:ext cx="777240" cy="548640"/>
+            <a:off x="3337560" y="7520940"/>
+            <a:ext cx="17922240" cy="548640"/>
           </a:xfrm>
           <a:prstGeom prst="rect">
             <a:avLst/>
@@ -7495,46 +6465,7 @@
           <a:bodyPr wrap="square" lIns="0" tIns="0" rIns="0" bIns="0" rtlCol="0" anchor="t"/>
           <a:lstStyle/>
           <a:p>
-            <a:pPr marL="0" indent="0">
-              <a:buNone/>
-            </a:pPr>
-            <a:r>
-              <a:rPr lang="en-US" sz="3000" b="1" dirty="0">
-                <a:solidFill>
-                  <a:srgbClr val="1F53E5"/>
-                </a:solidFill>
-                <a:latin typeface="Roboto" pitchFamily="34" charset="0"/>
-                <a:ea typeface="Roboto" pitchFamily="34" charset="-122"/>
-                <a:cs typeface="Roboto" pitchFamily="34" charset="-120"/>
-              </a:rPr>
-              <a:t>→</a:t>
-            </a:r>
-            <a:endParaRPr lang="en-US" sz="3000" dirty="0"/>
-          </a:p>
-        </p:txBody>
-      </p:sp>
-      <p:sp>
-        <p:nvSpPr>
-          <p:cNvPr id="9" name="Text 5"/>
-          <p:cNvSpPr txBox="1"/>
-          <p:nvPr/>
-        </p:nvSpPr>
-        <p:spPr>
-          <a:xfrm>
-            <a:off x="3337560" y="6400800"/>
-            <a:ext cx="17922240" cy="548640"/>
-          </a:xfrm>
-          <a:prstGeom prst="rect">
-            <a:avLst/>
-          </a:prstGeom>
-          <a:noFill/>
-          <a:ln/>
-        </p:spPr>
-        <p:txBody>
-          <a:bodyPr wrap="square" lIns="0" tIns="0" rIns="0" bIns="0" rtlCol="0" anchor="t"/>
-          <a:lstStyle/>
-          <a:p>
-            <a:pPr marL="0" indent="0">
+            <a:pPr indent="0" marL="0">
               <a:lnSpc>
                 <a:spcPct val="118000"/>
               </a:lnSpc>
@@ -7555,16 +6486,40 @@
           </a:p>
         </p:txBody>
       </p:sp>
-      <p:sp>
-        <p:nvSpPr>
-          <p:cNvPr id="10" name="Text 6"/>
+      <p:pic>
+        <p:nvPicPr>
+          <p:cNvPr id="11" name="Image 4" descr="art\seta.png">    </p:cNvPr>
+          <p:cNvPicPr>
+            <a:picLocks noChangeAspect="1"/>
+          </p:cNvPicPr>
+          <p:nvPr/>
+        </p:nvPicPr>
+        <p:blipFill>
+          <a:blip r:embed="rId5"/>
+          <a:stretch>
+            <a:fillRect/>
+          </a:stretch>
+        </p:blipFill>
+        <p:spPr>
+          <a:xfrm>
+            <a:off x="2423160" y="9203436"/>
+            <a:ext cx="475488" cy="411480"/>
+          </a:xfrm>
+          <a:prstGeom prst="rect">
+            <a:avLst/>
+          </a:prstGeom>
+        </p:spPr>
+      </p:pic>
+      <p:sp>
+        <p:nvSpPr>
+          <p:cNvPr id="12" name="Text 5"/>
           <p:cNvSpPr txBox="1"/>
           <p:nvPr/>
         </p:nvSpPr>
         <p:spPr>
           <a:xfrm>
-            <a:off x="2423160" y="7470648"/>
-            <a:ext cx="777240" cy="548640"/>
+            <a:off x="3337560" y="9075420"/>
+            <a:ext cx="17922240" cy="548640"/>
           </a:xfrm>
           <a:prstGeom prst="rect">
             <a:avLst/>
@@ -7576,46 +6531,7 @@
           <a:bodyPr wrap="square" lIns="0" tIns="0" rIns="0" bIns="0" rtlCol="0" anchor="t"/>
           <a:lstStyle/>
           <a:p>
-            <a:pPr marL="0" indent="0">
-              <a:buNone/>
-            </a:pPr>
-            <a:r>
-              <a:rPr lang="en-US" sz="3000" b="1" dirty="0">
-                <a:solidFill>
-                  <a:srgbClr val="1F53E5"/>
-                </a:solidFill>
-                <a:latin typeface="Roboto" pitchFamily="34" charset="0"/>
-                <a:ea typeface="Roboto" pitchFamily="34" charset="-122"/>
-                <a:cs typeface="Roboto" pitchFamily="34" charset="-120"/>
-              </a:rPr>
-              <a:t>→</a:t>
-            </a:r>
-            <a:endParaRPr lang="en-US" sz="3000" dirty="0"/>
-          </a:p>
-        </p:txBody>
-      </p:sp>
-      <p:sp>
-        <p:nvSpPr>
-          <p:cNvPr id="11" name="Text 7"/>
-          <p:cNvSpPr txBox="1"/>
-          <p:nvPr/>
-        </p:nvSpPr>
-        <p:spPr>
-          <a:xfrm>
-            <a:off x="3337560" y="7452360"/>
-            <a:ext cx="17922240" cy="548640"/>
-          </a:xfrm>
-          <a:prstGeom prst="rect">
-            <a:avLst/>
-          </a:prstGeom>
-          <a:noFill/>
-          <a:ln/>
-        </p:spPr>
-        <p:txBody>
-          <a:bodyPr wrap="square" lIns="0" tIns="0" rIns="0" bIns="0" rtlCol="0" anchor="t"/>
-          <a:lstStyle/>
-          <a:p>
-            <a:pPr marL="0" indent="0">
+            <a:pPr indent="0" marL="0">
               <a:lnSpc>
                 <a:spcPct val="118000"/>
               </a:lnSpc>
@@ -7636,16 +6552,40 @@
           </a:p>
         </p:txBody>
       </p:sp>
-      <p:sp>
-        <p:nvSpPr>
-          <p:cNvPr id="12" name="Text 8"/>
+      <p:pic>
+        <p:nvPicPr>
+          <p:cNvPr id="13" name="Image 5" descr="art\seta.png">    </p:cNvPr>
+          <p:cNvPicPr>
+            <a:picLocks noChangeAspect="1"/>
+          </p:cNvPicPr>
+          <p:nvPr/>
+        </p:nvPicPr>
+        <p:blipFill>
+          <a:blip r:embed="rId6"/>
+          <a:stretch>
+            <a:fillRect/>
+          </a:stretch>
+        </p:blipFill>
+        <p:spPr>
+          <a:xfrm>
+            <a:off x="2423160" y="10757916"/>
+            <a:ext cx="475488" cy="411480"/>
+          </a:xfrm>
+          <a:prstGeom prst="rect">
+            <a:avLst/>
+          </a:prstGeom>
+        </p:spPr>
+      </p:pic>
+      <p:sp>
+        <p:nvSpPr>
+          <p:cNvPr id="14" name="Text 6"/>
           <p:cNvSpPr txBox="1"/>
           <p:nvPr/>
         </p:nvSpPr>
         <p:spPr>
           <a:xfrm>
-            <a:off x="2423160" y="8522208"/>
-            <a:ext cx="777240" cy="548640"/>
+            <a:off x="3337560" y="10629900"/>
+            <a:ext cx="17922240" cy="548640"/>
           </a:xfrm>
           <a:prstGeom prst="rect">
             <a:avLst/>
@@ -7657,46 +6597,7 @@
           <a:bodyPr wrap="square" lIns="0" tIns="0" rIns="0" bIns="0" rtlCol="0" anchor="t"/>
           <a:lstStyle/>
           <a:p>
-            <a:pPr marL="0" indent="0">
-              <a:buNone/>
-            </a:pPr>
-            <a:r>
-              <a:rPr lang="en-US" sz="3000" b="1" dirty="0">
-                <a:solidFill>
-                  <a:srgbClr val="1F53E5"/>
-                </a:solidFill>
-                <a:latin typeface="Roboto" pitchFamily="34" charset="0"/>
-                <a:ea typeface="Roboto" pitchFamily="34" charset="-122"/>
-                <a:cs typeface="Roboto" pitchFamily="34" charset="-120"/>
-              </a:rPr>
-              <a:t>→</a:t>
-            </a:r>
-            <a:endParaRPr lang="en-US" sz="3000" dirty="0"/>
-          </a:p>
-        </p:txBody>
-      </p:sp>
-      <p:sp>
-        <p:nvSpPr>
-          <p:cNvPr id="13" name="Text 9"/>
-          <p:cNvSpPr txBox="1"/>
-          <p:nvPr/>
-        </p:nvSpPr>
-        <p:spPr>
-          <a:xfrm>
-            <a:off x="3337560" y="8503920"/>
-            <a:ext cx="17922240" cy="548640"/>
-          </a:xfrm>
-          <a:prstGeom prst="rect">
-            <a:avLst/>
-          </a:prstGeom>
-          <a:noFill/>
-          <a:ln/>
-        </p:spPr>
-        <p:txBody>
-          <a:bodyPr wrap="square" lIns="0" tIns="0" rIns="0" bIns="0" rtlCol="0" anchor="t"/>
-          <a:lstStyle/>
-          <a:p>
-            <a:pPr marL="0" indent="0">
+            <a:pPr indent="0" marL="0">
               <a:lnSpc>
                 <a:spcPct val="118000"/>
               </a:lnSpc>
@@ -7705,7 +6606,7 @@
             <a:r>
               <a:rPr lang="en-US" sz="2800" b="1" dirty="0">
                 <a:solidFill>
-                  <a:srgbClr val="BDBFC7"/>
+                  <a:srgbClr val="F4F5F6"/>
                 </a:solidFill>
                 <a:latin typeface="Roboto" pitchFamily="34" charset="0"/>
                 <a:ea typeface="Roboto" pitchFamily="34" charset="-122"/>
@@ -7719,7 +6620,7 @@
       </p:sp>
       <p:sp>
         <p:nvSpPr>
-          <p:cNvPr id="14" name="Text 10"/>
+          <p:cNvPr id="15" name="Text 7"/>
           <p:cNvSpPr txBox="1"/>
           <p:nvPr/>
         </p:nvSpPr>
@@ -7738,7 +6639,7 @@
           <a:bodyPr wrap="square" lIns="0" tIns="0" rIns="0" bIns="0" rtlCol="0" anchor="ctr"/>
           <a:lstStyle/>
           <a:p>
-            <a:pPr marL="0" indent="0">
+            <a:pPr indent="0" marL="0">
               <a:buNone/>
             </a:pPr>
             <a:r>
@@ -7766,7 +6667,7 @@
 </p:sld>
 </file>
 
-<file path=ppt/slides/slide17.xml><?xml version="1.0" encoding="utf-8"?>
+<file path=ppt/slides/slide16.xml><?xml version="1.0" encoding="utf-8"?>
 <p:sld xmlns:a="http://schemas.openxmlformats.org/drawingml/2006/main" xmlns:r="http://schemas.openxmlformats.org/officeDocument/2006/relationships" xmlns:p="http://schemas.openxmlformats.org/presentationml/2006/main">
   <p:cSld name="Slide 16">
     <p:bg>
@@ -7774,7 +6675,6 @@
         <a:solidFill>
           <a:srgbClr val="0C0C0E"/>
         </a:solidFill>
-        <a:effectLst/>
       </p:bgPr>
     </p:bg>
     <p:spTree>
@@ -7793,14 +6693,14 @@
       </p:grpSpPr>
       <p:pic>
         <p:nvPicPr>
-          <p:cNvPr id="2" name="Image 0" descr="C:\Users\PCSTUD~1\AppData\Local\Temp\claude\C--Users-PC-Studio-2-Desktop-6498-Evals\7ce78c02-4c99-40d4-bc57-5394098065c6\scratchpad\art\malha.png"/>
+          <p:cNvPr id="2" name="Image 0" descr="art\malha.png">    </p:cNvPr>
           <p:cNvPicPr>
             <a:picLocks noChangeAspect="1"/>
           </p:cNvPicPr>
           <p:nvPr/>
         </p:nvPicPr>
         <p:blipFill>
-          <a:blip r:embed="rId3"/>
+          <a:blip r:embed="rId1"/>
           <a:stretch>
             <a:fillRect/>
           </a:stretch>
@@ -7817,14 +6717,14 @@
       </p:pic>
       <p:pic>
         <p:nvPicPr>
-          <p:cNvPr id="3" name="Image 1" descr="C:\Users\PCSTUD~1\AppData\Local\Temp\claude\C--Users-PC-Studio-2-Desktop-6498-Evals\7ce78c02-4c99-40d4-bc57-5394098065c6\scratchpad\art\logo.png"/>
+          <p:cNvPr id="3" name="Image 1" descr="art\logo.png">    </p:cNvPr>
           <p:cNvPicPr>
             <a:picLocks noChangeAspect="1"/>
           </p:cNvPicPr>
           <p:nvPr/>
         </p:nvPicPr>
         <p:blipFill>
-          <a:blip r:embed="rId4"/>
+          <a:blip r:embed="rId2"/>
           <a:stretch>
             <a:fillRect/>
           </a:stretch>
@@ -7847,7 +6747,7 @@
         </p:nvSpPr>
         <p:spPr>
           <a:xfrm>
-            <a:off x="2423160" y="2148840"/>
+            <a:off x="2423160" y="1051560"/>
             <a:ext cx="19540728" cy="594360"/>
           </a:xfrm>
           <a:prstGeom prst="rect">
@@ -7860,11 +6760,11 @@
           <a:bodyPr wrap="square" lIns="0" tIns="0" rIns="0" bIns="0" rtlCol="0" anchor="ctr"/>
           <a:lstStyle/>
           <a:p>
-            <a:pPr marL="0" indent="0">
+            <a:pPr indent="0" marL="0">
               <a:buNone/>
             </a:pPr>
             <a:r>
-              <a:rPr lang="en-US" sz="2100" b="1" kern="0" spc="250" dirty="0">
+              <a:rPr lang="en-US" sz="2100" b="1" spc="250" kern="0" dirty="0">
                 <a:solidFill>
                   <a:srgbClr val="1F53E5"/>
                 </a:solidFill>
@@ -7886,8 +6786,8 @@
         </p:nvSpPr>
         <p:spPr>
           <a:xfrm>
-            <a:off x="2423160" y="2880360"/>
-            <a:ext cx="18745200" cy="2377440"/>
+            <a:off x="2423160" y="1783080"/>
+            <a:ext cx="19568160" cy="2377440"/>
           </a:xfrm>
           <a:prstGeom prst="rect">
             <a:avLst/>
@@ -7899,7 +6799,7 @@
           <a:bodyPr wrap="square" lIns="0" tIns="0" rIns="0" bIns="0" rtlCol="0" anchor="t"/>
           <a:lstStyle/>
           <a:p>
-            <a:pPr marL="0" indent="0">
+            <a:pPr indent="0" marL="0">
               <a:lnSpc>
                 <a:spcPct val="105000"/>
               </a:lnSpc>
@@ -7922,14 +6822,58 @@
       </p:sp>
       <p:sp>
         <p:nvSpPr>
-          <p:cNvPr id="6" name="Text 2"/>
+          <p:cNvPr id="6" name="Shape 2"/>
+          <p:cNvSpPr/>
+          <p:nvPr/>
+        </p:nvSpPr>
+        <p:spPr>
+          <a:xfrm>
+            <a:off x="2423160" y="4526280"/>
+            <a:ext cx="2011680" cy="68580"/>
+          </a:xfrm>
+          <a:prstGeom prst="rect">
+            <a:avLst/>
+          </a:prstGeom>
+          <a:solidFill>
+            <a:srgbClr val="1F53E5"/>
+          </a:solidFill>
+          <a:ln/>
+        </p:spPr>
+      </p:sp>
+      <p:pic>
+        <p:nvPicPr>
+          <p:cNvPr id="7" name="Image 2" descr="art\seta.png">    </p:cNvPr>
+          <p:cNvPicPr>
+            <a:picLocks noChangeAspect="1"/>
+          </p:cNvPicPr>
+          <p:nvPr/>
+        </p:nvPicPr>
+        <p:blipFill>
+          <a:blip r:embed="rId3"/>
+          <a:stretch>
+            <a:fillRect/>
+          </a:stretch>
+        </p:blipFill>
+        <p:spPr>
+          <a:xfrm>
+            <a:off x="2423160" y="6871716"/>
+            <a:ext cx="475488" cy="411480"/>
+          </a:xfrm>
+          <a:prstGeom prst="rect">
+            <a:avLst/>
+          </a:prstGeom>
+        </p:spPr>
+      </p:pic>
+      <p:sp>
+        <p:nvSpPr>
+          <p:cNvPr id="8" name="Text 3"/>
           <p:cNvSpPr txBox="1"/>
           <p:nvPr/>
         </p:nvSpPr>
         <p:spPr>
           <a:xfrm>
-            <a:off x="2423160" y="5367528"/>
-            <a:ext cx="777240" cy="548640"/>
+            <a:off x="3337560" y="6743700"/>
+            <a:ext cx="17922240" cy="548640"/>
           </a:xfrm>
           <a:prstGeom prst="rect">
             <a:avLst/>
@@ -7941,46 +6885,7 @@
           <a:bodyPr wrap="square" lIns="0" tIns="0" rIns="0" bIns="0" rtlCol="0" anchor="t"/>
           <a:lstStyle/>
           <a:p>
-            <a:pPr marL="0" indent="0">
-              <a:buNone/>
-            </a:pPr>
-            <a:r>
-              <a:rPr lang="en-US" sz="3000" b="1" dirty="0">
-                <a:solidFill>
-                  <a:srgbClr val="1F53E5"/>
-                </a:solidFill>
-                <a:latin typeface="Roboto" pitchFamily="34" charset="0"/>
-                <a:ea typeface="Roboto" pitchFamily="34" charset="-122"/>
-                <a:cs typeface="Roboto" pitchFamily="34" charset="-120"/>
-              </a:rPr>
-              <a:t>→</a:t>
-            </a:r>
-            <a:endParaRPr lang="en-US" sz="3000" dirty="0"/>
-          </a:p>
-        </p:txBody>
-      </p:sp>
-      <p:sp>
-        <p:nvSpPr>
-          <p:cNvPr id="7" name="Text 3"/>
-          <p:cNvSpPr txBox="1"/>
-          <p:nvPr/>
-        </p:nvSpPr>
-        <p:spPr>
-          <a:xfrm>
-            <a:off x="3337560" y="5349240"/>
-            <a:ext cx="17922240" cy="548640"/>
-          </a:xfrm>
-          <a:prstGeom prst="rect">
-            <a:avLst/>
-          </a:prstGeom>
-          <a:noFill/>
-          <a:ln/>
-        </p:spPr>
-        <p:txBody>
-          <a:bodyPr wrap="square" lIns="0" tIns="0" rIns="0" bIns="0" rtlCol="0" anchor="t"/>
-          <a:lstStyle/>
-          <a:p>
-            <a:pPr marL="0" indent="0">
+            <a:pPr indent="0" marL="0">
               <a:lnSpc>
                 <a:spcPct val="118000"/>
               </a:lnSpc>
@@ -8001,16 +6906,40 @@
           </a:p>
         </p:txBody>
       </p:sp>
-      <p:sp>
-        <p:nvSpPr>
-          <p:cNvPr id="8" name="Text 4"/>
+      <p:pic>
+        <p:nvPicPr>
+          <p:cNvPr id="9" name="Image 3" descr="art\seta.png">    </p:cNvPr>
+          <p:cNvPicPr>
+            <a:picLocks noChangeAspect="1"/>
+          </p:cNvPicPr>
+          <p:nvPr/>
+        </p:nvPicPr>
+        <p:blipFill>
+          <a:blip r:embed="rId4"/>
+          <a:stretch>
+            <a:fillRect/>
+          </a:stretch>
+        </p:blipFill>
+        <p:spPr>
+          <a:xfrm>
+            <a:off x="2423160" y="8426196"/>
+            <a:ext cx="475488" cy="411480"/>
+          </a:xfrm>
+          <a:prstGeom prst="rect">
+            <a:avLst/>
+          </a:prstGeom>
+        </p:spPr>
+      </p:pic>
+      <p:sp>
+        <p:nvSpPr>
+          <p:cNvPr id="10" name="Text 4"/>
           <p:cNvSpPr txBox="1"/>
           <p:nvPr/>
         </p:nvSpPr>
         <p:spPr>
           <a:xfrm>
-            <a:off x="2423160" y="6419088"/>
-            <a:ext cx="777240" cy="548640"/>
+            <a:off x="3337560" y="8298180"/>
+            <a:ext cx="17922240" cy="548640"/>
           </a:xfrm>
           <a:prstGeom prst="rect">
             <a:avLst/>
@@ -8022,46 +6951,7 @@
           <a:bodyPr wrap="square" lIns="0" tIns="0" rIns="0" bIns="0" rtlCol="0" anchor="t"/>
           <a:lstStyle/>
           <a:p>
-            <a:pPr marL="0" indent="0">
-              <a:buNone/>
-            </a:pPr>
-            <a:r>
-              <a:rPr lang="en-US" sz="3000" b="1" dirty="0">
-                <a:solidFill>
-                  <a:srgbClr val="1F53E5"/>
-                </a:solidFill>
-                <a:latin typeface="Roboto" pitchFamily="34" charset="0"/>
-                <a:ea typeface="Roboto" pitchFamily="34" charset="-122"/>
-                <a:cs typeface="Roboto" pitchFamily="34" charset="-120"/>
-              </a:rPr>
-              <a:t>→</a:t>
-            </a:r>
-            <a:endParaRPr lang="en-US" sz="3000" dirty="0"/>
-          </a:p>
-        </p:txBody>
-      </p:sp>
-      <p:sp>
-        <p:nvSpPr>
-          <p:cNvPr id="9" name="Text 5"/>
-          <p:cNvSpPr txBox="1"/>
-          <p:nvPr/>
-        </p:nvSpPr>
-        <p:spPr>
-          <a:xfrm>
-            <a:off x="3337560" y="6400800"/>
-            <a:ext cx="17922240" cy="548640"/>
-          </a:xfrm>
-          <a:prstGeom prst="rect">
-            <a:avLst/>
-          </a:prstGeom>
-          <a:noFill/>
-          <a:ln/>
-        </p:spPr>
-        <p:txBody>
-          <a:bodyPr wrap="square" lIns="0" tIns="0" rIns="0" bIns="0" rtlCol="0" anchor="t"/>
-          <a:lstStyle/>
-          <a:p>
-            <a:pPr marL="0" indent="0">
+            <a:pPr indent="0" marL="0">
               <a:lnSpc>
                 <a:spcPct val="118000"/>
               </a:lnSpc>
@@ -8082,16 +6972,40 @@
           </a:p>
         </p:txBody>
       </p:sp>
-      <p:sp>
-        <p:nvSpPr>
-          <p:cNvPr id="10" name="Text 6"/>
+      <p:pic>
+        <p:nvPicPr>
+          <p:cNvPr id="11" name="Image 4" descr="art\seta.png">    </p:cNvPr>
+          <p:cNvPicPr>
+            <a:picLocks noChangeAspect="1"/>
+          </p:cNvPicPr>
+          <p:nvPr/>
+        </p:nvPicPr>
+        <p:blipFill>
+          <a:blip r:embed="rId5"/>
+          <a:stretch>
+            <a:fillRect/>
+          </a:stretch>
+        </p:blipFill>
+        <p:spPr>
+          <a:xfrm>
+            <a:off x="2423160" y="9980676"/>
+            <a:ext cx="475488" cy="411480"/>
+          </a:xfrm>
+          <a:prstGeom prst="rect">
+            <a:avLst/>
+          </a:prstGeom>
+        </p:spPr>
+      </p:pic>
+      <p:sp>
+        <p:nvSpPr>
+          <p:cNvPr id="12" name="Text 5"/>
           <p:cNvSpPr txBox="1"/>
           <p:nvPr/>
         </p:nvSpPr>
         <p:spPr>
           <a:xfrm>
-            <a:off x="2423160" y="7470648"/>
-            <a:ext cx="777240" cy="548640"/>
+            <a:off x="3337560" y="9852660"/>
+            <a:ext cx="17922240" cy="548640"/>
           </a:xfrm>
           <a:prstGeom prst="rect">
             <a:avLst/>
@@ -8103,46 +7017,7 @@
           <a:bodyPr wrap="square" lIns="0" tIns="0" rIns="0" bIns="0" rtlCol="0" anchor="t"/>
           <a:lstStyle/>
           <a:p>
-            <a:pPr marL="0" indent="0">
-              <a:buNone/>
-            </a:pPr>
-            <a:r>
-              <a:rPr lang="en-US" sz="3000" b="1" dirty="0">
-                <a:solidFill>
-                  <a:srgbClr val="1F53E5"/>
-                </a:solidFill>
-                <a:latin typeface="Roboto" pitchFamily="34" charset="0"/>
-                <a:ea typeface="Roboto" pitchFamily="34" charset="-122"/>
-                <a:cs typeface="Roboto" pitchFamily="34" charset="-120"/>
-              </a:rPr>
-              <a:t>→</a:t>
-            </a:r>
-            <a:endParaRPr lang="en-US" sz="3000" dirty="0"/>
-          </a:p>
-        </p:txBody>
-      </p:sp>
-      <p:sp>
-        <p:nvSpPr>
-          <p:cNvPr id="11" name="Text 7"/>
-          <p:cNvSpPr txBox="1"/>
-          <p:nvPr/>
-        </p:nvSpPr>
-        <p:spPr>
-          <a:xfrm>
-            <a:off x="3337560" y="7452360"/>
-            <a:ext cx="17922240" cy="548640"/>
-          </a:xfrm>
-          <a:prstGeom prst="rect">
-            <a:avLst/>
-          </a:prstGeom>
-          <a:noFill/>
-          <a:ln/>
-        </p:spPr>
-        <p:txBody>
-          <a:bodyPr wrap="square" lIns="0" tIns="0" rIns="0" bIns="0" rtlCol="0" anchor="t"/>
-          <a:lstStyle/>
-          <a:p>
-            <a:pPr marL="0" indent="0">
+            <a:pPr indent="0" marL="0">
               <a:lnSpc>
                 <a:spcPct val="118000"/>
               </a:lnSpc>
@@ -8151,7 +7026,7 @@
             <a:r>
               <a:rPr lang="en-US" sz="2800" b="1" dirty="0">
                 <a:solidFill>
-                  <a:srgbClr val="BDBFC7"/>
+                  <a:srgbClr val="F4F5F6"/>
                 </a:solidFill>
                 <a:latin typeface="Roboto" pitchFamily="34" charset="0"/>
                 <a:ea typeface="Roboto" pitchFamily="34" charset="-122"/>
@@ -8165,7 +7040,7 @@
       </p:sp>
       <p:sp>
         <p:nvSpPr>
-          <p:cNvPr id="12" name="Text 8"/>
+          <p:cNvPr id="13" name="Text 6"/>
           <p:cNvSpPr txBox="1"/>
           <p:nvPr/>
         </p:nvSpPr>
@@ -8184,7 +7059,7 @@
           <a:bodyPr wrap="square" lIns="0" tIns="0" rIns="0" bIns="0" rtlCol="0" anchor="ctr"/>
           <a:lstStyle/>
           <a:p>
-            <a:pPr marL="0" indent="0">
+            <a:pPr indent="0" marL="0">
               <a:buNone/>
             </a:pPr>
             <a:r>
@@ -8212,7 +7087,7 @@
 </p:sld>
 </file>
 
-<file path=ppt/slides/slide18.xml><?xml version="1.0" encoding="utf-8"?>
+<file path=ppt/slides/slide17.xml><?xml version="1.0" encoding="utf-8"?>
 <p:sld xmlns:a="http://schemas.openxmlformats.org/drawingml/2006/main" xmlns:r="http://schemas.openxmlformats.org/officeDocument/2006/relationships" xmlns:p="http://schemas.openxmlformats.org/presentationml/2006/main">
   <p:cSld name="Slide 17">
     <p:bg>
@@ -8220,7 +7095,6 @@
         <a:solidFill>
           <a:srgbClr val="0C0C0E"/>
         </a:solidFill>
-        <a:effectLst/>
       </p:bgPr>
     </p:bg>
     <p:spTree>
@@ -8239,14 +7113,14 @@
       </p:grpSpPr>
       <p:pic>
         <p:nvPicPr>
-          <p:cNvPr id="2" name="Image 0" descr="C:\Users\PCSTUD~1\AppData\Local\Temp\claude\C--Users-PC-Studio-2-Desktop-6498-Evals\7ce78c02-4c99-40d4-bc57-5394098065c6\scratchpad\art\malha.png"/>
+          <p:cNvPr id="2" name="Image 0" descr="art\malha.png">    </p:cNvPr>
           <p:cNvPicPr>
             <a:picLocks noChangeAspect="1"/>
           </p:cNvPicPr>
           <p:nvPr/>
         </p:nvPicPr>
         <p:blipFill>
-          <a:blip r:embed="rId3"/>
+          <a:blip r:embed="rId1"/>
           <a:stretch>
             <a:fillRect/>
           </a:stretch>
@@ -8263,14 +7137,14 @@
       </p:pic>
       <p:pic>
         <p:nvPicPr>
-          <p:cNvPr id="3" name="Image 1" descr="C:\Users\PCSTUD~1\AppData\Local\Temp\claude\C--Users-PC-Studio-2-Desktop-6498-Evals\7ce78c02-4c99-40d4-bc57-5394098065c6\scratchpad\art\logo.png"/>
+          <p:cNvPr id="3" name="Image 1" descr="art\logo.png">    </p:cNvPr>
           <p:cNvPicPr>
             <a:picLocks noChangeAspect="1"/>
           </p:cNvPicPr>
           <p:nvPr/>
         </p:nvPicPr>
         <p:blipFill>
-          <a:blip r:embed="rId4"/>
+          <a:blip r:embed="rId2"/>
           <a:stretch>
             <a:fillRect/>
           </a:stretch>
@@ -8293,7 +7167,7 @@
         </p:nvSpPr>
         <p:spPr>
           <a:xfrm>
-            <a:off x="2423160" y="2148840"/>
+            <a:off x="2423160" y="1051560"/>
             <a:ext cx="19540728" cy="594360"/>
           </a:xfrm>
           <a:prstGeom prst="rect">
@@ -8306,11 +7180,11 @@
           <a:bodyPr wrap="square" lIns="0" tIns="0" rIns="0" bIns="0" rtlCol="0" anchor="ctr"/>
           <a:lstStyle/>
           <a:p>
-            <a:pPr marL="0" indent="0">
+            <a:pPr indent="0" marL="0">
               <a:buNone/>
             </a:pPr>
             <a:r>
-              <a:rPr lang="en-US" sz="2100" b="1" kern="0" spc="250" dirty="0">
+              <a:rPr lang="en-US" sz="2100" b="1" spc="250" kern="0" dirty="0">
                 <a:solidFill>
                   <a:srgbClr val="1F53E5"/>
                 </a:solidFill>
@@ -8332,8 +7206,8 @@
         </p:nvSpPr>
         <p:spPr>
           <a:xfrm>
-            <a:off x="2423160" y="2880360"/>
-            <a:ext cx="18745200" cy="2377440"/>
+            <a:off x="2423160" y="1783080"/>
+            <a:ext cx="19568160" cy="2377440"/>
           </a:xfrm>
           <a:prstGeom prst="rect">
             <a:avLst/>
@@ -8345,7 +7219,7 @@
           <a:bodyPr wrap="square" lIns="0" tIns="0" rIns="0" bIns="0" rtlCol="0" anchor="t"/>
           <a:lstStyle/>
           <a:p>
-            <a:pPr marL="0" indent="0">
+            <a:pPr indent="0" marL="0">
               <a:lnSpc>
                 <a:spcPct val="105000"/>
               </a:lnSpc>
@@ -8368,14 +7242,58 @@
       </p:sp>
       <p:sp>
         <p:nvSpPr>
-          <p:cNvPr id="6" name="Text 2"/>
+          <p:cNvPr id="6" name="Shape 2"/>
+          <p:cNvSpPr/>
+          <p:nvPr/>
+        </p:nvSpPr>
+        <p:spPr>
+          <a:xfrm>
+            <a:off x="2423160" y="4526280"/>
+            <a:ext cx="2011680" cy="68580"/>
+          </a:xfrm>
+          <a:prstGeom prst="rect">
+            <a:avLst/>
+          </a:prstGeom>
+          <a:solidFill>
+            <a:srgbClr val="1F53E5"/>
+          </a:solidFill>
+          <a:ln/>
+        </p:spPr>
+      </p:sp>
+      <p:pic>
+        <p:nvPicPr>
+          <p:cNvPr id="7" name="Image 2" descr="art\seta.png">    </p:cNvPr>
+          <p:cNvPicPr>
+            <a:picLocks noChangeAspect="1"/>
+          </p:cNvPicPr>
+          <p:nvPr/>
+        </p:nvPicPr>
+        <p:blipFill>
+          <a:blip r:embed="rId3"/>
+          <a:stretch>
+            <a:fillRect/>
+          </a:stretch>
+        </p:blipFill>
+        <p:spPr>
+          <a:xfrm>
+            <a:off x="2423160" y="6871716"/>
+            <a:ext cx="475488" cy="411480"/>
+          </a:xfrm>
+          <a:prstGeom prst="rect">
+            <a:avLst/>
+          </a:prstGeom>
+        </p:spPr>
+      </p:pic>
+      <p:sp>
+        <p:nvSpPr>
+          <p:cNvPr id="8" name="Text 3"/>
           <p:cNvSpPr txBox="1"/>
           <p:nvPr/>
         </p:nvSpPr>
         <p:spPr>
           <a:xfrm>
-            <a:off x="2423160" y="5367528"/>
-            <a:ext cx="777240" cy="548640"/>
+            <a:off x="3337560" y="6743700"/>
+            <a:ext cx="17922240" cy="548640"/>
           </a:xfrm>
           <a:prstGeom prst="rect">
             <a:avLst/>
@@ -8387,46 +7305,7 @@
           <a:bodyPr wrap="square" lIns="0" tIns="0" rIns="0" bIns="0" rtlCol="0" anchor="t"/>
           <a:lstStyle/>
           <a:p>
-            <a:pPr marL="0" indent="0">
-              <a:buNone/>
-            </a:pPr>
-            <a:r>
-              <a:rPr lang="en-US" sz="3000" b="1" dirty="0">
-                <a:solidFill>
-                  <a:srgbClr val="1F53E5"/>
-                </a:solidFill>
-                <a:latin typeface="Roboto" pitchFamily="34" charset="0"/>
-                <a:ea typeface="Roboto" pitchFamily="34" charset="-122"/>
-                <a:cs typeface="Roboto" pitchFamily="34" charset="-120"/>
-              </a:rPr>
-              <a:t>→</a:t>
-            </a:r>
-            <a:endParaRPr lang="en-US" sz="3000" dirty="0"/>
-          </a:p>
-        </p:txBody>
-      </p:sp>
-      <p:sp>
-        <p:nvSpPr>
-          <p:cNvPr id="7" name="Text 3"/>
-          <p:cNvSpPr txBox="1"/>
-          <p:nvPr/>
-        </p:nvSpPr>
-        <p:spPr>
-          <a:xfrm>
-            <a:off x="3337560" y="5349240"/>
-            <a:ext cx="17922240" cy="548640"/>
-          </a:xfrm>
-          <a:prstGeom prst="rect">
-            <a:avLst/>
-          </a:prstGeom>
-          <a:noFill/>
-          <a:ln/>
-        </p:spPr>
-        <p:txBody>
-          <a:bodyPr wrap="square" lIns="0" tIns="0" rIns="0" bIns="0" rtlCol="0" anchor="t"/>
-          <a:lstStyle/>
-          <a:p>
-            <a:pPr marL="0" indent="0">
+            <a:pPr indent="0" marL="0">
               <a:lnSpc>
                 <a:spcPct val="118000"/>
               </a:lnSpc>
@@ -8435,7 +7314,7 @@
             <a:r>
               <a:rPr lang="en-US" sz="2800" b="1" dirty="0">
                 <a:solidFill>
-                  <a:srgbClr val="BDBFC7"/>
+                  <a:srgbClr val="F4F5F6"/>
                 </a:solidFill>
                 <a:latin typeface="Roboto" pitchFamily="34" charset="0"/>
                 <a:ea typeface="Roboto" pitchFamily="34" charset="-122"/>
@@ -8447,16 +7326,40 @@
           </a:p>
         </p:txBody>
       </p:sp>
-      <p:sp>
-        <p:nvSpPr>
-          <p:cNvPr id="8" name="Text 4"/>
+      <p:pic>
+        <p:nvPicPr>
+          <p:cNvPr id="9" name="Image 3" descr="art\seta.png">    </p:cNvPr>
+          <p:cNvPicPr>
+            <a:picLocks noChangeAspect="1"/>
+          </p:cNvPicPr>
+          <p:nvPr/>
+        </p:nvPicPr>
+        <p:blipFill>
+          <a:blip r:embed="rId4"/>
+          <a:stretch>
+            <a:fillRect/>
+          </a:stretch>
+        </p:blipFill>
+        <p:spPr>
+          <a:xfrm>
+            <a:off x="2423160" y="8426196"/>
+            <a:ext cx="475488" cy="411480"/>
+          </a:xfrm>
+          <a:prstGeom prst="rect">
+            <a:avLst/>
+          </a:prstGeom>
+        </p:spPr>
+      </p:pic>
+      <p:sp>
+        <p:nvSpPr>
+          <p:cNvPr id="10" name="Text 4"/>
           <p:cNvSpPr txBox="1"/>
           <p:nvPr/>
         </p:nvSpPr>
         <p:spPr>
           <a:xfrm>
-            <a:off x="2423160" y="6419088"/>
-            <a:ext cx="777240" cy="548640"/>
+            <a:off x="3337560" y="8298180"/>
+            <a:ext cx="17922240" cy="548640"/>
           </a:xfrm>
           <a:prstGeom prst="rect">
             <a:avLst/>
@@ -8468,46 +7371,7 @@
           <a:bodyPr wrap="square" lIns="0" tIns="0" rIns="0" bIns="0" rtlCol="0" anchor="t"/>
           <a:lstStyle/>
           <a:p>
-            <a:pPr marL="0" indent="0">
-              <a:buNone/>
-            </a:pPr>
-            <a:r>
-              <a:rPr lang="en-US" sz="3000" b="1" dirty="0">
-                <a:solidFill>
-                  <a:srgbClr val="1F53E5"/>
-                </a:solidFill>
-                <a:latin typeface="Roboto" pitchFamily="34" charset="0"/>
-                <a:ea typeface="Roboto" pitchFamily="34" charset="-122"/>
-                <a:cs typeface="Roboto" pitchFamily="34" charset="-120"/>
-              </a:rPr>
-              <a:t>→</a:t>
-            </a:r>
-            <a:endParaRPr lang="en-US" sz="3000" dirty="0"/>
-          </a:p>
-        </p:txBody>
-      </p:sp>
-      <p:sp>
-        <p:nvSpPr>
-          <p:cNvPr id="9" name="Text 5"/>
-          <p:cNvSpPr txBox="1"/>
-          <p:nvPr/>
-        </p:nvSpPr>
-        <p:spPr>
-          <a:xfrm>
-            <a:off x="3337560" y="6400800"/>
-            <a:ext cx="17922240" cy="548640"/>
-          </a:xfrm>
-          <a:prstGeom prst="rect">
-            <a:avLst/>
-          </a:prstGeom>
-          <a:noFill/>
-          <a:ln/>
-        </p:spPr>
-        <p:txBody>
-          <a:bodyPr wrap="square" lIns="0" tIns="0" rIns="0" bIns="0" rtlCol="0" anchor="t"/>
-          <a:lstStyle/>
-          <a:p>
-            <a:pPr marL="0" indent="0">
+            <a:pPr indent="0" marL="0">
               <a:lnSpc>
                 <a:spcPct val="118000"/>
               </a:lnSpc>
@@ -8528,16 +7392,40 @@
           </a:p>
         </p:txBody>
       </p:sp>
-      <p:sp>
-        <p:nvSpPr>
-          <p:cNvPr id="10" name="Text 6"/>
+      <p:pic>
+        <p:nvPicPr>
+          <p:cNvPr id="11" name="Image 4" descr="art\seta.png">    </p:cNvPr>
+          <p:cNvPicPr>
+            <a:picLocks noChangeAspect="1"/>
+          </p:cNvPicPr>
+          <p:nvPr/>
+        </p:nvPicPr>
+        <p:blipFill>
+          <a:blip r:embed="rId5"/>
+          <a:stretch>
+            <a:fillRect/>
+          </a:stretch>
+        </p:blipFill>
+        <p:spPr>
+          <a:xfrm>
+            <a:off x="2423160" y="9980676"/>
+            <a:ext cx="475488" cy="411480"/>
+          </a:xfrm>
+          <a:prstGeom prst="rect">
+            <a:avLst/>
+          </a:prstGeom>
+        </p:spPr>
+      </p:pic>
+      <p:sp>
+        <p:nvSpPr>
+          <p:cNvPr id="12" name="Text 5"/>
           <p:cNvSpPr txBox="1"/>
           <p:nvPr/>
         </p:nvSpPr>
         <p:spPr>
           <a:xfrm>
-            <a:off x="2423160" y="7470648"/>
-            <a:ext cx="777240" cy="548640"/>
+            <a:off x="3337560" y="9852660"/>
+            <a:ext cx="17922240" cy="548640"/>
           </a:xfrm>
           <a:prstGeom prst="rect">
             <a:avLst/>
@@ -8549,46 +7437,7 @@
           <a:bodyPr wrap="square" lIns="0" tIns="0" rIns="0" bIns="0" rtlCol="0" anchor="t"/>
           <a:lstStyle/>
           <a:p>
-            <a:pPr marL="0" indent="0">
-              <a:buNone/>
-            </a:pPr>
-            <a:r>
-              <a:rPr lang="en-US" sz="3000" b="1" dirty="0">
-                <a:solidFill>
-                  <a:srgbClr val="1F53E5"/>
-                </a:solidFill>
-                <a:latin typeface="Roboto" pitchFamily="34" charset="0"/>
-                <a:ea typeface="Roboto" pitchFamily="34" charset="-122"/>
-                <a:cs typeface="Roboto" pitchFamily="34" charset="-120"/>
-              </a:rPr>
-              <a:t>→</a:t>
-            </a:r>
-            <a:endParaRPr lang="en-US" sz="3000" dirty="0"/>
-          </a:p>
-        </p:txBody>
-      </p:sp>
-      <p:sp>
-        <p:nvSpPr>
-          <p:cNvPr id="11" name="Text 7"/>
-          <p:cNvSpPr txBox="1"/>
-          <p:nvPr/>
-        </p:nvSpPr>
-        <p:spPr>
-          <a:xfrm>
-            <a:off x="3337560" y="7452360"/>
-            <a:ext cx="17922240" cy="548640"/>
-          </a:xfrm>
-          <a:prstGeom prst="rect">
-            <a:avLst/>
-          </a:prstGeom>
-          <a:noFill/>
-          <a:ln/>
-        </p:spPr>
-        <p:txBody>
-          <a:bodyPr wrap="square" lIns="0" tIns="0" rIns="0" bIns="0" rtlCol="0" anchor="t"/>
-          <a:lstStyle/>
-          <a:p>
-            <a:pPr marL="0" indent="0">
+            <a:pPr indent="0" marL="0">
               <a:lnSpc>
                 <a:spcPct val="118000"/>
               </a:lnSpc>
@@ -8611,7 +7460,7 @@
       </p:sp>
       <p:sp>
         <p:nvSpPr>
-          <p:cNvPr id="12" name="Text 8"/>
+          <p:cNvPr id="13" name="Text 6"/>
           <p:cNvSpPr txBox="1"/>
           <p:nvPr/>
         </p:nvSpPr>
@@ -8630,7 +7479,7 @@
           <a:bodyPr wrap="square" lIns="0" tIns="0" rIns="0" bIns="0" rtlCol="0" anchor="ctr"/>
           <a:lstStyle/>
           <a:p>
-            <a:pPr marL="0" indent="0">
+            <a:pPr indent="0" marL="0">
               <a:buNone/>
             </a:pPr>
             <a:r>
@@ -8658,7 +7507,7 @@
 </p:sld>
 </file>
 
-<file path=ppt/slides/slide19.xml><?xml version="1.0" encoding="utf-8"?>
+<file path=ppt/slides/slide18.xml><?xml version="1.0" encoding="utf-8"?>
 <p:sld xmlns:a="http://schemas.openxmlformats.org/drawingml/2006/main" xmlns:r="http://schemas.openxmlformats.org/officeDocument/2006/relationships" xmlns:p="http://schemas.openxmlformats.org/presentationml/2006/main">
   <p:cSld name="Slide 18">
     <p:bg>
@@ -8666,7 +7515,6 @@
         <a:solidFill>
           <a:srgbClr val="052FD3"/>
         </a:solidFill>
-        <a:effectLst/>
       </p:bgPr>
     </p:bg>
     <p:spTree>
@@ -8685,14 +7533,14 @@
       </p:grpSpPr>
       <p:pic>
         <p:nvPicPr>
-          <p:cNvPr id="2" name="Image 0" descr="C:\Users\PCSTUD~1\AppData\Local\Temp\claude\C--Users-PC-Studio-2-Desktop-6498-Evals\7ce78c02-4c99-40d4-bc57-5394098065c6\scratchpad\art\logo.png"/>
+          <p:cNvPr id="2" name="Image 0" descr="art\logo.png">    </p:cNvPr>
           <p:cNvPicPr>
             <a:picLocks noChangeAspect="1"/>
           </p:cNvPicPr>
           <p:nvPr/>
         </p:nvPicPr>
         <p:blipFill>
-          <a:blip r:embed="rId3"/>
+          <a:blip r:embed="rId1"/>
           <a:stretch>
             <a:fillRect/>
           </a:stretch>
@@ -8728,7 +7576,7 @@
           <a:bodyPr wrap="square" lIns="0" tIns="0" rIns="0" bIns="0" rtlCol="0" anchor="ctr"/>
           <a:lstStyle/>
           <a:p>
-            <a:pPr marL="0" indent="0" algn="ctr">
+            <a:pPr algn="ctr" indent="0" marL="0">
               <a:lnSpc>
                 <a:spcPct val="105000"/>
               </a:lnSpc>
@@ -8757,15 +7605,14 @@
 </p:sld>
 </file>
 
-<file path=ppt/slides/slide2.xml><?xml version="1.0" encoding="utf-8"?>
+<file path=ppt/slides/slide19.xml><?xml version="1.0" encoding="utf-8"?>
 <p:sld xmlns:a="http://schemas.openxmlformats.org/drawingml/2006/main" xmlns:r="http://schemas.openxmlformats.org/officeDocument/2006/relationships" xmlns:p="http://schemas.openxmlformats.org/presentationml/2006/main">
-  <p:cSld name="Slide 2">
+  <p:cSld name="Slide 19">
     <p:bg>
       <p:bgPr>
         <a:solidFill>
-          <a:srgbClr val="052FD3"/>
+          <a:srgbClr val="0C0C0E"/>
         </a:solidFill>
-        <a:effectLst/>
       </p:bgPr>
     </p:bg>
     <p:spTree>
@@ -8784,7 +7631,156 @@
       </p:grpSpPr>
       <p:pic>
         <p:nvPicPr>
-          <p:cNvPr id="2" name="Image 0" descr="C:\Users\PCSTUD~1\AppData\Local\Temp\claude\C--Users-PC-Studio-2-Desktop-6498-Evals\7ce78c02-4c99-40d4-bc57-5394098065c6\scratchpad\art\logo.png"/>
+          <p:cNvPr id="2" name="Image 0" descr="art\malha.png">    </p:cNvPr>
+          <p:cNvPicPr>
+            <a:picLocks noChangeAspect="1"/>
+          </p:cNvPicPr>
+          <p:nvPr/>
+        </p:nvPicPr>
+        <p:blipFill>
+          <a:blip r:embed="rId1"/>
+          <a:stretch>
+            <a:fillRect/>
+          </a:stretch>
+        </p:blipFill>
+        <p:spPr>
+          <a:xfrm>
+            <a:off x="0" y="0"/>
+            <a:ext cx="24387048" cy="13716000"/>
+          </a:xfrm>
+          <a:prstGeom prst="rect">
+            <a:avLst/>
+          </a:prstGeom>
+        </p:spPr>
+      </p:pic>
+      <p:pic>
+        <p:nvPicPr>
+          <p:cNvPr id="3" name="Image 1" descr="art\logo.png">    </p:cNvPr>
+          <p:cNvPicPr>
+            <a:picLocks noChangeAspect="1"/>
+          </p:cNvPicPr>
+          <p:nvPr/>
+        </p:nvPicPr>
+        <p:blipFill>
+          <a:blip r:embed="rId2"/>
+          <a:stretch>
+            <a:fillRect/>
+          </a:stretch>
+        </p:blipFill>
+        <p:spPr>
+          <a:xfrm>
+            <a:off x="23436072" y="402336"/>
+            <a:ext cx="475488" cy="594360"/>
+          </a:xfrm>
+          <a:prstGeom prst="rect">
+            <a:avLst/>
+          </a:prstGeom>
+        </p:spPr>
+      </p:pic>
+      <p:sp>
+        <p:nvSpPr>
+          <p:cNvPr id="4" name="Text 0"/>
+          <p:cNvSpPr txBox="1"/>
+          <p:nvPr/>
+        </p:nvSpPr>
+        <p:spPr>
+          <a:xfrm>
+            <a:off x="2423160" y="1051560"/>
+            <a:ext cx="19540728" cy="594360"/>
+          </a:xfrm>
+          <a:prstGeom prst="rect">
+            <a:avLst/>
+          </a:prstGeom>
+          <a:noFill/>
+          <a:ln/>
+        </p:spPr>
+        <p:txBody>
+          <a:bodyPr wrap="square" lIns="0" tIns="0" rIns="0" bIns="0" rtlCol="0" anchor="ctr"/>
+          <a:lstStyle/>
+          <a:p>
+            <a:pPr indent="0" marL="0">
+              <a:buNone/>
+            </a:pPr>
+            <a:r>
+              <a:rPr lang="en-US" sz="2100" b="1" spc="250" kern="0" dirty="0">
+                <a:solidFill>
+                  <a:srgbClr val="1F53E5"/>
+                </a:solidFill>
+                <a:latin typeface="Encode Sans" pitchFamily="34" charset="0"/>
+                <a:ea typeface="Encode Sans" pitchFamily="34" charset="-122"/>
+                <a:cs typeface="Encode Sans" pitchFamily="34" charset="-120"/>
+              </a:rPr>
+              <a:t>FECHAMENTO DA AULA</a:t>
+            </a:r>
+            <a:endParaRPr lang="en-US" sz="2100" dirty="0"/>
+          </a:p>
+        </p:txBody>
+      </p:sp>
+      <p:sp>
+        <p:nvSpPr>
+          <p:cNvPr id="5" name="Text 1"/>
+          <p:cNvSpPr txBox="1"/>
+          <p:nvPr/>
+        </p:nvSpPr>
+        <p:spPr>
+          <a:xfrm>
+            <a:off x="2423160" y="1783080"/>
+            <a:ext cx="19568160" cy="2377440"/>
+          </a:xfrm>
+          <a:prstGeom prst="rect">
+            <a:avLst/>
+          </a:prstGeom>
+          <a:noFill/>
+          <a:ln/>
+        </p:spPr>
+        <p:txBody>
+          <a:bodyPr wrap="square" lIns="0" tIns="0" rIns="0" bIns="0" rtlCol="0" anchor="t"/>
+          <a:lstStyle/>
+          <a:p>
+            <a:pPr indent="0" marL="0">
+              <a:lnSpc>
+                <a:spcPct val="105000"/>
+              </a:lnSpc>
+              <a:buNone/>
+            </a:pPr>
+            <a:r>
+              <a:rPr lang="en-US" sz="6600" dirty="0">
+                <a:solidFill>
+                  <a:srgbClr val="BDBFC7"/>
+                </a:solidFill>
+                <a:latin typeface="Encode Sans" pitchFamily="34" charset="0"/>
+                <a:ea typeface="Encode Sans" pitchFamily="34" charset="-122"/>
+                <a:cs typeface="Encode Sans" pitchFamily="34" charset="-120"/>
+              </a:rPr>
+              <a:t>O que aprendemos</a:t>
+            </a:r>
+            <a:endParaRPr lang="en-US" sz="6600" dirty="0"/>
+          </a:p>
+        </p:txBody>
+      </p:sp>
+      <p:sp>
+        <p:nvSpPr>
+          <p:cNvPr id="6" name="Shape 2"/>
+          <p:cNvSpPr/>
+          <p:nvPr/>
+        </p:nvSpPr>
+        <p:spPr>
+          <a:xfrm>
+            <a:off x="2423160" y="4526280"/>
+            <a:ext cx="2011680" cy="68580"/>
+          </a:xfrm>
+          <a:prstGeom prst="rect">
+            <a:avLst/>
+          </a:prstGeom>
+          <a:solidFill>
+            <a:srgbClr val="1F53E5"/>
+          </a:solidFill>
+          <a:ln/>
+        </p:spPr>
+      </p:sp>
+      <p:pic>
+        <p:nvPicPr>
+          <p:cNvPr id="7" name="Image 2" descr="art\seta.png">    </p:cNvPr>
           <p:cNvPicPr>
             <a:picLocks noChangeAspect="1"/>
           </p:cNvPicPr>
@@ -8798,8 +7794,8 @@
         </p:blipFill>
         <p:spPr>
           <a:xfrm>
-            <a:off x="23436072" y="402336"/>
-            <a:ext cx="475488" cy="594360"/>
+            <a:off x="2423160" y="6094476"/>
+            <a:ext cx="475488" cy="411480"/>
           </a:xfrm>
           <a:prstGeom prst="rect">
             <a:avLst/>
@@ -8808,14 +7804,14 @@
       </p:pic>
       <p:sp>
         <p:nvSpPr>
-          <p:cNvPr id="3" name="Text 0"/>
+          <p:cNvPr id="8" name="Text 3"/>
           <p:cNvSpPr txBox="1"/>
           <p:nvPr/>
         </p:nvSpPr>
         <p:spPr>
           <a:xfrm>
-            <a:off x="4416552" y="4023360"/>
-            <a:ext cx="15544800" cy="5669280"/>
+            <a:off x="3337560" y="5966460"/>
+            <a:ext cx="17922240" cy="548640"/>
           </a:xfrm>
           <a:prstGeom prst="rect">
             <a:avLst/>
@@ -8824,27 +7820,266 @@
           <a:ln/>
         </p:spPr>
         <p:txBody>
-          <a:bodyPr wrap="square" lIns="0" tIns="0" rIns="0" bIns="0" rtlCol="0" anchor="ctr"/>
-          <a:lstStyle/>
-          <a:p>
-            <a:pPr marL="0" indent="0" algn="ctr">
+          <a:bodyPr wrap="square" lIns="0" tIns="0" rIns="0" bIns="0" rtlCol="0" anchor="t"/>
+          <a:lstStyle/>
+          <a:p>
+            <a:pPr indent="0" marL="0">
               <a:lnSpc>
-                <a:spcPct val="105000"/>
+                <a:spcPct val="118000"/>
               </a:lnSpc>
               <a:buNone/>
             </a:pPr>
             <a:r>
-              <a:rPr lang="en-US" sz="9600" dirty="0">
+              <a:rPr lang="en-US" sz="2800" dirty="0">
                 <a:solidFill>
-                  <a:srgbClr val="FFFFFF"/>
+                  <a:srgbClr val="A7A9B4"/>
                 </a:solidFill>
-                <a:latin typeface="Encode Sans" pitchFamily="34" charset="0"/>
-                <a:ea typeface="Encode Sans" pitchFamily="34" charset="-122"/>
-                <a:cs typeface="Encode Sans" pitchFamily="34" charset="-120"/>
+                <a:latin typeface="Roboto" pitchFamily="34" charset="0"/>
+                <a:ea typeface="Roboto" pitchFamily="34" charset="-122"/>
+                <a:cs typeface="Roboto" pitchFamily="34" charset="-120"/>
               </a:rPr>
-              <a:t>3.1 O que é observabilidade?</a:t>
-            </a:r>
-            <a:endParaRPr lang="en-US" sz="9600" dirty="0"/>
+              <a:t>Observabilidade é reconstruir a causa, não só registrar o evento.</a:t>
+            </a:r>
+            <a:endParaRPr lang="en-US" sz="2800" dirty="0"/>
+          </a:p>
+        </p:txBody>
+      </p:sp>
+      <p:pic>
+        <p:nvPicPr>
+          <p:cNvPr id="9" name="Image 3" descr="art\seta.png">    </p:cNvPr>
+          <p:cNvPicPr>
+            <a:picLocks noChangeAspect="1"/>
+          </p:cNvPicPr>
+          <p:nvPr/>
+        </p:nvPicPr>
+        <p:blipFill>
+          <a:blip r:embed="rId4"/>
+          <a:stretch>
+            <a:fillRect/>
+          </a:stretch>
+        </p:blipFill>
+        <p:spPr>
+          <a:xfrm>
+            <a:off x="2423160" y="7648956"/>
+            <a:ext cx="475488" cy="411480"/>
+          </a:xfrm>
+          <a:prstGeom prst="rect">
+            <a:avLst/>
+          </a:prstGeom>
+        </p:spPr>
+      </p:pic>
+      <p:sp>
+        <p:nvSpPr>
+          <p:cNvPr id="10" name="Text 4"/>
+          <p:cNvSpPr txBox="1"/>
+          <p:nvPr/>
+        </p:nvSpPr>
+        <p:spPr>
+          <a:xfrm>
+            <a:off x="3337560" y="7520940"/>
+            <a:ext cx="17922240" cy="548640"/>
+          </a:xfrm>
+          <a:prstGeom prst="rect">
+            <a:avLst/>
+          </a:prstGeom>
+          <a:noFill/>
+          <a:ln/>
+        </p:spPr>
+        <p:txBody>
+          <a:bodyPr wrap="square" lIns="0" tIns="0" rIns="0" bIns="0" rtlCol="0" anchor="t"/>
+          <a:lstStyle/>
+          <a:p>
+            <a:pPr indent="0" marL="0">
+              <a:lnSpc>
+                <a:spcPct val="118000"/>
+              </a:lnSpc>
+              <a:buNone/>
+            </a:pPr>
+            <a:r>
+              <a:rPr lang="en-US" sz="2800" dirty="0">
+                <a:solidFill>
+                  <a:srgbClr val="A7A9B4"/>
+                </a:solidFill>
+                <a:latin typeface="Roboto" pitchFamily="34" charset="0"/>
+                <a:ea typeface="Roboto" pitchFamily="34" charset="-122"/>
+                <a:cs typeface="Roboto" pitchFamily="34" charset="-120"/>
+              </a:rPr>
+              <a:t>Interação, passo e nota são o vocabulário que você precisa para navegar o painel sozinha.</a:t>
+            </a:r>
+            <a:endParaRPr lang="en-US" sz="2800" dirty="0"/>
+          </a:p>
+        </p:txBody>
+      </p:sp>
+      <p:pic>
+        <p:nvPicPr>
+          <p:cNvPr id="11" name="Image 4" descr="art\seta.png">    </p:cNvPr>
+          <p:cNvPicPr>
+            <a:picLocks noChangeAspect="1"/>
+          </p:cNvPicPr>
+          <p:nvPr/>
+        </p:nvPicPr>
+        <p:blipFill>
+          <a:blip r:embed="rId5"/>
+          <a:stretch>
+            <a:fillRect/>
+          </a:stretch>
+        </p:blipFill>
+        <p:spPr>
+          <a:xfrm>
+            <a:off x="2423160" y="9203436"/>
+            <a:ext cx="475488" cy="411480"/>
+          </a:xfrm>
+          <a:prstGeom prst="rect">
+            <a:avLst/>
+          </a:prstGeom>
+        </p:spPr>
+      </p:pic>
+      <p:sp>
+        <p:nvSpPr>
+          <p:cNvPr id="12" name="Text 5"/>
+          <p:cNvSpPr txBox="1"/>
+          <p:nvPr/>
+        </p:nvSpPr>
+        <p:spPr>
+          <a:xfrm>
+            <a:off x="3337560" y="9075420"/>
+            <a:ext cx="17922240" cy="548640"/>
+          </a:xfrm>
+          <a:prstGeom prst="rect">
+            <a:avLst/>
+          </a:prstGeom>
+          <a:noFill/>
+          <a:ln/>
+        </p:spPr>
+        <p:txBody>
+          <a:bodyPr wrap="square" lIns="0" tIns="0" rIns="0" bIns="0" rtlCol="0" anchor="t"/>
+          <a:lstStyle/>
+          <a:p>
+            <a:pPr indent="0" marL="0">
+              <a:lnSpc>
+                <a:spcPct val="118000"/>
+              </a:lnSpc>
+              <a:buNone/>
+            </a:pPr>
+            <a:r>
+              <a:rPr lang="en-US" sz="2800" b="1" dirty="0">
+                <a:solidFill>
+                  <a:srgbClr val="F4F5F6"/>
+                </a:solidFill>
+                <a:latin typeface="Roboto" pitchFamily="34" charset="0"/>
+                <a:ea typeface="Roboto" pitchFamily="34" charset="-122"/>
+                <a:cs typeface="Roboto" pitchFamily="34" charset="-120"/>
+              </a:rPr>
+              <a:t>Com dado real dá para ver para onde o dinheiro está indo — e onde trocar de modelo compensa.</a:t>
+            </a:r>
+            <a:endParaRPr lang="en-US" sz="2800" dirty="0"/>
+          </a:p>
+        </p:txBody>
+      </p:sp>
+      <p:pic>
+        <p:nvPicPr>
+          <p:cNvPr id="13" name="Image 5" descr="art\seta.png">    </p:cNvPr>
+          <p:cNvPicPr>
+            <a:picLocks noChangeAspect="1"/>
+          </p:cNvPicPr>
+          <p:nvPr/>
+        </p:nvPicPr>
+        <p:blipFill>
+          <a:blip r:embed="rId6"/>
+          <a:stretch>
+            <a:fillRect/>
+          </a:stretch>
+        </p:blipFill>
+        <p:spPr>
+          <a:xfrm>
+            <a:off x="2423160" y="10757916"/>
+            <a:ext cx="475488" cy="411480"/>
+          </a:xfrm>
+          <a:prstGeom prst="rect">
+            <a:avLst/>
+          </a:prstGeom>
+        </p:spPr>
+      </p:pic>
+      <p:sp>
+        <p:nvSpPr>
+          <p:cNvPr id="14" name="Text 6"/>
+          <p:cNvSpPr txBox="1"/>
+          <p:nvPr/>
+        </p:nvSpPr>
+        <p:spPr>
+          <a:xfrm>
+            <a:off x="3337560" y="10629900"/>
+            <a:ext cx="17922240" cy="548640"/>
+          </a:xfrm>
+          <a:prstGeom prst="rect">
+            <a:avLst/>
+          </a:prstGeom>
+          <a:noFill/>
+          <a:ln/>
+        </p:spPr>
+        <p:txBody>
+          <a:bodyPr wrap="square" lIns="0" tIns="0" rIns="0" bIns="0" rtlCol="0" anchor="t"/>
+          <a:lstStyle/>
+          <a:p>
+            <a:pPr indent="0" marL="0">
+              <a:lnSpc>
+                <a:spcPct val="118000"/>
+              </a:lnSpc>
+              <a:buNone/>
+            </a:pPr>
+            <a:r>
+              <a:rPr lang="en-US" sz="2800" dirty="0">
+                <a:solidFill>
+                  <a:srgbClr val="A7A9B4"/>
+                </a:solidFill>
+                <a:latin typeface="Roboto" pitchFamily="34" charset="0"/>
+                <a:ea typeface="Roboto" pitchFamily="34" charset="-122"/>
+                <a:cs typeface="Roboto" pitchFamily="34" charset="-120"/>
+              </a:rPr>
+              <a:t>Quatro falhas documentadas, nenhuma descoberta por reclamação de usuário.</a:t>
+            </a:r>
+            <a:endParaRPr lang="en-US" sz="2800" dirty="0"/>
+          </a:p>
+        </p:txBody>
+      </p:sp>
+      <p:sp>
+        <p:nvSpPr>
+          <p:cNvPr id="15" name="Text 7"/>
+          <p:cNvSpPr txBox="1"/>
+          <p:nvPr/>
+        </p:nvSpPr>
+        <p:spPr>
+          <a:xfrm>
+            <a:off x="2423160" y="12755880"/>
+            <a:ext cx="19540728" cy="457200"/>
+          </a:xfrm>
+          <a:prstGeom prst="rect">
+            <a:avLst/>
+          </a:prstGeom>
+          <a:noFill/>
+          <a:ln/>
+        </p:spPr>
+        <p:txBody>
+          <a:bodyPr wrap="square" lIns="0" tIns="0" rIns="0" bIns="0" rtlCol="0" anchor="ctr"/>
+          <a:lstStyle/>
+          <a:p>
+            <a:pPr indent="0" marL="0">
+              <a:buNone/>
+            </a:pPr>
+            <a:r>
+              <a:rPr lang="en-US" sz="1500" dirty="0">
+                <a:solidFill>
+                  <a:srgbClr val="A7A9B4">
+                    <a:alpha val="65000"/>
+                  </a:srgbClr>
+                </a:solidFill>
+                <a:latin typeface="Roboto" pitchFamily="34" charset="0"/>
+                <a:ea typeface="Roboto" pitchFamily="34" charset="-122"/>
+                <a:cs typeface="Roboto" pitchFamily="34" charset="-120"/>
+              </a:rPr>
+              <a:t>Aula 3 — Observabilidade: monitorando em produção — Evals, observabilidade e conformidade</a:t>
+            </a:r>
+            <a:endParaRPr lang="en-US" sz="1500" dirty="0"/>
           </a:p>
         </p:txBody>
       </p:sp>
@@ -8856,15 +8091,14 @@
 </p:sld>
 </file>
 
-<file path=ppt/slides/slide20.xml><?xml version="1.0" encoding="utf-8"?>
+<file path=ppt/slides/slide2.xml><?xml version="1.0" encoding="utf-8"?>
 <p:sld xmlns:a="http://schemas.openxmlformats.org/drawingml/2006/main" xmlns:r="http://schemas.openxmlformats.org/officeDocument/2006/relationships" xmlns:p="http://schemas.openxmlformats.org/presentationml/2006/main">
-  <p:cSld name="Slide 19">
+  <p:cSld name="Slide 2">
     <p:bg>
       <p:bgPr>
         <a:solidFill>
-          <a:srgbClr val="0C0C0E"/>
+          <a:srgbClr val="052FD3"/>
         </a:solidFill>
-        <a:effectLst/>
       </p:bgPr>
     </p:bg>
     <p:spTree>
@@ -8883,44 +8117,20 @@
       </p:grpSpPr>
       <p:pic>
         <p:nvPicPr>
-          <p:cNvPr id="2" name="Image 0" descr="C:\Users\PCSTUD~1\AppData\Local\Temp\claude\C--Users-PC-Studio-2-Desktop-6498-Evals\7ce78c02-4c99-40d4-bc57-5394098065c6\scratchpad\art\malha.png"/>
+          <p:cNvPr id="2" name="Image 0" descr="art\logo.png">    </p:cNvPr>
           <p:cNvPicPr>
             <a:picLocks noChangeAspect="1"/>
           </p:cNvPicPr>
           <p:nvPr/>
         </p:nvPicPr>
         <p:blipFill>
-          <a:blip r:embed="rId3"/>
+          <a:blip r:embed="rId1"/>
           <a:stretch>
             <a:fillRect/>
           </a:stretch>
         </p:blipFill>
         <p:spPr>
           <a:xfrm>
-            <a:off x="0" y="0"/>
-            <a:ext cx="24387048" cy="13716000"/>
-          </a:xfrm>
-          <a:prstGeom prst="rect">
-            <a:avLst/>
-          </a:prstGeom>
-        </p:spPr>
-      </p:pic>
-      <p:pic>
-        <p:nvPicPr>
-          <p:cNvPr id="3" name="Image 1" descr="C:\Users\PCSTUD~1\AppData\Local\Temp\claude\C--Users-PC-Studio-2-Desktop-6498-Evals\7ce78c02-4c99-40d4-bc57-5394098065c6\scratchpad\art\logo.png"/>
-          <p:cNvPicPr>
-            <a:picLocks noChangeAspect="1"/>
-          </p:cNvPicPr>
-          <p:nvPr/>
-        </p:nvPicPr>
-        <p:blipFill>
-          <a:blip r:embed="rId4"/>
-          <a:stretch>
-            <a:fillRect/>
-          </a:stretch>
-        </p:blipFill>
-        <p:spPr>
-          <a:xfrm>
             <a:off x="23436072" y="402336"/>
             <a:ext cx="475488" cy="594360"/>
           </a:xfrm>
@@ -8931,14 +8141,14 @@
       </p:pic>
       <p:sp>
         <p:nvSpPr>
-          <p:cNvPr id="4" name="Text 0"/>
+          <p:cNvPr id="3" name="Text 0"/>
           <p:cNvSpPr txBox="1"/>
           <p:nvPr/>
         </p:nvSpPr>
         <p:spPr>
           <a:xfrm>
-            <a:off x="2423160" y="2148840"/>
-            <a:ext cx="19540728" cy="594360"/>
+            <a:off x="4416552" y="4023360"/>
+            <a:ext cx="15544800" cy="5669280"/>
           </a:xfrm>
           <a:prstGeom prst="rect">
             <a:avLst/>
@@ -8950,428 +8160,24 @@
           <a:bodyPr wrap="square" lIns="0" tIns="0" rIns="0" bIns="0" rtlCol="0" anchor="ctr"/>
           <a:lstStyle/>
           <a:p>
-            <a:pPr marL="0" indent="0">
+            <a:pPr algn="ctr" indent="0" marL="0">
+              <a:lnSpc>
+                <a:spcPct val="105000"/>
+              </a:lnSpc>
               <a:buNone/>
             </a:pPr>
             <a:r>
-              <a:rPr lang="en-US" sz="2100" b="1" kern="0" spc="250" dirty="0">
+              <a:rPr lang="en-US" sz="9600" dirty="0">
                 <a:solidFill>
-                  <a:srgbClr val="1F53E5"/>
+                  <a:srgbClr val="FFFFFF"/>
                 </a:solidFill>
                 <a:latin typeface="Encode Sans" pitchFamily="34" charset="0"/>
                 <a:ea typeface="Encode Sans" pitchFamily="34" charset="-122"/>
                 <a:cs typeface="Encode Sans" pitchFamily="34" charset="-120"/>
               </a:rPr>
-              <a:t>FECHAMENTO DA AULA</a:t>
-            </a:r>
-            <a:endParaRPr lang="en-US" sz="2100" dirty="0"/>
-          </a:p>
-        </p:txBody>
-      </p:sp>
-      <p:sp>
-        <p:nvSpPr>
-          <p:cNvPr id="5" name="Text 1"/>
-          <p:cNvSpPr txBox="1"/>
-          <p:nvPr/>
-        </p:nvSpPr>
-        <p:spPr>
-          <a:xfrm>
-            <a:off x="2423160" y="2880360"/>
-            <a:ext cx="18745200" cy="2377440"/>
-          </a:xfrm>
-          <a:prstGeom prst="rect">
-            <a:avLst/>
-          </a:prstGeom>
-          <a:noFill/>
-          <a:ln/>
-        </p:spPr>
-        <p:txBody>
-          <a:bodyPr wrap="square" lIns="0" tIns="0" rIns="0" bIns="0" rtlCol="0" anchor="t"/>
-          <a:lstStyle/>
-          <a:p>
-            <a:pPr marL="0" indent="0">
-              <a:lnSpc>
-                <a:spcPct val="105000"/>
-              </a:lnSpc>
-              <a:buNone/>
-            </a:pPr>
-            <a:r>
-              <a:rPr lang="en-US" sz="6600" dirty="0">
-                <a:solidFill>
-                  <a:srgbClr val="BDBFC7"/>
-                </a:solidFill>
-                <a:latin typeface="Encode Sans" pitchFamily="34" charset="0"/>
-                <a:ea typeface="Encode Sans" pitchFamily="34" charset="-122"/>
-                <a:cs typeface="Encode Sans" pitchFamily="34" charset="-120"/>
-              </a:rPr>
-              <a:t>O que aprendemos</a:t>
-            </a:r>
-            <a:endParaRPr lang="en-US" sz="6600" dirty="0"/>
-          </a:p>
-        </p:txBody>
-      </p:sp>
-      <p:sp>
-        <p:nvSpPr>
-          <p:cNvPr id="6" name="Text 2"/>
-          <p:cNvSpPr txBox="1"/>
-          <p:nvPr/>
-        </p:nvSpPr>
-        <p:spPr>
-          <a:xfrm>
-            <a:off x="2423160" y="5367528"/>
-            <a:ext cx="777240" cy="548640"/>
-          </a:xfrm>
-          <a:prstGeom prst="rect">
-            <a:avLst/>
-          </a:prstGeom>
-          <a:noFill/>
-          <a:ln/>
-        </p:spPr>
-        <p:txBody>
-          <a:bodyPr wrap="square" lIns="0" tIns="0" rIns="0" bIns="0" rtlCol="0" anchor="t"/>
-          <a:lstStyle/>
-          <a:p>
-            <a:pPr marL="0" indent="0">
-              <a:buNone/>
-            </a:pPr>
-            <a:r>
-              <a:rPr lang="en-US" sz="3000" b="1" dirty="0">
-                <a:solidFill>
-                  <a:srgbClr val="1F53E5"/>
-                </a:solidFill>
-                <a:latin typeface="Roboto" pitchFamily="34" charset="0"/>
-                <a:ea typeface="Roboto" pitchFamily="34" charset="-122"/>
-                <a:cs typeface="Roboto" pitchFamily="34" charset="-120"/>
-              </a:rPr>
-              <a:t>→</a:t>
-            </a:r>
-            <a:endParaRPr lang="en-US" sz="3000" dirty="0"/>
-          </a:p>
-        </p:txBody>
-      </p:sp>
-      <p:sp>
-        <p:nvSpPr>
-          <p:cNvPr id="7" name="Text 3"/>
-          <p:cNvSpPr txBox="1"/>
-          <p:nvPr/>
-        </p:nvSpPr>
-        <p:spPr>
-          <a:xfrm>
-            <a:off x="3337560" y="5349240"/>
-            <a:ext cx="17922240" cy="548640"/>
-          </a:xfrm>
-          <a:prstGeom prst="rect">
-            <a:avLst/>
-          </a:prstGeom>
-          <a:noFill/>
-          <a:ln/>
-        </p:spPr>
-        <p:txBody>
-          <a:bodyPr wrap="square" lIns="0" tIns="0" rIns="0" bIns="0" rtlCol="0" anchor="t"/>
-          <a:lstStyle/>
-          <a:p>
-            <a:pPr marL="0" indent="0">
-              <a:lnSpc>
-                <a:spcPct val="118000"/>
-              </a:lnSpc>
-              <a:buNone/>
-            </a:pPr>
-            <a:r>
-              <a:rPr lang="en-US" sz="2800" dirty="0">
-                <a:solidFill>
-                  <a:srgbClr val="A7A9B4"/>
-                </a:solidFill>
-                <a:latin typeface="Roboto" pitchFamily="34" charset="0"/>
-                <a:ea typeface="Roboto" pitchFamily="34" charset="-122"/>
-                <a:cs typeface="Roboto" pitchFamily="34" charset="-120"/>
-              </a:rPr>
-              <a:t>Observabilidade é reconstruir a causa, não só registrar o evento.</a:t>
-            </a:r>
-            <a:endParaRPr lang="en-US" sz="2800" dirty="0"/>
-          </a:p>
-        </p:txBody>
-      </p:sp>
-      <p:sp>
-        <p:nvSpPr>
-          <p:cNvPr id="8" name="Text 4"/>
-          <p:cNvSpPr txBox="1"/>
-          <p:nvPr/>
-        </p:nvSpPr>
-        <p:spPr>
-          <a:xfrm>
-            <a:off x="2423160" y="6419088"/>
-            <a:ext cx="777240" cy="548640"/>
-          </a:xfrm>
-          <a:prstGeom prst="rect">
-            <a:avLst/>
-          </a:prstGeom>
-          <a:noFill/>
-          <a:ln/>
-        </p:spPr>
-        <p:txBody>
-          <a:bodyPr wrap="square" lIns="0" tIns="0" rIns="0" bIns="0" rtlCol="0" anchor="t"/>
-          <a:lstStyle/>
-          <a:p>
-            <a:pPr marL="0" indent="0">
-              <a:buNone/>
-            </a:pPr>
-            <a:r>
-              <a:rPr lang="en-US" sz="3000" b="1" dirty="0">
-                <a:solidFill>
-                  <a:srgbClr val="1F53E5"/>
-                </a:solidFill>
-                <a:latin typeface="Roboto" pitchFamily="34" charset="0"/>
-                <a:ea typeface="Roboto" pitchFamily="34" charset="-122"/>
-                <a:cs typeface="Roboto" pitchFamily="34" charset="-120"/>
-              </a:rPr>
-              <a:t>→</a:t>
-            </a:r>
-            <a:endParaRPr lang="en-US" sz="3000" dirty="0"/>
-          </a:p>
-        </p:txBody>
-      </p:sp>
-      <p:sp>
-        <p:nvSpPr>
-          <p:cNvPr id="9" name="Text 5"/>
-          <p:cNvSpPr txBox="1"/>
-          <p:nvPr/>
-        </p:nvSpPr>
-        <p:spPr>
-          <a:xfrm>
-            <a:off x="3337560" y="6400800"/>
-            <a:ext cx="17922240" cy="548640"/>
-          </a:xfrm>
-          <a:prstGeom prst="rect">
-            <a:avLst/>
-          </a:prstGeom>
-          <a:noFill/>
-          <a:ln/>
-        </p:spPr>
-        <p:txBody>
-          <a:bodyPr wrap="square" lIns="0" tIns="0" rIns="0" bIns="0" rtlCol="0" anchor="t"/>
-          <a:lstStyle/>
-          <a:p>
-            <a:pPr marL="0" indent="0">
-              <a:lnSpc>
-                <a:spcPct val="118000"/>
-              </a:lnSpc>
-              <a:buNone/>
-            </a:pPr>
-            <a:r>
-              <a:rPr lang="en-US" sz="2800" dirty="0">
-                <a:solidFill>
-                  <a:srgbClr val="A7A9B4"/>
-                </a:solidFill>
-                <a:latin typeface="Roboto" pitchFamily="34" charset="0"/>
-                <a:ea typeface="Roboto" pitchFamily="34" charset="-122"/>
-                <a:cs typeface="Roboto" pitchFamily="34" charset="-120"/>
-              </a:rPr>
-              <a:t>Interação, passo e nota são o vocabulário que você precisa para navegar o painel sozinha.</a:t>
-            </a:r>
-            <a:endParaRPr lang="en-US" sz="2800" dirty="0"/>
-          </a:p>
-        </p:txBody>
-      </p:sp>
-      <p:sp>
-        <p:nvSpPr>
-          <p:cNvPr id="10" name="Text 6"/>
-          <p:cNvSpPr txBox="1"/>
-          <p:nvPr/>
-        </p:nvSpPr>
-        <p:spPr>
-          <a:xfrm>
-            <a:off x="2423160" y="7470648"/>
-            <a:ext cx="777240" cy="548640"/>
-          </a:xfrm>
-          <a:prstGeom prst="rect">
-            <a:avLst/>
-          </a:prstGeom>
-          <a:noFill/>
-          <a:ln/>
-        </p:spPr>
-        <p:txBody>
-          <a:bodyPr wrap="square" lIns="0" tIns="0" rIns="0" bIns="0" rtlCol="0" anchor="t"/>
-          <a:lstStyle/>
-          <a:p>
-            <a:pPr marL="0" indent="0">
-              <a:buNone/>
-            </a:pPr>
-            <a:r>
-              <a:rPr lang="en-US" sz="3000" b="1" dirty="0">
-                <a:solidFill>
-                  <a:srgbClr val="1F53E5"/>
-                </a:solidFill>
-                <a:latin typeface="Roboto" pitchFamily="34" charset="0"/>
-                <a:ea typeface="Roboto" pitchFamily="34" charset="-122"/>
-                <a:cs typeface="Roboto" pitchFamily="34" charset="-120"/>
-              </a:rPr>
-              <a:t>→</a:t>
-            </a:r>
-            <a:endParaRPr lang="en-US" sz="3000" dirty="0"/>
-          </a:p>
-        </p:txBody>
-      </p:sp>
-      <p:sp>
-        <p:nvSpPr>
-          <p:cNvPr id="11" name="Text 7"/>
-          <p:cNvSpPr txBox="1"/>
-          <p:nvPr/>
-        </p:nvSpPr>
-        <p:spPr>
-          <a:xfrm>
-            <a:off x="3337560" y="7452360"/>
-            <a:ext cx="17922240" cy="548640"/>
-          </a:xfrm>
-          <a:prstGeom prst="rect">
-            <a:avLst/>
-          </a:prstGeom>
-          <a:noFill/>
-          <a:ln/>
-        </p:spPr>
-        <p:txBody>
-          <a:bodyPr wrap="square" lIns="0" tIns="0" rIns="0" bIns="0" rtlCol="0" anchor="t"/>
-          <a:lstStyle/>
-          <a:p>
-            <a:pPr marL="0" indent="0">
-              <a:lnSpc>
-                <a:spcPct val="118000"/>
-              </a:lnSpc>
-              <a:buNone/>
-            </a:pPr>
-            <a:r>
-              <a:rPr lang="en-US" sz="2800" b="1" dirty="0">
-                <a:solidFill>
-                  <a:srgbClr val="BDBFC7"/>
-                </a:solidFill>
-                <a:latin typeface="Roboto" pitchFamily="34" charset="0"/>
-                <a:ea typeface="Roboto" pitchFamily="34" charset="-122"/>
-                <a:cs typeface="Roboto" pitchFamily="34" charset="-120"/>
-              </a:rPr>
-              <a:t>Com dado real dá para ver para onde o dinheiro está indo — e onde trocar de modelo compensa.</a:t>
-            </a:r>
-            <a:endParaRPr lang="en-US" sz="2800" dirty="0"/>
-          </a:p>
-        </p:txBody>
-      </p:sp>
-      <p:sp>
-        <p:nvSpPr>
-          <p:cNvPr id="12" name="Text 8"/>
-          <p:cNvSpPr txBox="1"/>
-          <p:nvPr/>
-        </p:nvSpPr>
-        <p:spPr>
-          <a:xfrm>
-            <a:off x="2423160" y="8522208"/>
-            <a:ext cx="777240" cy="548640"/>
-          </a:xfrm>
-          <a:prstGeom prst="rect">
-            <a:avLst/>
-          </a:prstGeom>
-          <a:noFill/>
-          <a:ln/>
-        </p:spPr>
-        <p:txBody>
-          <a:bodyPr wrap="square" lIns="0" tIns="0" rIns="0" bIns="0" rtlCol="0" anchor="t"/>
-          <a:lstStyle/>
-          <a:p>
-            <a:pPr marL="0" indent="0">
-              <a:buNone/>
-            </a:pPr>
-            <a:r>
-              <a:rPr lang="en-US" sz="3000" b="1" dirty="0">
-                <a:solidFill>
-                  <a:srgbClr val="1F53E5"/>
-                </a:solidFill>
-                <a:latin typeface="Roboto" pitchFamily="34" charset="0"/>
-                <a:ea typeface="Roboto" pitchFamily="34" charset="-122"/>
-                <a:cs typeface="Roboto" pitchFamily="34" charset="-120"/>
-              </a:rPr>
-              <a:t>→</a:t>
-            </a:r>
-            <a:endParaRPr lang="en-US" sz="3000" dirty="0"/>
-          </a:p>
-        </p:txBody>
-      </p:sp>
-      <p:sp>
-        <p:nvSpPr>
-          <p:cNvPr id="13" name="Text 9"/>
-          <p:cNvSpPr txBox="1"/>
-          <p:nvPr/>
-        </p:nvSpPr>
-        <p:spPr>
-          <a:xfrm>
-            <a:off x="3337560" y="8503920"/>
-            <a:ext cx="17922240" cy="548640"/>
-          </a:xfrm>
-          <a:prstGeom prst="rect">
-            <a:avLst/>
-          </a:prstGeom>
-          <a:noFill/>
-          <a:ln/>
-        </p:spPr>
-        <p:txBody>
-          <a:bodyPr wrap="square" lIns="0" tIns="0" rIns="0" bIns="0" rtlCol="0" anchor="t"/>
-          <a:lstStyle/>
-          <a:p>
-            <a:pPr marL="0" indent="0">
-              <a:lnSpc>
-                <a:spcPct val="118000"/>
-              </a:lnSpc>
-              <a:buNone/>
-            </a:pPr>
-            <a:r>
-              <a:rPr lang="en-US" sz="2800" dirty="0">
-                <a:solidFill>
-                  <a:srgbClr val="A7A9B4"/>
-                </a:solidFill>
-                <a:latin typeface="Roboto" pitchFamily="34" charset="0"/>
-                <a:ea typeface="Roboto" pitchFamily="34" charset="-122"/>
-                <a:cs typeface="Roboto" pitchFamily="34" charset="-120"/>
-              </a:rPr>
-              <a:t>Quatro falhas documentadas, nenhuma descoberta por reclamação de usuário.</a:t>
-            </a:r>
-            <a:endParaRPr lang="en-US" sz="2800" dirty="0"/>
-          </a:p>
-        </p:txBody>
-      </p:sp>
-      <p:sp>
-        <p:nvSpPr>
-          <p:cNvPr id="14" name="Text 10"/>
-          <p:cNvSpPr txBox="1"/>
-          <p:nvPr/>
-        </p:nvSpPr>
-        <p:spPr>
-          <a:xfrm>
-            <a:off x="2423160" y="12755880"/>
-            <a:ext cx="19540728" cy="457200"/>
-          </a:xfrm>
-          <a:prstGeom prst="rect">
-            <a:avLst/>
-          </a:prstGeom>
-          <a:noFill/>
-          <a:ln/>
-        </p:spPr>
-        <p:txBody>
-          <a:bodyPr wrap="square" lIns="0" tIns="0" rIns="0" bIns="0" rtlCol="0" anchor="ctr"/>
-          <a:lstStyle/>
-          <a:p>
-            <a:pPr marL="0" indent="0">
-              <a:buNone/>
-            </a:pPr>
-            <a:r>
-              <a:rPr lang="en-US" sz="1500" dirty="0">
-                <a:solidFill>
-                  <a:srgbClr val="A7A9B4">
-                    <a:alpha val="65000"/>
-                  </a:srgbClr>
-                </a:solidFill>
-                <a:latin typeface="Roboto" pitchFamily="34" charset="0"/>
-                <a:ea typeface="Roboto" pitchFamily="34" charset="-122"/>
-                <a:cs typeface="Roboto" pitchFamily="34" charset="-120"/>
-              </a:rPr>
-              <a:t>Aula 3 — Observabilidade: monitorando em produção — Evals, observabilidade e conformidade</a:t>
-            </a:r>
-            <a:endParaRPr lang="en-US" sz="1500" dirty="0"/>
+              <a:t>3.1 O que é observabilidade?</a:t>
+            </a:r>
+            <a:endParaRPr lang="en-US" sz="9600" dirty="0"/>
           </a:p>
         </p:txBody>
       </p:sp>
@@ -9383,7 +8189,7 @@
 </p:sld>
 </file>
 
-<file path=ppt/slides/slide21.xml><?xml version="1.0" encoding="utf-8"?>
+<file path=ppt/slides/slide20.xml><?xml version="1.0" encoding="utf-8"?>
 <p:sld xmlns:a="http://schemas.openxmlformats.org/drawingml/2006/main" xmlns:r="http://schemas.openxmlformats.org/officeDocument/2006/relationships" xmlns:p="http://schemas.openxmlformats.org/presentationml/2006/main">
   <p:cSld name="Slide 20">
     <p:bg>
@@ -9391,7 +8197,6 @@
         <a:solidFill>
           <a:srgbClr val="010C53"/>
         </a:solidFill>
-        <a:effectLst/>
       </p:bgPr>
     </p:bg>
     <p:spTree>
@@ -9410,14 +8215,14 @@
       </p:grpSpPr>
       <p:pic>
         <p:nvPicPr>
-          <p:cNvPr id="2" name="Image 0" descr="C:\Users\PCSTUD~1\AppData\Local\Temp\claude\C--Users-PC-Studio-2-Desktop-6498-Evals\7ce78c02-4c99-40d4-bc57-5394098065c6\scratchpad\art\logo.png"/>
+          <p:cNvPr id="2" name="Image 0" descr="art\logo.png">    </p:cNvPr>
           <p:cNvPicPr>
             <a:picLocks noChangeAspect="1"/>
           </p:cNvPicPr>
           <p:nvPr/>
         </p:nvPicPr>
         <p:blipFill>
-          <a:blip r:embed="rId3"/>
+          <a:blip r:embed="rId1"/>
           <a:stretch>
             <a:fillRect/>
           </a:stretch>
@@ -9453,11 +8258,11 @@
           <a:bodyPr wrap="square" lIns="0" tIns="0" rIns="0" bIns="0" rtlCol="0" anchor="ctr"/>
           <a:lstStyle/>
           <a:p>
-            <a:pPr marL="0" indent="0">
+            <a:pPr indent="0" marL="0">
               <a:buNone/>
             </a:pPr>
             <a:r>
-              <a:rPr lang="en-US" sz="2600" b="1" kern="0" spc="300" dirty="0">
+              <a:rPr lang="en-US" sz="2600" b="1" spc="300" kern="0" dirty="0">
                 <a:solidFill>
                   <a:srgbClr val="1F53E5"/>
                 </a:solidFill>
@@ -9492,7 +8297,7 @@
           <a:bodyPr wrap="square" lIns="0" tIns="0" rIns="0" bIns="0" rtlCol="0" anchor="t"/>
           <a:lstStyle/>
           <a:p>
-            <a:pPr marL="0" indent="0">
+            <a:pPr indent="0" marL="0">
               <a:lnSpc>
                 <a:spcPct val="112000"/>
               </a:lnSpc>
@@ -9512,7 +8317,7 @@
             <a:endParaRPr lang="en-US" sz="7800" dirty="0"/>
           </a:p>
           <a:p>
-            <a:pPr marL="0" indent="0">
+            <a:pPr indent="0" marL="0">
               <a:lnSpc>
                 <a:spcPct val="112000"/>
               </a:lnSpc>
@@ -9532,7 +8337,7 @@
             <a:endParaRPr lang="en-US" sz="7800" dirty="0"/>
           </a:p>
           <a:p>
-            <a:pPr marL="0" indent="0">
+            <a:pPr indent="0" marL="0">
               <a:lnSpc>
                 <a:spcPct val="112000"/>
               </a:lnSpc>
@@ -9569,7 +8374,6 @@
         <a:solidFill>
           <a:srgbClr val="0C0C0E"/>
         </a:solidFill>
-        <a:effectLst/>
       </p:bgPr>
     </p:bg>
     <p:spTree>
@@ -9588,14 +8392,14 @@
       </p:grpSpPr>
       <p:pic>
         <p:nvPicPr>
-          <p:cNvPr id="2" name="Image 0" descr="C:\Users\PCSTUD~1\AppData\Local\Temp\claude\C--Users-PC-Studio-2-Desktop-6498-Evals\7ce78c02-4c99-40d4-bc57-5394098065c6\scratchpad\art\malha.png"/>
+          <p:cNvPr id="2" name="Image 0" descr="art\malha.png">    </p:cNvPr>
           <p:cNvPicPr>
             <a:picLocks noChangeAspect="1"/>
           </p:cNvPicPr>
           <p:nvPr/>
         </p:nvPicPr>
         <p:blipFill>
-          <a:blip r:embed="rId3"/>
+          <a:blip r:embed="rId1"/>
           <a:stretch>
             <a:fillRect/>
           </a:stretch>
@@ -9612,14 +8416,14 @@
       </p:pic>
       <p:pic>
         <p:nvPicPr>
-          <p:cNvPr id="3" name="Image 1" descr="C:\Users\PCSTUD~1\AppData\Local\Temp\claude\C--Users-PC-Studio-2-Desktop-6498-Evals\7ce78c02-4c99-40d4-bc57-5394098065c6\scratchpad\art\logo.png"/>
+          <p:cNvPr id="3" name="Image 1" descr="art\logo.png">    </p:cNvPr>
           <p:cNvPicPr>
             <a:picLocks noChangeAspect="1"/>
           </p:cNvPicPr>
           <p:nvPr/>
         </p:nvPicPr>
         <p:blipFill>
-          <a:blip r:embed="rId4"/>
+          <a:blip r:embed="rId2"/>
           <a:stretch>
             <a:fillRect/>
           </a:stretch>
@@ -9642,7 +8446,7 @@
         </p:nvSpPr>
         <p:spPr>
           <a:xfrm>
-            <a:off x="2423160" y="2148840"/>
+            <a:off x="2423160" y="1051560"/>
             <a:ext cx="19540728" cy="594360"/>
           </a:xfrm>
           <a:prstGeom prst="rect">
@@ -9655,11 +8459,11 @@
           <a:bodyPr wrap="square" lIns="0" tIns="0" rIns="0" bIns="0" rtlCol="0" anchor="ctr"/>
           <a:lstStyle/>
           <a:p>
-            <a:pPr marL="0" indent="0">
+            <a:pPr indent="0" marL="0">
               <a:buNone/>
             </a:pPr>
             <a:r>
-              <a:rPr lang="en-US" sz="2100" b="1" kern="0" spc="250" dirty="0">
+              <a:rPr lang="en-US" sz="2100" b="1" spc="250" kern="0" dirty="0">
                 <a:solidFill>
                   <a:srgbClr val="1F53E5"/>
                 </a:solidFill>
@@ -9681,8 +8485,8 @@
         </p:nvSpPr>
         <p:spPr>
           <a:xfrm>
-            <a:off x="2423160" y="2880360"/>
-            <a:ext cx="18745200" cy="2377440"/>
+            <a:off x="2423160" y="1783080"/>
+            <a:ext cx="19568160" cy="2377440"/>
           </a:xfrm>
           <a:prstGeom prst="rect">
             <a:avLst/>
@@ -9694,7 +8498,7 @@
           <a:bodyPr wrap="square" lIns="0" tIns="0" rIns="0" bIns="0" rtlCol="0" anchor="t"/>
           <a:lstStyle/>
           <a:p>
-            <a:pPr marL="0" indent="0">
+            <a:pPr indent="0" marL="0">
               <a:lnSpc>
                 <a:spcPct val="105000"/>
               </a:lnSpc>
@@ -9717,14 +8521,58 @@
       </p:sp>
       <p:sp>
         <p:nvSpPr>
-          <p:cNvPr id="6" name="Text 2"/>
+          <p:cNvPr id="6" name="Shape 2"/>
+          <p:cNvSpPr/>
+          <p:nvPr/>
+        </p:nvSpPr>
+        <p:spPr>
+          <a:xfrm>
+            <a:off x="2423160" y="4526280"/>
+            <a:ext cx="2011680" cy="68580"/>
+          </a:xfrm>
+          <a:prstGeom prst="rect">
+            <a:avLst/>
+          </a:prstGeom>
+          <a:solidFill>
+            <a:srgbClr val="1F53E5"/>
+          </a:solidFill>
+          <a:ln/>
+        </p:spPr>
+      </p:sp>
+      <p:pic>
+        <p:nvPicPr>
+          <p:cNvPr id="7" name="Image 2" descr="art\seta.png">    </p:cNvPr>
+          <p:cNvPicPr>
+            <a:picLocks noChangeAspect="1"/>
+          </p:cNvPicPr>
+          <p:nvPr/>
+        </p:nvPicPr>
+        <p:blipFill>
+          <a:blip r:embed="rId3"/>
+          <a:stretch>
+            <a:fillRect/>
+          </a:stretch>
+        </p:blipFill>
+        <p:spPr>
+          <a:xfrm>
+            <a:off x="2423160" y="6871716"/>
+            <a:ext cx="475488" cy="411480"/>
+          </a:xfrm>
+          <a:prstGeom prst="rect">
+            <a:avLst/>
+          </a:prstGeom>
+        </p:spPr>
+      </p:pic>
+      <p:sp>
+        <p:nvSpPr>
+          <p:cNvPr id="8" name="Text 3"/>
           <p:cNvSpPr txBox="1"/>
           <p:nvPr/>
         </p:nvSpPr>
         <p:spPr>
           <a:xfrm>
-            <a:off x="2423160" y="5367528"/>
-            <a:ext cx="777240" cy="548640"/>
+            <a:off x="3337560" y="6743700"/>
+            <a:ext cx="17922240" cy="548640"/>
           </a:xfrm>
           <a:prstGeom prst="rect">
             <a:avLst/>
@@ -9736,46 +8584,7 @@
           <a:bodyPr wrap="square" lIns="0" tIns="0" rIns="0" bIns="0" rtlCol="0" anchor="t"/>
           <a:lstStyle/>
           <a:p>
-            <a:pPr marL="0" indent="0">
-              <a:buNone/>
-            </a:pPr>
-            <a:r>
-              <a:rPr lang="en-US" sz="3000" b="1" dirty="0">
-                <a:solidFill>
-                  <a:srgbClr val="1F53E5"/>
-                </a:solidFill>
-                <a:latin typeface="Roboto" pitchFamily="34" charset="0"/>
-                <a:ea typeface="Roboto" pitchFamily="34" charset="-122"/>
-                <a:cs typeface="Roboto" pitchFamily="34" charset="-120"/>
-              </a:rPr>
-              <a:t>→</a:t>
-            </a:r>
-            <a:endParaRPr lang="en-US" sz="3000" dirty="0"/>
-          </a:p>
-        </p:txBody>
-      </p:sp>
-      <p:sp>
-        <p:nvSpPr>
-          <p:cNvPr id="7" name="Text 3"/>
-          <p:cNvSpPr txBox="1"/>
-          <p:nvPr/>
-        </p:nvSpPr>
-        <p:spPr>
-          <a:xfrm>
-            <a:off x="3337560" y="5349240"/>
-            <a:ext cx="17922240" cy="548640"/>
-          </a:xfrm>
-          <a:prstGeom prst="rect">
-            <a:avLst/>
-          </a:prstGeom>
-          <a:noFill/>
-          <a:ln/>
-        </p:spPr>
-        <p:txBody>
-          <a:bodyPr wrap="square" lIns="0" tIns="0" rIns="0" bIns="0" rtlCol="0" anchor="t"/>
-          <a:lstStyle/>
-          <a:p>
-            <a:pPr marL="0" indent="0">
+            <a:pPr indent="0" marL="0">
               <a:lnSpc>
                 <a:spcPct val="118000"/>
               </a:lnSpc>
@@ -9796,16 +8605,40 @@
           </a:p>
         </p:txBody>
       </p:sp>
-      <p:sp>
-        <p:nvSpPr>
-          <p:cNvPr id="8" name="Text 4"/>
+      <p:pic>
+        <p:nvPicPr>
+          <p:cNvPr id="9" name="Image 3" descr="art\seta.png">    </p:cNvPr>
+          <p:cNvPicPr>
+            <a:picLocks noChangeAspect="1"/>
+          </p:cNvPicPr>
+          <p:nvPr/>
+        </p:nvPicPr>
+        <p:blipFill>
+          <a:blip r:embed="rId4"/>
+          <a:stretch>
+            <a:fillRect/>
+          </a:stretch>
+        </p:blipFill>
+        <p:spPr>
+          <a:xfrm>
+            <a:off x="2423160" y="8426196"/>
+            <a:ext cx="475488" cy="411480"/>
+          </a:xfrm>
+          <a:prstGeom prst="rect">
+            <a:avLst/>
+          </a:prstGeom>
+        </p:spPr>
+      </p:pic>
+      <p:sp>
+        <p:nvSpPr>
+          <p:cNvPr id="10" name="Text 4"/>
           <p:cNvSpPr txBox="1"/>
           <p:nvPr/>
         </p:nvSpPr>
         <p:spPr>
           <a:xfrm>
-            <a:off x="2423160" y="6419088"/>
-            <a:ext cx="777240" cy="548640"/>
+            <a:off x="3337560" y="8298180"/>
+            <a:ext cx="17922240" cy="548640"/>
           </a:xfrm>
           <a:prstGeom prst="rect">
             <a:avLst/>
@@ -9817,46 +8650,7 @@
           <a:bodyPr wrap="square" lIns="0" tIns="0" rIns="0" bIns="0" rtlCol="0" anchor="t"/>
           <a:lstStyle/>
           <a:p>
-            <a:pPr marL="0" indent="0">
-              <a:buNone/>
-            </a:pPr>
-            <a:r>
-              <a:rPr lang="en-US" sz="3000" b="1" dirty="0">
-                <a:solidFill>
-                  <a:srgbClr val="1F53E5"/>
-                </a:solidFill>
-                <a:latin typeface="Roboto" pitchFamily="34" charset="0"/>
-                <a:ea typeface="Roboto" pitchFamily="34" charset="-122"/>
-                <a:cs typeface="Roboto" pitchFamily="34" charset="-120"/>
-              </a:rPr>
-              <a:t>→</a:t>
-            </a:r>
-            <a:endParaRPr lang="en-US" sz="3000" dirty="0"/>
-          </a:p>
-        </p:txBody>
-      </p:sp>
-      <p:sp>
-        <p:nvSpPr>
-          <p:cNvPr id="9" name="Text 5"/>
-          <p:cNvSpPr txBox="1"/>
-          <p:nvPr/>
-        </p:nvSpPr>
-        <p:spPr>
-          <a:xfrm>
-            <a:off x="3337560" y="6400800"/>
-            <a:ext cx="17922240" cy="548640"/>
-          </a:xfrm>
-          <a:prstGeom prst="rect">
-            <a:avLst/>
-          </a:prstGeom>
-          <a:noFill/>
-          <a:ln/>
-        </p:spPr>
-        <p:txBody>
-          <a:bodyPr wrap="square" lIns="0" tIns="0" rIns="0" bIns="0" rtlCol="0" anchor="t"/>
-          <a:lstStyle/>
-          <a:p>
-            <a:pPr marL="0" indent="0">
+            <a:pPr indent="0" marL="0">
               <a:lnSpc>
                 <a:spcPct val="118000"/>
               </a:lnSpc>
@@ -9877,16 +8671,40 @@
           </a:p>
         </p:txBody>
       </p:sp>
-      <p:sp>
-        <p:nvSpPr>
-          <p:cNvPr id="10" name="Text 6"/>
+      <p:pic>
+        <p:nvPicPr>
+          <p:cNvPr id="11" name="Image 4" descr="art\seta.png">    </p:cNvPr>
+          <p:cNvPicPr>
+            <a:picLocks noChangeAspect="1"/>
+          </p:cNvPicPr>
+          <p:nvPr/>
+        </p:nvPicPr>
+        <p:blipFill>
+          <a:blip r:embed="rId5"/>
+          <a:stretch>
+            <a:fillRect/>
+          </a:stretch>
+        </p:blipFill>
+        <p:spPr>
+          <a:xfrm>
+            <a:off x="2423160" y="9980676"/>
+            <a:ext cx="475488" cy="411480"/>
+          </a:xfrm>
+          <a:prstGeom prst="rect">
+            <a:avLst/>
+          </a:prstGeom>
+        </p:spPr>
+      </p:pic>
+      <p:sp>
+        <p:nvSpPr>
+          <p:cNvPr id="12" name="Text 5"/>
           <p:cNvSpPr txBox="1"/>
           <p:nvPr/>
         </p:nvSpPr>
         <p:spPr>
           <a:xfrm>
-            <a:off x="2423160" y="7470648"/>
-            <a:ext cx="777240" cy="548640"/>
+            <a:off x="3337560" y="9852660"/>
+            <a:ext cx="17922240" cy="548640"/>
           </a:xfrm>
           <a:prstGeom prst="rect">
             <a:avLst/>
@@ -9898,46 +8716,7 @@
           <a:bodyPr wrap="square" lIns="0" tIns="0" rIns="0" bIns="0" rtlCol="0" anchor="t"/>
           <a:lstStyle/>
           <a:p>
-            <a:pPr marL="0" indent="0">
-              <a:buNone/>
-            </a:pPr>
-            <a:r>
-              <a:rPr lang="en-US" sz="3000" b="1" dirty="0">
-                <a:solidFill>
-                  <a:srgbClr val="1F53E5"/>
-                </a:solidFill>
-                <a:latin typeface="Roboto" pitchFamily="34" charset="0"/>
-                <a:ea typeface="Roboto" pitchFamily="34" charset="-122"/>
-                <a:cs typeface="Roboto" pitchFamily="34" charset="-120"/>
-              </a:rPr>
-              <a:t>→</a:t>
-            </a:r>
-            <a:endParaRPr lang="en-US" sz="3000" dirty="0"/>
-          </a:p>
-        </p:txBody>
-      </p:sp>
-      <p:sp>
-        <p:nvSpPr>
-          <p:cNvPr id="11" name="Text 7"/>
-          <p:cNvSpPr txBox="1"/>
-          <p:nvPr/>
-        </p:nvSpPr>
-        <p:spPr>
-          <a:xfrm>
-            <a:off x="3337560" y="7452360"/>
-            <a:ext cx="17922240" cy="548640"/>
-          </a:xfrm>
-          <a:prstGeom prst="rect">
-            <a:avLst/>
-          </a:prstGeom>
-          <a:noFill/>
-          <a:ln/>
-        </p:spPr>
-        <p:txBody>
-          <a:bodyPr wrap="square" lIns="0" tIns="0" rIns="0" bIns="0" rtlCol="0" anchor="t"/>
-          <a:lstStyle/>
-          <a:p>
-            <a:pPr marL="0" indent="0">
+            <a:pPr indent="0" marL="0">
               <a:lnSpc>
                 <a:spcPct val="118000"/>
               </a:lnSpc>
@@ -9946,7 +8725,7 @@
             <a:r>
               <a:rPr lang="en-US" sz="2800" b="1" dirty="0">
                 <a:solidFill>
-                  <a:srgbClr val="BDBFC7"/>
+                  <a:srgbClr val="F4F5F6"/>
                 </a:solidFill>
                 <a:latin typeface="Roboto" pitchFamily="34" charset="0"/>
                 <a:ea typeface="Roboto" pitchFamily="34" charset="-122"/>
@@ -9960,7 +8739,7 @@
       </p:sp>
       <p:sp>
         <p:nvSpPr>
-          <p:cNvPr id="12" name="Text 8"/>
+          <p:cNvPr id="13" name="Text 6"/>
           <p:cNvSpPr txBox="1"/>
           <p:nvPr/>
         </p:nvSpPr>
@@ -9979,7 +8758,7 @@
           <a:bodyPr wrap="square" lIns="0" tIns="0" rIns="0" bIns="0" rtlCol="0" anchor="ctr"/>
           <a:lstStyle/>
           <a:p>
-            <a:pPr marL="0" indent="0">
+            <a:pPr indent="0" marL="0">
               <a:buNone/>
             </a:pPr>
             <a:r>
@@ -10015,7 +8794,6 @@
         <a:solidFill>
           <a:srgbClr val="0C0C0E"/>
         </a:solidFill>
-        <a:effectLst/>
       </p:bgPr>
     </p:bg>
     <p:spTree>
@@ -10034,14 +8812,14 @@
       </p:grpSpPr>
       <p:pic>
         <p:nvPicPr>
-          <p:cNvPr id="2" name="Image 0" descr="C:\Users\PCSTUD~1\AppData\Local\Temp\claude\C--Users-PC-Studio-2-Desktop-6498-Evals\7ce78c02-4c99-40d4-bc57-5394098065c6\scratchpad\art\malha.png"/>
+          <p:cNvPr id="2" name="Image 0" descr="art\malha.png">    </p:cNvPr>
           <p:cNvPicPr>
             <a:picLocks noChangeAspect="1"/>
           </p:cNvPicPr>
           <p:nvPr/>
         </p:nvPicPr>
         <p:blipFill>
-          <a:blip r:embed="rId3"/>
+          <a:blip r:embed="rId1"/>
           <a:stretch>
             <a:fillRect/>
           </a:stretch>
@@ -10058,14 +8836,14 @@
       </p:pic>
       <p:pic>
         <p:nvPicPr>
-          <p:cNvPr id="3" name="Image 1" descr="C:\Users\PCSTUD~1\AppData\Local\Temp\claude\C--Users-PC-Studio-2-Desktop-6498-Evals\7ce78c02-4c99-40d4-bc57-5394098065c6\scratchpad\art\logo.png"/>
+          <p:cNvPr id="3" name="Image 1" descr="art\logo.png">    </p:cNvPr>
           <p:cNvPicPr>
             <a:picLocks noChangeAspect="1"/>
           </p:cNvPicPr>
           <p:nvPr/>
         </p:nvPicPr>
         <p:blipFill>
-          <a:blip r:embed="rId4"/>
+          <a:blip r:embed="rId2"/>
           <a:stretch>
             <a:fillRect/>
           </a:stretch>
@@ -10088,7 +8866,7 @@
         </p:nvSpPr>
         <p:spPr>
           <a:xfrm>
-            <a:off x="2423160" y="2148840"/>
+            <a:off x="2423160" y="1051560"/>
             <a:ext cx="19540728" cy="594360"/>
           </a:xfrm>
           <a:prstGeom prst="rect">
@@ -10101,11 +8879,11 @@
           <a:bodyPr wrap="square" lIns="0" tIns="0" rIns="0" bIns="0" rtlCol="0" anchor="ctr"/>
           <a:lstStyle/>
           <a:p>
-            <a:pPr marL="0" indent="0">
+            <a:pPr indent="0" marL="0">
               <a:buNone/>
             </a:pPr>
             <a:r>
-              <a:rPr lang="en-US" sz="2100" b="1" kern="0" spc="250" dirty="0">
+              <a:rPr lang="en-US" sz="2100" b="1" spc="250" kern="0" dirty="0">
                 <a:solidFill>
                   <a:srgbClr val="1F53E5"/>
                 </a:solidFill>
@@ -10127,8 +8905,8 @@
         </p:nvSpPr>
         <p:spPr>
           <a:xfrm>
-            <a:off x="2423160" y="2880360"/>
-            <a:ext cx="18745200" cy="2377440"/>
+            <a:off x="2423160" y="1783080"/>
+            <a:ext cx="19568160" cy="2377440"/>
           </a:xfrm>
           <a:prstGeom prst="rect">
             <a:avLst/>
@@ -10140,7 +8918,7 @@
           <a:bodyPr wrap="square" lIns="0" tIns="0" rIns="0" bIns="0" rtlCol="0" anchor="t"/>
           <a:lstStyle/>
           <a:p>
-            <a:pPr marL="0" indent="0">
+            <a:pPr indent="0" marL="0">
               <a:lnSpc>
                 <a:spcPct val="105000"/>
               </a:lnSpc>
@@ -10163,14 +8941,58 @@
       </p:sp>
       <p:sp>
         <p:nvSpPr>
-          <p:cNvPr id="6" name="Text 2"/>
+          <p:cNvPr id="6" name="Shape 2"/>
+          <p:cNvSpPr/>
+          <p:nvPr/>
+        </p:nvSpPr>
+        <p:spPr>
+          <a:xfrm>
+            <a:off x="2423160" y="4526280"/>
+            <a:ext cx="2011680" cy="68580"/>
+          </a:xfrm>
+          <a:prstGeom prst="rect">
+            <a:avLst/>
+          </a:prstGeom>
+          <a:solidFill>
+            <a:srgbClr val="1F53E5"/>
+          </a:solidFill>
+          <a:ln/>
+        </p:spPr>
+      </p:sp>
+      <p:pic>
+        <p:nvPicPr>
+          <p:cNvPr id="7" name="Image 2" descr="art\seta.png">    </p:cNvPr>
+          <p:cNvPicPr>
+            <a:picLocks noChangeAspect="1"/>
+          </p:cNvPicPr>
+          <p:nvPr/>
+        </p:nvPicPr>
+        <p:blipFill>
+          <a:blip r:embed="rId3"/>
+          <a:stretch>
+            <a:fillRect/>
+          </a:stretch>
+        </p:blipFill>
+        <p:spPr>
+          <a:xfrm>
+            <a:off x="2423160" y="6871716"/>
+            <a:ext cx="475488" cy="411480"/>
+          </a:xfrm>
+          <a:prstGeom prst="rect">
+            <a:avLst/>
+          </a:prstGeom>
+        </p:spPr>
+      </p:pic>
+      <p:sp>
+        <p:nvSpPr>
+          <p:cNvPr id="8" name="Text 3"/>
           <p:cNvSpPr txBox="1"/>
           <p:nvPr/>
         </p:nvSpPr>
         <p:spPr>
           <a:xfrm>
-            <a:off x="2423160" y="5367528"/>
-            <a:ext cx="777240" cy="548640"/>
+            <a:off x="3337560" y="6743700"/>
+            <a:ext cx="17922240" cy="548640"/>
           </a:xfrm>
           <a:prstGeom prst="rect">
             <a:avLst/>
@@ -10182,46 +9004,7 @@
           <a:bodyPr wrap="square" lIns="0" tIns="0" rIns="0" bIns="0" rtlCol="0" anchor="t"/>
           <a:lstStyle/>
           <a:p>
-            <a:pPr marL="0" indent="0">
-              <a:buNone/>
-            </a:pPr>
-            <a:r>
-              <a:rPr lang="en-US" sz="3000" b="1" dirty="0">
-                <a:solidFill>
-                  <a:srgbClr val="1F53E5"/>
-                </a:solidFill>
-                <a:latin typeface="Roboto" pitchFamily="34" charset="0"/>
-                <a:ea typeface="Roboto" pitchFamily="34" charset="-122"/>
-                <a:cs typeface="Roboto" pitchFamily="34" charset="-120"/>
-              </a:rPr>
-              <a:t>→</a:t>
-            </a:r>
-            <a:endParaRPr lang="en-US" sz="3000" dirty="0"/>
-          </a:p>
-        </p:txBody>
-      </p:sp>
-      <p:sp>
-        <p:nvSpPr>
-          <p:cNvPr id="7" name="Text 3"/>
-          <p:cNvSpPr txBox="1"/>
-          <p:nvPr/>
-        </p:nvSpPr>
-        <p:spPr>
-          <a:xfrm>
-            <a:off x="3337560" y="5349240"/>
-            <a:ext cx="17922240" cy="548640"/>
-          </a:xfrm>
-          <a:prstGeom prst="rect">
-            <a:avLst/>
-          </a:prstGeom>
-          <a:noFill/>
-          <a:ln/>
-        </p:spPr>
-        <p:txBody>
-          <a:bodyPr wrap="square" lIns="0" tIns="0" rIns="0" bIns="0" rtlCol="0" anchor="t"/>
-          <a:lstStyle/>
-          <a:p>
-            <a:pPr marL="0" indent="0">
+            <a:pPr indent="0" marL="0">
               <a:lnSpc>
                 <a:spcPct val="118000"/>
               </a:lnSpc>
@@ -10230,7 +9013,7 @@
             <a:r>
               <a:rPr lang="en-US" sz="2800" b="1" dirty="0">
                 <a:solidFill>
-                  <a:srgbClr val="BDBFC7"/>
+                  <a:srgbClr val="F4F5F6"/>
                 </a:solidFill>
                 <a:latin typeface="Roboto" pitchFamily="34" charset="0"/>
                 <a:ea typeface="Roboto" pitchFamily="34" charset="-122"/>
@@ -10242,16 +9025,40 @@
           </a:p>
         </p:txBody>
       </p:sp>
-      <p:sp>
-        <p:nvSpPr>
-          <p:cNvPr id="8" name="Text 4"/>
+      <p:pic>
+        <p:nvPicPr>
+          <p:cNvPr id="9" name="Image 3" descr="art\seta.png">    </p:cNvPr>
+          <p:cNvPicPr>
+            <a:picLocks noChangeAspect="1"/>
+          </p:cNvPicPr>
+          <p:nvPr/>
+        </p:nvPicPr>
+        <p:blipFill>
+          <a:blip r:embed="rId4"/>
+          <a:stretch>
+            <a:fillRect/>
+          </a:stretch>
+        </p:blipFill>
+        <p:spPr>
+          <a:xfrm>
+            <a:off x="2423160" y="8426196"/>
+            <a:ext cx="475488" cy="411480"/>
+          </a:xfrm>
+          <a:prstGeom prst="rect">
+            <a:avLst/>
+          </a:prstGeom>
+        </p:spPr>
+      </p:pic>
+      <p:sp>
+        <p:nvSpPr>
+          <p:cNvPr id="10" name="Text 4"/>
           <p:cNvSpPr txBox="1"/>
           <p:nvPr/>
         </p:nvSpPr>
         <p:spPr>
           <a:xfrm>
-            <a:off x="2423160" y="6419088"/>
-            <a:ext cx="777240" cy="548640"/>
+            <a:off x="3337560" y="8298180"/>
+            <a:ext cx="17922240" cy="548640"/>
           </a:xfrm>
           <a:prstGeom prst="rect">
             <a:avLst/>
@@ -10263,46 +9070,7 @@
           <a:bodyPr wrap="square" lIns="0" tIns="0" rIns="0" bIns="0" rtlCol="0" anchor="t"/>
           <a:lstStyle/>
           <a:p>
-            <a:pPr marL="0" indent="0">
-              <a:buNone/>
-            </a:pPr>
-            <a:r>
-              <a:rPr lang="en-US" sz="3000" b="1" dirty="0">
-                <a:solidFill>
-                  <a:srgbClr val="1F53E5"/>
-                </a:solidFill>
-                <a:latin typeface="Roboto" pitchFamily="34" charset="0"/>
-                <a:ea typeface="Roboto" pitchFamily="34" charset="-122"/>
-                <a:cs typeface="Roboto" pitchFamily="34" charset="-120"/>
-              </a:rPr>
-              <a:t>→</a:t>
-            </a:r>
-            <a:endParaRPr lang="en-US" sz="3000" dirty="0"/>
-          </a:p>
-        </p:txBody>
-      </p:sp>
-      <p:sp>
-        <p:nvSpPr>
-          <p:cNvPr id="9" name="Text 5"/>
-          <p:cNvSpPr txBox="1"/>
-          <p:nvPr/>
-        </p:nvSpPr>
-        <p:spPr>
-          <a:xfrm>
-            <a:off x="3337560" y="6400800"/>
-            <a:ext cx="17922240" cy="548640"/>
-          </a:xfrm>
-          <a:prstGeom prst="rect">
-            <a:avLst/>
-          </a:prstGeom>
-          <a:noFill/>
-          <a:ln/>
-        </p:spPr>
-        <p:txBody>
-          <a:bodyPr wrap="square" lIns="0" tIns="0" rIns="0" bIns="0" rtlCol="0" anchor="t"/>
-          <a:lstStyle/>
-          <a:p>
-            <a:pPr marL="0" indent="0">
+            <a:pPr indent="0" marL="0">
               <a:lnSpc>
                 <a:spcPct val="118000"/>
               </a:lnSpc>
@@ -10323,16 +9091,40 @@
           </a:p>
         </p:txBody>
       </p:sp>
-      <p:sp>
-        <p:nvSpPr>
-          <p:cNvPr id="10" name="Text 6"/>
+      <p:pic>
+        <p:nvPicPr>
+          <p:cNvPr id="11" name="Image 4" descr="art\seta.png">    </p:cNvPr>
+          <p:cNvPicPr>
+            <a:picLocks noChangeAspect="1"/>
+          </p:cNvPicPr>
+          <p:nvPr/>
+        </p:nvPicPr>
+        <p:blipFill>
+          <a:blip r:embed="rId5"/>
+          <a:stretch>
+            <a:fillRect/>
+          </a:stretch>
+        </p:blipFill>
+        <p:spPr>
+          <a:xfrm>
+            <a:off x="2423160" y="9980676"/>
+            <a:ext cx="475488" cy="411480"/>
+          </a:xfrm>
+          <a:prstGeom prst="rect">
+            <a:avLst/>
+          </a:prstGeom>
+        </p:spPr>
+      </p:pic>
+      <p:sp>
+        <p:nvSpPr>
+          <p:cNvPr id="12" name="Text 5"/>
           <p:cNvSpPr txBox="1"/>
           <p:nvPr/>
         </p:nvSpPr>
         <p:spPr>
           <a:xfrm>
-            <a:off x="2423160" y="7470648"/>
-            <a:ext cx="777240" cy="548640"/>
+            <a:off x="3337560" y="9852660"/>
+            <a:ext cx="17922240" cy="548640"/>
           </a:xfrm>
           <a:prstGeom prst="rect">
             <a:avLst/>
@@ -10344,46 +9136,7 @@
           <a:bodyPr wrap="square" lIns="0" tIns="0" rIns="0" bIns="0" rtlCol="0" anchor="t"/>
           <a:lstStyle/>
           <a:p>
-            <a:pPr marL="0" indent="0">
-              <a:buNone/>
-            </a:pPr>
-            <a:r>
-              <a:rPr lang="en-US" sz="3000" b="1" dirty="0">
-                <a:solidFill>
-                  <a:srgbClr val="1F53E5"/>
-                </a:solidFill>
-                <a:latin typeface="Roboto" pitchFamily="34" charset="0"/>
-                <a:ea typeface="Roboto" pitchFamily="34" charset="-122"/>
-                <a:cs typeface="Roboto" pitchFamily="34" charset="-120"/>
-              </a:rPr>
-              <a:t>→</a:t>
-            </a:r>
-            <a:endParaRPr lang="en-US" sz="3000" dirty="0"/>
-          </a:p>
-        </p:txBody>
-      </p:sp>
-      <p:sp>
-        <p:nvSpPr>
-          <p:cNvPr id="11" name="Text 7"/>
-          <p:cNvSpPr txBox="1"/>
-          <p:nvPr/>
-        </p:nvSpPr>
-        <p:spPr>
-          <a:xfrm>
-            <a:off x="3337560" y="7452360"/>
-            <a:ext cx="17922240" cy="548640"/>
-          </a:xfrm>
-          <a:prstGeom prst="rect">
-            <a:avLst/>
-          </a:prstGeom>
-          <a:noFill/>
-          <a:ln/>
-        </p:spPr>
-        <p:txBody>
-          <a:bodyPr wrap="square" lIns="0" tIns="0" rIns="0" bIns="0" rtlCol="0" anchor="t"/>
-          <a:lstStyle/>
-          <a:p>
-            <a:pPr marL="0" indent="0">
+            <a:pPr indent="0" marL="0">
               <a:lnSpc>
                 <a:spcPct val="118000"/>
               </a:lnSpc>
@@ -10406,7 +9159,7 @@
       </p:sp>
       <p:sp>
         <p:nvSpPr>
-          <p:cNvPr id="12" name="Text 8"/>
+          <p:cNvPr id="13" name="Text 6"/>
           <p:cNvSpPr txBox="1"/>
           <p:nvPr/>
         </p:nvSpPr>
@@ -10425,7 +9178,7 @@
           <a:bodyPr wrap="square" lIns="0" tIns="0" rIns="0" bIns="0" rtlCol="0" anchor="ctr"/>
           <a:lstStyle/>
           <a:p>
-            <a:pPr marL="0" indent="0">
+            <a:pPr indent="0" marL="0">
               <a:buNone/>
             </a:pPr>
             <a:r>
@@ -10461,7 +9214,6 @@
         <a:solidFill>
           <a:srgbClr val="0C0C0E"/>
         </a:solidFill>
-        <a:effectLst/>
       </p:bgPr>
     </p:bg>
     <p:spTree>
@@ -10480,14 +9232,14 @@
       </p:grpSpPr>
       <p:pic>
         <p:nvPicPr>
-          <p:cNvPr id="2" name="Image 0" descr="C:\Users\PCSTUD~1\AppData\Local\Temp\claude\C--Users-PC-Studio-2-Desktop-6498-Evals\7ce78c02-4c99-40d4-bc57-5394098065c6\scratchpad\art\malha.png"/>
+          <p:cNvPr id="2" name="Image 0" descr="art\malha.png">    </p:cNvPr>
           <p:cNvPicPr>
             <a:picLocks noChangeAspect="1"/>
           </p:cNvPicPr>
           <p:nvPr/>
         </p:nvPicPr>
         <p:blipFill>
-          <a:blip r:embed="rId3"/>
+          <a:blip r:embed="rId1"/>
           <a:stretch>
             <a:fillRect/>
           </a:stretch>
@@ -10504,14 +9256,14 @@
       </p:pic>
       <p:pic>
         <p:nvPicPr>
-          <p:cNvPr id="3" name="Image 1" descr="C:\Users\PCSTUD~1\AppData\Local\Temp\claude\C--Users-PC-Studio-2-Desktop-6498-Evals\7ce78c02-4c99-40d4-bc57-5394098065c6\scratchpad\art\logo.png"/>
+          <p:cNvPr id="3" name="Image 1" descr="art\logo.png">    </p:cNvPr>
           <p:cNvPicPr>
             <a:picLocks noChangeAspect="1"/>
           </p:cNvPicPr>
           <p:nvPr/>
         </p:nvPicPr>
         <p:blipFill>
-          <a:blip r:embed="rId4"/>
+          <a:blip r:embed="rId2"/>
           <a:stretch>
             <a:fillRect/>
           </a:stretch>
@@ -10534,7 +9286,7 @@
         </p:nvSpPr>
         <p:spPr>
           <a:xfrm>
-            <a:off x="2423160" y="2148840"/>
+            <a:off x="2423160" y="1051560"/>
             <a:ext cx="19540728" cy="594360"/>
           </a:xfrm>
           <a:prstGeom prst="rect">
@@ -10547,11 +9299,11 @@
           <a:bodyPr wrap="square" lIns="0" tIns="0" rIns="0" bIns="0" rtlCol="0" anchor="ctr"/>
           <a:lstStyle/>
           <a:p>
-            <a:pPr marL="0" indent="0">
+            <a:pPr indent="0" marL="0">
               <a:buNone/>
             </a:pPr>
             <a:r>
-              <a:rPr lang="en-US" sz="2100" b="1" kern="0" spc="250" dirty="0">
+              <a:rPr lang="en-US" sz="2100" b="1" spc="250" kern="0" dirty="0">
                 <a:solidFill>
                   <a:srgbClr val="1F53E5"/>
                 </a:solidFill>
@@ -10573,8 +9325,8 @@
         </p:nvSpPr>
         <p:spPr>
           <a:xfrm>
-            <a:off x="2423160" y="2880360"/>
-            <a:ext cx="18745200" cy="2377440"/>
+            <a:off x="2423160" y="1783080"/>
+            <a:ext cx="19568160" cy="2377440"/>
           </a:xfrm>
           <a:prstGeom prst="rect">
             <a:avLst/>
@@ -10586,7 +9338,7 @@
           <a:bodyPr wrap="square" lIns="0" tIns="0" rIns="0" bIns="0" rtlCol="0" anchor="t"/>
           <a:lstStyle/>
           <a:p>
-            <a:pPr marL="0" indent="0">
+            <a:pPr indent="0" marL="0">
               <a:lnSpc>
                 <a:spcPct val="105000"/>
               </a:lnSpc>
@@ -10609,14 +9361,58 @@
       </p:sp>
       <p:sp>
         <p:nvSpPr>
-          <p:cNvPr id="6" name="Text 2"/>
+          <p:cNvPr id="6" name="Shape 2"/>
+          <p:cNvSpPr/>
+          <p:nvPr/>
+        </p:nvSpPr>
+        <p:spPr>
+          <a:xfrm>
+            <a:off x="2423160" y="4526280"/>
+            <a:ext cx="2011680" cy="68580"/>
+          </a:xfrm>
+          <a:prstGeom prst="rect">
+            <a:avLst/>
+          </a:prstGeom>
+          <a:solidFill>
+            <a:srgbClr val="1F53E5"/>
+          </a:solidFill>
+          <a:ln/>
+        </p:spPr>
+      </p:sp>
+      <p:pic>
+        <p:nvPicPr>
+          <p:cNvPr id="7" name="Image 2" descr="art\seta.png">    </p:cNvPr>
+          <p:cNvPicPr>
+            <a:picLocks noChangeAspect="1"/>
+          </p:cNvPicPr>
+          <p:nvPr/>
+        </p:nvPicPr>
+        <p:blipFill>
+          <a:blip r:embed="rId3"/>
+          <a:stretch>
+            <a:fillRect/>
+          </a:stretch>
+        </p:blipFill>
+        <p:spPr>
+          <a:xfrm>
+            <a:off x="2423160" y="6871716"/>
+            <a:ext cx="475488" cy="411480"/>
+          </a:xfrm>
+          <a:prstGeom prst="rect">
+            <a:avLst/>
+          </a:prstGeom>
+        </p:spPr>
+      </p:pic>
+      <p:sp>
+        <p:nvSpPr>
+          <p:cNvPr id="8" name="Text 3"/>
           <p:cNvSpPr txBox="1"/>
           <p:nvPr/>
         </p:nvSpPr>
         <p:spPr>
           <a:xfrm>
-            <a:off x="2423160" y="5367528"/>
-            <a:ext cx="777240" cy="548640"/>
+            <a:off x="3337560" y="6743700"/>
+            <a:ext cx="17922240" cy="548640"/>
           </a:xfrm>
           <a:prstGeom prst="rect">
             <a:avLst/>
@@ -10628,46 +9424,7 @@
           <a:bodyPr wrap="square" lIns="0" tIns="0" rIns="0" bIns="0" rtlCol="0" anchor="t"/>
           <a:lstStyle/>
           <a:p>
-            <a:pPr marL="0" indent="0">
-              <a:buNone/>
-            </a:pPr>
-            <a:r>
-              <a:rPr lang="en-US" sz="3000" b="1" dirty="0">
-                <a:solidFill>
-                  <a:srgbClr val="1F53E5"/>
-                </a:solidFill>
-                <a:latin typeface="Roboto" pitchFamily="34" charset="0"/>
-                <a:ea typeface="Roboto" pitchFamily="34" charset="-122"/>
-                <a:cs typeface="Roboto" pitchFamily="34" charset="-120"/>
-              </a:rPr>
-              <a:t>→</a:t>
-            </a:r>
-            <a:endParaRPr lang="en-US" sz="3000" dirty="0"/>
-          </a:p>
-        </p:txBody>
-      </p:sp>
-      <p:sp>
-        <p:nvSpPr>
-          <p:cNvPr id="7" name="Text 3"/>
-          <p:cNvSpPr txBox="1"/>
-          <p:nvPr/>
-        </p:nvSpPr>
-        <p:spPr>
-          <a:xfrm>
-            <a:off x="3337560" y="5349240"/>
-            <a:ext cx="17922240" cy="548640"/>
-          </a:xfrm>
-          <a:prstGeom prst="rect">
-            <a:avLst/>
-          </a:prstGeom>
-          <a:noFill/>
-          <a:ln/>
-        </p:spPr>
-        <p:txBody>
-          <a:bodyPr wrap="square" lIns="0" tIns="0" rIns="0" bIns="0" rtlCol="0" anchor="t"/>
-          <a:lstStyle/>
-          <a:p>
-            <a:pPr marL="0" indent="0">
+            <a:pPr indent="0" marL="0">
               <a:lnSpc>
                 <a:spcPct val="118000"/>
               </a:lnSpc>
@@ -10688,16 +9445,40 @@
           </a:p>
         </p:txBody>
       </p:sp>
-      <p:sp>
-        <p:nvSpPr>
-          <p:cNvPr id="8" name="Text 4"/>
+      <p:pic>
+        <p:nvPicPr>
+          <p:cNvPr id="9" name="Image 3" descr="art\seta.png">    </p:cNvPr>
+          <p:cNvPicPr>
+            <a:picLocks noChangeAspect="1"/>
+          </p:cNvPicPr>
+          <p:nvPr/>
+        </p:nvPicPr>
+        <p:blipFill>
+          <a:blip r:embed="rId4"/>
+          <a:stretch>
+            <a:fillRect/>
+          </a:stretch>
+        </p:blipFill>
+        <p:spPr>
+          <a:xfrm>
+            <a:off x="2423160" y="8426196"/>
+            <a:ext cx="475488" cy="411480"/>
+          </a:xfrm>
+          <a:prstGeom prst="rect">
+            <a:avLst/>
+          </a:prstGeom>
+        </p:spPr>
+      </p:pic>
+      <p:sp>
+        <p:nvSpPr>
+          <p:cNvPr id="10" name="Text 4"/>
           <p:cNvSpPr txBox="1"/>
           <p:nvPr/>
         </p:nvSpPr>
         <p:spPr>
           <a:xfrm>
-            <a:off x="2423160" y="6419088"/>
-            <a:ext cx="777240" cy="548640"/>
+            <a:off x="3337560" y="8298180"/>
+            <a:ext cx="17922240" cy="548640"/>
           </a:xfrm>
           <a:prstGeom prst="rect">
             <a:avLst/>
@@ -10709,46 +9490,7 @@
           <a:bodyPr wrap="square" lIns="0" tIns="0" rIns="0" bIns="0" rtlCol="0" anchor="t"/>
           <a:lstStyle/>
           <a:p>
-            <a:pPr marL="0" indent="0">
-              <a:buNone/>
-            </a:pPr>
-            <a:r>
-              <a:rPr lang="en-US" sz="3000" b="1" dirty="0">
-                <a:solidFill>
-                  <a:srgbClr val="1F53E5"/>
-                </a:solidFill>
-                <a:latin typeface="Roboto" pitchFamily="34" charset="0"/>
-                <a:ea typeface="Roboto" pitchFamily="34" charset="-122"/>
-                <a:cs typeface="Roboto" pitchFamily="34" charset="-120"/>
-              </a:rPr>
-              <a:t>→</a:t>
-            </a:r>
-            <a:endParaRPr lang="en-US" sz="3000" dirty="0"/>
-          </a:p>
-        </p:txBody>
-      </p:sp>
-      <p:sp>
-        <p:nvSpPr>
-          <p:cNvPr id="9" name="Text 5"/>
-          <p:cNvSpPr txBox="1"/>
-          <p:nvPr/>
-        </p:nvSpPr>
-        <p:spPr>
-          <a:xfrm>
-            <a:off x="3337560" y="6400800"/>
-            <a:ext cx="17922240" cy="548640"/>
-          </a:xfrm>
-          <a:prstGeom prst="rect">
-            <a:avLst/>
-          </a:prstGeom>
-          <a:noFill/>
-          <a:ln/>
-        </p:spPr>
-        <p:txBody>
-          <a:bodyPr wrap="square" lIns="0" tIns="0" rIns="0" bIns="0" rtlCol="0" anchor="t"/>
-          <a:lstStyle/>
-          <a:p>
-            <a:pPr marL="0" indent="0">
+            <a:pPr indent="0" marL="0">
               <a:lnSpc>
                 <a:spcPct val="118000"/>
               </a:lnSpc>
@@ -10769,16 +9511,40 @@
           </a:p>
         </p:txBody>
       </p:sp>
-      <p:sp>
-        <p:nvSpPr>
-          <p:cNvPr id="10" name="Text 6"/>
+      <p:pic>
+        <p:nvPicPr>
+          <p:cNvPr id="11" name="Image 4" descr="art\seta.png">    </p:cNvPr>
+          <p:cNvPicPr>
+            <a:picLocks noChangeAspect="1"/>
+          </p:cNvPicPr>
+          <p:nvPr/>
+        </p:nvPicPr>
+        <p:blipFill>
+          <a:blip r:embed="rId5"/>
+          <a:stretch>
+            <a:fillRect/>
+          </a:stretch>
+        </p:blipFill>
+        <p:spPr>
+          <a:xfrm>
+            <a:off x="2423160" y="9980676"/>
+            <a:ext cx="475488" cy="411480"/>
+          </a:xfrm>
+          <a:prstGeom prst="rect">
+            <a:avLst/>
+          </a:prstGeom>
+        </p:spPr>
+      </p:pic>
+      <p:sp>
+        <p:nvSpPr>
+          <p:cNvPr id="12" name="Text 5"/>
           <p:cNvSpPr txBox="1"/>
           <p:nvPr/>
         </p:nvSpPr>
         <p:spPr>
           <a:xfrm>
-            <a:off x="2423160" y="7470648"/>
-            <a:ext cx="777240" cy="548640"/>
+            <a:off x="3337560" y="9852660"/>
+            <a:ext cx="17922240" cy="548640"/>
           </a:xfrm>
           <a:prstGeom prst="rect">
             <a:avLst/>
@@ -10790,46 +9556,7 @@
           <a:bodyPr wrap="square" lIns="0" tIns="0" rIns="0" bIns="0" rtlCol="0" anchor="t"/>
           <a:lstStyle/>
           <a:p>
-            <a:pPr marL="0" indent="0">
-              <a:buNone/>
-            </a:pPr>
-            <a:r>
-              <a:rPr lang="en-US" sz="3000" b="1" dirty="0">
-                <a:solidFill>
-                  <a:srgbClr val="1F53E5"/>
-                </a:solidFill>
-                <a:latin typeface="Roboto" pitchFamily="34" charset="0"/>
-                <a:ea typeface="Roboto" pitchFamily="34" charset="-122"/>
-                <a:cs typeface="Roboto" pitchFamily="34" charset="-120"/>
-              </a:rPr>
-              <a:t>→</a:t>
-            </a:r>
-            <a:endParaRPr lang="en-US" sz="3000" dirty="0"/>
-          </a:p>
-        </p:txBody>
-      </p:sp>
-      <p:sp>
-        <p:nvSpPr>
-          <p:cNvPr id="11" name="Text 7"/>
-          <p:cNvSpPr txBox="1"/>
-          <p:nvPr/>
-        </p:nvSpPr>
-        <p:spPr>
-          <a:xfrm>
-            <a:off x="3337560" y="7452360"/>
-            <a:ext cx="17922240" cy="1097280"/>
-          </a:xfrm>
-          <a:prstGeom prst="rect">
-            <a:avLst/>
-          </a:prstGeom>
-          <a:noFill/>
-          <a:ln/>
-        </p:spPr>
-        <p:txBody>
-          <a:bodyPr wrap="square" lIns="0" tIns="0" rIns="0" bIns="0" rtlCol="0" anchor="t"/>
-          <a:lstStyle/>
-          <a:p>
-            <a:pPr marL="0" indent="0">
+            <a:pPr indent="0" marL="0">
               <a:lnSpc>
                 <a:spcPct val="118000"/>
               </a:lnSpc>
@@ -10838,7 +9565,7 @@
             <a:r>
               <a:rPr lang="en-US" sz="2800" b="1" dirty="0">
                 <a:solidFill>
-                  <a:srgbClr val="BDBFC7"/>
+                  <a:srgbClr val="F4F5F6"/>
                 </a:solidFill>
                 <a:latin typeface="Roboto" pitchFamily="34" charset="0"/>
                 <a:ea typeface="Roboto" pitchFamily="34" charset="-122"/>
@@ -10852,7 +9579,7 @@
       </p:sp>
       <p:sp>
         <p:nvSpPr>
-          <p:cNvPr id="12" name="Text 8"/>
+          <p:cNvPr id="13" name="Text 6"/>
           <p:cNvSpPr txBox="1"/>
           <p:nvPr/>
         </p:nvSpPr>
@@ -10871,7 +9598,7 @@
           <a:bodyPr wrap="square" lIns="0" tIns="0" rIns="0" bIns="0" rtlCol="0" anchor="ctr"/>
           <a:lstStyle/>
           <a:p>
-            <a:pPr marL="0" indent="0">
+            <a:pPr indent="0" marL="0">
               <a:buNone/>
             </a:pPr>
             <a:r>
@@ -10907,7 +9634,6 @@
         <a:solidFill>
           <a:srgbClr val="052FD3"/>
         </a:solidFill>
-        <a:effectLst/>
       </p:bgPr>
     </p:bg>
     <p:spTree>
@@ -10926,14 +9652,14 @@
       </p:grpSpPr>
       <p:pic>
         <p:nvPicPr>
-          <p:cNvPr id="2" name="Image 0" descr="C:\Users\PCSTUD~1\AppData\Local\Temp\claude\C--Users-PC-Studio-2-Desktop-6498-Evals\7ce78c02-4c99-40d4-bc57-5394098065c6\scratchpad\art\logo.png"/>
+          <p:cNvPr id="2" name="Image 0" descr="art\logo.png">    </p:cNvPr>
           <p:cNvPicPr>
             <a:picLocks noChangeAspect="1"/>
           </p:cNvPicPr>
           <p:nvPr/>
         </p:nvPicPr>
         <p:blipFill>
-          <a:blip r:embed="rId3"/>
+          <a:blip r:embed="rId1"/>
           <a:stretch>
             <a:fillRect/>
           </a:stretch>
@@ -10969,7 +9695,7 @@
           <a:bodyPr wrap="square" lIns="0" tIns="0" rIns="0" bIns="0" rtlCol="0" anchor="ctr"/>
           <a:lstStyle/>
           <a:p>
-            <a:pPr marL="0" indent="0" algn="ctr">
+            <a:pPr algn="ctr" indent="0" marL="0">
               <a:lnSpc>
                 <a:spcPct val="105000"/>
               </a:lnSpc>
@@ -11000,365 +9726,12 @@
 
 <file path=ppt/slides/slide7.xml><?xml version="1.0" encoding="utf-8"?>
 <p:sld xmlns:a="http://schemas.openxmlformats.org/drawingml/2006/main" xmlns:r="http://schemas.openxmlformats.org/officeDocument/2006/relationships" xmlns:p="http://schemas.openxmlformats.org/presentationml/2006/main">
-  <p:cSld>
-    <p:spTree>
-      <p:nvGrpSpPr>
-        <p:cNvPr id="1" name="">
-          <a:extLst>
-            <a:ext uri="{FF2B5EF4-FFF2-40B4-BE49-F238E27FC236}">
-              <a16:creationId xmlns:a16="http://schemas.microsoft.com/office/drawing/2014/main" id="{57F91ED9-A211-0295-1477-E82A4C229ED0}"/>
-            </a:ext>
-          </a:extLst>
-        </p:cNvPr>
-        <p:cNvGrpSpPr/>
-        <p:nvPr/>
-      </p:nvGrpSpPr>
-      <p:grpSpPr>
-        <a:xfrm>
-          <a:off x="0" y="0"/>
-          <a:ext cx="0" cy="0"/>
-          <a:chOff x="0" y="0"/>
-          <a:chExt cx="0" cy="0"/>
-        </a:xfrm>
-      </p:grpSpPr>
-      <p:pic>
-        <p:nvPicPr>
-          <p:cNvPr id="2" name="Image 0" descr="C:\Users\PCSTUD~1\AppData\Local\Temp\claude\C--Users-PC-Studio-2-Desktop-6498-Evals\7ce78c02-4c99-40d4-bc57-5394098065c6\scratchpad\art\malha.png">
-            <a:extLst>
-              <a:ext uri="{FF2B5EF4-FFF2-40B4-BE49-F238E27FC236}">
-                <a16:creationId xmlns:a16="http://schemas.microsoft.com/office/drawing/2014/main" id="{0DE3EE38-D44F-B202-FAE1-81B2A180B8D9}"/>
-              </a:ext>
-            </a:extLst>
-          </p:cNvPr>
-          <p:cNvPicPr>
-            <a:picLocks noChangeAspect="1"/>
-          </p:cNvPicPr>
-          <p:nvPr/>
-        </p:nvPicPr>
-        <p:blipFill>
-          <a:blip r:embed="rId3"/>
-          <a:stretch>
-            <a:fillRect/>
-          </a:stretch>
-        </p:blipFill>
-        <p:spPr>
-          <a:xfrm>
-            <a:off x="0" y="0"/>
-            <a:ext cx="24387048" cy="13716000"/>
-          </a:xfrm>
-          <a:prstGeom prst="rect">
-            <a:avLst/>
-          </a:prstGeom>
-        </p:spPr>
-      </p:pic>
-      <p:pic>
-        <p:nvPicPr>
-          <p:cNvPr id="3" name="Image 1" descr="C:\Users\PCSTUD~1\AppData\Local\Temp\claude\C--Users-PC-Studio-2-Desktop-6498-Evals\7ce78c02-4c99-40d4-bc57-5394098065c6\scratchpad\art\capa.png">
-            <a:extLst>
-              <a:ext uri="{FF2B5EF4-FFF2-40B4-BE49-F238E27FC236}">
-                <a16:creationId xmlns:a16="http://schemas.microsoft.com/office/drawing/2014/main" id="{AAD3F2FB-967D-3972-83A0-F6622874FC45}"/>
-              </a:ext>
-            </a:extLst>
-          </p:cNvPr>
-          <p:cNvPicPr>
-            <a:picLocks noChangeAspect="1"/>
-          </p:cNvPicPr>
-          <p:nvPr/>
-        </p:nvPicPr>
-        <p:blipFill>
-          <a:blip r:embed="rId4"/>
-          <a:stretch>
-            <a:fillRect/>
-          </a:stretch>
-        </p:blipFill>
-        <p:spPr>
-          <a:xfrm>
-            <a:off x="8092440" y="0"/>
-            <a:ext cx="16294608" cy="13716000"/>
-          </a:xfrm>
-          <a:prstGeom prst="rect">
-            <a:avLst/>
-          </a:prstGeom>
-        </p:spPr>
-      </p:pic>
-      <p:pic>
-        <p:nvPicPr>
-          <p:cNvPr id="4" name="Image 2" descr="C:\Users\PCSTUD~1\AppData\Local\Temp\claude\C--Users-PC-Studio-2-Desktop-6498-Evals\7ce78c02-4c99-40d4-bc57-5394098065c6\scratchpad\art\logo.png">
-            <a:extLst>
-              <a:ext uri="{FF2B5EF4-FFF2-40B4-BE49-F238E27FC236}">
-                <a16:creationId xmlns:a16="http://schemas.microsoft.com/office/drawing/2014/main" id="{F91975FC-462C-A787-95B7-D32F518A8319}"/>
-              </a:ext>
-            </a:extLst>
-          </p:cNvPr>
-          <p:cNvPicPr>
-            <a:picLocks noChangeAspect="1"/>
-          </p:cNvPicPr>
-          <p:nvPr/>
-        </p:nvPicPr>
-        <p:blipFill>
-          <a:blip r:embed="rId5"/>
-          <a:stretch>
-            <a:fillRect/>
-          </a:stretch>
-        </p:blipFill>
-        <p:spPr>
-          <a:xfrm>
-            <a:off x="23436072" y="402336"/>
-            <a:ext cx="475488" cy="594360"/>
-          </a:xfrm>
-          <a:prstGeom prst="rect">
-            <a:avLst/>
-          </a:prstGeom>
-        </p:spPr>
-      </p:pic>
-      <p:sp>
-        <p:nvSpPr>
-          <p:cNvPr id="5" name="Text 0">
-            <a:extLst>
-              <a:ext uri="{FF2B5EF4-FFF2-40B4-BE49-F238E27FC236}">
-                <a16:creationId xmlns:a16="http://schemas.microsoft.com/office/drawing/2014/main" id="{E7FDA8CD-294D-6085-5F73-702612AF61D1}"/>
-              </a:ext>
-            </a:extLst>
-          </p:cNvPr>
-          <p:cNvSpPr txBox="1"/>
-          <p:nvPr/>
-        </p:nvSpPr>
-        <p:spPr>
-          <a:xfrm>
-            <a:off x="2423160" y="1874520"/>
-            <a:ext cx="13258800" cy="640080"/>
-          </a:xfrm>
-          <a:prstGeom prst="rect">
-            <a:avLst/>
-          </a:prstGeom>
-          <a:noFill/>
-          <a:ln/>
-        </p:spPr>
-        <p:txBody>
-          <a:bodyPr wrap="square" lIns="0" tIns="0" rIns="0" bIns="0" rtlCol="0" anchor="ctr"/>
-          <a:lstStyle/>
-          <a:p>
-            <a:pPr marL="0" indent="0">
-              <a:buNone/>
-            </a:pPr>
-            <a:r>
-              <a:rPr lang="en-US" sz="2200" b="1" kern="0" spc="300" dirty="0">
-                <a:solidFill>
-                  <a:srgbClr val="1F53E5"/>
-                </a:solidFill>
-                <a:latin typeface="Encode Sans" pitchFamily="34" charset="0"/>
-                <a:ea typeface="Encode Sans" pitchFamily="34" charset="-122"/>
-                <a:cs typeface="Encode Sans" pitchFamily="34" charset="-120"/>
-              </a:rPr>
-              <a:t>EVALS, OBSERVABILIDADE E CONFORMIDADE</a:t>
-            </a:r>
-            <a:endParaRPr lang="en-US" sz="2200" dirty="0"/>
-          </a:p>
-        </p:txBody>
-      </p:sp>
-      <p:sp>
-        <p:nvSpPr>
-          <p:cNvPr id="6" name="Text 1">
-            <a:extLst>
-              <a:ext uri="{FF2B5EF4-FFF2-40B4-BE49-F238E27FC236}">
-                <a16:creationId xmlns:a16="http://schemas.microsoft.com/office/drawing/2014/main" id="{39D1E998-DC01-0CD7-37F2-7CE0FD457AA5}"/>
-              </a:ext>
-            </a:extLst>
-          </p:cNvPr>
-          <p:cNvSpPr txBox="1"/>
-          <p:nvPr/>
-        </p:nvSpPr>
-        <p:spPr>
-          <a:xfrm>
-            <a:off x="2423160" y="2697480"/>
-            <a:ext cx="13167360" cy="5760720"/>
-          </a:xfrm>
-          <a:prstGeom prst="rect">
-            <a:avLst/>
-          </a:prstGeom>
-          <a:noFill/>
-          <a:ln/>
-        </p:spPr>
-        <p:txBody>
-          <a:bodyPr wrap="square" lIns="0" tIns="0" rIns="0" bIns="0" rtlCol="0" anchor="t"/>
-          <a:lstStyle/>
-          <a:p>
-            <a:pPr marL="0" indent="0">
-              <a:lnSpc>
-                <a:spcPct val="102000"/>
-              </a:lnSpc>
-              <a:buNone/>
-            </a:pPr>
-            <a:r>
-              <a:rPr lang="en-US" sz="10400" dirty="0">
-                <a:solidFill>
-                  <a:srgbClr val="BDBFC7"/>
-                </a:solidFill>
-                <a:latin typeface="Encode Sans" pitchFamily="34" charset="0"/>
-                <a:ea typeface="Encode Sans" pitchFamily="34" charset="-122"/>
-                <a:cs typeface="Encode Sans" pitchFamily="34" charset="-120"/>
-              </a:rPr>
-              <a:t>Observabilidade:</a:t>
-            </a:r>
-            <a:endParaRPr lang="en-US" sz="10400" dirty="0"/>
-          </a:p>
-          <a:p>
-            <a:pPr marL="0" indent="0">
-              <a:lnSpc>
-                <a:spcPct val="102000"/>
-              </a:lnSpc>
-              <a:buNone/>
-            </a:pPr>
-            <a:r>
-              <a:rPr lang="en-US" sz="10400" dirty="0">
-                <a:solidFill>
-                  <a:srgbClr val="BDBFC7"/>
-                </a:solidFill>
-                <a:latin typeface="Encode Sans" pitchFamily="34" charset="0"/>
-                <a:ea typeface="Encode Sans" pitchFamily="34" charset="-122"/>
-                <a:cs typeface="Encode Sans" pitchFamily="34" charset="-120"/>
-              </a:rPr>
-              <a:t>monitorando</a:t>
-            </a:r>
-            <a:endParaRPr lang="en-US" sz="10400" dirty="0"/>
-          </a:p>
-          <a:p>
-            <a:pPr marL="0" indent="0">
-              <a:lnSpc>
-                <a:spcPct val="102000"/>
-              </a:lnSpc>
-              <a:buNone/>
-            </a:pPr>
-            <a:r>
-              <a:rPr lang="en-US" sz="10400" dirty="0">
-                <a:solidFill>
-                  <a:srgbClr val="BDBFC7"/>
-                </a:solidFill>
-                <a:latin typeface="Encode Sans" pitchFamily="34" charset="0"/>
-                <a:ea typeface="Encode Sans" pitchFamily="34" charset="-122"/>
-                <a:cs typeface="Encode Sans" pitchFamily="34" charset="-120"/>
-              </a:rPr>
-              <a:t>em produção</a:t>
-            </a:r>
-            <a:endParaRPr lang="en-US" sz="10400" dirty="0"/>
-          </a:p>
-        </p:txBody>
-      </p:sp>
-      <p:sp>
-        <p:nvSpPr>
-          <p:cNvPr id="7" name="Text 2">
-            <a:extLst>
-              <a:ext uri="{FF2B5EF4-FFF2-40B4-BE49-F238E27FC236}">
-                <a16:creationId xmlns:a16="http://schemas.microsoft.com/office/drawing/2014/main" id="{9018670F-3F31-E639-CF49-86A37E2286B9}"/>
-              </a:ext>
-            </a:extLst>
-          </p:cNvPr>
-          <p:cNvSpPr txBox="1"/>
-          <p:nvPr/>
-        </p:nvSpPr>
-        <p:spPr>
-          <a:xfrm>
-            <a:off x="2423160" y="8732520"/>
-            <a:ext cx="13624560" cy="1737360"/>
-          </a:xfrm>
-          <a:prstGeom prst="rect">
-            <a:avLst/>
-          </a:prstGeom>
-          <a:noFill/>
-          <a:ln/>
-        </p:spPr>
-        <p:txBody>
-          <a:bodyPr wrap="square" lIns="0" tIns="0" rIns="0" bIns="0" rtlCol="0" anchor="t"/>
-          <a:lstStyle/>
-          <a:p>
-            <a:pPr marL="0" indent="0">
-              <a:lnSpc>
-                <a:spcPct val="115000"/>
-              </a:lnSpc>
-              <a:buNone/>
-            </a:pPr>
-            <a:r>
-              <a:rPr lang="en-US" sz="3800" dirty="0">
-                <a:solidFill>
-                  <a:srgbClr val="A7A9B4"/>
-                </a:solidFill>
-                <a:latin typeface="Encode Sans" pitchFamily="34" charset="0"/>
-                <a:ea typeface="Encode Sans" pitchFamily="34" charset="-122"/>
-                <a:cs typeface="Encode Sans" pitchFamily="34" charset="-120"/>
-              </a:rPr>
-              <a:t>Aula 3 — lendo os dados reais do meu produto no Langfuse</a:t>
-            </a:r>
-            <a:endParaRPr lang="en-US" sz="3800" dirty="0"/>
-          </a:p>
-        </p:txBody>
-      </p:sp>
-      <p:sp>
-        <p:nvSpPr>
-          <p:cNvPr id="8" name="Text 3">
-            <a:extLst>
-              <a:ext uri="{FF2B5EF4-FFF2-40B4-BE49-F238E27FC236}">
-                <a16:creationId xmlns:a16="http://schemas.microsoft.com/office/drawing/2014/main" id="{E61C69C2-987C-CB2C-6634-4D7BD77D998E}"/>
-              </a:ext>
-            </a:extLst>
-          </p:cNvPr>
-          <p:cNvSpPr txBox="1"/>
-          <p:nvPr/>
-        </p:nvSpPr>
-        <p:spPr>
-          <a:xfrm>
-            <a:off x="2423160" y="10744200"/>
-            <a:ext cx="13898880" cy="731520"/>
-          </a:xfrm>
-          <a:prstGeom prst="rect">
-            <a:avLst/>
-          </a:prstGeom>
-          <a:noFill/>
-          <a:ln/>
-        </p:spPr>
-        <p:txBody>
-          <a:bodyPr wrap="square" lIns="0" tIns="0" rIns="0" bIns="0" rtlCol="0" anchor="ctr"/>
-          <a:lstStyle/>
-          <a:p>
-            <a:pPr marL="0" indent="0">
-              <a:buNone/>
-            </a:pPr>
-            <a:r>
-              <a:rPr lang="en-US" sz="2800" dirty="0">
-                <a:solidFill>
-                  <a:srgbClr val="1F53E5"/>
-                </a:solidFill>
-                <a:latin typeface="Roboto" pitchFamily="34" charset="0"/>
-                <a:ea typeface="Roboto" pitchFamily="34" charset="-122"/>
-                <a:cs typeface="Roboto" pitchFamily="34" charset="-120"/>
-              </a:rPr>
-              <a:t>Dados reais: 61 interações, 31/07 a 28/08, US$ 1,88 acumulado</a:t>
-            </a:r>
-            <a:endParaRPr lang="en-US" sz="2800" dirty="0"/>
-          </a:p>
-        </p:txBody>
-      </p:sp>
-    </p:spTree>
-    <p:extLst>
-      <p:ext uri="{BB962C8B-B14F-4D97-AF65-F5344CB8AC3E}">
-        <p14:creationId xmlns:p14="http://schemas.microsoft.com/office/powerpoint/2010/main" val="2400972537"/>
-      </p:ext>
-    </p:extLst>
-  </p:cSld>
-  <p:clrMapOvr>
-    <a:masterClrMapping/>
-  </p:clrMapOvr>
-</p:sld>
-</file>
-
-<file path=ppt/slides/slide8.xml><?xml version="1.0" encoding="utf-8"?>
-<p:sld xmlns:a="http://schemas.openxmlformats.org/drawingml/2006/main" xmlns:r="http://schemas.openxmlformats.org/officeDocument/2006/relationships" xmlns:p="http://schemas.openxmlformats.org/presentationml/2006/main">
   <p:cSld name="Slide 7">
     <p:bg>
       <p:bgPr>
         <a:solidFill>
           <a:srgbClr val="0C0C0E"/>
         </a:solidFill>
-        <a:effectLst/>
       </p:bgPr>
     </p:bg>
     <p:spTree>
@@ -11377,14 +9750,14 @@
       </p:grpSpPr>
       <p:pic>
         <p:nvPicPr>
-          <p:cNvPr id="2" name="Image 0" descr="C:\Users\PCSTUD~1\AppData\Local\Temp\claude\C--Users-PC-Studio-2-Desktop-6498-Evals\7ce78c02-4c99-40d4-bc57-5394098065c6\scratchpad\art\malha.png"/>
+          <p:cNvPr id="2" name="Image 0" descr="art\malha.png">    </p:cNvPr>
           <p:cNvPicPr>
             <a:picLocks noChangeAspect="1"/>
           </p:cNvPicPr>
           <p:nvPr/>
         </p:nvPicPr>
         <p:blipFill>
-          <a:blip r:embed="rId3"/>
+          <a:blip r:embed="rId1"/>
           <a:stretch>
             <a:fillRect/>
           </a:stretch>
@@ -11401,14 +9774,14 @@
       </p:pic>
       <p:pic>
         <p:nvPicPr>
-          <p:cNvPr id="3" name="Image 1" descr="C:\Users\PCSTUD~1\AppData\Local\Temp\claude\C--Users-PC-Studio-2-Desktop-6498-Evals\7ce78c02-4c99-40d4-bc57-5394098065c6\scratchpad\art\logo.png"/>
+          <p:cNvPr id="3" name="Image 1" descr="art\logo.png">    </p:cNvPr>
           <p:cNvPicPr>
             <a:picLocks noChangeAspect="1"/>
           </p:cNvPicPr>
           <p:nvPr/>
         </p:nvPicPr>
         <p:blipFill>
-          <a:blip r:embed="rId4"/>
+          <a:blip r:embed="rId2"/>
           <a:stretch>
             <a:fillRect/>
           </a:stretch>
@@ -11431,7 +9804,7 @@
         </p:nvSpPr>
         <p:spPr>
           <a:xfrm>
-            <a:off x="2423160" y="2148840"/>
+            <a:off x="2423160" y="1051560"/>
             <a:ext cx="19540728" cy="594360"/>
           </a:xfrm>
           <a:prstGeom prst="rect">
@@ -11444,11 +9817,11 @@
           <a:bodyPr wrap="square" lIns="0" tIns="0" rIns="0" bIns="0" rtlCol="0" anchor="ctr"/>
           <a:lstStyle/>
           <a:p>
-            <a:pPr marL="0" indent="0">
+            <a:pPr indent="0" marL="0">
               <a:buNone/>
             </a:pPr>
             <a:r>
-              <a:rPr lang="en-US" sz="2100" b="1" kern="0" spc="250" dirty="0">
+              <a:rPr lang="en-US" sz="2100" b="1" spc="250" kern="0" dirty="0">
                 <a:solidFill>
                   <a:srgbClr val="1F53E5"/>
                 </a:solidFill>
@@ -11470,8 +9843,8 @@
         </p:nvSpPr>
         <p:spPr>
           <a:xfrm>
-            <a:off x="2423160" y="2880360"/>
-            <a:ext cx="18745200" cy="2377440"/>
+            <a:off x="2423160" y="1783080"/>
+            <a:ext cx="19568160" cy="2377440"/>
           </a:xfrm>
           <a:prstGeom prst="rect">
             <a:avLst/>
@@ -11483,7 +9856,7 @@
           <a:bodyPr wrap="square" lIns="0" tIns="0" rIns="0" bIns="0" rtlCol="0" anchor="t"/>
           <a:lstStyle/>
           <a:p>
-            <a:pPr marL="0" indent="0">
+            <a:pPr indent="0" marL="0">
               <a:lnSpc>
                 <a:spcPct val="105000"/>
               </a:lnSpc>
@@ -11506,14 +9879,58 @@
       </p:sp>
       <p:sp>
         <p:nvSpPr>
-          <p:cNvPr id="6" name="Text 2"/>
+          <p:cNvPr id="6" name="Shape 2"/>
+          <p:cNvSpPr/>
+          <p:nvPr/>
+        </p:nvSpPr>
+        <p:spPr>
+          <a:xfrm>
+            <a:off x="2423160" y="4526280"/>
+            <a:ext cx="2011680" cy="68580"/>
+          </a:xfrm>
+          <a:prstGeom prst="rect">
+            <a:avLst/>
+          </a:prstGeom>
+          <a:solidFill>
+            <a:srgbClr val="1F53E5"/>
+          </a:solidFill>
+          <a:ln/>
+        </p:spPr>
+      </p:sp>
+      <p:pic>
+        <p:nvPicPr>
+          <p:cNvPr id="7" name="Image 2" descr="art\seta.png">    </p:cNvPr>
+          <p:cNvPicPr>
+            <a:picLocks noChangeAspect="1"/>
+          </p:cNvPicPr>
+          <p:nvPr/>
+        </p:nvPicPr>
+        <p:blipFill>
+          <a:blip r:embed="rId3"/>
+          <a:stretch>
+            <a:fillRect/>
+          </a:stretch>
+        </p:blipFill>
+        <p:spPr>
+          <a:xfrm>
+            <a:off x="2423160" y="6094476"/>
+            <a:ext cx="475488" cy="411480"/>
+          </a:xfrm>
+          <a:prstGeom prst="rect">
+            <a:avLst/>
+          </a:prstGeom>
+        </p:spPr>
+      </p:pic>
+      <p:sp>
+        <p:nvSpPr>
+          <p:cNvPr id="8" name="Text 3"/>
           <p:cNvSpPr txBox="1"/>
           <p:nvPr/>
         </p:nvSpPr>
         <p:spPr>
           <a:xfrm>
-            <a:off x="2423160" y="5367528"/>
-            <a:ext cx="777240" cy="548640"/>
+            <a:off x="3337560" y="5966460"/>
+            <a:ext cx="17922240" cy="548640"/>
           </a:xfrm>
           <a:prstGeom prst="rect">
             <a:avLst/>
@@ -11525,46 +9942,7 @@
           <a:bodyPr wrap="square" lIns="0" tIns="0" rIns="0" bIns="0" rtlCol="0" anchor="t"/>
           <a:lstStyle/>
           <a:p>
-            <a:pPr marL="0" indent="0">
-              <a:buNone/>
-            </a:pPr>
-            <a:r>
-              <a:rPr lang="en-US" sz="3000" b="1" dirty="0">
-                <a:solidFill>
-                  <a:srgbClr val="1F53E5"/>
-                </a:solidFill>
-                <a:latin typeface="Roboto" pitchFamily="34" charset="0"/>
-                <a:ea typeface="Roboto" pitchFamily="34" charset="-122"/>
-                <a:cs typeface="Roboto" pitchFamily="34" charset="-120"/>
-              </a:rPr>
-              <a:t>→</a:t>
-            </a:r>
-            <a:endParaRPr lang="en-US" sz="3000" dirty="0"/>
-          </a:p>
-        </p:txBody>
-      </p:sp>
-      <p:sp>
-        <p:nvSpPr>
-          <p:cNvPr id="7" name="Text 3"/>
-          <p:cNvSpPr txBox="1"/>
-          <p:nvPr/>
-        </p:nvSpPr>
-        <p:spPr>
-          <a:xfrm>
-            <a:off x="3337560" y="5349240"/>
-            <a:ext cx="17922240" cy="548640"/>
-          </a:xfrm>
-          <a:prstGeom prst="rect">
-            <a:avLst/>
-          </a:prstGeom>
-          <a:noFill/>
-          <a:ln/>
-        </p:spPr>
-        <p:txBody>
-          <a:bodyPr wrap="square" lIns="0" tIns="0" rIns="0" bIns="0" rtlCol="0" anchor="t"/>
-          <a:lstStyle/>
-          <a:p>
-            <a:pPr marL="0" indent="0">
+            <a:pPr indent="0" marL="0">
               <a:lnSpc>
                 <a:spcPct val="118000"/>
               </a:lnSpc>
@@ -11585,16 +9963,40 @@
           </a:p>
         </p:txBody>
       </p:sp>
-      <p:sp>
-        <p:nvSpPr>
-          <p:cNvPr id="8" name="Text 4"/>
+      <p:pic>
+        <p:nvPicPr>
+          <p:cNvPr id="9" name="Image 3" descr="art\seta.png">    </p:cNvPr>
+          <p:cNvPicPr>
+            <a:picLocks noChangeAspect="1"/>
+          </p:cNvPicPr>
+          <p:nvPr/>
+        </p:nvPicPr>
+        <p:blipFill>
+          <a:blip r:embed="rId4"/>
+          <a:stretch>
+            <a:fillRect/>
+          </a:stretch>
+        </p:blipFill>
+        <p:spPr>
+          <a:xfrm>
+            <a:off x="2423160" y="7648956"/>
+            <a:ext cx="475488" cy="411480"/>
+          </a:xfrm>
+          <a:prstGeom prst="rect">
+            <a:avLst/>
+          </a:prstGeom>
+        </p:spPr>
+      </p:pic>
+      <p:sp>
+        <p:nvSpPr>
+          <p:cNvPr id="10" name="Text 4"/>
           <p:cNvSpPr txBox="1"/>
           <p:nvPr/>
         </p:nvSpPr>
         <p:spPr>
           <a:xfrm>
-            <a:off x="2423160" y="6419088"/>
-            <a:ext cx="777240" cy="548640"/>
+            <a:off x="3337560" y="7520940"/>
+            <a:ext cx="17922240" cy="548640"/>
           </a:xfrm>
           <a:prstGeom prst="rect">
             <a:avLst/>
@@ -11606,46 +10008,7 @@
           <a:bodyPr wrap="square" lIns="0" tIns="0" rIns="0" bIns="0" rtlCol="0" anchor="t"/>
           <a:lstStyle/>
           <a:p>
-            <a:pPr marL="0" indent="0">
-              <a:buNone/>
-            </a:pPr>
-            <a:r>
-              <a:rPr lang="en-US" sz="3000" b="1" dirty="0">
-                <a:solidFill>
-                  <a:srgbClr val="1F53E5"/>
-                </a:solidFill>
-                <a:latin typeface="Roboto" pitchFamily="34" charset="0"/>
-                <a:ea typeface="Roboto" pitchFamily="34" charset="-122"/>
-                <a:cs typeface="Roboto" pitchFamily="34" charset="-120"/>
-              </a:rPr>
-              <a:t>→</a:t>
-            </a:r>
-            <a:endParaRPr lang="en-US" sz="3000" dirty="0"/>
-          </a:p>
-        </p:txBody>
-      </p:sp>
-      <p:sp>
-        <p:nvSpPr>
-          <p:cNvPr id="9" name="Text 5"/>
-          <p:cNvSpPr txBox="1"/>
-          <p:nvPr/>
-        </p:nvSpPr>
-        <p:spPr>
-          <a:xfrm>
-            <a:off x="3337560" y="6400800"/>
-            <a:ext cx="17922240" cy="548640"/>
-          </a:xfrm>
-          <a:prstGeom prst="rect">
-            <a:avLst/>
-          </a:prstGeom>
-          <a:noFill/>
-          <a:ln/>
-        </p:spPr>
-        <p:txBody>
-          <a:bodyPr wrap="square" lIns="0" tIns="0" rIns="0" bIns="0" rtlCol="0" anchor="t"/>
-          <a:lstStyle/>
-          <a:p>
-            <a:pPr marL="0" indent="0">
+            <a:pPr indent="0" marL="0">
               <a:lnSpc>
                 <a:spcPct val="118000"/>
               </a:lnSpc>
@@ -11666,16 +10029,40 @@
           </a:p>
         </p:txBody>
       </p:sp>
-      <p:sp>
-        <p:nvSpPr>
-          <p:cNvPr id="10" name="Text 6"/>
+      <p:pic>
+        <p:nvPicPr>
+          <p:cNvPr id="11" name="Image 4" descr="art\seta.png">    </p:cNvPr>
+          <p:cNvPicPr>
+            <a:picLocks noChangeAspect="1"/>
+          </p:cNvPicPr>
+          <p:nvPr/>
+        </p:nvPicPr>
+        <p:blipFill>
+          <a:blip r:embed="rId5"/>
+          <a:stretch>
+            <a:fillRect/>
+          </a:stretch>
+        </p:blipFill>
+        <p:spPr>
+          <a:xfrm>
+            <a:off x="2423160" y="9203436"/>
+            <a:ext cx="475488" cy="411480"/>
+          </a:xfrm>
+          <a:prstGeom prst="rect">
+            <a:avLst/>
+          </a:prstGeom>
+        </p:spPr>
+      </p:pic>
+      <p:sp>
+        <p:nvSpPr>
+          <p:cNvPr id="12" name="Text 5"/>
           <p:cNvSpPr txBox="1"/>
           <p:nvPr/>
         </p:nvSpPr>
         <p:spPr>
           <a:xfrm>
-            <a:off x="2423160" y="7470648"/>
-            <a:ext cx="777240" cy="548640"/>
+            <a:off x="3337560" y="9075420"/>
+            <a:ext cx="17922240" cy="548640"/>
           </a:xfrm>
           <a:prstGeom prst="rect">
             <a:avLst/>
@@ -11687,46 +10074,7 @@
           <a:bodyPr wrap="square" lIns="0" tIns="0" rIns="0" bIns="0" rtlCol="0" anchor="t"/>
           <a:lstStyle/>
           <a:p>
-            <a:pPr marL="0" indent="0">
-              <a:buNone/>
-            </a:pPr>
-            <a:r>
-              <a:rPr lang="en-US" sz="3000" b="1" dirty="0">
-                <a:solidFill>
-                  <a:srgbClr val="1F53E5"/>
-                </a:solidFill>
-                <a:latin typeface="Roboto" pitchFamily="34" charset="0"/>
-                <a:ea typeface="Roboto" pitchFamily="34" charset="-122"/>
-                <a:cs typeface="Roboto" pitchFamily="34" charset="-120"/>
-              </a:rPr>
-              <a:t>→</a:t>
-            </a:r>
-            <a:endParaRPr lang="en-US" sz="3000" dirty="0"/>
-          </a:p>
-        </p:txBody>
-      </p:sp>
-      <p:sp>
-        <p:nvSpPr>
-          <p:cNvPr id="11" name="Text 7"/>
-          <p:cNvSpPr txBox="1"/>
-          <p:nvPr/>
-        </p:nvSpPr>
-        <p:spPr>
-          <a:xfrm>
-            <a:off x="3337560" y="7452360"/>
-            <a:ext cx="17922240" cy="548640"/>
-          </a:xfrm>
-          <a:prstGeom prst="rect">
-            <a:avLst/>
-          </a:prstGeom>
-          <a:noFill/>
-          <a:ln/>
-        </p:spPr>
-        <p:txBody>
-          <a:bodyPr wrap="square" lIns="0" tIns="0" rIns="0" bIns="0" rtlCol="0" anchor="t"/>
-          <a:lstStyle/>
-          <a:p>
-            <a:pPr marL="0" indent="0">
+            <a:pPr indent="0" marL="0">
               <a:lnSpc>
                 <a:spcPct val="118000"/>
               </a:lnSpc>
@@ -11747,16 +10095,40 @@
           </a:p>
         </p:txBody>
       </p:sp>
-      <p:sp>
-        <p:nvSpPr>
-          <p:cNvPr id="12" name="Text 8"/>
+      <p:pic>
+        <p:nvPicPr>
+          <p:cNvPr id="13" name="Image 5" descr="art\seta.png">    </p:cNvPr>
+          <p:cNvPicPr>
+            <a:picLocks noChangeAspect="1"/>
+          </p:cNvPicPr>
+          <p:nvPr/>
+        </p:nvPicPr>
+        <p:blipFill>
+          <a:blip r:embed="rId6"/>
+          <a:stretch>
+            <a:fillRect/>
+          </a:stretch>
+        </p:blipFill>
+        <p:spPr>
+          <a:xfrm>
+            <a:off x="2423160" y="10757916"/>
+            <a:ext cx="475488" cy="411480"/>
+          </a:xfrm>
+          <a:prstGeom prst="rect">
+            <a:avLst/>
+          </a:prstGeom>
+        </p:spPr>
+      </p:pic>
+      <p:sp>
+        <p:nvSpPr>
+          <p:cNvPr id="14" name="Text 6"/>
           <p:cNvSpPr txBox="1"/>
           <p:nvPr/>
         </p:nvSpPr>
         <p:spPr>
           <a:xfrm>
-            <a:off x="2423160" y="8522208"/>
-            <a:ext cx="777240" cy="548640"/>
+            <a:off x="3337560" y="10629900"/>
+            <a:ext cx="17922240" cy="548640"/>
           </a:xfrm>
           <a:prstGeom prst="rect">
             <a:avLst/>
@@ -11768,46 +10140,7 @@
           <a:bodyPr wrap="square" lIns="0" tIns="0" rIns="0" bIns="0" rtlCol="0" anchor="t"/>
           <a:lstStyle/>
           <a:p>
-            <a:pPr marL="0" indent="0">
-              <a:buNone/>
-            </a:pPr>
-            <a:r>
-              <a:rPr lang="en-US" sz="3000" b="1" dirty="0">
-                <a:solidFill>
-                  <a:srgbClr val="1F53E5"/>
-                </a:solidFill>
-                <a:latin typeface="Roboto" pitchFamily="34" charset="0"/>
-                <a:ea typeface="Roboto" pitchFamily="34" charset="-122"/>
-                <a:cs typeface="Roboto" pitchFamily="34" charset="-120"/>
-              </a:rPr>
-              <a:t>→</a:t>
-            </a:r>
-            <a:endParaRPr lang="en-US" sz="3000" dirty="0"/>
-          </a:p>
-        </p:txBody>
-      </p:sp>
-      <p:sp>
-        <p:nvSpPr>
-          <p:cNvPr id="13" name="Text 9"/>
-          <p:cNvSpPr txBox="1"/>
-          <p:nvPr/>
-        </p:nvSpPr>
-        <p:spPr>
-          <a:xfrm>
-            <a:off x="3337560" y="8503920"/>
-            <a:ext cx="17922240" cy="548640"/>
-          </a:xfrm>
-          <a:prstGeom prst="rect">
-            <a:avLst/>
-          </a:prstGeom>
-          <a:noFill/>
-          <a:ln/>
-        </p:spPr>
-        <p:txBody>
-          <a:bodyPr wrap="square" lIns="0" tIns="0" rIns="0" bIns="0" rtlCol="0" anchor="t"/>
-          <a:lstStyle/>
-          <a:p>
-            <a:pPr marL="0" indent="0">
+            <a:pPr indent="0" marL="0">
               <a:lnSpc>
                 <a:spcPct val="118000"/>
               </a:lnSpc>
@@ -11816,7 +10149,7 @@
             <a:r>
               <a:rPr lang="en-US" sz="2800" b="1" dirty="0">
                 <a:solidFill>
-                  <a:srgbClr val="BDBFC7"/>
+                  <a:srgbClr val="F4F5F6"/>
                 </a:solidFill>
                 <a:latin typeface="Roboto" pitchFamily="34" charset="0"/>
                 <a:ea typeface="Roboto" pitchFamily="34" charset="-122"/>
@@ -11830,7 +10163,7 @@
       </p:sp>
       <p:sp>
         <p:nvSpPr>
-          <p:cNvPr id="14" name="Text 10"/>
+          <p:cNvPr id="15" name="Text 7"/>
           <p:cNvSpPr txBox="1"/>
           <p:nvPr/>
         </p:nvSpPr>
@@ -11849,7 +10182,7 @@
           <a:bodyPr wrap="square" lIns="0" tIns="0" rIns="0" bIns="0" rtlCol="0" anchor="ctr"/>
           <a:lstStyle/>
           <a:p>
-            <a:pPr marL="0" indent="0">
+            <a:pPr indent="0" marL="0">
               <a:buNone/>
             </a:pPr>
             <a:r>
@@ -11877,7 +10210,7 @@
 </p:sld>
 </file>
 
-<file path=ppt/slides/slide9.xml><?xml version="1.0" encoding="utf-8"?>
+<file path=ppt/slides/slide8.xml><?xml version="1.0" encoding="utf-8"?>
 <p:sld xmlns:a="http://schemas.openxmlformats.org/drawingml/2006/main" xmlns:r="http://schemas.openxmlformats.org/officeDocument/2006/relationships" xmlns:p="http://schemas.openxmlformats.org/presentationml/2006/main">
   <p:cSld name="Slide 8">
     <p:bg>
@@ -11885,7 +10218,6 @@
         <a:solidFill>
           <a:srgbClr val="0C0C0E"/>
         </a:solidFill>
-        <a:effectLst/>
       </p:bgPr>
     </p:bg>
     <p:spTree>
@@ -11904,14 +10236,14 @@
       </p:grpSpPr>
       <p:pic>
         <p:nvPicPr>
-          <p:cNvPr id="2" name="Image 0" descr="C:\Users\PCSTUD~1\AppData\Local\Temp\claude\C--Users-PC-Studio-2-Desktop-6498-Evals\7ce78c02-4c99-40d4-bc57-5394098065c6\scratchpad\art\malha.png"/>
+          <p:cNvPr id="2" name="Image 0" descr="art\malha.png">    </p:cNvPr>
           <p:cNvPicPr>
             <a:picLocks noChangeAspect="1"/>
           </p:cNvPicPr>
           <p:nvPr/>
         </p:nvPicPr>
         <p:blipFill>
-          <a:blip r:embed="rId3"/>
+          <a:blip r:embed="rId1"/>
           <a:stretch>
             <a:fillRect/>
           </a:stretch>
@@ -11928,14 +10260,14 @@
       </p:pic>
       <p:pic>
         <p:nvPicPr>
-          <p:cNvPr id="3" name="Image 1" descr="C:\Users\PCSTUD~1\AppData\Local\Temp\claude\C--Users-PC-Studio-2-Desktop-6498-Evals\7ce78c02-4c99-40d4-bc57-5394098065c6\scratchpad\art\logo.png"/>
+          <p:cNvPr id="3" name="Image 1" descr="art\logo.png">    </p:cNvPr>
           <p:cNvPicPr>
             <a:picLocks noChangeAspect="1"/>
           </p:cNvPicPr>
           <p:nvPr/>
         </p:nvPicPr>
         <p:blipFill>
-          <a:blip r:embed="rId4"/>
+          <a:blip r:embed="rId2"/>
           <a:stretch>
             <a:fillRect/>
           </a:stretch>
@@ -11958,7 +10290,7 @@
         </p:nvSpPr>
         <p:spPr>
           <a:xfrm>
-            <a:off x="2423160" y="2148840"/>
+            <a:off x="2423160" y="1051560"/>
             <a:ext cx="19540728" cy="594360"/>
           </a:xfrm>
           <a:prstGeom prst="rect">
@@ -11971,11 +10303,11 @@
           <a:bodyPr wrap="square" lIns="0" tIns="0" rIns="0" bIns="0" rtlCol="0" anchor="ctr"/>
           <a:lstStyle/>
           <a:p>
-            <a:pPr marL="0" indent="0">
+            <a:pPr indent="0" marL="0">
               <a:buNone/>
             </a:pPr>
             <a:r>
-              <a:rPr lang="en-US" sz="2100" b="1" kern="0" spc="250" dirty="0">
+              <a:rPr lang="en-US" sz="2100" b="1" spc="250" kern="0" dirty="0">
                 <a:solidFill>
                   <a:srgbClr val="1F53E5"/>
                 </a:solidFill>
@@ -11997,8 +10329,8 @@
         </p:nvSpPr>
         <p:spPr>
           <a:xfrm>
-            <a:off x="2423160" y="2880360"/>
-            <a:ext cx="18745200" cy="2377440"/>
+            <a:off x="2423160" y="1783080"/>
+            <a:ext cx="19568160" cy="2377440"/>
           </a:xfrm>
           <a:prstGeom prst="rect">
             <a:avLst/>
@@ -12010,7 +10342,7 @@
           <a:bodyPr wrap="square" lIns="0" tIns="0" rIns="0" bIns="0" rtlCol="0" anchor="t"/>
           <a:lstStyle/>
           <a:p>
-            <a:pPr marL="0" indent="0">
+            <a:pPr indent="0" marL="0">
               <a:lnSpc>
                 <a:spcPct val="105000"/>
               </a:lnSpc>
@@ -12033,14 +10365,58 @@
       </p:sp>
       <p:sp>
         <p:nvSpPr>
-          <p:cNvPr id="6" name="Text 2"/>
+          <p:cNvPr id="6" name="Shape 2"/>
+          <p:cNvSpPr/>
+          <p:nvPr/>
+        </p:nvSpPr>
+        <p:spPr>
+          <a:xfrm>
+            <a:off x="2423160" y="4526280"/>
+            <a:ext cx="2011680" cy="68580"/>
+          </a:xfrm>
+          <a:prstGeom prst="rect">
+            <a:avLst/>
+          </a:prstGeom>
+          <a:solidFill>
+            <a:srgbClr val="1F53E5"/>
+          </a:solidFill>
+          <a:ln/>
+        </p:spPr>
+      </p:sp>
+      <p:pic>
+        <p:nvPicPr>
+          <p:cNvPr id="7" name="Image 2" descr="art\seta.png">    </p:cNvPr>
+          <p:cNvPicPr>
+            <a:picLocks noChangeAspect="1"/>
+          </p:cNvPicPr>
+          <p:nvPr/>
+        </p:nvPicPr>
+        <p:blipFill>
+          <a:blip r:embed="rId3"/>
+          <a:stretch>
+            <a:fillRect/>
+          </a:stretch>
+        </p:blipFill>
+        <p:spPr>
+          <a:xfrm>
+            <a:off x="2423160" y="6871716"/>
+            <a:ext cx="475488" cy="411480"/>
+          </a:xfrm>
+          <a:prstGeom prst="rect">
+            <a:avLst/>
+          </a:prstGeom>
+        </p:spPr>
+      </p:pic>
+      <p:sp>
+        <p:nvSpPr>
+          <p:cNvPr id="8" name="Text 3"/>
           <p:cNvSpPr txBox="1"/>
           <p:nvPr/>
         </p:nvSpPr>
         <p:spPr>
           <a:xfrm>
-            <a:off x="2423160" y="5367528"/>
-            <a:ext cx="777240" cy="548640"/>
+            <a:off x="3337560" y="6743700"/>
+            <a:ext cx="17922240" cy="548640"/>
           </a:xfrm>
           <a:prstGeom prst="rect">
             <a:avLst/>
@@ -12052,46 +10428,7 @@
           <a:bodyPr wrap="square" lIns="0" tIns="0" rIns="0" bIns="0" rtlCol="0" anchor="t"/>
           <a:lstStyle/>
           <a:p>
-            <a:pPr marL="0" indent="0">
-              <a:buNone/>
-            </a:pPr>
-            <a:r>
-              <a:rPr lang="en-US" sz="3000" b="1" dirty="0">
-                <a:solidFill>
-                  <a:srgbClr val="1F53E5"/>
-                </a:solidFill>
-                <a:latin typeface="Roboto" pitchFamily="34" charset="0"/>
-                <a:ea typeface="Roboto" pitchFamily="34" charset="-122"/>
-                <a:cs typeface="Roboto" pitchFamily="34" charset="-120"/>
-              </a:rPr>
-              <a:t>→</a:t>
-            </a:r>
-            <a:endParaRPr lang="en-US" sz="3000" dirty="0"/>
-          </a:p>
-        </p:txBody>
-      </p:sp>
-      <p:sp>
-        <p:nvSpPr>
-          <p:cNvPr id="7" name="Text 3"/>
-          <p:cNvSpPr txBox="1"/>
-          <p:nvPr/>
-        </p:nvSpPr>
-        <p:spPr>
-          <a:xfrm>
-            <a:off x="3337560" y="5349240"/>
-            <a:ext cx="17922240" cy="548640"/>
-          </a:xfrm>
-          <a:prstGeom prst="rect">
-            <a:avLst/>
-          </a:prstGeom>
-          <a:noFill/>
-          <a:ln/>
-        </p:spPr>
-        <p:txBody>
-          <a:bodyPr wrap="square" lIns="0" tIns="0" rIns="0" bIns="0" rtlCol="0" anchor="t"/>
-          <a:lstStyle/>
-          <a:p>
-            <a:pPr marL="0" indent="0">
+            <a:pPr indent="0" marL="0">
               <a:lnSpc>
                 <a:spcPct val="118000"/>
               </a:lnSpc>
@@ -12112,16 +10449,40 @@
           </a:p>
         </p:txBody>
       </p:sp>
-      <p:sp>
-        <p:nvSpPr>
-          <p:cNvPr id="8" name="Text 4"/>
+      <p:pic>
+        <p:nvPicPr>
+          <p:cNvPr id="9" name="Image 3" descr="art\seta.png">    </p:cNvPr>
+          <p:cNvPicPr>
+            <a:picLocks noChangeAspect="1"/>
+          </p:cNvPicPr>
+          <p:nvPr/>
+        </p:nvPicPr>
+        <p:blipFill>
+          <a:blip r:embed="rId4"/>
+          <a:stretch>
+            <a:fillRect/>
+          </a:stretch>
+        </p:blipFill>
+        <p:spPr>
+          <a:xfrm>
+            <a:off x="2423160" y="8426196"/>
+            <a:ext cx="475488" cy="411480"/>
+          </a:xfrm>
+          <a:prstGeom prst="rect">
+            <a:avLst/>
+          </a:prstGeom>
+        </p:spPr>
+      </p:pic>
+      <p:sp>
+        <p:nvSpPr>
+          <p:cNvPr id="10" name="Text 4"/>
           <p:cNvSpPr txBox="1"/>
           <p:nvPr/>
         </p:nvSpPr>
         <p:spPr>
           <a:xfrm>
-            <a:off x="2423160" y="6419088"/>
-            <a:ext cx="777240" cy="548640"/>
+            <a:off x="3337560" y="8298180"/>
+            <a:ext cx="17922240" cy="548640"/>
           </a:xfrm>
           <a:prstGeom prst="rect">
             <a:avLst/>
@@ -12133,46 +10494,7 @@
           <a:bodyPr wrap="square" lIns="0" tIns="0" rIns="0" bIns="0" rtlCol="0" anchor="t"/>
           <a:lstStyle/>
           <a:p>
-            <a:pPr marL="0" indent="0">
-              <a:buNone/>
-            </a:pPr>
-            <a:r>
-              <a:rPr lang="en-US" sz="3000" b="1" dirty="0">
-                <a:solidFill>
-                  <a:srgbClr val="1F53E5"/>
-                </a:solidFill>
-                <a:latin typeface="Roboto" pitchFamily="34" charset="0"/>
-                <a:ea typeface="Roboto" pitchFamily="34" charset="-122"/>
-                <a:cs typeface="Roboto" pitchFamily="34" charset="-120"/>
-              </a:rPr>
-              <a:t>→</a:t>
-            </a:r>
-            <a:endParaRPr lang="en-US" sz="3000" dirty="0"/>
-          </a:p>
-        </p:txBody>
-      </p:sp>
-      <p:sp>
-        <p:nvSpPr>
-          <p:cNvPr id="9" name="Text 5"/>
-          <p:cNvSpPr txBox="1"/>
-          <p:nvPr/>
-        </p:nvSpPr>
-        <p:spPr>
-          <a:xfrm>
-            <a:off x="3337560" y="6400800"/>
-            <a:ext cx="17922240" cy="548640"/>
-          </a:xfrm>
-          <a:prstGeom prst="rect">
-            <a:avLst/>
-          </a:prstGeom>
-          <a:noFill/>
-          <a:ln/>
-        </p:spPr>
-        <p:txBody>
-          <a:bodyPr wrap="square" lIns="0" tIns="0" rIns="0" bIns="0" rtlCol="0" anchor="t"/>
-          <a:lstStyle/>
-          <a:p>
-            <a:pPr marL="0" indent="0">
+            <a:pPr indent="0" marL="0">
               <a:lnSpc>
                 <a:spcPct val="118000"/>
               </a:lnSpc>
@@ -12193,16 +10515,40 @@
           </a:p>
         </p:txBody>
       </p:sp>
-      <p:sp>
-        <p:nvSpPr>
-          <p:cNvPr id="10" name="Text 6"/>
+      <p:pic>
+        <p:nvPicPr>
+          <p:cNvPr id="11" name="Image 4" descr="art\seta.png">    </p:cNvPr>
+          <p:cNvPicPr>
+            <a:picLocks noChangeAspect="1"/>
+          </p:cNvPicPr>
+          <p:nvPr/>
+        </p:nvPicPr>
+        <p:blipFill>
+          <a:blip r:embed="rId5"/>
+          <a:stretch>
+            <a:fillRect/>
+          </a:stretch>
+        </p:blipFill>
+        <p:spPr>
+          <a:xfrm>
+            <a:off x="2423160" y="9980676"/>
+            <a:ext cx="475488" cy="411480"/>
+          </a:xfrm>
+          <a:prstGeom prst="rect">
+            <a:avLst/>
+          </a:prstGeom>
+        </p:spPr>
+      </p:pic>
+      <p:sp>
+        <p:nvSpPr>
+          <p:cNvPr id="12" name="Text 5"/>
           <p:cNvSpPr txBox="1"/>
           <p:nvPr/>
         </p:nvSpPr>
         <p:spPr>
           <a:xfrm>
-            <a:off x="2423160" y="7470648"/>
-            <a:ext cx="777240" cy="548640"/>
+            <a:off x="3337560" y="9852660"/>
+            <a:ext cx="17922240" cy="548640"/>
           </a:xfrm>
           <a:prstGeom prst="rect">
             <a:avLst/>
@@ -12214,46 +10560,7 @@
           <a:bodyPr wrap="square" lIns="0" tIns="0" rIns="0" bIns="0" rtlCol="0" anchor="t"/>
           <a:lstStyle/>
           <a:p>
-            <a:pPr marL="0" indent="0">
-              <a:buNone/>
-            </a:pPr>
-            <a:r>
-              <a:rPr lang="en-US" sz="3000" b="1" dirty="0">
-                <a:solidFill>
-                  <a:srgbClr val="1F53E5"/>
-                </a:solidFill>
-                <a:latin typeface="Roboto" pitchFamily="34" charset="0"/>
-                <a:ea typeface="Roboto" pitchFamily="34" charset="-122"/>
-                <a:cs typeface="Roboto" pitchFamily="34" charset="-120"/>
-              </a:rPr>
-              <a:t>→</a:t>
-            </a:r>
-            <a:endParaRPr lang="en-US" sz="3000" dirty="0"/>
-          </a:p>
-        </p:txBody>
-      </p:sp>
-      <p:sp>
-        <p:nvSpPr>
-          <p:cNvPr id="11" name="Text 7"/>
-          <p:cNvSpPr txBox="1"/>
-          <p:nvPr/>
-        </p:nvSpPr>
-        <p:spPr>
-          <a:xfrm>
-            <a:off x="3337560" y="7452360"/>
-            <a:ext cx="17922240" cy="548640"/>
-          </a:xfrm>
-          <a:prstGeom prst="rect">
-            <a:avLst/>
-          </a:prstGeom>
-          <a:noFill/>
-          <a:ln/>
-        </p:spPr>
-        <p:txBody>
-          <a:bodyPr wrap="square" lIns="0" tIns="0" rIns="0" bIns="0" rtlCol="0" anchor="t"/>
-          <a:lstStyle/>
-          <a:p>
-            <a:pPr marL="0" indent="0">
+            <a:pPr indent="0" marL="0">
               <a:lnSpc>
                 <a:spcPct val="118000"/>
               </a:lnSpc>
@@ -12262,7 +10569,7 @@
             <a:r>
               <a:rPr lang="en-US" sz="2800" b="1" dirty="0">
                 <a:solidFill>
-                  <a:srgbClr val="BDBFC7"/>
+                  <a:srgbClr val="F4F5F6"/>
                 </a:solidFill>
                 <a:latin typeface="Roboto" pitchFamily="34" charset="0"/>
                 <a:ea typeface="Roboto" pitchFamily="34" charset="-122"/>
@@ -12276,7 +10583,7 @@
       </p:sp>
       <p:sp>
         <p:nvSpPr>
-          <p:cNvPr id="12" name="Text 8"/>
+          <p:cNvPr id="13" name="Text 6"/>
           <p:cNvSpPr txBox="1"/>
           <p:nvPr/>
         </p:nvSpPr>
@@ -12295,7 +10602,427 @@
           <a:bodyPr wrap="square" lIns="0" tIns="0" rIns="0" bIns="0" rtlCol="0" anchor="ctr"/>
           <a:lstStyle/>
           <a:p>
-            <a:pPr marL="0" indent="0">
+            <a:pPr indent="0" marL="0">
+              <a:buNone/>
+            </a:pPr>
+            <a:r>
+              <a:rPr lang="en-US" sz="1500" dirty="0">
+                <a:solidFill>
+                  <a:srgbClr val="A7A9B4">
+                    <a:alpha val="65000"/>
+                  </a:srgbClr>
+                </a:solidFill>
+                <a:latin typeface="Roboto" pitchFamily="34" charset="0"/>
+                <a:ea typeface="Roboto" pitchFamily="34" charset="-122"/>
+                <a:cs typeface="Roboto" pitchFamily="34" charset="-120"/>
+              </a:rPr>
+              <a:t>Aula 3 — Observabilidade: monitorando em produção — Evals, observabilidade e conformidade</a:t>
+            </a:r>
+            <a:endParaRPr lang="en-US" sz="1500" dirty="0"/>
+          </a:p>
+        </p:txBody>
+      </p:sp>
+    </p:spTree>
+  </p:cSld>
+  <p:clrMapOvr>
+    <a:masterClrMapping/>
+  </p:clrMapOvr>
+</p:sld>
+</file>
+
+<file path=ppt/slides/slide9.xml><?xml version="1.0" encoding="utf-8"?>
+<p:sld xmlns:a="http://schemas.openxmlformats.org/drawingml/2006/main" xmlns:r="http://schemas.openxmlformats.org/officeDocument/2006/relationships" xmlns:p="http://schemas.openxmlformats.org/presentationml/2006/main">
+  <p:cSld name="Slide 9">
+    <p:bg>
+      <p:bgPr>
+        <a:solidFill>
+          <a:srgbClr val="0C0C0E"/>
+        </a:solidFill>
+      </p:bgPr>
+    </p:bg>
+    <p:spTree>
+      <p:nvGrpSpPr>
+        <p:cNvPr id="1" name=""/>
+        <p:cNvGrpSpPr/>
+        <p:nvPr/>
+      </p:nvGrpSpPr>
+      <p:grpSpPr>
+        <a:xfrm>
+          <a:off x="0" y="0"/>
+          <a:ext cx="0" cy="0"/>
+          <a:chOff x="0" y="0"/>
+          <a:chExt cx="0" cy="0"/>
+        </a:xfrm>
+      </p:grpSpPr>
+      <p:pic>
+        <p:nvPicPr>
+          <p:cNvPr id="2" name="Image 0" descr="art\malha.png">    </p:cNvPr>
+          <p:cNvPicPr>
+            <a:picLocks noChangeAspect="1"/>
+          </p:cNvPicPr>
+          <p:nvPr/>
+        </p:nvPicPr>
+        <p:blipFill>
+          <a:blip r:embed="rId1"/>
+          <a:stretch>
+            <a:fillRect/>
+          </a:stretch>
+        </p:blipFill>
+        <p:spPr>
+          <a:xfrm>
+            <a:off x="0" y="0"/>
+            <a:ext cx="24387048" cy="13716000"/>
+          </a:xfrm>
+          <a:prstGeom prst="rect">
+            <a:avLst/>
+          </a:prstGeom>
+        </p:spPr>
+      </p:pic>
+      <p:pic>
+        <p:nvPicPr>
+          <p:cNvPr id="3" name="Image 1" descr="art\logo.png">    </p:cNvPr>
+          <p:cNvPicPr>
+            <a:picLocks noChangeAspect="1"/>
+          </p:cNvPicPr>
+          <p:nvPr/>
+        </p:nvPicPr>
+        <p:blipFill>
+          <a:blip r:embed="rId2"/>
+          <a:stretch>
+            <a:fillRect/>
+          </a:stretch>
+        </p:blipFill>
+        <p:spPr>
+          <a:xfrm>
+            <a:off x="23436072" y="402336"/>
+            <a:ext cx="475488" cy="594360"/>
+          </a:xfrm>
+          <a:prstGeom prst="rect">
+            <a:avLst/>
+          </a:prstGeom>
+        </p:spPr>
+      </p:pic>
+      <p:sp>
+        <p:nvSpPr>
+          <p:cNvPr id="4" name="Text 0"/>
+          <p:cNvSpPr txBox="1"/>
+          <p:nvPr/>
+        </p:nvSpPr>
+        <p:spPr>
+          <a:xfrm>
+            <a:off x="2423160" y="1051560"/>
+            <a:ext cx="19540728" cy="594360"/>
+          </a:xfrm>
+          <a:prstGeom prst="rect">
+            <a:avLst/>
+          </a:prstGeom>
+          <a:noFill/>
+          <a:ln/>
+        </p:spPr>
+        <p:txBody>
+          <a:bodyPr wrap="square" lIns="0" tIns="0" rIns="0" bIns="0" rtlCol="0" anchor="ctr"/>
+          <a:lstStyle/>
+          <a:p>
+            <a:pPr indent="0" marL="0">
+              <a:buNone/>
+            </a:pPr>
+            <a:r>
+              <a:rPr lang="en-US" sz="2100" b="1" spc="250" kern="0" dirty="0">
+                <a:solidFill>
+                  <a:srgbClr val="1F53E5"/>
+                </a:solidFill>
+                <a:latin typeface="Encode Sans" pitchFamily="34" charset="0"/>
+                <a:ea typeface="Encode Sans" pitchFamily="34" charset="-122"/>
+                <a:cs typeface="Encode Sans" pitchFamily="34" charset="-120"/>
+              </a:rPr>
+              <a:t>VÍDEO 3.2</a:t>
+            </a:r>
+            <a:endParaRPr lang="en-US" sz="2100" dirty="0"/>
+          </a:p>
+        </p:txBody>
+      </p:sp>
+      <p:sp>
+        <p:nvSpPr>
+          <p:cNvPr id="5" name="Text 1"/>
+          <p:cNvSpPr txBox="1"/>
+          <p:nvPr/>
+        </p:nvSpPr>
+        <p:spPr>
+          <a:xfrm>
+            <a:off x="2423160" y="1783080"/>
+            <a:ext cx="19568160" cy="2377440"/>
+          </a:xfrm>
+          <a:prstGeom prst="rect">
+            <a:avLst/>
+          </a:prstGeom>
+          <a:noFill/>
+          <a:ln/>
+        </p:spPr>
+        <p:txBody>
+          <a:bodyPr wrap="square" lIns="0" tIns="0" rIns="0" bIns="0" rtlCol="0" anchor="t"/>
+          <a:lstStyle/>
+          <a:p>
+            <a:pPr indent="0" marL="0">
+              <a:lnSpc>
+                <a:spcPct val="105000"/>
+              </a:lnSpc>
+              <a:buNone/>
+            </a:pPr>
+            <a:r>
+              <a:rPr lang="en-US" sz="6600" dirty="0">
+                <a:solidFill>
+                  <a:srgbClr val="BDBFC7"/>
+                </a:solidFill>
+                <a:latin typeface="Encode Sans" pitchFamily="34" charset="0"/>
+                <a:ea typeface="Encode Sans" pitchFamily="34" charset="-122"/>
+                <a:cs typeface="Encode Sans" pitchFamily="34" charset="-120"/>
+              </a:rPr>
+              <a:t>Antes e depois, ao vivo</a:t>
+            </a:r>
+            <a:endParaRPr lang="en-US" sz="6600" dirty="0"/>
+          </a:p>
+        </p:txBody>
+      </p:sp>
+      <p:sp>
+        <p:nvSpPr>
+          <p:cNvPr id="6" name="Shape 2"/>
+          <p:cNvSpPr/>
+          <p:nvPr/>
+        </p:nvSpPr>
+        <p:spPr>
+          <a:xfrm>
+            <a:off x="2423160" y="4526280"/>
+            <a:ext cx="2011680" cy="68580"/>
+          </a:xfrm>
+          <a:prstGeom prst="rect">
+            <a:avLst/>
+          </a:prstGeom>
+          <a:solidFill>
+            <a:srgbClr val="1F53E5"/>
+          </a:solidFill>
+          <a:ln/>
+        </p:spPr>
+      </p:sp>
+      <p:pic>
+        <p:nvPicPr>
+          <p:cNvPr id="7" name="Image 2" descr="art\seta.png">    </p:cNvPr>
+          <p:cNvPicPr>
+            <a:picLocks noChangeAspect="1"/>
+          </p:cNvPicPr>
+          <p:nvPr/>
+        </p:nvPicPr>
+        <p:blipFill>
+          <a:blip r:embed="rId3"/>
+          <a:stretch>
+            <a:fillRect/>
+          </a:stretch>
+        </p:blipFill>
+        <p:spPr>
+          <a:xfrm>
+            <a:off x="2423160" y="6871716"/>
+            <a:ext cx="475488" cy="411480"/>
+          </a:xfrm>
+          <a:prstGeom prst="rect">
+            <a:avLst/>
+          </a:prstGeom>
+        </p:spPr>
+      </p:pic>
+      <p:sp>
+        <p:nvSpPr>
+          <p:cNvPr id="8" name="Text 3"/>
+          <p:cNvSpPr txBox="1"/>
+          <p:nvPr/>
+        </p:nvSpPr>
+        <p:spPr>
+          <a:xfrm>
+            <a:off x="3337560" y="6743700"/>
+            <a:ext cx="17922240" cy="548640"/>
+          </a:xfrm>
+          <a:prstGeom prst="rect">
+            <a:avLst/>
+          </a:prstGeom>
+          <a:noFill/>
+          <a:ln/>
+        </p:spPr>
+        <p:txBody>
+          <a:bodyPr wrap="square" lIns="0" tIns="0" rIns="0" bIns="0" rtlCol="0" anchor="t"/>
+          <a:lstStyle/>
+          <a:p>
+            <a:pPr indent="0" marL="0">
+              <a:lnSpc>
+                <a:spcPct val="118000"/>
+              </a:lnSpc>
+              <a:buNone/>
+            </a:pPr>
+            <a:r>
+              <a:rPr lang="en-US" sz="2800" dirty="0">
+                <a:solidFill>
+                  <a:srgbClr val="A7A9B4"/>
+                </a:solidFill>
+                <a:latin typeface="Roboto" pitchFamily="34" charset="0"/>
+                <a:ea typeface="Roboto" pitchFamily="34" charset="-122"/>
+                <a:cs typeface="Roboto" pitchFamily="34" charset="-120"/>
+              </a:rPr>
+              <a:t>Desligo a observabilidade e uso o produto: funciona igual, e não aparece nada no painel.</a:t>
+            </a:r>
+            <a:endParaRPr lang="en-US" sz="2800" dirty="0"/>
+          </a:p>
+        </p:txBody>
+      </p:sp>
+      <p:pic>
+        <p:nvPicPr>
+          <p:cNvPr id="9" name="Image 3" descr="art\seta.png">    </p:cNvPr>
+          <p:cNvPicPr>
+            <a:picLocks noChangeAspect="1"/>
+          </p:cNvPicPr>
+          <p:nvPr/>
+        </p:nvPicPr>
+        <p:blipFill>
+          <a:blip r:embed="rId4"/>
+          <a:stretch>
+            <a:fillRect/>
+          </a:stretch>
+        </p:blipFill>
+        <p:spPr>
+          <a:xfrm>
+            <a:off x="2423160" y="8426196"/>
+            <a:ext cx="475488" cy="411480"/>
+          </a:xfrm>
+          <a:prstGeom prst="rect">
+            <a:avLst/>
+          </a:prstGeom>
+        </p:spPr>
+      </p:pic>
+      <p:sp>
+        <p:nvSpPr>
+          <p:cNvPr id="10" name="Text 4"/>
+          <p:cNvSpPr txBox="1"/>
+          <p:nvPr/>
+        </p:nvSpPr>
+        <p:spPr>
+          <a:xfrm>
+            <a:off x="3337560" y="8298180"/>
+            <a:ext cx="17922240" cy="548640"/>
+          </a:xfrm>
+          <a:prstGeom prst="rect">
+            <a:avLst/>
+          </a:prstGeom>
+          <a:noFill/>
+          <a:ln/>
+        </p:spPr>
+        <p:txBody>
+          <a:bodyPr wrap="square" lIns="0" tIns="0" rIns="0" bIns="0" rtlCol="0" anchor="t"/>
+          <a:lstStyle/>
+          <a:p>
+            <a:pPr indent="0" marL="0">
+              <a:lnSpc>
+                <a:spcPct val="118000"/>
+              </a:lnSpc>
+              <a:buNone/>
+            </a:pPr>
+            <a:r>
+              <a:rPr lang="en-US" sz="2800" dirty="0">
+                <a:solidFill>
+                  <a:srgbClr val="A7A9B4"/>
+                </a:solidFill>
+                <a:latin typeface="Roboto" pitchFamily="34" charset="0"/>
+                <a:ea typeface="Roboto" pitchFamily="34" charset="-122"/>
+                <a:cs typeface="Roboto" pitchFamily="34" charset="-120"/>
+              </a:rPr>
+              <a:t>Ligo de novo e faço exatamente a mesma coisa: agora a interação aparece inteira.</a:t>
+            </a:r>
+            <a:endParaRPr lang="en-US" sz="2800" dirty="0"/>
+          </a:p>
+        </p:txBody>
+      </p:sp>
+      <p:pic>
+        <p:nvPicPr>
+          <p:cNvPr id="11" name="Image 4" descr="art\seta.png">    </p:cNvPr>
+          <p:cNvPicPr>
+            <a:picLocks noChangeAspect="1"/>
+          </p:cNvPicPr>
+          <p:nvPr/>
+        </p:nvPicPr>
+        <p:blipFill>
+          <a:blip r:embed="rId5"/>
+          <a:stretch>
+            <a:fillRect/>
+          </a:stretch>
+        </p:blipFill>
+        <p:spPr>
+          <a:xfrm>
+            <a:off x="2423160" y="9980676"/>
+            <a:ext cx="475488" cy="411480"/>
+          </a:xfrm>
+          <a:prstGeom prst="rect">
+            <a:avLst/>
+          </a:prstGeom>
+        </p:spPr>
+      </p:pic>
+      <p:sp>
+        <p:nvSpPr>
+          <p:cNvPr id="12" name="Text 5"/>
+          <p:cNvSpPr txBox="1"/>
+          <p:nvPr/>
+        </p:nvSpPr>
+        <p:spPr>
+          <a:xfrm>
+            <a:off x="3337560" y="9852660"/>
+            <a:ext cx="17922240" cy="548640"/>
+          </a:xfrm>
+          <a:prstGeom prst="rect">
+            <a:avLst/>
+          </a:prstGeom>
+          <a:noFill/>
+          <a:ln/>
+        </p:spPr>
+        <p:txBody>
+          <a:bodyPr wrap="square" lIns="0" tIns="0" rIns="0" bIns="0" rtlCol="0" anchor="t"/>
+          <a:lstStyle/>
+          <a:p>
+            <a:pPr indent="0" marL="0">
+              <a:lnSpc>
+                <a:spcPct val="118000"/>
+              </a:lnSpc>
+              <a:buNone/>
+            </a:pPr>
+            <a:r>
+              <a:rPr lang="en-US" sz="2800" b="1" dirty="0">
+                <a:solidFill>
+                  <a:srgbClr val="F4F5F6"/>
+                </a:solidFill>
+                <a:latin typeface="Roboto" pitchFamily="34" charset="0"/>
+                <a:ea typeface="Roboto" pitchFamily="34" charset="-122"/>
+                <a:cs typeface="Roboto" pitchFamily="34" charset="-120"/>
+              </a:rPr>
+              <a:t>Espere uns 45 segundos até o registro ficar visível. Não é erro — é a fila de chegada.</a:t>
+            </a:r>
+            <a:endParaRPr lang="en-US" sz="2800" dirty="0"/>
+          </a:p>
+        </p:txBody>
+      </p:sp>
+      <p:sp>
+        <p:nvSpPr>
+          <p:cNvPr id="13" name="Text 6"/>
+          <p:cNvSpPr txBox="1"/>
+          <p:nvPr/>
+        </p:nvSpPr>
+        <p:spPr>
+          <a:xfrm>
+            <a:off x="2423160" y="12755880"/>
+            <a:ext cx="19540728" cy="457200"/>
+          </a:xfrm>
+          <a:prstGeom prst="rect">
+            <a:avLst/>
+          </a:prstGeom>
+          <a:noFill/>
+          <a:ln/>
+        </p:spPr>
+        <p:txBody>
+          <a:bodyPr wrap="square" lIns="0" tIns="0" rIns="0" bIns="0" rtlCol="0" anchor="ctr"/>
+          <a:lstStyle/>
+          <a:p>
+            <a:pPr indent="0" marL="0">
               <a:buNone/>
             </a:pPr>
             <a:r>
@@ -12616,319 +11343,4 @@
     </a:ext>
   </a:extLst>
 </a:theme>
-</file>
-
-<file path=ppt/theme/theme2.xml><?xml version="1.0" encoding="utf-8"?>
-<a:theme xmlns:a="http://schemas.openxmlformats.org/drawingml/2006/main" name="Tema do Office">
-  <a:themeElements>
-    <a:clrScheme name="Office">
-      <a:dk1>
-        <a:sysClr val="windowText" lastClr="000000"/>
-      </a:dk1>
-      <a:lt1>
-        <a:sysClr val="window" lastClr="FFFFFF"/>
-      </a:lt1>
-      <a:dk2>
-        <a:srgbClr val="0E2841"/>
-      </a:dk2>
-      <a:lt2>
-        <a:srgbClr val="E8E8E8"/>
-      </a:lt2>
-      <a:accent1>
-        <a:srgbClr val="156082"/>
-      </a:accent1>
-      <a:accent2>
-        <a:srgbClr val="E97132"/>
-      </a:accent2>
-      <a:accent3>
-        <a:srgbClr val="196B24"/>
-      </a:accent3>
-      <a:accent4>
-        <a:srgbClr val="0F9ED5"/>
-      </a:accent4>
-      <a:accent5>
-        <a:srgbClr val="A02B93"/>
-      </a:accent5>
-      <a:accent6>
-        <a:srgbClr val="4EA72E"/>
-      </a:accent6>
-      <a:hlink>
-        <a:srgbClr val="467886"/>
-      </a:hlink>
-      <a:folHlink>
-        <a:srgbClr val="96607D"/>
-      </a:folHlink>
-    </a:clrScheme>
-    <a:fontScheme name="Office">
-      <a:majorFont>
-        <a:latin typeface="Aptos Display" panose="02110004020202020204"/>
-        <a:ea typeface=""/>
-        <a:cs typeface=""/>
-        <a:font script="Jpan" typeface="游ゴシック Light"/>
-        <a:font script="Hang" typeface="맑은 고딕"/>
-        <a:font script="Hans" typeface="等线 Light"/>
-        <a:font script="Hant" typeface="新細明體"/>
-        <a:font script="Arab" typeface="Times New Roman"/>
-        <a:font script="Hebr" typeface="Times New Roman"/>
-        <a:font script="Thai" typeface="Angsana New"/>
-        <a:font script="Ethi" typeface="Nyala"/>
-        <a:font script="Beng" typeface="Vrinda"/>
-        <a:font script="Gujr" typeface="Shruti"/>
-        <a:font script="Khmr" typeface="MoolBoran"/>
-        <a:font script="Knda" typeface="Tunga"/>
-        <a:font script="Guru" typeface="Raavi"/>
-        <a:font script="Cans" typeface="Euphemia"/>
-        <a:font script="Cher" typeface="Plantagenet Cherokee"/>
-        <a:font script="Yiii" typeface="Microsoft Yi Baiti"/>
-        <a:font script="Tibt" typeface="Microsoft Himalaya"/>
-        <a:font script="Thaa" typeface="MV Boli"/>
-        <a:font script="Deva" typeface="Mangal"/>
-        <a:font script="Telu" typeface="Gautami"/>
-        <a:font script="Taml" typeface="Latha"/>
-        <a:font script="Syrc" typeface="Estrangelo Edessa"/>
-        <a:font script="Orya" typeface="Kalinga"/>
-        <a:font script="Mlym" typeface="Kartika"/>
-        <a:font script="Laoo" typeface="DokChampa"/>
-        <a:font script="Sinh" typeface="Iskoola Pota"/>
-        <a:font script="Mong" typeface="Mongolian Baiti"/>
-        <a:font script="Viet" typeface="Times New Roman"/>
-        <a:font script="Uigh" typeface="Microsoft Uighur"/>
-        <a:font script="Geor" typeface="Sylfaen"/>
-        <a:font script="Armn" typeface="Arial"/>
-        <a:font script="Bugi" typeface="Leelawadee UI"/>
-        <a:font script="Bopo" typeface="Microsoft JhengHei"/>
-        <a:font script="Java" typeface="Javanese Text"/>
-        <a:font script="Lisu" typeface="Segoe UI"/>
-        <a:font script="Mymr" typeface="Myanmar Text"/>
-        <a:font script="Nkoo" typeface="Ebrima"/>
-        <a:font script="Olck" typeface="Nirmala UI"/>
-        <a:font script="Osma" typeface="Ebrima"/>
-        <a:font script="Phag" typeface="Phagspa"/>
-        <a:font script="Syrn" typeface="Estrangelo Edessa"/>
-        <a:font script="Syrj" typeface="Estrangelo Edessa"/>
-        <a:font script="Syre" typeface="Estrangelo Edessa"/>
-        <a:font script="Sora" typeface="Nirmala UI"/>
-        <a:font script="Tale" typeface="Microsoft Tai Le"/>
-        <a:font script="Talu" typeface="Microsoft New Tai Lue"/>
-        <a:font script="Tfng" typeface="Ebrima"/>
-      </a:majorFont>
-      <a:minorFont>
-        <a:latin typeface="Aptos" panose="02110004020202020204"/>
-        <a:ea typeface=""/>
-        <a:cs typeface=""/>
-        <a:font script="Jpan" typeface="游ゴシック"/>
-        <a:font script="Hang" typeface="맑은 고딕"/>
-        <a:font script="Hans" typeface="等线"/>
-        <a:font script="Hant" typeface="新細明體"/>
-        <a:font script="Arab" typeface="Arial"/>
-        <a:font script="Hebr" typeface="Arial"/>
-        <a:font script="Thai" typeface="Cordia New"/>
-        <a:font script="Ethi" typeface="Nyala"/>
-        <a:font script="Beng" typeface="Vrinda"/>
-        <a:font script="Gujr" typeface="Shruti"/>
-        <a:font script="Khmr" typeface="DaunPenh"/>
-        <a:font script="Knda" typeface="Tunga"/>
-        <a:font script="Guru" typeface="Raavi"/>
-        <a:font script="Cans" typeface="Euphemia"/>
-        <a:font script="Cher" typeface="Plantagenet Cherokee"/>
-        <a:font script="Yiii" typeface="Microsoft Yi Baiti"/>
-        <a:font script="Tibt" typeface="Microsoft Himalaya"/>
-        <a:font script="Thaa" typeface="MV Boli"/>
-        <a:font script="Deva" typeface="Mangal"/>
-        <a:font script="Telu" typeface="Gautami"/>
-        <a:font script="Taml" typeface="Latha"/>
-        <a:font script="Syrc" typeface="Estrangelo Edessa"/>
-        <a:font script="Orya" typeface="Kalinga"/>
-        <a:font script="Mlym" typeface="Kartika"/>
-        <a:font script="Laoo" typeface="DokChampa"/>
-        <a:font script="Sinh" typeface="Iskoola Pota"/>
-        <a:font script="Mong" typeface="Mongolian Baiti"/>
-        <a:font script="Viet" typeface="Arial"/>
-        <a:font script="Uigh" typeface="Microsoft Uighur"/>
-        <a:font script="Geor" typeface="Sylfaen"/>
-        <a:font script="Armn" typeface="Arial"/>
-        <a:font script="Bugi" typeface="Leelawadee UI"/>
-        <a:font script="Bopo" typeface="Microsoft JhengHei"/>
-        <a:font script="Java" typeface="Javanese Text"/>
-        <a:font script="Lisu" typeface="Segoe UI"/>
-        <a:font script="Mymr" typeface="Myanmar Text"/>
-        <a:font script="Nkoo" typeface="Ebrima"/>
-        <a:font script="Olck" typeface="Nirmala UI"/>
-        <a:font script="Osma" typeface="Ebrima"/>
-        <a:font script="Phag" typeface="Phagspa"/>
-        <a:font script="Syrn" typeface="Estrangelo Edessa"/>
-        <a:font script="Syrj" typeface="Estrangelo Edessa"/>
-        <a:font script="Syre" typeface="Estrangelo Edessa"/>
-        <a:font script="Sora" typeface="Nirmala UI"/>
-        <a:font script="Tale" typeface="Microsoft Tai Le"/>
-        <a:font script="Talu" typeface="Microsoft New Tai Lue"/>
-        <a:font script="Tfng" typeface="Ebrima"/>
-      </a:minorFont>
-    </a:fontScheme>
-    <a:fmtScheme name="Office">
-      <a:fillStyleLst>
-        <a:solidFill>
-          <a:schemeClr val="phClr"/>
-        </a:solidFill>
-        <a:gradFill rotWithShape="1">
-          <a:gsLst>
-            <a:gs pos="0">
-              <a:schemeClr val="phClr">
-                <a:lumMod val="110000"/>
-                <a:satMod val="105000"/>
-                <a:tint val="67000"/>
-              </a:schemeClr>
-            </a:gs>
-            <a:gs pos="50000">
-              <a:schemeClr val="phClr">
-                <a:lumMod val="105000"/>
-                <a:satMod val="103000"/>
-                <a:tint val="73000"/>
-              </a:schemeClr>
-            </a:gs>
-            <a:gs pos="100000">
-              <a:schemeClr val="phClr">
-                <a:lumMod val="105000"/>
-                <a:satMod val="109000"/>
-                <a:tint val="81000"/>
-              </a:schemeClr>
-            </a:gs>
-          </a:gsLst>
-          <a:lin ang="5400000" scaled="0"/>
-        </a:gradFill>
-        <a:gradFill rotWithShape="1">
-          <a:gsLst>
-            <a:gs pos="0">
-              <a:schemeClr val="phClr">
-                <a:satMod val="103000"/>
-                <a:lumMod val="102000"/>
-                <a:tint val="94000"/>
-              </a:schemeClr>
-            </a:gs>
-            <a:gs pos="50000">
-              <a:schemeClr val="phClr">
-                <a:satMod val="110000"/>
-                <a:lumMod val="100000"/>
-                <a:shade val="100000"/>
-              </a:schemeClr>
-            </a:gs>
-            <a:gs pos="100000">
-              <a:schemeClr val="phClr">
-                <a:lumMod val="99000"/>
-                <a:satMod val="120000"/>
-                <a:shade val="78000"/>
-              </a:schemeClr>
-            </a:gs>
-          </a:gsLst>
-          <a:lin ang="5400000" scaled="0"/>
-        </a:gradFill>
-      </a:fillStyleLst>
-      <a:lnStyleLst>
-        <a:ln w="12700" cap="flat" cmpd="sng" algn="ctr">
-          <a:solidFill>
-            <a:schemeClr val="phClr"/>
-          </a:solidFill>
-          <a:prstDash val="solid"/>
-          <a:miter lim="800000"/>
-        </a:ln>
-        <a:ln w="19050" cap="flat" cmpd="sng" algn="ctr">
-          <a:solidFill>
-            <a:schemeClr val="phClr"/>
-          </a:solidFill>
-          <a:prstDash val="solid"/>
-          <a:miter lim="800000"/>
-        </a:ln>
-        <a:ln w="25400" cap="flat" cmpd="sng" algn="ctr">
-          <a:solidFill>
-            <a:schemeClr val="phClr"/>
-          </a:solidFill>
-          <a:prstDash val="solid"/>
-          <a:miter lim="800000"/>
-        </a:ln>
-      </a:lnStyleLst>
-      <a:effectStyleLst>
-        <a:effectStyle>
-          <a:effectLst/>
-        </a:effectStyle>
-        <a:effectStyle>
-          <a:effectLst/>
-        </a:effectStyle>
-        <a:effectStyle>
-          <a:effectLst>
-            <a:outerShdw blurRad="57150" dist="19050" dir="5400000" algn="ctr" rotWithShape="0">
-              <a:srgbClr val="000000">
-                <a:alpha val="63000"/>
-              </a:srgbClr>
-            </a:outerShdw>
-          </a:effectLst>
-        </a:effectStyle>
-      </a:effectStyleLst>
-      <a:bgFillStyleLst>
-        <a:solidFill>
-          <a:schemeClr val="phClr"/>
-        </a:solidFill>
-        <a:solidFill>
-          <a:schemeClr val="phClr">
-            <a:tint val="95000"/>
-            <a:satMod val="170000"/>
-          </a:schemeClr>
-        </a:solidFill>
-        <a:gradFill rotWithShape="1">
-          <a:gsLst>
-            <a:gs pos="0">
-              <a:schemeClr val="phClr">
-                <a:tint val="93000"/>
-                <a:satMod val="150000"/>
-                <a:shade val="98000"/>
-                <a:lumMod val="102000"/>
-              </a:schemeClr>
-            </a:gs>
-            <a:gs pos="50000">
-              <a:schemeClr val="phClr">
-                <a:tint val="98000"/>
-                <a:satMod val="130000"/>
-                <a:shade val="90000"/>
-                <a:lumMod val="103000"/>
-              </a:schemeClr>
-            </a:gs>
-            <a:gs pos="100000">
-              <a:schemeClr val="phClr">
-                <a:shade val="63000"/>
-                <a:satMod val="120000"/>
-              </a:schemeClr>
-            </a:gs>
-          </a:gsLst>
-          <a:lin ang="5400000" scaled="0"/>
-        </a:gradFill>
-      </a:bgFillStyleLst>
-    </a:fmtScheme>
-  </a:themeElements>
-  <a:objectDefaults>
-    <a:lnDef>
-      <a:spPr/>
-      <a:bodyPr/>
-      <a:lstStyle/>
-      <a:style>
-        <a:lnRef idx="2">
-          <a:schemeClr val="accent1"/>
-        </a:lnRef>
-        <a:fillRef idx="0">
-          <a:schemeClr val="accent1"/>
-        </a:fillRef>
-        <a:effectRef idx="1">
-          <a:schemeClr val="accent1"/>
-        </a:effectRef>
-        <a:fontRef idx="minor">
-          <a:schemeClr val="tx1"/>
-        </a:fontRef>
-      </a:style>
-    </a:lnDef>
-  </a:objectDefaults>
-  <a:extraClrSchemeLst/>
-  <a:extLst>
-    <a:ext uri="{05A4C25C-085E-4340-85A3-A5531E510DB2}">
-      <thm15:themeFamily xmlns:thm15="http://schemas.microsoft.com/office/thememl/2012/main" name="Office Theme" id="{2E142A2C-CD16-42D6-873A-C26D2A0506FA}" vid="{1BDDFF52-6CD6-40A5-AB3C-68EB2F1E4D0A}"/>
-    </a:ext>
-  </a:extLst>
-</a:theme>
 </file>
--- a/slides/aula3-alura.pptx
+++ b/slides/aula3-alura.pptx
@@ -25,9 +25,10 @@
     <p:sldId id="273" r:id="rId19"/>
     <p:sldId id="274" r:id="rId20"/>
     <p:sldId id="275" r:id="rId21"/>
+    <p:sldId id="276" r:id="rId22"/>
   </p:sldIdLst>
   <p:notesMasterIdLst>
-    <p:notesMasterId r:id="rId22"/>
+    <p:notesMasterId r:id="rId23"/>
   </p:notesMasterIdLst>
   <p:sldSz cx="24387048" cy="13716000"/>
   <p:notesSz cx="13716000" cy="24387048"/>
@@ -1313,7 +1314,7 @@
           <a:p>
             <a:r>
               <a:rPr lang="en-US" dirty="0"/>
-              <a:t>CLAQUETE — inicio do video 3.5. Segure 2 segundos em silencio antes de comecar a falar: e por esta tela que a edicao corta.</a:t>
+              <a:t/>
             </a:r>
             <a:endParaRPr lang="en-US" dirty="0"/>
           </a:p>
@@ -1401,7 +1402,7 @@
           <a:p>
             <a:r>
               <a:rPr lang="en-US" dirty="0"/>
-              <a:t/>
+              <a:t>CLAQUETE — inicio do video 3.5. Segure 2 segundos em silencio antes de comecar a falar: e por esta tela que a edicao corta.</a:t>
             </a:r>
             <a:endParaRPr lang="en-US" dirty="0"/>
           </a:p>
@@ -1601,6 +1602,94 @@
             <a:fld id="{F7021451-1387-4CA6-816F-3879F97B5CBC}" type="slidenum">
               <a:rPr lang="en-US"/>
               <a:t>20</a:t>
+            </a:fld>
+            <a:endParaRPr lang="en-US"/>
+          </a:p>
+        </p:txBody>
+      </p:sp>
+    </p:spTree>
+    <p:extLst>
+      <p:ext uri="{BB962C8B-B14F-4D97-AF65-F5344CB8AC3E}">
+        <p14:creationId xmlns:p14="http://schemas.microsoft.com/office/powerpoint/2010/main" val="1024086991"/>
+      </p:ext>
+    </p:extLst>
+  </p:cSld>
+  <p:clrMapOvr>
+    <a:masterClrMapping/>
+  </p:clrMapOvr>
+</p:notes>
+</file>
+
+<file path=ppt/notesSlides/notesSlide21.xml><?xml version="1.0" encoding="utf-8"?>
+<p:notes xmlns:a="http://schemas.openxmlformats.org/drawingml/2006/main" xmlns:r="http://schemas.openxmlformats.org/officeDocument/2006/relationships" xmlns:p="http://schemas.openxmlformats.org/presentationml/2006/main">
+  <p:cSld>
+    <p:spTree>
+      <p:nvGrpSpPr>
+        <p:cNvPr id="1" name=""/>
+        <p:cNvGrpSpPr/>
+        <p:nvPr/>
+      </p:nvGrpSpPr>
+      <p:grpSpPr>
+        <a:xfrm>
+          <a:off x="0" y="0"/>
+          <a:ext cx="0" cy="0"/>
+          <a:chOff x="0" y="0"/>
+          <a:chExt cx="0" cy="0"/>
+        </a:xfrm>
+      </p:grpSpPr>
+      <p:sp>
+        <p:nvSpPr>
+          <p:cNvPr id="2" name="Slide Image Placeholder 1"/>
+          <p:cNvSpPr>
+            <a:spLocks noGrp="1" noRot="1" noChangeAspect="1"/>
+          </p:cNvSpPr>
+          <p:nvPr>
+            <p:ph type="sldImg"/>
+          </p:nvPr>
+        </p:nvSpPr>
+        <p:spPr/>
+      </p:sp>
+      <p:sp>
+        <p:nvSpPr>
+          <p:cNvPr id="3" name="Notes Placeholder 2"/>
+          <p:cNvSpPr>
+            <a:spLocks noGrp="1"/>
+          </p:cNvSpPr>
+          <p:nvPr>
+            <p:ph type="body" idx="1"/>
+          </p:nvPr>
+        </p:nvSpPr>
+        <p:spPr/>
+        <p:txBody>
+          <a:bodyPr/>
+          <a:lstStyle/>
+          <a:p>
+            <a:r>
+              <a:rPr lang="en-US" dirty="0"/>
+              <a:t/>
+            </a:r>
+            <a:endParaRPr lang="en-US" dirty="0"/>
+          </a:p>
+        </p:txBody>
+      </p:sp>
+      <p:sp>
+        <p:nvSpPr>
+          <p:cNvPr id="4" name="Slide Number Placeholder 3"/>
+          <p:cNvSpPr>
+            <a:spLocks noGrp="1"/>
+          </p:cNvSpPr>
+          <p:nvPr>
+            <p:ph type="sldNum" sz="quarter" idx="10"/>
+          </p:nvPr>
+        </p:nvSpPr>
+        <p:spPr/>
+        <p:txBody>
+          <a:bodyPr/>
+          <a:lstStyle/>
+          <a:p>
+            <a:fld id="{F7021451-1387-4CA6-816F-3879F97B5CBC}" type="slidenum">
+              <a:rPr lang="en-US"/>
+              <a:t>21</a:t>
             </a:fld>
             <a:endParaRPr lang="en-US"/>
           </a:p>
@@ -6328,7 +6417,7 @@
                 <a:ea typeface="Encode Sans" pitchFamily="34" charset="-122"/>
                 <a:cs typeface="Encode Sans" pitchFamily="34" charset="-120"/>
               </a:rPr>
-              <a:t>Quatro falhas que eu achei olhando</a:t>
+              <a:t>Cinco falhas que eu achei olhando</a:t>
             </a:r>
             <a:endParaRPr lang="en-US" sz="6600" dirty="0"/>
           </a:p>
@@ -6370,7 +6459,7 @@
         </p:blipFill>
         <p:spPr>
           <a:xfrm>
-            <a:off x="2423160" y="6094476"/>
+            <a:off x="2423160" y="5385816"/>
             <a:ext cx="475488" cy="411480"/>
           </a:xfrm>
           <a:prstGeom prst="rect">
@@ -6386,7 +6475,7 @@
         </p:nvSpPr>
         <p:spPr>
           <a:xfrm>
-            <a:off x="3337560" y="5966460"/>
+            <a:off x="3337560" y="5257800"/>
             <a:ext cx="17922240" cy="548640"/>
           </a:xfrm>
           <a:prstGeom prst="rect">
@@ -6436,7 +6525,7 @@
         </p:blipFill>
         <p:spPr>
           <a:xfrm>
-            <a:off x="2423160" y="7648956"/>
+            <a:off x="2423160" y="6906006"/>
             <a:ext cx="475488" cy="411480"/>
           </a:xfrm>
           <a:prstGeom prst="rect">
@@ -6452,7 +6541,7 @@
         </p:nvSpPr>
         <p:spPr>
           <a:xfrm>
-            <a:off x="3337560" y="7520940"/>
+            <a:off x="3337560" y="6777990"/>
             <a:ext cx="17922240" cy="548640"/>
           </a:xfrm>
           <a:prstGeom prst="rect">
@@ -6502,7 +6591,7 @@
         </p:blipFill>
         <p:spPr>
           <a:xfrm>
-            <a:off x="2423160" y="9203436"/>
+            <a:off x="2423160" y="8426196"/>
             <a:ext cx="475488" cy="411480"/>
           </a:xfrm>
           <a:prstGeom prst="rect">
@@ -6518,7 +6607,7 @@
         </p:nvSpPr>
         <p:spPr>
           <a:xfrm>
-            <a:off x="3337560" y="9075420"/>
+            <a:off x="3337560" y="8298180"/>
             <a:ext cx="17922240" cy="548640"/>
           </a:xfrm>
           <a:prstGeom prst="rect">
@@ -6568,7 +6657,7 @@
         </p:blipFill>
         <p:spPr>
           <a:xfrm>
-            <a:off x="2423160" y="10757916"/>
+            <a:off x="2423160" y="9946386"/>
             <a:ext cx="475488" cy="411480"/>
           </a:xfrm>
           <a:prstGeom prst="rect">
@@ -6584,7 +6673,73 @@
         </p:nvSpPr>
         <p:spPr>
           <a:xfrm>
-            <a:off x="3337560" y="10629900"/>
+            <a:off x="3337560" y="9818370"/>
+            <a:ext cx="17922240" cy="548640"/>
+          </a:xfrm>
+          <a:prstGeom prst="rect">
+            <a:avLst/>
+          </a:prstGeom>
+          <a:noFill/>
+          <a:ln/>
+        </p:spPr>
+        <p:txBody>
+          <a:bodyPr wrap="square" lIns="0" tIns="0" rIns="0" bIns="0" rtlCol="0" anchor="t"/>
+          <a:lstStyle/>
+          <a:p>
+            <a:pPr indent="0" marL="0">
+              <a:lnSpc>
+                <a:spcPct val="118000"/>
+              </a:lnSpc>
+              <a:buNone/>
+            </a:pPr>
+            <a:r>
+              <a:rPr lang="en-US" sz="2800" dirty="0">
+                <a:solidFill>
+                  <a:srgbClr val="A7A9B4"/>
+                </a:solidFill>
+                <a:latin typeface="Roboto" pitchFamily="34" charset="0"/>
+                <a:ea typeface="Roboto" pitchFamily="34" charset="-122"/>
+                <a:cs typeface="Roboto" pitchFamily="34" charset="-120"/>
+              </a:rPr>
+              <a:t>Uma em que a inteligência acertou tudo, e mesmo assim o estoque ficou errado.</a:t>
+            </a:r>
+            <a:endParaRPr lang="en-US" sz="2800" dirty="0"/>
+          </a:p>
+        </p:txBody>
+      </p:sp>
+      <p:pic>
+        <p:nvPicPr>
+          <p:cNvPr id="15" name="Image 6" descr="art\seta.png">    </p:cNvPr>
+          <p:cNvPicPr>
+            <a:picLocks noChangeAspect="1"/>
+          </p:cNvPicPr>
+          <p:nvPr/>
+        </p:nvPicPr>
+        <p:blipFill>
+          <a:blip r:embed="rId7"/>
+          <a:stretch>
+            <a:fillRect/>
+          </a:stretch>
+        </p:blipFill>
+        <p:spPr>
+          <a:xfrm>
+            <a:off x="2423160" y="11466576"/>
+            <a:ext cx="475488" cy="411480"/>
+          </a:xfrm>
+          <a:prstGeom prst="rect">
+            <a:avLst/>
+          </a:prstGeom>
+        </p:spPr>
+      </p:pic>
+      <p:sp>
+        <p:nvSpPr>
+          <p:cNvPr id="16" name="Text 7"/>
+          <p:cNvSpPr txBox="1"/>
+          <p:nvPr/>
+        </p:nvSpPr>
+        <p:spPr>
+          <a:xfrm>
+            <a:off x="3337560" y="11338560"/>
             <a:ext cx="17922240" cy="548640"/>
           </a:xfrm>
           <a:prstGeom prst="rect">
@@ -6612,7 +6767,7 @@
                 <a:ea typeface="Roboto" pitchFamily="34" charset="-122"/>
                 <a:cs typeface="Roboto" pitchFamily="34" charset="-120"/>
               </a:rPr>
-              <a:t>E uma em que a inteligência acertou tudo, e mesmo assim o estoque ficou errado.</a:t>
+              <a:t>E uma quinta, achada ontem à noite, cozinhando de verdade — diferente de todas as outras.</a:t>
             </a:r>
             <a:endParaRPr lang="en-US" sz="2800" dirty="0"/>
           </a:p>
@@ -6620,7 +6775,7 @@
       </p:sp>
       <p:sp>
         <p:nvSpPr>
-          <p:cNvPr id="15" name="Text 7"/>
+          <p:cNvPr id="17" name="Text 8"/>
           <p:cNvSpPr txBox="1"/>
           <p:nvPr/>
         </p:nvSpPr>
@@ -7192,7 +7347,7 @@
                 <a:ea typeface="Encode Sans" pitchFamily="34" charset="-122"/>
                 <a:cs typeface="Encode Sans" pitchFamily="34" charset="-120"/>
               </a:rPr>
-              <a:t>VÍDEO 3.4</a:t>
+              <a:t>VÍDEO 3.4 — 14/09, AO VIVO</a:t>
             </a:r>
             <a:endParaRPr lang="en-US" sz="2100" dirty="0"/>
           </a:p>
@@ -7234,7 +7389,7 @@
                 <a:ea typeface="Encode Sans" pitchFamily="34" charset="-122"/>
                 <a:cs typeface="Encode Sans" pitchFamily="34" charset="-120"/>
               </a:rPr>
-              <a:t>O que as quatro têm em comum</a:t>
+              <a:t>O hambúrguer que sumiu</a:t>
             </a:r>
             <a:endParaRPr lang="en-US" sz="6600" dirty="0"/>
           </a:p>
@@ -7293,6 +7448,72 @@
         <p:spPr>
           <a:xfrm>
             <a:off x="3337560" y="6743700"/>
+            <a:ext cx="17922240" cy="548640"/>
+          </a:xfrm>
+          <a:prstGeom prst="rect">
+            <a:avLst/>
+          </a:prstGeom>
+          <a:noFill/>
+          <a:ln/>
+        </p:spPr>
+        <p:txBody>
+          <a:bodyPr wrap="square" lIns="0" tIns="0" rIns="0" bIns="0" rtlCol="0" anchor="t"/>
+          <a:lstStyle/>
+          <a:p>
+            <a:pPr indent="0" marL="0">
+              <a:lnSpc>
+                <a:spcPct val="118000"/>
+              </a:lnSpc>
+              <a:buNone/>
+            </a:pPr>
+            <a:r>
+              <a:rPr lang="en-US" sz="2800" dirty="0">
+                <a:solidFill>
+                  <a:srgbClr val="A7A9B4"/>
+                </a:solidFill>
+                <a:latin typeface="Roboto" pitchFamily="34" charset="0"/>
+                <a:ea typeface="Roboto" pitchFamily="34" charset="-122"/>
+                <a:cs typeface="Roboto" pitchFamily="34" charset="-120"/>
+              </a:rPr>
+              <a:t>Preparei um prato, contei pro bot, respondi a pergunta dele — três vezes, de jeitos diferentes.</a:t>
+            </a:r>
+            <a:endParaRPr lang="en-US" sz="2800" dirty="0"/>
+          </a:p>
+        </p:txBody>
+      </p:sp>
+      <p:pic>
+        <p:nvPicPr>
+          <p:cNvPr id="9" name="Image 3" descr="art\seta.png">    </p:cNvPr>
+          <p:cNvPicPr>
+            <a:picLocks noChangeAspect="1"/>
+          </p:cNvPicPr>
+          <p:nvPr/>
+        </p:nvPicPr>
+        <p:blipFill>
+          <a:blip r:embed="rId4"/>
+          <a:stretch>
+            <a:fillRect/>
+          </a:stretch>
+        </p:blipFill>
+        <p:spPr>
+          <a:xfrm>
+            <a:off x="2423160" y="8426196"/>
+            <a:ext cx="475488" cy="411480"/>
+          </a:xfrm>
+          <a:prstGeom prst="rect">
+            <a:avLst/>
+          </a:prstGeom>
+        </p:spPr>
+      </p:pic>
+      <p:sp>
+        <p:nvSpPr>
+          <p:cNvPr id="10" name="Text 4"/>
+          <p:cNvSpPr txBox="1"/>
+          <p:nvPr/>
+        </p:nvSpPr>
+        <p:spPr>
+          <a:xfrm>
+            <a:off x="3337560" y="8298180"/>
             <a:ext cx="17922240" cy="548640"/>
           </a:xfrm>
           <a:prstGeom prst="rect">
@@ -7320,7 +7541,7 @@
                 <a:ea typeface="Roboto" pitchFamily="34" charset="-122"/>
                 <a:cs typeface="Roboto" pitchFamily="34" charset="-120"/>
               </a:rPr>
-              <a:t>Nenhuma delas gritou.</a:t>
+              <a:t>Fui checar os quatro traces: os quatro estão perfeitos. Zero erro.</a:t>
             </a:r>
             <a:endParaRPr lang="en-US" sz="2800" dirty="0"/>
           </a:p>
@@ -7328,21 +7549,21 @@
       </p:sp>
       <p:pic>
         <p:nvPicPr>
-          <p:cNvPr id="9" name="Image 3" descr="art\seta.png">    </p:cNvPr>
+          <p:cNvPr id="11" name="Image 4" descr="art\seta.png">    </p:cNvPr>
           <p:cNvPicPr>
             <a:picLocks noChangeAspect="1"/>
           </p:cNvPicPr>
           <p:nvPr/>
         </p:nvPicPr>
         <p:blipFill>
-          <a:blip r:embed="rId4"/>
+          <a:blip r:embed="rId5"/>
           <a:stretch>
             <a:fillRect/>
           </a:stretch>
         </p:blipFill>
         <p:spPr>
           <a:xfrm>
-            <a:off x="2423160" y="8426196"/>
+            <a:off x="2423160" y="9980676"/>
             <a:ext cx="475488" cy="411480"/>
           </a:xfrm>
           <a:prstGeom prst="rect">
@@ -7352,13 +7573,13 @@
       </p:pic>
       <p:sp>
         <p:nvSpPr>
-          <p:cNvPr id="10" name="Text 4"/>
+          <p:cNvPr id="12" name="Text 5"/>
           <p:cNvSpPr txBox="1"/>
           <p:nvPr/>
         </p:nvSpPr>
         <p:spPr>
           <a:xfrm>
-            <a:off x="3337560" y="8298180"/>
+            <a:off x="3337560" y="9852660"/>
             <a:ext cx="17922240" cy="548640"/>
           </a:xfrm>
           <a:prstGeom prst="rect">
@@ -7386,73 +7607,7 @@
                 <a:ea typeface="Roboto" pitchFamily="34" charset="-122"/>
                 <a:cs typeface="Roboto" pitchFamily="34" charset="-120"/>
               </a:rPr>
-              <a:t>Nenhum usuário reclamou de nenhuma das quatro.</a:t>
-            </a:r>
-            <a:endParaRPr lang="en-US" sz="2800" dirty="0"/>
-          </a:p>
-        </p:txBody>
-      </p:sp>
-      <p:pic>
-        <p:nvPicPr>
-          <p:cNvPr id="11" name="Image 4" descr="art\seta.png">    </p:cNvPr>
-          <p:cNvPicPr>
-            <a:picLocks noChangeAspect="1"/>
-          </p:cNvPicPr>
-          <p:nvPr/>
-        </p:nvPicPr>
-        <p:blipFill>
-          <a:blip r:embed="rId5"/>
-          <a:stretch>
-            <a:fillRect/>
-          </a:stretch>
-        </p:blipFill>
-        <p:spPr>
-          <a:xfrm>
-            <a:off x="2423160" y="9980676"/>
-            <a:ext cx="475488" cy="411480"/>
-          </a:xfrm>
-          <a:prstGeom prst="rect">
-            <a:avLst/>
-          </a:prstGeom>
-        </p:spPr>
-      </p:pic>
-      <p:sp>
-        <p:nvSpPr>
-          <p:cNvPr id="12" name="Text 5"/>
-          <p:cNvSpPr txBox="1"/>
-          <p:nvPr/>
-        </p:nvSpPr>
-        <p:spPr>
-          <a:xfrm>
-            <a:off x="3337560" y="9852660"/>
-            <a:ext cx="17922240" cy="548640"/>
-          </a:xfrm>
-          <a:prstGeom prst="rect">
-            <a:avLst/>
-          </a:prstGeom>
-          <a:noFill/>
-          <a:ln/>
-        </p:spPr>
-        <p:txBody>
-          <a:bodyPr wrap="square" lIns="0" tIns="0" rIns="0" bIns="0" rtlCol="0" anchor="t"/>
-          <a:lstStyle/>
-          <a:p>
-            <a:pPr indent="0" marL="0">
-              <a:lnSpc>
-                <a:spcPct val="118000"/>
-              </a:lnSpc>
-              <a:buNone/>
-            </a:pPr>
-            <a:r>
-              <a:rPr lang="en-US" sz="2800" dirty="0">
-                <a:solidFill>
-                  <a:srgbClr val="A7A9B4"/>
-                </a:solidFill>
-                <a:latin typeface="Roboto" pitchFamily="34" charset="0"/>
-                <a:ea typeface="Roboto" pitchFamily="34" charset="-122"/>
-                <a:cs typeface="Roboto" pitchFamily="34" charset="-120"/>
-              </a:rPr>
-              <a:t>Cada uma precisou de alguém olhando o dado certo, com a pergunta certa — e esse alguém é você.</a:t>
+              <a:t>E mesmo assim, o prato nunca entrou no estoque. Resultado líquido zero, sem uma falha visível.</a:t>
             </a:r>
             <a:endParaRPr lang="en-US" sz="2800" dirty="0"/>
           </a:p>
@@ -7510,6 +7665,426 @@
 <file path=ppt/slides/slide18.xml><?xml version="1.0" encoding="utf-8"?>
 <p:sld xmlns:a="http://schemas.openxmlformats.org/drawingml/2006/main" xmlns:r="http://schemas.openxmlformats.org/officeDocument/2006/relationships" xmlns:p="http://schemas.openxmlformats.org/presentationml/2006/main">
   <p:cSld name="Slide 18">
+    <p:bg>
+      <p:bgPr>
+        <a:solidFill>
+          <a:srgbClr val="0C0C0E"/>
+        </a:solidFill>
+      </p:bgPr>
+    </p:bg>
+    <p:spTree>
+      <p:nvGrpSpPr>
+        <p:cNvPr id="1" name=""/>
+        <p:cNvGrpSpPr/>
+        <p:nvPr/>
+      </p:nvGrpSpPr>
+      <p:grpSpPr>
+        <a:xfrm>
+          <a:off x="0" y="0"/>
+          <a:ext cx="0" cy="0"/>
+          <a:chOff x="0" y="0"/>
+          <a:chExt cx="0" cy="0"/>
+        </a:xfrm>
+      </p:grpSpPr>
+      <p:pic>
+        <p:nvPicPr>
+          <p:cNvPr id="2" name="Image 0" descr="art\malha.png">    </p:cNvPr>
+          <p:cNvPicPr>
+            <a:picLocks noChangeAspect="1"/>
+          </p:cNvPicPr>
+          <p:nvPr/>
+        </p:nvPicPr>
+        <p:blipFill>
+          <a:blip r:embed="rId1"/>
+          <a:stretch>
+            <a:fillRect/>
+          </a:stretch>
+        </p:blipFill>
+        <p:spPr>
+          <a:xfrm>
+            <a:off x="0" y="0"/>
+            <a:ext cx="24387048" cy="13716000"/>
+          </a:xfrm>
+          <a:prstGeom prst="rect">
+            <a:avLst/>
+          </a:prstGeom>
+        </p:spPr>
+      </p:pic>
+      <p:pic>
+        <p:nvPicPr>
+          <p:cNvPr id="3" name="Image 1" descr="art\logo.png">    </p:cNvPr>
+          <p:cNvPicPr>
+            <a:picLocks noChangeAspect="1"/>
+          </p:cNvPicPr>
+          <p:nvPr/>
+        </p:nvPicPr>
+        <p:blipFill>
+          <a:blip r:embed="rId2"/>
+          <a:stretch>
+            <a:fillRect/>
+          </a:stretch>
+        </p:blipFill>
+        <p:spPr>
+          <a:xfrm>
+            <a:off x="23436072" y="402336"/>
+            <a:ext cx="475488" cy="594360"/>
+          </a:xfrm>
+          <a:prstGeom prst="rect">
+            <a:avLst/>
+          </a:prstGeom>
+        </p:spPr>
+      </p:pic>
+      <p:sp>
+        <p:nvSpPr>
+          <p:cNvPr id="4" name="Text 0"/>
+          <p:cNvSpPr txBox="1"/>
+          <p:nvPr/>
+        </p:nvSpPr>
+        <p:spPr>
+          <a:xfrm>
+            <a:off x="2423160" y="1051560"/>
+            <a:ext cx="19540728" cy="594360"/>
+          </a:xfrm>
+          <a:prstGeom prst="rect">
+            <a:avLst/>
+          </a:prstGeom>
+          <a:noFill/>
+          <a:ln/>
+        </p:spPr>
+        <p:txBody>
+          <a:bodyPr wrap="square" lIns="0" tIns="0" rIns="0" bIns="0" rtlCol="0" anchor="ctr"/>
+          <a:lstStyle/>
+          <a:p>
+            <a:pPr indent="0" marL="0">
+              <a:buNone/>
+            </a:pPr>
+            <a:r>
+              <a:rPr lang="en-US" sz="2100" b="1" spc="250" kern="0" dirty="0">
+                <a:solidFill>
+                  <a:srgbClr val="1F53E5"/>
+                </a:solidFill>
+                <a:latin typeface="Encode Sans" pitchFamily="34" charset="0"/>
+                <a:ea typeface="Encode Sans" pitchFamily="34" charset="-122"/>
+                <a:cs typeface="Encode Sans" pitchFamily="34" charset="-120"/>
+              </a:rPr>
+              <a:t>VÍDEO 3.4</a:t>
+            </a:r>
+            <a:endParaRPr lang="en-US" sz="2100" dirty="0"/>
+          </a:p>
+        </p:txBody>
+      </p:sp>
+      <p:sp>
+        <p:nvSpPr>
+          <p:cNvPr id="5" name="Text 1"/>
+          <p:cNvSpPr txBox="1"/>
+          <p:nvPr/>
+        </p:nvSpPr>
+        <p:spPr>
+          <a:xfrm>
+            <a:off x="2423160" y="1783080"/>
+            <a:ext cx="19568160" cy="2377440"/>
+          </a:xfrm>
+          <a:prstGeom prst="rect">
+            <a:avLst/>
+          </a:prstGeom>
+          <a:noFill/>
+          <a:ln/>
+        </p:spPr>
+        <p:txBody>
+          <a:bodyPr wrap="square" lIns="0" tIns="0" rIns="0" bIns="0" rtlCol="0" anchor="t"/>
+          <a:lstStyle/>
+          <a:p>
+            <a:pPr indent="0" marL="0">
+              <a:lnSpc>
+                <a:spcPct val="105000"/>
+              </a:lnSpc>
+              <a:buNone/>
+            </a:pPr>
+            <a:r>
+              <a:rPr lang="en-US" sz="6600" dirty="0">
+                <a:solidFill>
+                  <a:srgbClr val="BDBFC7"/>
+                </a:solidFill>
+                <a:latin typeface="Encode Sans" pitchFamily="34" charset="0"/>
+                <a:ea typeface="Encode Sans" pitchFamily="34" charset="-122"/>
+                <a:cs typeface="Encode Sans" pitchFamily="34" charset="-120"/>
+              </a:rPr>
+              <a:t>O que as cinco têm em comum</a:t>
+            </a:r>
+            <a:endParaRPr lang="en-US" sz="6600" dirty="0"/>
+          </a:p>
+        </p:txBody>
+      </p:sp>
+      <p:sp>
+        <p:nvSpPr>
+          <p:cNvPr id="6" name="Shape 2"/>
+          <p:cNvSpPr/>
+          <p:nvPr/>
+        </p:nvSpPr>
+        <p:spPr>
+          <a:xfrm>
+            <a:off x="2423160" y="4526280"/>
+            <a:ext cx="2011680" cy="68580"/>
+          </a:xfrm>
+          <a:prstGeom prst="rect">
+            <a:avLst/>
+          </a:prstGeom>
+          <a:solidFill>
+            <a:srgbClr val="1F53E5"/>
+          </a:solidFill>
+          <a:ln/>
+        </p:spPr>
+      </p:sp>
+      <p:pic>
+        <p:nvPicPr>
+          <p:cNvPr id="7" name="Image 2" descr="art\seta.png">    </p:cNvPr>
+          <p:cNvPicPr>
+            <a:picLocks noChangeAspect="1"/>
+          </p:cNvPicPr>
+          <p:nvPr/>
+        </p:nvPicPr>
+        <p:blipFill>
+          <a:blip r:embed="rId3"/>
+          <a:stretch>
+            <a:fillRect/>
+          </a:stretch>
+        </p:blipFill>
+        <p:spPr>
+          <a:xfrm>
+            <a:off x="2423160" y="6871716"/>
+            <a:ext cx="475488" cy="411480"/>
+          </a:xfrm>
+          <a:prstGeom prst="rect">
+            <a:avLst/>
+          </a:prstGeom>
+        </p:spPr>
+      </p:pic>
+      <p:sp>
+        <p:nvSpPr>
+          <p:cNvPr id="8" name="Text 3"/>
+          <p:cNvSpPr txBox="1"/>
+          <p:nvPr/>
+        </p:nvSpPr>
+        <p:spPr>
+          <a:xfrm>
+            <a:off x="3337560" y="6743700"/>
+            <a:ext cx="17922240" cy="548640"/>
+          </a:xfrm>
+          <a:prstGeom prst="rect">
+            <a:avLst/>
+          </a:prstGeom>
+          <a:noFill/>
+          <a:ln/>
+        </p:spPr>
+        <p:txBody>
+          <a:bodyPr wrap="square" lIns="0" tIns="0" rIns="0" bIns="0" rtlCol="0" anchor="t"/>
+          <a:lstStyle/>
+          <a:p>
+            <a:pPr indent="0" marL="0">
+              <a:lnSpc>
+                <a:spcPct val="118000"/>
+              </a:lnSpc>
+              <a:buNone/>
+            </a:pPr>
+            <a:r>
+              <a:rPr lang="en-US" sz="2800" b="1" dirty="0">
+                <a:solidFill>
+                  <a:srgbClr val="F4F5F6"/>
+                </a:solidFill>
+                <a:latin typeface="Roboto" pitchFamily="34" charset="0"/>
+                <a:ea typeface="Roboto" pitchFamily="34" charset="-122"/>
+                <a:cs typeface="Roboto" pitchFamily="34" charset="-120"/>
+              </a:rPr>
+              <a:t>Nenhuma delas gritou.</a:t>
+            </a:r>
+            <a:endParaRPr lang="en-US" sz="2800" dirty="0"/>
+          </a:p>
+        </p:txBody>
+      </p:sp>
+      <p:pic>
+        <p:nvPicPr>
+          <p:cNvPr id="9" name="Image 3" descr="art\seta.png">    </p:cNvPr>
+          <p:cNvPicPr>
+            <a:picLocks noChangeAspect="1"/>
+          </p:cNvPicPr>
+          <p:nvPr/>
+        </p:nvPicPr>
+        <p:blipFill>
+          <a:blip r:embed="rId4"/>
+          <a:stretch>
+            <a:fillRect/>
+          </a:stretch>
+        </p:blipFill>
+        <p:spPr>
+          <a:xfrm>
+            <a:off x="2423160" y="8426196"/>
+            <a:ext cx="475488" cy="411480"/>
+          </a:xfrm>
+          <a:prstGeom prst="rect">
+            <a:avLst/>
+          </a:prstGeom>
+        </p:spPr>
+      </p:pic>
+      <p:sp>
+        <p:nvSpPr>
+          <p:cNvPr id="10" name="Text 4"/>
+          <p:cNvSpPr txBox="1"/>
+          <p:nvPr/>
+        </p:nvSpPr>
+        <p:spPr>
+          <a:xfrm>
+            <a:off x="3337560" y="8298180"/>
+            <a:ext cx="17922240" cy="548640"/>
+          </a:xfrm>
+          <a:prstGeom prst="rect">
+            <a:avLst/>
+          </a:prstGeom>
+          <a:noFill/>
+          <a:ln/>
+        </p:spPr>
+        <p:txBody>
+          <a:bodyPr wrap="square" lIns="0" tIns="0" rIns="0" bIns="0" rtlCol="0" anchor="t"/>
+          <a:lstStyle/>
+          <a:p>
+            <a:pPr indent="0" marL="0">
+              <a:lnSpc>
+                <a:spcPct val="118000"/>
+              </a:lnSpc>
+              <a:buNone/>
+            </a:pPr>
+            <a:r>
+              <a:rPr lang="en-US" sz="2800" dirty="0">
+                <a:solidFill>
+                  <a:srgbClr val="A7A9B4"/>
+                </a:solidFill>
+                <a:latin typeface="Roboto" pitchFamily="34" charset="0"/>
+                <a:ea typeface="Roboto" pitchFamily="34" charset="-122"/>
+                <a:cs typeface="Roboto" pitchFamily="34" charset="-120"/>
+              </a:rPr>
+              <a:t>Nenhum usuário reclamou de nenhuma — a última, nem eu tinha certeza se o erro era meu.</a:t>
+            </a:r>
+            <a:endParaRPr lang="en-US" sz="2800" dirty="0"/>
+          </a:p>
+        </p:txBody>
+      </p:sp>
+      <p:pic>
+        <p:nvPicPr>
+          <p:cNvPr id="11" name="Image 4" descr="art\seta.png">    </p:cNvPr>
+          <p:cNvPicPr>
+            <a:picLocks noChangeAspect="1"/>
+          </p:cNvPicPr>
+          <p:nvPr/>
+        </p:nvPicPr>
+        <p:blipFill>
+          <a:blip r:embed="rId5"/>
+          <a:stretch>
+            <a:fillRect/>
+          </a:stretch>
+        </p:blipFill>
+        <p:spPr>
+          <a:xfrm>
+            <a:off x="2423160" y="9980676"/>
+            <a:ext cx="475488" cy="411480"/>
+          </a:xfrm>
+          <a:prstGeom prst="rect">
+            <a:avLst/>
+          </a:prstGeom>
+        </p:spPr>
+      </p:pic>
+      <p:sp>
+        <p:nvSpPr>
+          <p:cNvPr id="12" name="Text 5"/>
+          <p:cNvSpPr txBox="1"/>
+          <p:nvPr/>
+        </p:nvSpPr>
+        <p:spPr>
+          <a:xfrm>
+            <a:off x="3337560" y="9852660"/>
+            <a:ext cx="17922240" cy="548640"/>
+          </a:xfrm>
+          <a:prstGeom prst="rect">
+            <a:avLst/>
+          </a:prstGeom>
+          <a:noFill/>
+          <a:ln/>
+        </p:spPr>
+        <p:txBody>
+          <a:bodyPr wrap="square" lIns="0" tIns="0" rIns="0" bIns="0" rtlCol="0" anchor="t"/>
+          <a:lstStyle/>
+          <a:p>
+            <a:pPr indent="0" marL="0">
+              <a:lnSpc>
+                <a:spcPct val="118000"/>
+              </a:lnSpc>
+              <a:buNone/>
+            </a:pPr>
+            <a:r>
+              <a:rPr lang="en-US" sz="2800" dirty="0">
+                <a:solidFill>
+                  <a:srgbClr val="A7A9B4"/>
+                </a:solidFill>
+                <a:latin typeface="Roboto" pitchFamily="34" charset="0"/>
+                <a:ea typeface="Roboto" pitchFamily="34" charset="-122"/>
+                <a:cs typeface="Roboto" pitchFamily="34" charset="-120"/>
+              </a:rPr>
+              <a:t>Cada uma precisou de alguém olhando o dado certo, com a pergunta certa — e esse alguém é você.</a:t>
+            </a:r>
+            <a:endParaRPr lang="en-US" sz="2800" dirty="0"/>
+          </a:p>
+        </p:txBody>
+      </p:sp>
+      <p:sp>
+        <p:nvSpPr>
+          <p:cNvPr id="13" name="Text 6"/>
+          <p:cNvSpPr txBox="1"/>
+          <p:nvPr/>
+        </p:nvSpPr>
+        <p:spPr>
+          <a:xfrm>
+            <a:off x="2423160" y="12755880"/>
+            <a:ext cx="19540728" cy="457200"/>
+          </a:xfrm>
+          <a:prstGeom prst="rect">
+            <a:avLst/>
+          </a:prstGeom>
+          <a:noFill/>
+          <a:ln/>
+        </p:spPr>
+        <p:txBody>
+          <a:bodyPr wrap="square" lIns="0" tIns="0" rIns="0" bIns="0" rtlCol="0" anchor="ctr"/>
+          <a:lstStyle/>
+          <a:p>
+            <a:pPr indent="0" marL="0">
+              <a:buNone/>
+            </a:pPr>
+            <a:r>
+              <a:rPr lang="en-US" sz="1500" dirty="0">
+                <a:solidFill>
+                  <a:srgbClr val="A7A9B4">
+                    <a:alpha val="65000"/>
+                  </a:srgbClr>
+                </a:solidFill>
+                <a:latin typeface="Roboto" pitchFamily="34" charset="0"/>
+                <a:ea typeface="Roboto" pitchFamily="34" charset="-122"/>
+                <a:cs typeface="Roboto" pitchFamily="34" charset="-120"/>
+              </a:rPr>
+              <a:t>Aula 3 — Observabilidade: monitorando em produção — Evals, observabilidade e conformidade</a:t>
+            </a:r>
+            <a:endParaRPr lang="en-US" sz="1500" dirty="0"/>
+          </a:p>
+        </p:txBody>
+      </p:sp>
+    </p:spTree>
+  </p:cSld>
+  <p:clrMapOvr>
+    <a:masterClrMapping/>
+  </p:clrMapOvr>
+</p:sld>
+</file>
+
+<file path=ppt/slides/slide19.xml><?xml version="1.0" encoding="utf-8"?>
+<p:sld xmlns:a="http://schemas.openxmlformats.org/drawingml/2006/main" xmlns:r="http://schemas.openxmlformats.org/officeDocument/2006/relationships" xmlns:p="http://schemas.openxmlformats.org/presentationml/2006/main">
+  <p:cSld name="Slide 19">
     <p:bg>
       <p:bgPr>
         <a:solidFill>
@@ -7594,492 +8169,6 @@
               <a:t>3.5 O que aprendemos?</a:t>
             </a:r>
             <a:endParaRPr lang="en-US" sz="9600" dirty="0"/>
-          </a:p>
-        </p:txBody>
-      </p:sp>
-    </p:spTree>
-  </p:cSld>
-  <p:clrMapOvr>
-    <a:masterClrMapping/>
-  </p:clrMapOvr>
-</p:sld>
-</file>
-
-<file path=ppt/slides/slide19.xml><?xml version="1.0" encoding="utf-8"?>
-<p:sld xmlns:a="http://schemas.openxmlformats.org/drawingml/2006/main" xmlns:r="http://schemas.openxmlformats.org/officeDocument/2006/relationships" xmlns:p="http://schemas.openxmlformats.org/presentationml/2006/main">
-  <p:cSld name="Slide 19">
-    <p:bg>
-      <p:bgPr>
-        <a:solidFill>
-          <a:srgbClr val="0C0C0E"/>
-        </a:solidFill>
-      </p:bgPr>
-    </p:bg>
-    <p:spTree>
-      <p:nvGrpSpPr>
-        <p:cNvPr id="1" name=""/>
-        <p:cNvGrpSpPr/>
-        <p:nvPr/>
-      </p:nvGrpSpPr>
-      <p:grpSpPr>
-        <a:xfrm>
-          <a:off x="0" y="0"/>
-          <a:ext cx="0" cy="0"/>
-          <a:chOff x="0" y="0"/>
-          <a:chExt cx="0" cy="0"/>
-        </a:xfrm>
-      </p:grpSpPr>
-      <p:pic>
-        <p:nvPicPr>
-          <p:cNvPr id="2" name="Image 0" descr="art\malha.png">    </p:cNvPr>
-          <p:cNvPicPr>
-            <a:picLocks noChangeAspect="1"/>
-          </p:cNvPicPr>
-          <p:nvPr/>
-        </p:nvPicPr>
-        <p:blipFill>
-          <a:blip r:embed="rId1"/>
-          <a:stretch>
-            <a:fillRect/>
-          </a:stretch>
-        </p:blipFill>
-        <p:spPr>
-          <a:xfrm>
-            <a:off x="0" y="0"/>
-            <a:ext cx="24387048" cy="13716000"/>
-          </a:xfrm>
-          <a:prstGeom prst="rect">
-            <a:avLst/>
-          </a:prstGeom>
-        </p:spPr>
-      </p:pic>
-      <p:pic>
-        <p:nvPicPr>
-          <p:cNvPr id="3" name="Image 1" descr="art\logo.png">    </p:cNvPr>
-          <p:cNvPicPr>
-            <a:picLocks noChangeAspect="1"/>
-          </p:cNvPicPr>
-          <p:nvPr/>
-        </p:nvPicPr>
-        <p:blipFill>
-          <a:blip r:embed="rId2"/>
-          <a:stretch>
-            <a:fillRect/>
-          </a:stretch>
-        </p:blipFill>
-        <p:spPr>
-          <a:xfrm>
-            <a:off x="23436072" y="402336"/>
-            <a:ext cx="475488" cy="594360"/>
-          </a:xfrm>
-          <a:prstGeom prst="rect">
-            <a:avLst/>
-          </a:prstGeom>
-        </p:spPr>
-      </p:pic>
-      <p:sp>
-        <p:nvSpPr>
-          <p:cNvPr id="4" name="Text 0"/>
-          <p:cNvSpPr txBox="1"/>
-          <p:nvPr/>
-        </p:nvSpPr>
-        <p:spPr>
-          <a:xfrm>
-            <a:off x="2423160" y="1051560"/>
-            <a:ext cx="19540728" cy="594360"/>
-          </a:xfrm>
-          <a:prstGeom prst="rect">
-            <a:avLst/>
-          </a:prstGeom>
-          <a:noFill/>
-          <a:ln/>
-        </p:spPr>
-        <p:txBody>
-          <a:bodyPr wrap="square" lIns="0" tIns="0" rIns="0" bIns="0" rtlCol="0" anchor="ctr"/>
-          <a:lstStyle/>
-          <a:p>
-            <a:pPr indent="0" marL="0">
-              <a:buNone/>
-            </a:pPr>
-            <a:r>
-              <a:rPr lang="en-US" sz="2100" b="1" spc="250" kern="0" dirty="0">
-                <a:solidFill>
-                  <a:srgbClr val="1F53E5"/>
-                </a:solidFill>
-                <a:latin typeface="Encode Sans" pitchFamily="34" charset="0"/>
-                <a:ea typeface="Encode Sans" pitchFamily="34" charset="-122"/>
-                <a:cs typeface="Encode Sans" pitchFamily="34" charset="-120"/>
-              </a:rPr>
-              <a:t>FECHAMENTO DA AULA</a:t>
-            </a:r>
-            <a:endParaRPr lang="en-US" sz="2100" dirty="0"/>
-          </a:p>
-        </p:txBody>
-      </p:sp>
-      <p:sp>
-        <p:nvSpPr>
-          <p:cNvPr id="5" name="Text 1"/>
-          <p:cNvSpPr txBox="1"/>
-          <p:nvPr/>
-        </p:nvSpPr>
-        <p:spPr>
-          <a:xfrm>
-            <a:off x="2423160" y="1783080"/>
-            <a:ext cx="19568160" cy="2377440"/>
-          </a:xfrm>
-          <a:prstGeom prst="rect">
-            <a:avLst/>
-          </a:prstGeom>
-          <a:noFill/>
-          <a:ln/>
-        </p:spPr>
-        <p:txBody>
-          <a:bodyPr wrap="square" lIns="0" tIns="0" rIns="0" bIns="0" rtlCol="0" anchor="t"/>
-          <a:lstStyle/>
-          <a:p>
-            <a:pPr indent="0" marL="0">
-              <a:lnSpc>
-                <a:spcPct val="105000"/>
-              </a:lnSpc>
-              <a:buNone/>
-            </a:pPr>
-            <a:r>
-              <a:rPr lang="en-US" sz="6600" dirty="0">
-                <a:solidFill>
-                  <a:srgbClr val="BDBFC7"/>
-                </a:solidFill>
-                <a:latin typeface="Encode Sans" pitchFamily="34" charset="0"/>
-                <a:ea typeface="Encode Sans" pitchFamily="34" charset="-122"/>
-                <a:cs typeface="Encode Sans" pitchFamily="34" charset="-120"/>
-              </a:rPr>
-              <a:t>O que aprendemos</a:t>
-            </a:r>
-            <a:endParaRPr lang="en-US" sz="6600" dirty="0"/>
-          </a:p>
-        </p:txBody>
-      </p:sp>
-      <p:sp>
-        <p:nvSpPr>
-          <p:cNvPr id="6" name="Shape 2"/>
-          <p:cNvSpPr/>
-          <p:nvPr/>
-        </p:nvSpPr>
-        <p:spPr>
-          <a:xfrm>
-            <a:off x="2423160" y="4526280"/>
-            <a:ext cx="2011680" cy="68580"/>
-          </a:xfrm>
-          <a:prstGeom prst="rect">
-            <a:avLst/>
-          </a:prstGeom>
-          <a:solidFill>
-            <a:srgbClr val="1F53E5"/>
-          </a:solidFill>
-          <a:ln/>
-        </p:spPr>
-      </p:sp>
-      <p:pic>
-        <p:nvPicPr>
-          <p:cNvPr id="7" name="Image 2" descr="art\seta.png">    </p:cNvPr>
-          <p:cNvPicPr>
-            <a:picLocks noChangeAspect="1"/>
-          </p:cNvPicPr>
-          <p:nvPr/>
-        </p:nvPicPr>
-        <p:blipFill>
-          <a:blip r:embed="rId3"/>
-          <a:stretch>
-            <a:fillRect/>
-          </a:stretch>
-        </p:blipFill>
-        <p:spPr>
-          <a:xfrm>
-            <a:off x="2423160" y="6094476"/>
-            <a:ext cx="475488" cy="411480"/>
-          </a:xfrm>
-          <a:prstGeom prst="rect">
-            <a:avLst/>
-          </a:prstGeom>
-        </p:spPr>
-      </p:pic>
-      <p:sp>
-        <p:nvSpPr>
-          <p:cNvPr id="8" name="Text 3"/>
-          <p:cNvSpPr txBox="1"/>
-          <p:nvPr/>
-        </p:nvSpPr>
-        <p:spPr>
-          <a:xfrm>
-            <a:off x="3337560" y="5966460"/>
-            <a:ext cx="17922240" cy="548640"/>
-          </a:xfrm>
-          <a:prstGeom prst="rect">
-            <a:avLst/>
-          </a:prstGeom>
-          <a:noFill/>
-          <a:ln/>
-        </p:spPr>
-        <p:txBody>
-          <a:bodyPr wrap="square" lIns="0" tIns="0" rIns="0" bIns="0" rtlCol="0" anchor="t"/>
-          <a:lstStyle/>
-          <a:p>
-            <a:pPr indent="0" marL="0">
-              <a:lnSpc>
-                <a:spcPct val="118000"/>
-              </a:lnSpc>
-              <a:buNone/>
-            </a:pPr>
-            <a:r>
-              <a:rPr lang="en-US" sz="2800" dirty="0">
-                <a:solidFill>
-                  <a:srgbClr val="A7A9B4"/>
-                </a:solidFill>
-                <a:latin typeface="Roboto" pitchFamily="34" charset="0"/>
-                <a:ea typeface="Roboto" pitchFamily="34" charset="-122"/>
-                <a:cs typeface="Roboto" pitchFamily="34" charset="-120"/>
-              </a:rPr>
-              <a:t>Observabilidade é reconstruir a causa, não só registrar o evento.</a:t>
-            </a:r>
-            <a:endParaRPr lang="en-US" sz="2800" dirty="0"/>
-          </a:p>
-        </p:txBody>
-      </p:sp>
-      <p:pic>
-        <p:nvPicPr>
-          <p:cNvPr id="9" name="Image 3" descr="art\seta.png">    </p:cNvPr>
-          <p:cNvPicPr>
-            <a:picLocks noChangeAspect="1"/>
-          </p:cNvPicPr>
-          <p:nvPr/>
-        </p:nvPicPr>
-        <p:blipFill>
-          <a:blip r:embed="rId4"/>
-          <a:stretch>
-            <a:fillRect/>
-          </a:stretch>
-        </p:blipFill>
-        <p:spPr>
-          <a:xfrm>
-            <a:off x="2423160" y="7648956"/>
-            <a:ext cx="475488" cy="411480"/>
-          </a:xfrm>
-          <a:prstGeom prst="rect">
-            <a:avLst/>
-          </a:prstGeom>
-        </p:spPr>
-      </p:pic>
-      <p:sp>
-        <p:nvSpPr>
-          <p:cNvPr id="10" name="Text 4"/>
-          <p:cNvSpPr txBox="1"/>
-          <p:nvPr/>
-        </p:nvSpPr>
-        <p:spPr>
-          <a:xfrm>
-            <a:off x="3337560" y="7520940"/>
-            <a:ext cx="17922240" cy="548640"/>
-          </a:xfrm>
-          <a:prstGeom prst="rect">
-            <a:avLst/>
-          </a:prstGeom>
-          <a:noFill/>
-          <a:ln/>
-        </p:spPr>
-        <p:txBody>
-          <a:bodyPr wrap="square" lIns="0" tIns="0" rIns="0" bIns="0" rtlCol="0" anchor="t"/>
-          <a:lstStyle/>
-          <a:p>
-            <a:pPr indent="0" marL="0">
-              <a:lnSpc>
-                <a:spcPct val="118000"/>
-              </a:lnSpc>
-              <a:buNone/>
-            </a:pPr>
-            <a:r>
-              <a:rPr lang="en-US" sz="2800" dirty="0">
-                <a:solidFill>
-                  <a:srgbClr val="A7A9B4"/>
-                </a:solidFill>
-                <a:latin typeface="Roboto" pitchFamily="34" charset="0"/>
-                <a:ea typeface="Roboto" pitchFamily="34" charset="-122"/>
-                <a:cs typeface="Roboto" pitchFamily="34" charset="-120"/>
-              </a:rPr>
-              <a:t>Interação, passo e nota são o vocabulário que você precisa para navegar o painel sozinha.</a:t>
-            </a:r>
-            <a:endParaRPr lang="en-US" sz="2800" dirty="0"/>
-          </a:p>
-        </p:txBody>
-      </p:sp>
-      <p:pic>
-        <p:nvPicPr>
-          <p:cNvPr id="11" name="Image 4" descr="art\seta.png">    </p:cNvPr>
-          <p:cNvPicPr>
-            <a:picLocks noChangeAspect="1"/>
-          </p:cNvPicPr>
-          <p:nvPr/>
-        </p:nvPicPr>
-        <p:blipFill>
-          <a:blip r:embed="rId5"/>
-          <a:stretch>
-            <a:fillRect/>
-          </a:stretch>
-        </p:blipFill>
-        <p:spPr>
-          <a:xfrm>
-            <a:off x="2423160" y="9203436"/>
-            <a:ext cx="475488" cy="411480"/>
-          </a:xfrm>
-          <a:prstGeom prst="rect">
-            <a:avLst/>
-          </a:prstGeom>
-        </p:spPr>
-      </p:pic>
-      <p:sp>
-        <p:nvSpPr>
-          <p:cNvPr id="12" name="Text 5"/>
-          <p:cNvSpPr txBox="1"/>
-          <p:nvPr/>
-        </p:nvSpPr>
-        <p:spPr>
-          <a:xfrm>
-            <a:off x="3337560" y="9075420"/>
-            <a:ext cx="17922240" cy="548640"/>
-          </a:xfrm>
-          <a:prstGeom prst="rect">
-            <a:avLst/>
-          </a:prstGeom>
-          <a:noFill/>
-          <a:ln/>
-        </p:spPr>
-        <p:txBody>
-          <a:bodyPr wrap="square" lIns="0" tIns="0" rIns="0" bIns="0" rtlCol="0" anchor="t"/>
-          <a:lstStyle/>
-          <a:p>
-            <a:pPr indent="0" marL="0">
-              <a:lnSpc>
-                <a:spcPct val="118000"/>
-              </a:lnSpc>
-              <a:buNone/>
-            </a:pPr>
-            <a:r>
-              <a:rPr lang="en-US" sz="2800" b="1" dirty="0">
-                <a:solidFill>
-                  <a:srgbClr val="F4F5F6"/>
-                </a:solidFill>
-                <a:latin typeface="Roboto" pitchFamily="34" charset="0"/>
-                <a:ea typeface="Roboto" pitchFamily="34" charset="-122"/>
-                <a:cs typeface="Roboto" pitchFamily="34" charset="-120"/>
-              </a:rPr>
-              <a:t>Com dado real dá para ver para onde o dinheiro está indo — e onde trocar de modelo compensa.</a:t>
-            </a:r>
-            <a:endParaRPr lang="en-US" sz="2800" dirty="0"/>
-          </a:p>
-        </p:txBody>
-      </p:sp>
-      <p:pic>
-        <p:nvPicPr>
-          <p:cNvPr id="13" name="Image 5" descr="art\seta.png">    </p:cNvPr>
-          <p:cNvPicPr>
-            <a:picLocks noChangeAspect="1"/>
-          </p:cNvPicPr>
-          <p:nvPr/>
-        </p:nvPicPr>
-        <p:blipFill>
-          <a:blip r:embed="rId6"/>
-          <a:stretch>
-            <a:fillRect/>
-          </a:stretch>
-        </p:blipFill>
-        <p:spPr>
-          <a:xfrm>
-            <a:off x="2423160" y="10757916"/>
-            <a:ext cx="475488" cy="411480"/>
-          </a:xfrm>
-          <a:prstGeom prst="rect">
-            <a:avLst/>
-          </a:prstGeom>
-        </p:spPr>
-      </p:pic>
-      <p:sp>
-        <p:nvSpPr>
-          <p:cNvPr id="14" name="Text 6"/>
-          <p:cNvSpPr txBox="1"/>
-          <p:nvPr/>
-        </p:nvSpPr>
-        <p:spPr>
-          <a:xfrm>
-            <a:off x="3337560" y="10629900"/>
-            <a:ext cx="17922240" cy="548640"/>
-          </a:xfrm>
-          <a:prstGeom prst="rect">
-            <a:avLst/>
-          </a:prstGeom>
-          <a:noFill/>
-          <a:ln/>
-        </p:spPr>
-        <p:txBody>
-          <a:bodyPr wrap="square" lIns="0" tIns="0" rIns="0" bIns="0" rtlCol="0" anchor="t"/>
-          <a:lstStyle/>
-          <a:p>
-            <a:pPr indent="0" marL="0">
-              <a:lnSpc>
-                <a:spcPct val="118000"/>
-              </a:lnSpc>
-              <a:buNone/>
-            </a:pPr>
-            <a:r>
-              <a:rPr lang="en-US" sz="2800" dirty="0">
-                <a:solidFill>
-                  <a:srgbClr val="A7A9B4"/>
-                </a:solidFill>
-                <a:latin typeface="Roboto" pitchFamily="34" charset="0"/>
-                <a:ea typeface="Roboto" pitchFamily="34" charset="-122"/>
-                <a:cs typeface="Roboto" pitchFamily="34" charset="-120"/>
-              </a:rPr>
-              <a:t>Quatro falhas documentadas, nenhuma descoberta por reclamação de usuário.</a:t>
-            </a:r>
-            <a:endParaRPr lang="en-US" sz="2800" dirty="0"/>
-          </a:p>
-        </p:txBody>
-      </p:sp>
-      <p:sp>
-        <p:nvSpPr>
-          <p:cNvPr id="15" name="Text 7"/>
-          <p:cNvSpPr txBox="1"/>
-          <p:nvPr/>
-        </p:nvSpPr>
-        <p:spPr>
-          <a:xfrm>
-            <a:off x="2423160" y="12755880"/>
-            <a:ext cx="19540728" cy="457200"/>
-          </a:xfrm>
-          <a:prstGeom prst="rect">
-            <a:avLst/>
-          </a:prstGeom>
-          <a:noFill/>
-          <a:ln/>
-        </p:spPr>
-        <p:txBody>
-          <a:bodyPr wrap="square" lIns="0" tIns="0" rIns="0" bIns="0" rtlCol="0" anchor="ctr"/>
-          <a:lstStyle/>
-          <a:p>
-            <a:pPr indent="0" marL="0">
-              <a:buNone/>
-            </a:pPr>
-            <a:r>
-              <a:rPr lang="en-US" sz="1500" dirty="0">
-                <a:solidFill>
-                  <a:srgbClr val="A7A9B4">
-                    <a:alpha val="65000"/>
-                  </a:srgbClr>
-                </a:solidFill>
-                <a:latin typeface="Roboto" pitchFamily="34" charset="0"/>
-                <a:ea typeface="Roboto" pitchFamily="34" charset="-122"/>
-                <a:cs typeface="Roboto" pitchFamily="34" charset="-120"/>
-              </a:rPr>
-              <a:t>Aula 3 — Observabilidade: monitorando em produção — Evals, observabilidade e conformidade</a:t>
-            </a:r>
-            <a:endParaRPr lang="en-US" sz="1500" dirty="0"/>
           </a:p>
         </p:txBody>
       </p:sp>
@@ -8192,6 +8281,492 @@
 <file path=ppt/slides/slide20.xml><?xml version="1.0" encoding="utf-8"?>
 <p:sld xmlns:a="http://schemas.openxmlformats.org/drawingml/2006/main" xmlns:r="http://schemas.openxmlformats.org/officeDocument/2006/relationships" xmlns:p="http://schemas.openxmlformats.org/presentationml/2006/main">
   <p:cSld name="Slide 20">
+    <p:bg>
+      <p:bgPr>
+        <a:solidFill>
+          <a:srgbClr val="0C0C0E"/>
+        </a:solidFill>
+      </p:bgPr>
+    </p:bg>
+    <p:spTree>
+      <p:nvGrpSpPr>
+        <p:cNvPr id="1" name=""/>
+        <p:cNvGrpSpPr/>
+        <p:nvPr/>
+      </p:nvGrpSpPr>
+      <p:grpSpPr>
+        <a:xfrm>
+          <a:off x="0" y="0"/>
+          <a:ext cx="0" cy="0"/>
+          <a:chOff x="0" y="0"/>
+          <a:chExt cx="0" cy="0"/>
+        </a:xfrm>
+      </p:grpSpPr>
+      <p:pic>
+        <p:nvPicPr>
+          <p:cNvPr id="2" name="Image 0" descr="art\malha.png">    </p:cNvPr>
+          <p:cNvPicPr>
+            <a:picLocks noChangeAspect="1"/>
+          </p:cNvPicPr>
+          <p:nvPr/>
+        </p:nvPicPr>
+        <p:blipFill>
+          <a:blip r:embed="rId1"/>
+          <a:stretch>
+            <a:fillRect/>
+          </a:stretch>
+        </p:blipFill>
+        <p:spPr>
+          <a:xfrm>
+            <a:off x="0" y="0"/>
+            <a:ext cx="24387048" cy="13716000"/>
+          </a:xfrm>
+          <a:prstGeom prst="rect">
+            <a:avLst/>
+          </a:prstGeom>
+        </p:spPr>
+      </p:pic>
+      <p:pic>
+        <p:nvPicPr>
+          <p:cNvPr id="3" name="Image 1" descr="art\logo.png">    </p:cNvPr>
+          <p:cNvPicPr>
+            <a:picLocks noChangeAspect="1"/>
+          </p:cNvPicPr>
+          <p:nvPr/>
+        </p:nvPicPr>
+        <p:blipFill>
+          <a:blip r:embed="rId2"/>
+          <a:stretch>
+            <a:fillRect/>
+          </a:stretch>
+        </p:blipFill>
+        <p:spPr>
+          <a:xfrm>
+            <a:off x="23436072" y="402336"/>
+            <a:ext cx="475488" cy="594360"/>
+          </a:xfrm>
+          <a:prstGeom prst="rect">
+            <a:avLst/>
+          </a:prstGeom>
+        </p:spPr>
+      </p:pic>
+      <p:sp>
+        <p:nvSpPr>
+          <p:cNvPr id="4" name="Text 0"/>
+          <p:cNvSpPr txBox="1"/>
+          <p:nvPr/>
+        </p:nvSpPr>
+        <p:spPr>
+          <a:xfrm>
+            <a:off x="2423160" y="1051560"/>
+            <a:ext cx="19540728" cy="594360"/>
+          </a:xfrm>
+          <a:prstGeom prst="rect">
+            <a:avLst/>
+          </a:prstGeom>
+          <a:noFill/>
+          <a:ln/>
+        </p:spPr>
+        <p:txBody>
+          <a:bodyPr wrap="square" lIns="0" tIns="0" rIns="0" bIns="0" rtlCol="0" anchor="ctr"/>
+          <a:lstStyle/>
+          <a:p>
+            <a:pPr indent="0" marL="0">
+              <a:buNone/>
+            </a:pPr>
+            <a:r>
+              <a:rPr lang="en-US" sz="2100" b="1" spc="250" kern="0" dirty="0">
+                <a:solidFill>
+                  <a:srgbClr val="1F53E5"/>
+                </a:solidFill>
+                <a:latin typeface="Encode Sans" pitchFamily="34" charset="0"/>
+                <a:ea typeface="Encode Sans" pitchFamily="34" charset="-122"/>
+                <a:cs typeface="Encode Sans" pitchFamily="34" charset="-120"/>
+              </a:rPr>
+              <a:t>FECHAMENTO DA AULA</a:t>
+            </a:r>
+            <a:endParaRPr lang="en-US" sz="2100" dirty="0"/>
+          </a:p>
+        </p:txBody>
+      </p:sp>
+      <p:sp>
+        <p:nvSpPr>
+          <p:cNvPr id="5" name="Text 1"/>
+          <p:cNvSpPr txBox="1"/>
+          <p:nvPr/>
+        </p:nvSpPr>
+        <p:spPr>
+          <a:xfrm>
+            <a:off x="2423160" y="1783080"/>
+            <a:ext cx="19568160" cy="2377440"/>
+          </a:xfrm>
+          <a:prstGeom prst="rect">
+            <a:avLst/>
+          </a:prstGeom>
+          <a:noFill/>
+          <a:ln/>
+        </p:spPr>
+        <p:txBody>
+          <a:bodyPr wrap="square" lIns="0" tIns="0" rIns="0" bIns="0" rtlCol="0" anchor="t"/>
+          <a:lstStyle/>
+          <a:p>
+            <a:pPr indent="0" marL="0">
+              <a:lnSpc>
+                <a:spcPct val="105000"/>
+              </a:lnSpc>
+              <a:buNone/>
+            </a:pPr>
+            <a:r>
+              <a:rPr lang="en-US" sz="6600" dirty="0">
+                <a:solidFill>
+                  <a:srgbClr val="BDBFC7"/>
+                </a:solidFill>
+                <a:latin typeface="Encode Sans" pitchFamily="34" charset="0"/>
+                <a:ea typeface="Encode Sans" pitchFamily="34" charset="-122"/>
+                <a:cs typeface="Encode Sans" pitchFamily="34" charset="-120"/>
+              </a:rPr>
+              <a:t>O que aprendemos</a:t>
+            </a:r>
+            <a:endParaRPr lang="en-US" sz="6600" dirty="0"/>
+          </a:p>
+        </p:txBody>
+      </p:sp>
+      <p:sp>
+        <p:nvSpPr>
+          <p:cNvPr id="6" name="Shape 2"/>
+          <p:cNvSpPr/>
+          <p:nvPr/>
+        </p:nvSpPr>
+        <p:spPr>
+          <a:xfrm>
+            <a:off x="2423160" y="4526280"/>
+            <a:ext cx="2011680" cy="68580"/>
+          </a:xfrm>
+          <a:prstGeom prst="rect">
+            <a:avLst/>
+          </a:prstGeom>
+          <a:solidFill>
+            <a:srgbClr val="1F53E5"/>
+          </a:solidFill>
+          <a:ln/>
+        </p:spPr>
+      </p:sp>
+      <p:pic>
+        <p:nvPicPr>
+          <p:cNvPr id="7" name="Image 2" descr="art\seta.png">    </p:cNvPr>
+          <p:cNvPicPr>
+            <a:picLocks noChangeAspect="1"/>
+          </p:cNvPicPr>
+          <p:nvPr/>
+        </p:nvPicPr>
+        <p:blipFill>
+          <a:blip r:embed="rId3"/>
+          <a:stretch>
+            <a:fillRect/>
+          </a:stretch>
+        </p:blipFill>
+        <p:spPr>
+          <a:xfrm>
+            <a:off x="2423160" y="6094476"/>
+            <a:ext cx="475488" cy="411480"/>
+          </a:xfrm>
+          <a:prstGeom prst="rect">
+            <a:avLst/>
+          </a:prstGeom>
+        </p:spPr>
+      </p:pic>
+      <p:sp>
+        <p:nvSpPr>
+          <p:cNvPr id="8" name="Text 3"/>
+          <p:cNvSpPr txBox="1"/>
+          <p:nvPr/>
+        </p:nvSpPr>
+        <p:spPr>
+          <a:xfrm>
+            <a:off x="3337560" y="5966460"/>
+            <a:ext cx="17922240" cy="548640"/>
+          </a:xfrm>
+          <a:prstGeom prst="rect">
+            <a:avLst/>
+          </a:prstGeom>
+          <a:noFill/>
+          <a:ln/>
+        </p:spPr>
+        <p:txBody>
+          <a:bodyPr wrap="square" lIns="0" tIns="0" rIns="0" bIns="0" rtlCol="0" anchor="t"/>
+          <a:lstStyle/>
+          <a:p>
+            <a:pPr indent="0" marL="0">
+              <a:lnSpc>
+                <a:spcPct val="118000"/>
+              </a:lnSpc>
+              <a:buNone/>
+            </a:pPr>
+            <a:r>
+              <a:rPr lang="en-US" sz="2800" dirty="0">
+                <a:solidFill>
+                  <a:srgbClr val="A7A9B4"/>
+                </a:solidFill>
+                <a:latin typeface="Roboto" pitchFamily="34" charset="0"/>
+                <a:ea typeface="Roboto" pitchFamily="34" charset="-122"/>
+                <a:cs typeface="Roboto" pitchFamily="34" charset="-120"/>
+              </a:rPr>
+              <a:t>Observabilidade é reconstruir a causa, não só registrar o evento.</a:t>
+            </a:r>
+            <a:endParaRPr lang="en-US" sz="2800" dirty="0"/>
+          </a:p>
+        </p:txBody>
+      </p:sp>
+      <p:pic>
+        <p:nvPicPr>
+          <p:cNvPr id="9" name="Image 3" descr="art\seta.png">    </p:cNvPr>
+          <p:cNvPicPr>
+            <a:picLocks noChangeAspect="1"/>
+          </p:cNvPicPr>
+          <p:nvPr/>
+        </p:nvPicPr>
+        <p:blipFill>
+          <a:blip r:embed="rId4"/>
+          <a:stretch>
+            <a:fillRect/>
+          </a:stretch>
+        </p:blipFill>
+        <p:spPr>
+          <a:xfrm>
+            <a:off x="2423160" y="7648956"/>
+            <a:ext cx="475488" cy="411480"/>
+          </a:xfrm>
+          <a:prstGeom prst="rect">
+            <a:avLst/>
+          </a:prstGeom>
+        </p:spPr>
+      </p:pic>
+      <p:sp>
+        <p:nvSpPr>
+          <p:cNvPr id="10" name="Text 4"/>
+          <p:cNvSpPr txBox="1"/>
+          <p:nvPr/>
+        </p:nvSpPr>
+        <p:spPr>
+          <a:xfrm>
+            <a:off x="3337560" y="7520940"/>
+            <a:ext cx="17922240" cy="548640"/>
+          </a:xfrm>
+          <a:prstGeom prst="rect">
+            <a:avLst/>
+          </a:prstGeom>
+          <a:noFill/>
+          <a:ln/>
+        </p:spPr>
+        <p:txBody>
+          <a:bodyPr wrap="square" lIns="0" tIns="0" rIns="0" bIns="0" rtlCol="0" anchor="t"/>
+          <a:lstStyle/>
+          <a:p>
+            <a:pPr indent="0" marL="0">
+              <a:lnSpc>
+                <a:spcPct val="118000"/>
+              </a:lnSpc>
+              <a:buNone/>
+            </a:pPr>
+            <a:r>
+              <a:rPr lang="en-US" sz="2800" dirty="0">
+                <a:solidFill>
+                  <a:srgbClr val="A7A9B4"/>
+                </a:solidFill>
+                <a:latin typeface="Roboto" pitchFamily="34" charset="0"/>
+                <a:ea typeface="Roboto" pitchFamily="34" charset="-122"/>
+                <a:cs typeface="Roboto" pitchFamily="34" charset="-120"/>
+              </a:rPr>
+              <a:t>Interação, passo e nota são o vocabulário que você precisa para navegar o painel sozinha.</a:t>
+            </a:r>
+            <a:endParaRPr lang="en-US" sz="2800" dirty="0"/>
+          </a:p>
+        </p:txBody>
+      </p:sp>
+      <p:pic>
+        <p:nvPicPr>
+          <p:cNvPr id="11" name="Image 4" descr="art\seta.png">    </p:cNvPr>
+          <p:cNvPicPr>
+            <a:picLocks noChangeAspect="1"/>
+          </p:cNvPicPr>
+          <p:nvPr/>
+        </p:nvPicPr>
+        <p:blipFill>
+          <a:blip r:embed="rId5"/>
+          <a:stretch>
+            <a:fillRect/>
+          </a:stretch>
+        </p:blipFill>
+        <p:spPr>
+          <a:xfrm>
+            <a:off x="2423160" y="9203436"/>
+            <a:ext cx="475488" cy="411480"/>
+          </a:xfrm>
+          <a:prstGeom prst="rect">
+            <a:avLst/>
+          </a:prstGeom>
+        </p:spPr>
+      </p:pic>
+      <p:sp>
+        <p:nvSpPr>
+          <p:cNvPr id="12" name="Text 5"/>
+          <p:cNvSpPr txBox="1"/>
+          <p:nvPr/>
+        </p:nvSpPr>
+        <p:spPr>
+          <a:xfrm>
+            <a:off x="3337560" y="9075420"/>
+            <a:ext cx="17922240" cy="548640"/>
+          </a:xfrm>
+          <a:prstGeom prst="rect">
+            <a:avLst/>
+          </a:prstGeom>
+          <a:noFill/>
+          <a:ln/>
+        </p:spPr>
+        <p:txBody>
+          <a:bodyPr wrap="square" lIns="0" tIns="0" rIns="0" bIns="0" rtlCol="0" anchor="t"/>
+          <a:lstStyle/>
+          <a:p>
+            <a:pPr indent="0" marL="0">
+              <a:lnSpc>
+                <a:spcPct val="118000"/>
+              </a:lnSpc>
+              <a:buNone/>
+            </a:pPr>
+            <a:r>
+              <a:rPr lang="en-US" sz="2800" b="1" dirty="0">
+                <a:solidFill>
+                  <a:srgbClr val="F4F5F6"/>
+                </a:solidFill>
+                <a:latin typeface="Roboto" pitchFamily="34" charset="0"/>
+                <a:ea typeface="Roboto" pitchFamily="34" charset="-122"/>
+                <a:cs typeface="Roboto" pitchFamily="34" charset="-120"/>
+              </a:rPr>
+              <a:t>Com dado real dá para ver para onde o dinheiro está indo — e onde trocar de modelo compensa.</a:t>
+            </a:r>
+            <a:endParaRPr lang="en-US" sz="2800" dirty="0"/>
+          </a:p>
+        </p:txBody>
+      </p:sp>
+      <p:pic>
+        <p:nvPicPr>
+          <p:cNvPr id="13" name="Image 5" descr="art\seta.png">    </p:cNvPr>
+          <p:cNvPicPr>
+            <a:picLocks noChangeAspect="1"/>
+          </p:cNvPicPr>
+          <p:nvPr/>
+        </p:nvPicPr>
+        <p:blipFill>
+          <a:blip r:embed="rId6"/>
+          <a:stretch>
+            <a:fillRect/>
+          </a:stretch>
+        </p:blipFill>
+        <p:spPr>
+          <a:xfrm>
+            <a:off x="2423160" y="10757916"/>
+            <a:ext cx="475488" cy="411480"/>
+          </a:xfrm>
+          <a:prstGeom prst="rect">
+            <a:avLst/>
+          </a:prstGeom>
+        </p:spPr>
+      </p:pic>
+      <p:sp>
+        <p:nvSpPr>
+          <p:cNvPr id="14" name="Text 6"/>
+          <p:cNvSpPr txBox="1"/>
+          <p:nvPr/>
+        </p:nvSpPr>
+        <p:spPr>
+          <a:xfrm>
+            <a:off x="3337560" y="10629900"/>
+            <a:ext cx="17922240" cy="548640"/>
+          </a:xfrm>
+          <a:prstGeom prst="rect">
+            <a:avLst/>
+          </a:prstGeom>
+          <a:noFill/>
+          <a:ln/>
+        </p:spPr>
+        <p:txBody>
+          <a:bodyPr wrap="square" lIns="0" tIns="0" rIns="0" bIns="0" rtlCol="0" anchor="t"/>
+          <a:lstStyle/>
+          <a:p>
+            <a:pPr indent="0" marL="0">
+              <a:lnSpc>
+                <a:spcPct val="118000"/>
+              </a:lnSpc>
+              <a:buNone/>
+            </a:pPr>
+            <a:r>
+              <a:rPr lang="en-US" sz="2800" dirty="0">
+                <a:solidFill>
+                  <a:srgbClr val="A7A9B4"/>
+                </a:solidFill>
+                <a:latin typeface="Roboto" pitchFamily="34" charset="0"/>
+                <a:ea typeface="Roboto" pitchFamily="34" charset="-122"/>
+                <a:cs typeface="Roboto" pitchFamily="34" charset="-120"/>
+              </a:rPr>
+              <a:t>Quatro falhas documentadas, nenhuma descoberta por reclamação de usuário.</a:t>
+            </a:r>
+            <a:endParaRPr lang="en-US" sz="2800" dirty="0"/>
+          </a:p>
+        </p:txBody>
+      </p:sp>
+      <p:sp>
+        <p:nvSpPr>
+          <p:cNvPr id="15" name="Text 7"/>
+          <p:cNvSpPr txBox="1"/>
+          <p:nvPr/>
+        </p:nvSpPr>
+        <p:spPr>
+          <a:xfrm>
+            <a:off x="2423160" y="12755880"/>
+            <a:ext cx="19540728" cy="457200"/>
+          </a:xfrm>
+          <a:prstGeom prst="rect">
+            <a:avLst/>
+          </a:prstGeom>
+          <a:noFill/>
+          <a:ln/>
+        </p:spPr>
+        <p:txBody>
+          <a:bodyPr wrap="square" lIns="0" tIns="0" rIns="0" bIns="0" rtlCol="0" anchor="ctr"/>
+          <a:lstStyle/>
+          <a:p>
+            <a:pPr indent="0" marL="0">
+              <a:buNone/>
+            </a:pPr>
+            <a:r>
+              <a:rPr lang="en-US" sz="1500" dirty="0">
+                <a:solidFill>
+                  <a:srgbClr val="A7A9B4">
+                    <a:alpha val="65000"/>
+                  </a:srgbClr>
+                </a:solidFill>
+                <a:latin typeface="Roboto" pitchFamily="34" charset="0"/>
+                <a:ea typeface="Roboto" pitchFamily="34" charset="-122"/>
+                <a:cs typeface="Roboto" pitchFamily="34" charset="-120"/>
+              </a:rPr>
+              <a:t>Aula 3 — Observabilidade: monitorando em produção — Evals, observabilidade e conformidade</a:t>
+            </a:r>
+            <a:endParaRPr lang="en-US" sz="1500" dirty="0"/>
+          </a:p>
+        </p:txBody>
+      </p:sp>
+    </p:spTree>
+  </p:cSld>
+  <p:clrMapOvr>
+    <a:masterClrMapping/>
+  </p:clrMapOvr>
+</p:sld>
+</file>
+
+<file path=ppt/slides/slide21.xml><?xml version="1.0" encoding="utf-8"?>
+<p:sld xmlns:a="http://schemas.openxmlformats.org/drawingml/2006/main" xmlns:r="http://schemas.openxmlformats.org/officeDocument/2006/relationships" xmlns:p="http://schemas.openxmlformats.org/presentationml/2006/main">
+  <p:cSld name="Slide 21">
     <p:bg>
       <p:bgPr>
         <a:solidFill>
